--- a/a7/packages/A7 Unit 4 - Solving Problems with Rational Numbers/Lessons/4.04/A7 4.04 Real-World Problems and Significant Digits - Slides.pptx
+++ b/a7/packages/A7 Unit 4 - Solving Problems with Rational Numbers/Lessons/4.04/A7 4.04 Real-World Problems and Significant Digits - Slides.pptx
@@ -3129,7 +3129,7 @@
         </p:nvSpPr>
         <p:spPr>
           <a:xfrm>
-            <a:off x="777240" y="1691640"/>
+            <a:off x="777240" y="2148840"/>
             <a:ext cx="10607040" cy="347472"/>
           </a:xfrm>
           <a:prstGeom prst="rect">
@@ -3164,7 +3164,7 @@
         </p:nvSpPr>
         <p:spPr>
           <a:xfrm>
-            <a:off x="777240" y="2048256"/>
+            <a:off x="777240" y="2505456"/>
             <a:ext cx="10607040" cy="1005840"/>
           </a:xfrm>
           <a:prstGeom prst="rect">
@@ -3199,7 +3199,7 @@
         </p:nvCxnSpPr>
         <p:spPr>
           <a:xfrm>
-            <a:off x="3291840" y="3255264"/>
+            <a:off x="3291840" y="3712464"/>
             <a:ext cx="5577840" cy="0"/>
           </a:xfrm>
           <a:prstGeom prst="line">
@@ -3234,7 +3234,7 @@
         </p:nvCxnSpPr>
         <p:spPr>
           <a:xfrm>
-            <a:off x="3291840" y="3337560"/>
+            <a:off x="3291840" y="3794760"/>
             <a:ext cx="5577840" cy="0"/>
           </a:xfrm>
           <a:prstGeom prst="line">
@@ -3269,7 +3269,7 @@
         </p:nvSpPr>
         <p:spPr>
           <a:xfrm>
-            <a:off x="777240" y="3502152"/>
+            <a:off x="777240" y="3959352"/>
             <a:ext cx="10607040" cy="310896"/>
           </a:xfrm>
           <a:prstGeom prst="rect">
@@ -3304,7 +3304,7 @@
         </p:nvSpPr>
         <p:spPr>
           <a:xfrm>
-            <a:off x="777240" y="3840480"/>
+            <a:off x="777240" y="4297680"/>
             <a:ext cx="10607040" cy="731520"/>
           </a:xfrm>
           <a:prstGeom prst="rect">
@@ -3331,125 +3331,9 @@
           </a:p>
         </p:txBody>
       </p:sp>
-      <p:sp>
-        <p:nvSpPr>
-          <p:cNvPr id="8" name="Rectangle 7"/>
-          <p:cNvSpPr/>
-          <p:nvPr/>
-        </p:nvSpPr>
-        <p:spPr>
-          <a:xfrm>
-            <a:off x="2377440" y="4736592"/>
-            <a:ext cx="7406640" cy="1051560"/>
-          </a:xfrm>
-          <a:prstGeom prst="rect">
-            <a:avLst/>
-          </a:prstGeom>
-          <a:solidFill>
-            <a:srgbClr val="F2F2F0"/>
-          </a:solidFill>
-          <a:ln w="9525">
-            <a:solidFill>
-              <a:srgbClr val="BFBFBF"/>
-            </a:solidFill>
-          </a:ln>
-          <a:effectLst/>
-        </p:spPr>
-        <p:style>
-          <a:lnRef idx="1">
-            <a:schemeClr val="accent1"/>
-          </a:lnRef>
-          <a:fillRef idx="3">
-            <a:schemeClr val="accent1"/>
-          </a:fillRef>
-          <a:effectRef idx="2">
-            <a:schemeClr val="accent1"/>
-          </a:effectRef>
-          <a:fontRef idx="minor">
-            <a:schemeClr val="lt1"/>
-          </a:fontRef>
-        </p:style>
-        <p:txBody>
-          <a:bodyPr rtlCol="0" anchor="ctr"/>
-          <a:lstStyle/>
-          <a:p>
-            <a:pPr algn="ctr"/>
-          </a:p>
-        </p:txBody>
-      </p:sp>
-      <p:sp>
-        <p:nvSpPr>
-          <p:cNvPr id="9" name="TextBox 8"/>
-          <p:cNvSpPr txBox="1"/>
-          <p:nvPr/>
-        </p:nvSpPr>
-        <p:spPr>
-          <a:xfrm>
-            <a:off x="2606040" y="4892040"/>
-            <a:ext cx="6949440" cy="365760"/>
-          </a:xfrm>
-          <a:prstGeom prst="rect">
-            <a:avLst/>
-          </a:prstGeom>
-          <a:noFill/>
-        </p:spPr>
-        <p:txBody>
-          <a:bodyPr wrap="square" lIns="45720" rIns="45720" tIns="18288" bIns="18288" anchor="t">
-            <a:spAutoFit/>
-          </a:bodyPr>
-          <a:lstStyle/>
-          <a:p>
-            <a:pPr algn="ctr"/>
-            <a:r>
-              <a:rPr sz="1700" b="0" i="1">
-                <a:solidFill>
-                  <a:srgbClr val="6B6B6B"/>
-                </a:solidFill>
-                <a:latin typeface="Century Schoolbook"/>
-              </a:rPr>
-              <a:t>Yesterday you multiplied and divided in scientific notation.</a:t>
-            </a:r>
-          </a:p>
-        </p:txBody>
-      </p:sp>
-      <p:sp>
-        <p:nvSpPr>
-          <p:cNvPr id="10" name="TextBox 9"/>
-          <p:cNvSpPr txBox="1"/>
-          <p:nvPr/>
-        </p:nvSpPr>
-        <p:spPr>
-          <a:xfrm>
-            <a:off x="2606040" y="5276088"/>
-            <a:ext cx="6949440" cy="365760"/>
-          </a:xfrm>
-          <a:prstGeom prst="rect">
-            <a:avLst/>
-          </a:prstGeom>
-          <a:noFill/>
-        </p:spPr>
-        <p:txBody>
-          <a:bodyPr wrap="square" lIns="45720" rIns="45720" tIns="18288" bIns="18288" anchor="t">
-            <a:spAutoFit/>
-          </a:bodyPr>
-          <a:lstStyle/>
-          <a:p>
-            <a:pPr algn="ctr"/>
-            <a:r>
-              <a:rPr sz="1700" b="1" i="0">
-                <a:solidFill>
-                  <a:srgbClr val="1A1A1A"/>
-                </a:solidFill>
-                <a:latin typeface="Century Schoolbook"/>
-              </a:rPr>
-              <a:t>Today the numbers are measurements, each with limits.</a:t>
-            </a:r>
-          </a:p>
-        </p:txBody>
-      </p:sp>
       <p:cxnSp>
         <p:nvCxnSpPr>
-          <p:cNvPr id="11" name="Connector 10"/>
+          <p:cNvPr id="8" name="Connector 7"/>
           <p:cNvCxnSpPr/>
           <p:nvPr/>
         </p:nvCxnSpPr>
@@ -3484,7 +3368,7 @@
       </p:cxnSp>
       <p:sp>
         <p:nvSpPr>
-          <p:cNvPr id="12" name="TextBox 11"/>
+          <p:cNvPr id="9" name="TextBox 8"/>
           <p:cNvSpPr txBox="1"/>
           <p:nvPr/>
         </p:nvSpPr>
@@ -3519,7 +3403,7 @@
       </p:sp>
       <p:sp>
         <p:nvSpPr>
-          <p:cNvPr id="13" name="TextBox 12"/>
+          <p:cNvPr id="10" name="TextBox 9"/>
           <p:cNvSpPr txBox="1"/>
           <p:nvPr/>
         </p:nvSpPr>
@@ -3675,44 +3559,9 @@
           </a:fontRef>
         </p:style>
       </p:cxnSp>
-      <p:sp>
-        <p:nvSpPr>
-          <p:cNvPr id="5" name="TextBox 4"/>
-          <p:cNvSpPr txBox="1"/>
-          <p:nvPr/>
-        </p:nvSpPr>
-        <p:spPr>
-          <a:xfrm>
-            <a:off x="777240" y="1261872"/>
-            <a:ext cx="10607040" cy="310896"/>
-          </a:xfrm>
-          <a:prstGeom prst="rect">
-            <a:avLst/>
-          </a:prstGeom>
-          <a:noFill/>
-        </p:spPr>
-        <p:txBody>
-          <a:bodyPr wrap="square" lIns="45720" rIns="45720" tIns="18288" bIns="18288" anchor="t">
-            <a:spAutoFit/>
-          </a:bodyPr>
-          <a:lstStyle/>
-          <a:p>
-            <a:pPr algn="l"/>
-            <a:r>
-              <a:rPr sz="1700" b="0" i="1">
-                <a:solidFill>
-                  <a:srgbClr val="6B6B6B"/>
-                </a:solidFill>
-                <a:latin typeface="Century Schoolbook"/>
-              </a:rPr>
-              <a:t>Answer.</a:t>
-            </a:r>
-          </a:p>
-        </p:txBody>
-      </p:sp>
       <p:cxnSp>
         <p:nvCxnSpPr>
-          <p:cNvPr id="6" name="Connector 5"/>
+          <p:cNvPr id="5" name="Connector 4"/>
           <p:cNvCxnSpPr/>
           <p:nvPr/>
         </p:nvCxnSpPr>
@@ -3747,7 +3596,7 @@
       </p:cxnSp>
       <p:sp>
         <p:nvSpPr>
-          <p:cNvPr id="7" name="TextBox 6"/>
+          <p:cNvPr id="6" name="TextBox 5"/>
           <p:cNvSpPr txBox="1"/>
           <p:nvPr/>
         </p:nvSpPr>
@@ -3782,7 +3631,7 @@
       </p:sp>
       <p:sp>
         <p:nvSpPr>
-          <p:cNvPr id="8" name="TextBox 7"/>
+          <p:cNvPr id="7" name="TextBox 6"/>
           <p:cNvSpPr txBox="1"/>
           <p:nvPr/>
         </p:nvSpPr>
@@ -3817,7 +3666,7 @@
       </p:sp>
       <p:sp>
         <p:nvSpPr>
-          <p:cNvPr id="9" name="TextBox 8"/>
+          <p:cNvPr id="8" name="TextBox 7"/>
           <p:cNvSpPr txBox="1"/>
           <p:nvPr/>
         </p:nvSpPr>
@@ -3852,7 +3701,7 @@
       </p:sp>
       <p:pic>
         <p:nvPicPr>
-          <p:cNvPr id="10" name="Picture 9" descr="2ea2d2cafb18840a.png"/>
+          <p:cNvPr id="9" name="Picture 8" descr="2ea2d2cafb18840a.png"/>
           <p:cNvPicPr>
             <a:picLocks noChangeAspect="1"/>
           </p:cNvPicPr>
@@ -3876,7 +3725,7 @@
       </p:pic>
       <p:sp>
         <p:nvSpPr>
-          <p:cNvPr id="11" name="TextBox 10"/>
+          <p:cNvPr id="10" name="TextBox 9"/>
           <p:cNvSpPr txBox="1"/>
           <p:nvPr/>
         </p:nvSpPr>
@@ -3911,7 +3760,7 @@
       </p:sp>
       <p:pic>
         <p:nvPicPr>
-          <p:cNvPr id="12" name="Picture 11" descr="798bb70a13d738fd.png"/>
+          <p:cNvPr id="11" name="Picture 10" descr="798bb70a13d738fd.png"/>
           <p:cNvPicPr>
             <a:picLocks noChangeAspect="1"/>
           </p:cNvPicPr>
@@ -3935,7 +3784,7 @@
       </p:pic>
       <p:sp>
         <p:nvSpPr>
-          <p:cNvPr id="13" name="TextBox 12"/>
+          <p:cNvPr id="12" name="TextBox 11"/>
           <p:cNvSpPr txBox="1"/>
           <p:nvPr/>
         </p:nvSpPr>
@@ -3970,7 +3819,7 @@
       </p:sp>
       <p:sp>
         <p:nvSpPr>
-          <p:cNvPr id="14" name="TextBox 13"/>
+          <p:cNvPr id="13" name="TextBox 12"/>
           <p:cNvSpPr txBox="1"/>
           <p:nvPr/>
         </p:nvSpPr>
@@ -4005,42 +3854,7 @@
       </p:sp>
       <p:sp>
         <p:nvSpPr>
-          <p:cNvPr id="15" name="TextBox 14"/>
-          <p:cNvSpPr txBox="1"/>
-          <p:nvPr/>
-        </p:nvSpPr>
-        <p:spPr>
-          <a:xfrm>
-            <a:off x="777240" y="3492610"/>
-            <a:ext cx="10607040" cy="429370"/>
-          </a:xfrm>
-          <a:prstGeom prst="rect">
-            <a:avLst/>
-          </a:prstGeom>
-          <a:noFill/>
-        </p:spPr>
-        <p:txBody>
-          <a:bodyPr wrap="square" lIns="45720" rIns="45720" tIns="18288" bIns="18288" anchor="t">
-            <a:spAutoFit/>
-          </a:bodyPr>
-          <a:lstStyle/>
-          <a:p>
-            <a:pPr algn="ctr"/>
-            <a:r>
-              <a:rPr sz="2400" b="0" i="0">
-                <a:solidFill>
-                  <a:srgbClr val="6B6B6B"/>
-                </a:solidFill>
-                <a:latin typeface="Century Schoolbook"/>
-              </a:rPr>
-              <a:t>108,100, kept to two significant digits</a:t>
-            </a:r>
-          </a:p>
-        </p:txBody>
-      </p:sp>
-      <p:sp>
-        <p:nvSpPr>
-          <p:cNvPr id="16" name="TextBox 15"/>
+          <p:cNvPr id="14" name="TextBox 13"/>
           <p:cNvSpPr txBox="1"/>
           <p:nvPr/>
         </p:nvSpPr>
@@ -4214,44 +4028,9 @@
           </a:fontRef>
         </p:style>
       </p:cxnSp>
-      <p:sp>
-        <p:nvSpPr>
-          <p:cNvPr id="5" name="TextBox 4"/>
-          <p:cNvSpPr txBox="1"/>
-          <p:nvPr/>
-        </p:nvSpPr>
-        <p:spPr>
-          <a:xfrm>
-            <a:off x="777240" y="1261872"/>
-            <a:ext cx="10607040" cy="310896"/>
-          </a:xfrm>
-          <a:prstGeom prst="rect">
-            <a:avLst/>
-          </a:prstGeom>
-          <a:noFill/>
-        </p:spPr>
-        <p:txBody>
-          <a:bodyPr wrap="square" lIns="45720" rIns="45720" tIns="18288" bIns="18288" anchor="t">
-            <a:spAutoFit/>
-          </a:bodyPr>
-          <a:lstStyle/>
-          <a:p>
-            <a:pPr algn="l"/>
-            <a:r>
-              <a:rPr sz="1700" b="0" i="1">
-                <a:solidFill>
-                  <a:srgbClr val="6B6B6B"/>
-                </a:solidFill>
-                <a:latin typeface="Century Schoolbook"/>
-              </a:rPr>
-              <a:t>A difference of two measurements.</a:t>
-            </a:r>
-          </a:p>
-        </p:txBody>
-      </p:sp>
       <p:cxnSp>
         <p:nvCxnSpPr>
-          <p:cNvPr id="6" name="Connector 5"/>
+          <p:cNvPr id="5" name="Connector 4"/>
           <p:cNvCxnSpPr/>
           <p:nvPr/>
         </p:nvCxnSpPr>
@@ -4286,7 +4065,7 @@
       </p:cxnSp>
       <p:sp>
         <p:nvSpPr>
-          <p:cNvPr id="7" name="TextBox 6"/>
+          <p:cNvPr id="6" name="TextBox 5"/>
           <p:cNvSpPr txBox="1"/>
           <p:nvPr/>
         </p:nvSpPr>
@@ -4321,7 +4100,7 @@
       </p:sp>
       <p:sp>
         <p:nvSpPr>
-          <p:cNvPr id="8" name="TextBox 7"/>
+          <p:cNvPr id="7" name="TextBox 6"/>
           <p:cNvSpPr txBox="1"/>
           <p:nvPr/>
         </p:nvSpPr>
@@ -4356,13 +4135,13 @@
       </p:sp>
       <p:sp>
         <p:nvSpPr>
-          <p:cNvPr id="9" name="TextBox 8"/>
-          <p:cNvSpPr txBox="1"/>
-          <p:nvPr/>
-        </p:nvSpPr>
-        <p:spPr>
-          <a:xfrm>
-            <a:off x="1973513" y="2080260"/>
+          <p:cNvPr id="8" name="TextBox 7"/>
+          <p:cNvSpPr txBox="1"/>
+          <p:nvPr/>
+        </p:nvSpPr>
+        <p:spPr>
+          <a:xfrm>
+            <a:off x="1973513" y="1714500"/>
             <a:ext cx="3245624" cy="457200"/>
           </a:xfrm>
           <a:prstGeom prst="rect">
@@ -4391,7 +4170,7 @@
       </p:sp>
       <p:pic>
         <p:nvPicPr>
-          <p:cNvPr id="10" name="Picture 9" descr="2cd8b9426e72708f.png"/>
+          <p:cNvPr id="9" name="Picture 8" descr="2cd8b9426e72708f.png"/>
           <p:cNvPicPr>
             <a:picLocks noChangeAspect="1"/>
           </p:cNvPicPr>
@@ -4405,7 +4184,7 @@
         </p:blipFill>
         <p:spPr>
           <a:xfrm>
-            <a:off x="5081977" y="2133599"/>
+            <a:off x="5081977" y="1767839"/>
             <a:ext cx="1804416" cy="350520"/>
           </a:xfrm>
           <a:prstGeom prst="rect">
@@ -4415,13 +4194,13 @@
       </p:pic>
       <p:sp>
         <p:nvSpPr>
-          <p:cNvPr id="11" name="TextBox 10"/>
-          <p:cNvSpPr txBox="1"/>
-          <p:nvPr/>
-        </p:nvSpPr>
-        <p:spPr>
-          <a:xfrm>
-            <a:off x="6886393" y="2080260"/>
+          <p:cNvPr id="10" name="TextBox 9"/>
+          <p:cNvSpPr txBox="1"/>
+          <p:nvPr/>
+        </p:nvSpPr>
+        <p:spPr>
+          <a:xfrm>
+            <a:off x="6886393" y="1714500"/>
             <a:ext cx="3438773" cy="457200"/>
           </a:xfrm>
           <a:prstGeom prst="rect">
@@ -4450,7 +4229,7 @@
       </p:sp>
       <p:pic>
         <p:nvPicPr>
-          <p:cNvPr id="12" name="Picture 11" descr="96c6bbe36750af3e.png"/>
+          <p:cNvPr id="11" name="Picture 10" descr="96c6bbe36750af3e.png"/>
           <p:cNvPicPr>
             <a:picLocks noChangeAspect="1"/>
           </p:cNvPicPr>
@@ -4464,7 +4243,7 @@
         </p:blipFill>
         <p:spPr>
           <a:xfrm>
-            <a:off x="3217029" y="2863596"/>
+            <a:off x="3217029" y="2497836"/>
             <a:ext cx="2008632" cy="353568"/>
           </a:xfrm>
           <a:prstGeom prst="rect">
@@ -4474,13 +4253,13 @@
       </p:pic>
       <p:sp>
         <p:nvSpPr>
-          <p:cNvPr id="13" name="TextBox 12"/>
-          <p:cNvSpPr txBox="1"/>
-          <p:nvPr/>
-        </p:nvSpPr>
-        <p:spPr>
-          <a:xfrm>
-            <a:off x="5225661" y="2811780"/>
+          <p:cNvPr id="12" name="TextBox 11"/>
+          <p:cNvSpPr txBox="1"/>
+          <p:nvPr/>
+        </p:nvSpPr>
+        <p:spPr>
+          <a:xfrm>
+            <a:off x="5225661" y="2446020"/>
             <a:ext cx="3855989" cy="457200"/>
           </a:xfrm>
           <a:prstGeom prst="rect">
@@ -4509,13 +4288,13 @@
       </p:sp>
       <p:sp>
         <p:nvSpPr>
-          <p:cNvPr id="14" name="TextBox 13"/>
-          <p:cNvSpPr txBox="1"/>
-          <p:nvPr/>
-        </p:nvSpPr>
-        <p:spPr>
-          <a:xfrm>
-            <a:off x="777240" y="3749040"/>
+          <p:cNvPr id="13" name="TextBox 12"/>
+          <p:cNvSpPr txBox="1"/>
+          <p:nvPr/>
+        </p:nvSpPr>
+        <p:spPr>
+          <a:xfrm>
+            <a:off x="777240" y="3383280"/>
             <a:ext cx="10607040" cy="429370"/>
           </a:xfrm>
           <a:prstGeom prst="rect">
@@ -4665,44 +4444,9 @@
           </a:fontRef>
         </p:style>
       </p:cxnSp>
-      <p:sp>
-        <p:nvSpPr>
-          <p:cNvPr id="5" name="TextBox 4"/>
-          <p:cNvSpPr txBox="1"/>
-          <p:nvPr/>
-        </p:nvSpPr>
-        <p:spPr>
-          <a:xfrm>
-            <a:off x="777240" y="1261872"/>
-            <a:ext cx="10607040" cy="310896"/>
-          </a:xfrm>
-          <a:prstGeom prst="rect">
-            <a:avLst/>
-          </a:prstGeom>
-          <a:noFill/>
-        </p:spPr>
-        <p:txBody>
-          <a:bodyPr wrap="square" lIns="45720" rIns="45720" tIns="18288" bIns="18288" anchor="t">
-            <a:spAutoFit/>
-          </a:bodyPr>
-          <a:lstStyle/>
-          <a:p>
-            <a:pPr algn="l"/>
-            <a:r>
-              <a:rPr sz="1700" b="0" i="1">
-                <a:solidFill>
-                  <a:srgbClr val="6B6B6B"/>
-                </a:solidFill>
-                <a:latin typeface="Century Schoolbook"/>
-              </a:rPr>
-              <a:t>Worked.</a:t>
-            </a:r>
-          </a:p>
-        </p:txBody>
-      </p:sp>
       <p:cxnSp>
         <p:nvCxnSpPr>
-          <p:cNvPr id="6" name="Connector 5"/>
+          <p:cNvPr id="5" name="Connector 4"/>
           <p:cNvCxnSpPr/>
           <p:nvPr/>
         </p:nvCxnSpPr>
@@ -4737,7 +4481,7 @@
       </p:cxnSp>
       <p:sp>
         <p:nvSpPr>
-          <p:cNvPr id="7" name="TextBox 6"/>
+          <p:cNvPr id="6" name="TextBox 5"/>
           <p:cNvSpPr txBox="1"/>
           <p:nvPr/>
         </p:nvSpPr>
@@ -4772,7 +4516,7 @@
       </p:sp>
       <p:sp>
         <p:nvSpPr>
-          <p:cNvPr id="8" name="TextBox 7"/>
+          <p:cNvPr id="7" name="TextBox 6"/>
           <p:cNvSpPr txBox="1"/>
           <p:nvPr/>
         </p:nvSpPr>
@@ -4807,7 +4551,7 @@
       </p:sp>
       <p:pic>
         <p:nvPicPr>
-          <p:cNvPr id="9" name="Picture 8" descr="799fbcd94df55113.png"/>
+          <p:cNvPr id="8" name="Picture 7" descr="799fbcd94df55113.png"/>
           <p:cNvPicPr>
             <a:picLocks noChangeAspect="1"/>
           </p:cNvPicPr>
@@ -4829,44 +4573,9 @@
           </a:prstGeom>
         </p:spPr>
       </p:pic>
-      <p:sp>
-        <p:nvSpPr>
-          <p:cNvPr id="10" name="TextBox 9"/>
-          <p:cNvSpPr txBox="1"/>
-          <p:nvPr/>
-        </p:nvSpPr>
-        <p:spPr>
-          <a:xfrm>
-            <a:off x="8232648" y="1836420"/>
-            <a:ext cx="3151631" cy="502920"/>
-          </a:xfrm>
-          <a:prstGeom prst="rect">
-            <a:avLst/>
-          </a:prstGeom>
-          <a:noFill/>
-        </p:spPr>
-        <p:txBody>
-          <a:bodyPr wrap="square" lIns="45720" rIns="45720" tIns="18288" bIns="18288" anchor="ctr">
-            <a:spAutoFit/>
-          </a:bodyPr>
-          <a:lstStyle/>
-          <a:p>
-            <a:pPr algn="l"/>
-            <a:r>
-              <a:rPr sz="2100" b="0" i="1">
-                <a:solidFill>
-                  <a:srgbClr val="6B6B6B"/>
-                </a:solidFill>
-                <a:latin typeface="Century Schoolbook"/>
-              </a:rPr>
-              <a:t>subtract in full</a:t>
-            </a:r>
-          </a:p>
-        </p:txBody>
-      </p:sp>
       <p:pic>
         <p:nvPicPr>
-          <p:cNvPr id="11" name="Picture 10" descr="22b44a67be12e9b0.png"/>
+          <p:cNvPr id="9" name="Picture 8" descr="22b44a67be12e9b0.png"/>
           <p:cNvPicPr>
             <a:picLocks noChangeAspect="1"/>
           </p:cNvPicPr>
@@ -4888,44 +4597,9 @@
           </a:prstGeom>
         </p:spPr>
       </p:pic>
-      <p:sp>
-        <p:nvSpPr>
-          <p:cNvPr id="12" name="TextBox 11"/>
-          <p:cNvSpPr txBox="1"/>
-          <p:nvPr/>
-        </p:nvSpPr>
-        <p:spPr>
-          <a:xfrm>
-            <a:off x="6153912" y="2470404"/>
-            <a:ext cx="5230367" cy="502920"/>
-          </a:xfrm>
-          <a:prstGeom prst="rect">
-            <a:avLst/>
-          </a:prstGeom>
-          <a:noFill/>
-        </p:spPr>
-        <p:txBody>
-          <a:bodyPr wrap="square" lIns="45720" rIns="45720" tIns="18288" bIns="18288" anchor="ctr">
-            <a:spAutoFit/>
-          </a:bodyPr>
-          <a:lstStyle/>
-          <a:p>
-            <a:pPr algn="l"/>
-            <a:r>
-              <a:rPr sz="2100" b="0" i="1">
-                <a:solidFill>
-                  <a:srgbClr val="6B6B6B"/>
-                </a:solidFill>
-                <a:latin typeface="Century Schoolbook"/>
-              </a:rPr>
-              <a:t>the leftmost last-digit place</a:t>
-            </a:r>
-          </a:p>
-        </p:txBody>
-      </p:sp>
       <p:pic>
         <p:nvPicPr>
-          <p:cNvPr id="13" name="Picture 12" descr="4629515b15c2b4c2.png"/>
+          <p:cNvPr id="10" name="Picture 9" descr="4629515b15c2b4c2.png"/>
           <p:cNvPicPr>
             <a:picLocks noChangeAspect="1"/>
           </p:cNvPicPr>
@@ -4949,42 +4623,7 @@
       </p:pic>
       <p:sp>
         <p:nvSpPr>
-          <p:cNvPr id="14" name="TextBox 13"/>
-          <p:cNvSpPr txBox="1"/>
-          <p:nvPr/>
-        </p:nvSpPr>
-        <p:spPr>
-          <a:xfrm>
-            <a:off x="8241792" y="3134868"/>
-            <a:ext cx="3142487" cy="502920"/>
-          </a:xfrm>
-          <a:prstGeom prst="rect">
-            <a:avLst/>
-          </a:prstGeom>
-          <a:noFill/>
-        </p:spPr>
-        <p:txBody>
-          <a:bodyPr wrap="square" lIns="45720" rIns="45720" tIns="18288" bIns="18288" anchor="ctr">
-            <a:spAutoFit/>
-          </a:bodyPr>
-          <a:lstStyle/>
-          <a:p>
-            <a:pPr algn="l"/>
-            <a:r>
-              <a:rPr sz="2100" b="0" i="1">
-                <a:solidFill>
-                  <a:srgbClr val="6B6B6B"/>
-                </a:solidFill>
-                <a:latin typeface="Century Schoolbook"/>
-              </a:rPr>
-              <a:t>round there</a:t>
-            </a:r>
-          </a:p>
-        </p:txBody>
-      </p:sp>
-      <p:sp>
-        <p:nvSpPr>
-          <p:cNvPr id="15" name="TextBox 14"/>
+          <p:cNvPr id="11" name="TextBox 10"/>
           <p:cNvSpPr txBox="1"/>
           <p:nvPr/>
         </p:nvSpPr>
@@ -5158,44 +4797,9 @@
           </a:fontRef>
         </p:style>
       </p:cxnSp>
-      <p:sp>
-        <p:nvSpPr>
-          <p:cNvPr id="5" name="TextBox 4"/>
-          <p:cNvSpPr txBox="1"/>
-          <p:nvPr/>
-        </p:nvSpPr>
-        <p:spPr>
-          <a:xfrm>
-            <a:off x="777240" y="1261872"/>
-            <a:ext cx="10607040" cy="310896"/>
-          </a:xfrm>
-          <a:prstGeom prst="rect">
-            <a:avLst/>
-          </a:prstGeom>
-          <a:noFill/>
-        </p:spPr>
-        <p:txBody>
-          <a:bodyPr wrap="square" lIns="45720" rIns="45720" tIns="18288" bIns="18288" anchor="t">
-            <a:spAutoFit/>
-          </a:bodyPr>
-          <a:lstStyle/>
-          <a:p>
-            <a:pPr algn="l"/>
-            <a:r>
-              <a:rPr sz="1700" b="0" i="1">
-                <a:solidFill>
-                  <a:srgbClr val="6B6B6B"/>
-                </a:solidFill>
-                <a:latin typeface="Century Schoolbook"/>
-              </a:rPr>
-              <a:t>Same steps, your numbers. Boards up when done.</a:t>
-            </a:r>
-          </a:p>
-        </p:txBody>
-      </p:sp>
       <p:cxnSp>
         <p:nvCxnSpPr>
-          <p:cNvPr id="6" name="Connector 5"/>
+          <p:cNvPr id="5" name="Connector 4"/>
           <p:cNvCxnSpPr/>
           <p:nvPr/>
         </p:nvCxnSpPr>
@@ -5230,7 +4834,7 @@
       </p:cxnSp>
       <p:sp>
         <p:nvSpPr>
-          <p:cNvPr id="7" name="TextBox 6"/>
+          <p:cNvPr id="6" name="TextBox 5"/>
           <p:cNvSpPr txBox="1"/>
           <p:nvPr/>
         </p:nvSpPr>
@@ -5265,7 +4869,7 @@
       </p:sp>
       <p:sp>
         <p:nvSpPr>
-          <p:cNvPr id="8" name="TextBox 7"/>
+          <p:cNvPr id="7" name="TextBox 6"/>
           <p:cNvSpPr txBox="1"/>
           <p:nvPr/>
         </p:nvSpPr>
@@ -5300,7 +4904,7 @@
       </p:sp>
       <p:sp>
         <p:nvSpPr>
-          <p:cNvPr id="9" name="TextBox 8"/>
+          <p:cNvPr id="8" name="TextBox 7"/>
           <p:cNvSpPr txBox="1"/>
           <p:nvPr/>
         </p:nvSpPr>
@@ -5335,7 +4939,7 @@
       </p:sp>
       <p:pic>
         <p:nvPicPr>
-          <p:cNvPr id="10" name="Picture 9" descr="6fe96bec24508838.png"/>
+          <p:cNvPr id="9" name="Picture 8" descr="6fe96bec24508838.png"/>
           <p:cNvPicPr>
             <a:picLocks noChangeAspect="1"/>
           </p:cNvPicPr>
@@ -5359,7 +4963,7 @@
       </p:pic>
       <p:sp>
         <p:nvSpPr>
-          <p:cNvPr id="11" name="TextBox 10"/>
+          <p:cNvPr id="10" name="TextBox 9"/>
           <p:cNvSpPr txBox="1"/>
           <p:nvPr/>
         </p:nvSpPr>
@@ -5394,7 +4998,7 @@
       </p:sp>
       <p:sp>
         <p:nvSpPr>
-          <p:cNvPr id="12" name="TextBox 11"/>
+          <p:cNvPr id="11" name="TextBox 10"/>
           <p:cNvSpPr txBox="1"/>
           <p:nvPr/>
         </p:nvSpPr>
@@ -5429,7 +5033,7 @@
       </p:sp>
       <p:pic>
         <p:nvPicPr>
-          <p:cNvPr id="13" name="Picture 12" descr="e7c28ca8c59a9fff.png"/>
+          <p:cNvPr id="12" name="Picture 11" descr="e7c28ca8c59a9fff.png"/>
           <p:cNvPicPr>
             <a:picLocks noChangeAspect="1"/>
           </p:cNvPicPr>
@@ -5453,7 +5057,7 @@
       </p:pic>
       <p:sp>
         <p:nvSpPr>
-          <p:cNvPr id="14" name="TextBox 13"/>
+          <p:cNvPr id="13" name="TextBox 12"/>
           <p:cNvSpPr txBox="1"/>
           <p:nvPr/>
         </p:nvSpPr>
@@ -5488,7 +5092,7 @@
       </p:sp>
       <p:sp>
         <p:nvSpPr>
-          <p:cNvPr id="15" name="TextBox 14"/>
+          <p:cNvPr id="14" name="TextBox 13"/>
           <p:cNvSpPr txBox="1"/>
           <p:nvPr/>
         </p:nvSpPr>
@@ -5644,44 +5248,9 @@
           </a:fontRef>
         </p:style>
       </p:cxnSp>
-      <p:sp>
-        <p:nvSpPr>
-          <p:cNvPr id="5" name="TextBox 4"/>
-          <p:cNvSpPr txBox="1"/>
-          <p:nvPr/>
-        </p:nvSpPr>
-        <p:spPr>
-          <a:xfrm>
-            <a:off x="777240" y="1261872"/>
-            <a:ext cx="10607040" cy="310896"/>
-          </a:xfrm>
-          <a:prstGeom prst="rect">
-            <a:avLst/>
-          </a:prstGeom>
-          <a:noFill/>
-        </p:spPr>
-        <p:txBody>
-          <a:bodyPr wrap="square" lIns="45720" rIns="45720" tIns="18288" bIns="18288" anchor="t">
-            <a:spAutoFit/>
-          </a:bodyPr>
-          <a:lstStyle/>
-          <a:p>
-            <a:pPr algn="l"/>
-            <a:r>
-              <a:rPr sz="1700" b="0" i="1">
-                <a:solidFill>
-                  <a:srgbClr val="6B6B6B"/>
-                </a:solidFill>
-                <a:latin typeface="Century Schoolbook"/>
-              </a:rPr>
-              <a:t>Answer.</a:t>
-            </a:r>
-          </a:p>
-        </p:txBody>
-      </p:sp>
       <p:cxnSp>
         <p:nvCxnSpPr>
-          <p:cNvPr id="6" name="Connector 5"/>
+          <p:cNvPr id="5" name="Connector 4"/>
           <p:cNvCxnSpPr/>
           <p:nvPr/>
         </p:nvCxnSpPr>
@@ -5716,7 +5285,7 @@
       </p:cxnSp>
       <p:sp>
         <p:nvSpPr>
-          <p:cNvPr id="7" name="TextBox 6"/>
+          <p:cNvPr id="6" name="TextBox 5"/>
           <p:cNvSpPr txBox="1"/>
           <p:nvPr/>
         </p:nvSpPr>
@@ -5751,7 +5320,7 @@
       </p:sp>
       <p:sp>
         <p:nvSpPr>
-          <p:cNvPr id="8" name="TextBox 7"/>
+          <p:cNvPr id="7" name="TextBox 6"/>
           <p:cNvSpPr txBox="1"/>
           <p:nvPr/>
         </p:nvSpPr>
@@ -5786,7 +5355,7 @@
       </p:sp>
       <p:sp>
         <p:nvSpPr>
-          <p:cNvPr id="9" name="TextBox 8"/>
+          <p:cNvPr id="8" name="TextBox 7"/>
           <p:cNvSpPr txBox="1"/>
           <p:nvPr/>
         </p:nvSpPr>
@@ -5821,7 +5390,7 @@
       </p:sp>
       <p:pic>
         <p:nvPicPr>
-          <p:cNvPr id="10" name="Picture 9" descr="8579fbd842756a60.png"/>
+          <p:cNvPr id="9" name="Picture 8" descr="8579fbd842756a60.png"/>
           <p:cNvPicPr>
             <a:picLocks noChangeAspect="1"/>
           </p:cNvPicPr>
@@ -5845,7 +5414,7 @@
       </p:pic>
       <p:sp>
         <p:nvSpPr>
-          <p:cNvPr id="11" name="TextBox 10"/>
+          <p:cNvPr id="10" name="TextBox 9"/>
           <p:cNvSpPr txBox="1"/>
           <p:nvPr/>
         </p:nvSpPr>
@@ -5880,7 +5449,7 @@
       </p:sp>
       <p:sp>
         <p:nvSpPr>
-          <p:cNvPr id="12" name="TextBox 11"/>
+          <p:cNvPr id="11" name="TextBox 10"/>
           <p:cNvSpPr txBox="1"/>
           <p:nvPr/>
         </p:nvSpPr>
@@ -5915,7 +5484,7 @@
       </p:sp>
       <p:pic>
         <p:nvPicPr>
-          <p:cNvPr id="13" name="Picture 12" descr="522cffef3ffba4df.png"/>
+          <p:cNvPr id="12" name="Picture 11" descr="522cffef3ffba4df.png"/>
           <p:cNvPicPr>
             <a:picLocks noChangeAspect="1"/>
           </p:cNvPicPr>
@@ -5939,7 +5508,7 @@
       </p:pic>
       <p:sp>
         <p:nvSpPr>
-          <p:cNvPr id="14" name="TextBox 13"/>
+          <p:cNvPr id="13" name="TextBox 12"/>
           <p:cNvSpPr txBox="1"/>
           <p:nvPr/>
         </p:nvSpPr>
@@ -5974,7 +5543,7 @@
       </p:sp>
       <p:sp>
         <p:nvSpPr>
-          <p:cNvPr id="15" name="TextBox 14"/>
+          <p:cNvPr id="14" name="TextBox 13"/>
           <p:cNvSpPr txBox="1"/>
           <p:nvPr/>
         </p:nvSpPr>
@@ -6009,48 +5578,13 @@
       </p:sp>
       <p:sp>
         <p:nvSpPr>
-          <p:cNvPr id="16" name="TextBox 15"/>
-          <p:cNvSpPr txBox="1"/>
-          <p:nvPr/>
-        </p:nvSpPr>
-        <p:spPr>
-          <a:xfrm>
-            <a:off x="777240" y="4248514"/>
-            <a:ext cx="10607040" cy="429370"/>
-          </a:xfrm>
-          <a:prstGeom prst="rect">
-            <a:avLst/>
-          </a:prstGeom>
-          <a:noFill/>
-        </p:spPr>
-        <p:txBody>
-          <a:bodyPr wrap="square" lIns="45720" rIns="45720" tIns="18288" bIns="18288" anchor="t">
-            <a:spAutoFit/>
-          </a:bodyPr>
-          <a:lstStyle/>
-          <a:p>
-            <a:pPr algn="ctr"/>
-            <a:r>
-              <a:rPr sz="2400" b="0" i="0">
-                <a:solidFill>
-                  <a:srgbClr val="6B6B6B"/>
-                </a:solidFill>
-                <a:latin typeface="Century Schoolbook"/>
-              </a:rPr>
-              <a:t>3,576, stopped at the tens place</a:t>
-            </a:r>
-          </a:p>
-        </p:txBody>
-      </p:sp>
-      <p:sp>
-        <p:nvSpPr>
-          <p:cNvPr id="17" name="TextBox 16"/>
-          <p:cNvSpPr txBox="1"/>
-          <p:nvPr/>
-        </p:nvSpPr>
-        <p:spPr>
-          <a:xfrm>
-            <a:off x="777240" y="4970492"/>
+          <p:cNvPr id="15" name="TextBox 14"/>
+          <p:cNvSpPr txBox="1"/>
+          <p:nvPr/>
+        </p:nvSpPr>
+        <p:spPr>
+          <a:xfrm>
+            <a:off x="777240" y="4572000"/>
             <a:ext cx="10607040" cy="548640"/>
           </a:xfrm>
           <a:prstGeom prst="rect">
@@ -6218,44 +5752,9 @@
           </a:fontRef>
         </p:style>
       </p:cxnSp>
-      <p:sp>
-        <p:nvSpPr>
-          <p:cNvPr id="5" name="TextBox 4"/>
-          <p:cNvSpPr txBox="1"/>
-          <p:nvPr/>
-        </p:nvSpPr>
-        <p:spPr>
-          <a:xfrm>
-            <a:off x="777240" y="1261872"/>
-            <a:ext cx="10607040" cy="310896"/>
-          </a:xfrm>
-          <a:prstGeom prst="rect">
-            <a:avLst/>
-          </a:prstGeom>
-          <a:noFill/>
-        </p:spPr>
-        <p:txBody>
-          <a:bodyPr wrap="square" lIns="45720" rIns="45720" tIns="18288" bIns="18288" anchor="t">
-            <a:spAutoFit/>
-          </a:bodyPr>
-          <a:lstStyle/>
-          <a:p>
-            <a:pPr algn="l"/>
-            <a:r>
-              <a:rPr sz="1700" b="0" i="1">
-                <a:solidFill>
-                  <a:srgbClr val="6B6B6B"/>
-                </a:solidFill>
-                <a:latin typeface="Century Schoolbook"/>
-              </a:rPr>
-              <a:t>Boards up on three.</a:t>
-            </a:r>
-          </a:p>
-        </p:txBody>
-      </p:sp>
       <p:cxnSp>
         <p:nvCxnSpPr>
-          <p:cNvPr id="6" name="Connector 5"/>
+          <p:cNvPr id="5" name="Connector 4"/>
           <p:cNvCxnSpPr/>
           <p:nvPr/>
         </p:nvCxnSpPr>
@@ -6290,7 +5789,7 @@
       </p:cxnSp>
       <p:sp>
         <p:nvSpPr>
-          <p:cNvPr id="7" name="TextBox 6"/>
+          <p:cNvPr id="6" name="TextBox 5"/>
           <p:cNvSpPr txBox="1"/>
           <p:nvPr/>
         </p:nvSpPr>
@@ -6325,7 +5824,7 @@
       </p:sp>
       <p:sp>
         <p:nvSpPr>
-          <p:cNvPr id="8" name="TextBox 7"/>
+          <p:cNvPr id="7" name="TextBox 6"/>
           <p:cNvSpPr txBox="1"/>
           <p:nvPr/>
         </p:nvSpPr>
@@ -6360,7 +5859,7 @@
       </p:sp>
       <p:sp>
         <p:nvSpPr>
-          <p:cNvPr id="9" name="TextBox 8"/>
+          <p:cNvPr id="8" name="TextBox 7"/>
           <p:cNvSpPr txBox="1"/>
           <p:nvPr/>
         </p:nvSpPr>
@@ -6395,7 +5894,7 @@
       </p:sp>
       <p:sp>
         <p:nvSpPr>
-          <p:cNvPr id="10" name="TextBox 9"/>
+          <p:cNvPr id="9" name="TextBox 8"/>
           <p:cNvSpPr txBox="1"/>
           <p:nvPr/>
         </p:nvSpPr>
@@ -6424,41 +5923,6 @@
                 <a:latin typeface="Century Schoolbook"/>
               </a:rPr>
               <a:t>Answer it.</a:t>
-            </a:r>
-          </a:p>
-        </p:txBody>
-      </p:sp>
-      <p:sp>
-        <p:nvSpPr>
-          <p:cNvPr id="11" name="TextBox 10"/>
-          <p:cNvSpPr txBox="1"/>
-          <p:nvPr/>
-        </p:nvSpPr>
-        <p:spPr>
-          <a:xfrm>
-            <a:off x="777240" y="4828032"/>
-            <a:ext cx="10607040" cy="365760"/>
-          </a:xfrm>
-          <a:prstGeom prst="rect">
-            <a:avLst/>
-          </a:prstGeom>
-          <a:noFill/>
-        </p:spPr>
-        <p:txBody>
-          <a:bodyPr wrap="square" lIns="45720" rIns="45720" tIns="18288" bIns="18288" anchor="t">
-            <a:spAutoFit/>
-          </a:bodyPr>
-          <a:lstStyle/>
-          <a:p>
-            <a:pPr algn="ctr"/>
-            <a:r>
-              <a:rPr sz="1900" b="0" i="1">
-                <a:solidFill>
-                  <a:srgbClr val="6B6B6B"/>
-                </a:solidFill>
-                <a:latin typeface="Century Schoolbook"/>
-              </a:rPr>
-              <a:t>Leading zeros, then trailing zeros.</a:t>
             </a:r>
           </a:p>
         </p:txBody>
@@ -6586,44 +6050,9 @@
           </a:fontRef>
         </p:style>
       </p:cxnSp>
-      <p:sp>
-        <p:nvSpPr>
-          <p:cNvPr id="5" name="TextBox 4"/>
-          <p:cNvSpPr txBox="1"/>
-          <p:nvPr/>
-        </p:nvSpPr>
-        <p:spPr>
-          <a:xfrm>
-            <a:off x="777240" y="1261872"/>
-            <a:ext cx="10607040" cy="310896"/>
-          </a:xfrm>
-          <a:prstGeom prst="rect">
-            <a:avLst/>
-          </a:prstGeom>
-          <a:noFill/>
-        </p:spPr>
-        <p:txBody>
-          <a:bodyPr wrap="square" lIns="45720" rIns="45720" tIns="18288" bIns="18288" anchor="t">
-            <a:spAutoFit/>
-          </a:bodyPr>
-          <a:lstStyle/>
-          <a:p>
-            <a:pPr algn="l"/>
-            <a:r>
-              <a:rPr sz="1700" b="0" i="1">
-                <a:solidFill>
-                  <a:srgbClr val="6B6B6B"/>
-                </a:solidFill>
-                <a:latin typeface="Century Schoolbook"/>
-              </a:rPr>
-              <a:t>Answer.</a:t>
-            </a:r>
-          </a:p>
-        </p:txBody>
-      </p:sp>
       <p:cxnSp>
         <p:nvCxnSpPr>
-          <p:cNvPr id="6" name="Connector 5"/>
+          <p:cNvPr id="5" name="Connector 4"/>
           <p:cNvCxnSpPr/>
           <p:nvPr/>
         </p:nvCxnSpPr>
@@ -6658,7 +6087,7 @@
       </p:cxnSp>
       <p:sp>
         <p:nvSpPr>
-          <p:cNvPr id="7" name="TextBox 6"/>
+          <p:cNvPr id="6" name="TextBox 5"/>
           <p:cNvSpPr txBox="1"/>
           <p:nvPr/>
         </p:nvSpPr>
@@ -6693,7 +6122,7 @@
       </p:sp>
       <p:sp>
         <p:nvSpPr>
-          <p:cNvPr id="8" name="TextBox 7"/>
+          <p:cNvPr id="7" name="TextBox 6"/>
           <p:cNvSpPr txBox="1"/>
           <p:nvPr/>
         </p:nvSpPr>
@@ -6728,7 +6157,7 @@
       </p:sp>
       <p:sp>
         <p:nvSpPr>
-          <p:cNvPr id="9" name="TextBox 8"/>
+          <p:cNvPr id="8" name="TextBox 7"/>
           <p:cNvSpPr txBox="1"/>
           <p:nvPr/>
         </p:nvSpPr>
@@ -6763,42 +6192,7 @@
       </p:sp>
       <p:sp>
         <p:nvSpPr>
-          <p:cNvPr id="10" name="TextBox 9"/>
-          <p:cNvSpPr txBox="1"/>
-          <p:nvPr/>
-        </p:nvSpPr>
-        <p:spPr>
-          <a:xfrm>
-            <a:off x="1828800" y="2723719"/>
-            <a:ext cx="8503920" cy="548640"/>
-          </a:xfrm>
-          <a:prstGeom prst="rect">
-            <a:avLst/>
-          </a:prstGeom>
-          <a:noFill/>
-        </p:spPr>
-        <p:txBody>
-          <a:bodyPr wrap="square" lIns="45720" rIns="45720" tIns="18288" bIns="18288" anchor="t">
-            <a:spAutoFit/>
-          </a:bodyPr>
-          <a:lstStyle/>
-          <a:p>
-            <a:pPr algn="ctr"/>
-            <a:r>
-              <a:rPr sz="2400" b="0" i="0">
-                <a:solidFill>
-                  <a:srgbClr val="6B6B6B"/>
-                </a:solidFill>
-                <a:latin typeface="Century Schoolbook"/>
-              </a:rPr>
-              <a:t>4, 7 and the last 0</a:t>
-            </a:r>
-          </a:p>
-        </p:txBody>
-      </p:sp>
-      <p:sp>
-        <p:nvSpPr>
-          <p:cNvPr id="11" name="TextBox 10"/>
+          <p:cNvPr id="9" name="TextBox 8"/>
           <p:cNvSpPr txBox="1"/>
           <p:nvPr/>
         </p:nvSpPr>
@@ -6954,44 +6348,9 @@
           </a:fontRef>
         </p:style>
       </p:cxnSp>
-      <p:sp>
-        <p:nvSpPr>
-          <p:cNvPr id="5" name="TextBox 4"/>
-          <p:cNvSpPr txBox="1"/>
-          <p:nvPr/>
-        </p:nvSpPr>
-        <p:spPr>
-          <a:xfrm>
-            <a:off x="777240" y="1261872"/>
-            <a:ext cx="10607040" cy="310896"/>
-          </a:xfrm>
-          <a:prstGeom prst="rect">
-            <a:avLst/>
-          </a:prstGeom>
-          <a:noFill/>
-        </p:spPr>
-        <p:txBody>
-          <a:bodyPr wrap="square" lIns="45720" rIns="45720" tIns="18288" bIns="18288" anchor="t">
-            <a:spAutoFit/>
-          </a:bodyPr>
-          <a:lstStyle/>
-          <a:p>
-            <a:pPr algn="l"/>
-            <a:r>
-              <a:rPr sz="1700" b="0" i="1">
-                <a:solidFill>
-                  <a:srgbClr val="6B6B6B"/>
-                </a:solidFill>
-                <a:latin typeface="Century Schoolbook"/>
-              </a:rPr>
-              <a:t>Boards up on three.</a:t>
-            </a:r>
-          </a:p>
-        </p:txBody>
-      </p:sp>
       <p:cxnSp>
         <p:nvCxnSpPr>
-          <p:cNvPr id="6" name="Connector 5"/>
+          <p:cNvPr id="5" name="Connector 4"/>
           <p:cNvCxnSpPr/>
           <p:nvPr/>
         </p:nvCxnSpPr>
@@ -7026,7 +6385,7 @@
       </p:cxnSp>
       <p:sp>
         <p:nvSpPr>
-          <p:cNvPr id="7" name="TextBox 6"/>
+          <p:cNvPr id="6" name="TextBox 5"/>
           <p:cNvSpPr txBox="1"/>
           <p:nvPr/>
         </p:nvSpPr>
@@ -7061,7 +6420,7 @@
       </p:sp>
       <p:sp>
         <p:nvSpPr>
-          <p:cNvPr id="8" name="TextBox 7"/>
+          <p:cNvPr id="7" name="TextBox 6"/>
           <p:cNvSpPr txBox="1"/>
           <p:nvPr/>
         </p:nvSpPr>
@@ -7096,7 +6455,7 @@
       </p:sp>
       <p:sp>
         <p:nvSpPr>
-          <p:cNvPr id="9" name="TextBox 8"/>
+          <p:cNvPr id="8" name="TextBox 7"/>
           <p:cNvSpPr txBox="1"/>
           <p:nvPr/>
         </p:nvSpPr>
@@ -7131,7 +6490,7 @@
       </p:sp>
       <p:pic>
         <p:nvPicPr>
-          <p:cNvPr id="10" name="Picture 9" descr="69f46df5ecb064d7.png"/>
+          <p:cNvPr id="9" name="Picture 8" descr="69f46df5ecb064d7.png"/>
           <p:cNvPicPr>
             <a:picLocks noChangeAspect="1"/>
           </p:cNvPicPr>
@@ -7155,7 +6514,7 @@
       </p:pic>
       <p:sp>
         <p:nvSpPr>
-          <p:cNvPr id="11" name="TextBox 10"/>
+          <p:cNvPr id="10" name="TextBox 9"/>
           <p:cNvSpPr txBox="1"/>
           <p:nvPr/>
         </p:nvSpPr>
@@ -7190,7 +6549,7 @@
       </p:sp>
       <p:pic>
         <p:nvPicPr>
-          <p:cNvPr id="12" name="Picture 11" descr="dd823fb368db84d4.png"/>
+          <p:cNvPr id="11" name="Picture 10" descr="dd823fb368db84d4.png"/>
           <p:cNvPicPr>
             <a:picLocks noChangeAspect="1"/>
           </p:cNvPicPr>
@@ -7214,7 +6573,7 @@
       </p:pic>
       <p:sp>
         <p:nvSpPr>
-          <p:cNvPr id="13" name="TextBox 12"/>
+          <p:cNvPr id="12" name="TextBox 11"/>
           <p:cNvSpPr txBox="1"/>
           <p:nvPr/>
         </p:nvSpPr>
@@ -7249,7 +6608,7 @@
       </p:sp>
       <p:sp>
         <p:nvSpPr>
-          <p:cNvPr id="14" name="TextBox 13"/>
+          <p:cNvPr id="13" name="TextBox 12"/>
           <p:cNvSpPr txBox="1"/>
           <p:nvPr/>
         </p:nvSpPr>
@@ -7284,7 +6643,7 @@
       </p:sp>
       <p:sp>
         <p:nvSpPr>
-          <p:cNvPr id="15" name="TextBox 14"/>
+          <p:cNvPr id="14" name="TextBox 13"/>
           <p:cNvSpPr txBox="1"/>
           <p:nvPr/>
         </p:nvSpPr>
@@ -7319,7 +6678,7 @@
       </p:sp>
       <p:sp>
         <p:nvSpPr>
-          <p:cNvPr id="16" name="TextBox 15"/>
+          <p:cNvPr id="15" name="TextBox 14"/>
           <p:cNvSpPr txBox="1"/>
           <p:nvPr/>
         </p:nvSpPr>
@@ -7475,44 +6834,9 @@
           </a:fontRef>
         </p:style>
       </p:cxnSp>
-      <p:sp>
-        <p:nvSpPr>
-          <p:cNvPr id="5" name="TextBox 4"/>
-          <p:cNvSpPr txBox="1"/>
-          <p:nvPr/>
-        </p:nvSpPr>
-        <p:spPr>
-          <a:xfrm>
-            <a:off x="777240" y="1261872"/>
-            <a:ext cx="10607040" cy="310896"/>
-          </a:xfrm>
-          <a:prstGeom prst="rect">
-            <a:avLst/>
-          </a:prstGeom>
-          <a:noFill/>
-        </p:spPr>
-        <p:txBody>
-          <a:bodyPr wrap="square" lIns="45720" rIns="45720" tIns="18288" bIns="18288" anchor="t">
-            <a:spAutoFit/>
-          </a:bodyPr>
-          <a:lstStyle/>
-          <a:p>
-            <a:pPr algn="l"/>
-            <a:r>
-              <a:rPr sz="1700" b="0" i="1">
-                <a:solidFill>
-                  <a:srgbClr val="6B6B6B"/>
-                </a:solidFill>
-                <a:latin typeface="Century Schoolbook"/>
-              </a:rPr>
-              <a:t>Answer.</a:t>
-            </a:r>
-          </a:p>
-        </p:txBody>
-      </p:sp>
       <p:cxnSp>
         <p:nvCxnSpPr>
-          <p:cNvPr id="6" name="Connector 5"/>
+          <p:cNvPr id="5" name="Connector 4"/>
           <p:cNvCxnSpPr/>
           <p:nvPr/>
         </p:nvCxnSpPr>
@@ -7547,7 +6871,7 @@
       </p:cxnSp>
       <p:sp>
         <p:nvSpPr>
-          <p:cNvPr id="7" name="TextBox 6"/>
+          <p:cNvPr id="6" name="TextBox 5"/>
           <p:cNvSpPr txBox="1"/>
           <p:nvPr/>
         </p:nvSpPr>
@@ -7582,7 +6906,7 @@
       </p:sp>
       <p:sp>
         <p:nvSpPr>
-          <p:cNvPr id="8" name="TextBox 7"/>
+          <p:cNvPr id="7" name="TextBox 6"/>
           <p:cNvSpPr txBox="1"/>
           <p:nvPr/>
         </p:nvSpPr>
@@ -7617,7 +6941,7 @@
       </p:sp>
       <p:sp>
         <p:nvSpPr>
-          <p:cNvPr id="9" name="TextBox 8"/>
+          <p:cNvPr id="8" name="TextBox 7"/>
           <p:cNvSpPr txBox="1"/>
           <p:nvPr/>
         </p:nvSpPr>
@@ -7652,7 +6976,7 @@
       </p:sp>
       <p:pic>
         <p:nvPicPr>
-          <p:cNvPr id="10" name="Picture 9" descr="877de329d13d7ebe.png"/>
+          <p:cNvPr id="9" name="Picture 8" descr="877de329d13d7ebe.png"/>
           <p:cNvPicPr>
             <a:picLocks noChangeAspect="1"/>
           </p:cNvPicPr>
@@ -7676,7 +7000,7 @@
       </p:pic>
       <p:sp>
         <p:nvSpPr>
-          <p:cNvPr id="11" name="TextBox 10"/>
+          <p:cNvPr id="10" name="TextBox 9"/>
           <p:cNvSpPr txBox="1"/>
           <p:nvPr/>
         </p:nvSpPr>
@@ -7711,7 +7035,7 @@
       </p:sp>
       <p:pic>
         <p:nvPicPr>
-          <p:cNvPr id="12" name="Picture 11" descr="98384e6b1ba1215b.png"/>
+          <p:cNvPr id="11" name="Picture 10" descr="98384e6b1ba1215b.png"/>
           <p:cNvPicPr>
             <a:picLocks noChangeAspect="1"/>
           </p:cNvPicPr>
@@ -7735,7 +7059,7 @@
       </p:pic>
       <p:sp>
         <p:nvSpPr>
-          <p:cNvPr id="13" name="TextBox 12"/>
+          <p:cNvPr id="12" name="TextBox 11"/>
           <p:cNvSpPr txBox="1"/>
           <p:nvPr/>
         </p:nvSpPr>
@@ -7770,7 +7094,7 @@
       </p:sp>
       <p:sp>
         <p:nvSpPr>
-          <p:cNvPr id="14" name="TextBox 13"/>
+          <p:cNvPr id="13" name="TextBox 12"/>
           <p:cNvSpPr txBox="1"/>
           <p:nvPr/>
         </p:nvSpPr>
@@ -7805,7 +7129,7 @@
       </p:sp>
       <p:sp>
         <p:nvSpPr>
-          <p:cNvPr id="15" name="TextBox 14"/>
+          <p:cNvPr id="14" name="TextBox 13"/>
           <p:cNvSpPr txBox="1"/>
           <p:nvPr/>
         </p:nvSpPr>
@@ -7840,48 +7164,13 @@
       </p:sp>
       <p:sp>
         <p:nvSpPr>
-          <p:cNvPr id="16" name="TextBox 15"/>
-          <p:cNvSpPr txBox="1"/>
-          <p:nvPr/>
-        </p:nvSpPr>
-        <p:spPr>
-          <a:xfrm>
-            <a:off x="1828800" y="4086175"/>
-            <a:ext cx="8503920" cy="548640"/>
-          </a:xfrm>
-          <a:prstGeom prst="rect">
-            <a:avLst/>
-          </a:prstGeom>
-          <a:noFill/>
-        </p:spPr>
-        <p:txBody>
-          <a:bodyPr wrap="square" lIns="45720" rIns="45720" tIns="18288" bIns="18288" anchor="t">
-            <a:spAutoFit/>
-          </a:bodyPr>
-          <a:lstStyle/>
-          <a:p>
-            <a:pPr algn="ctr"/>
-            <a:r>
-              <a:rPr sz="2400" b="0" i="0">
-                <a:solidFill>
-                  <a:srgbClr val="6B6B6B"/>
-                </a:solidFill>
-                <a:latin typeface="Century Schoolbook"/>
-              </a:rPr>
-              <a:t>11,900, kept to two digits</a:t>
-            </a:r>
-          </a:p>
-        </p:txBody>
-      </p:sp>
-      <p:sp>
-        <p:nvSpPr>
-          <p:cNvPr id="17" name="TextBox 16"/>
-          <p:cNvSpPr txBox="1"/>
-          <p:nvPr/>
-        </p:nvSpPr>
-        <p:spPr>
-          <a:xfrm>
-            <a:off x="777240" y="4817695"/>
+          <p:cNvPr id="15" name="TextBox 14"/>
+          <p:cNvSpPr txBox="1"/>
+          <p:nvPr/>
+        </p:nvSpPr>
+        <p:spPr>
+          <a:xfrm>
+            <a:off x="777240" y="4663440"/>
             <a:ext cx="10607040" cy="548640"/>
           </a:xfrm>
           <a:prstGeom prst="rect">
@@ -8049,44 +7338,9 @@
           </a:fontRef>
         </p:style>
       </p:cxnSp>
-      <p:sp>
-        <p:nvSpPr>
-          <p:cNvPr id="5" name="TextBox 4"/>
-          <p:cNvSpPr txBox="1"/>
-          <p:nvPr/>
-        </p:nvSpPr>
-        <p:spPr>
-          <a:xfrm>
-            <a:off x="777240" y="1261872"/>
-            <a:ext cx="10607040" cy="310896"/>
-          </a:xfrm>
-          <a:prstGeom prst="rect">
-            <a:avLst/>
-          </a:prstGeom>
-          <a:noFill/>
-        </p:spPr>
-        <p:txBody>
-          <a:bodyPr wrap="square" lIns="45720" rIns="45720" tIns="18288" bIns="18288" anchor="t">
-            <a:spAutoFit/>
-          </a:bodyPr>
-          <a:lstStyle/>
-          <a:p>
-            <a:pPr algn="l"/>
-            <a:r>
-              <a:rPr sz="1700" b="0" i="1">
-                <a:solidFill>
-                  <a:srgbClr val="6B6B6B"/>
-                </a:solidFill>
-                <a:latin typeface="Century Schoolbook"/>
-              </a:rPr>
-              <a:t>Boards up on three.</a:t>
-            </a:r>
-          </a:p>
-        </p:txBody>
-      </p:sp>
       <p:cxnSp>
         <p:nvCxnSpPr>
-          <p:cNvPr id="6" name="Connector 5"/>
+          <p:cNvPr id="5" name="Connector 4"/>
           <p:cNvCxnSpPr/>
           <p:nvPr/>
         </p:nvCxnSpPr>
@@ -8121,7 +7375,7 @@
       </p:cxnSp>
       <p:sp>
         <p:nvSpPr>
-          <p:cNvPr id="7" name="TextBox 6"/>
+          <p:cNvPr id="6" name="TextBox 5"/>
           <p:cNvSpPr txBox="1"/>
           <p:nvPr/>
         </p:nvSpPr>
@@ -8156,7 +7410,7 @@
       </p:sp>
       <p:sp>
         <p:nvSpPr>
-          <p:cNvPr id="8" name="TextBox 7"/>
+          <p:cNvPr id="7" name="TextBox 6"/>
           <p:cNvSpPr txBox="1"/>
           <p:nvPr/>
         </p:nvSpPr>
@@ -8191,7 +7445,7 @@
       </p:sp>
       <p:sp>
         <p:nvSpPr>
-          <p:cNvPr id="9" name="TextBox 8"/>
+          <p:cNvPr id="8" name="TextBox 7"/>
           <p:cNvSpPr txBox="1"/>
           <p:nvPr/>
         </p:nvSpPr>
@@ -8226,7 +7480,7 @@
       </p:sp>
       <p:sp>
         <p:nvSpPr>
-          <p:cNvPr id="10" name="TextBox 9"/>
+          <p:cNvPr id="9" name="TextBox 8"/>
           <p:cNvSpPr txBox="1"/>
           <p:nvPr/>
         </p:nvSpPr>
@@ -8261,7 +7515,7 @@
       </p:sp>
       <p:pic>
         <p:nvPicPr>
-          <p:cNvPr id="11" name="Picture 10" descr="f1f759a641dda94a.png"/>
+          <p:cNvPr id="10" name="Picture 9" descr="f1f759a641dda94a.png"/>
           <p:cNvPicPr>
             <a:picLocks noChangeAspect="1"/>
           </p:cNvPicPr>
@@ -8285,7 +7539,7 @@
       </p:pic>
       <p:sp>
         <p:nvSpPr>
-          <p:cNvPr id="12" name="TextBox 11"/>
+          <p:cNvPr id="11" name="TextBox 10"/>
           <p:cNvSpPr txBox="1"/>
           <p:nvPr/>
         </p:nvSpPr>
@@ -8320,7 +7574,7 @@
       </p:sp>
       <p:sp>
         <p:nvSpPr>
-          <p:cNvPr id="13" name="TextBox 12"/>
+          <p:cNvPr id="12" name="TextBox 11"/>
           <p:cNvSpPr txBox="1"/>
           <p:nvPr/>
         </p:nvSpPr>
@@ -8355,7 +7609,7 @@
       </p:sp>
       <p:sp>
         <p:nvSpPr>
-          <p:cNvPr id="14" name="TextBox 13"/>
+          <p:cNvPr id="13" name="TextBox 12"/>
           <p:cNvSpPr txBox="1"/>
           <p:nvPr/>
         </p:nvSpPr>
@@ -8384,41 +7638,6 @@
                 <a:latin typeface="Century Schoolbook"/>
               </a:rPr>
               <a:t>Answer it.</a:t>
-            </a:r>
-          </a:p>
-        </p:txBody>
-      </p:sp>
-      <p:sp>
-        <p:nvSpPr>
-          <p:cNvPr id="15" name="TextBox 14"/>
-          <p:cNvSpPr txBox="1"/>
-          <p:nvPr/>
-        </p:nvSpPr>
-        <p:spPr>
-          <a:xfrm>
-            <a:off x="777240" y="4828032"/>
-            <a:ext cx="10607040" cy="365760"/>
-          </a:xfrm>
-          <a:prstGeom prst="rect">
-            <a:avLst/>
-          </a:prstGeom>
-          <a:noFill/>
-        </p:spPr>
-        <p:txBody>
-          <a:bodyPr wrap="square" lIns="45720" rIns="45720" tIns="18288" bIns="18288" anchor="t">
-            <a:spAutoFit/>
-          </a:bodyPr>
-          <a:lstStyle/>
-          <a:p>
-            <a:pPr algn="ctr"/>
-            <a:r>
-              <a:rPr sz="1900" b="0" i="1">
-                <a:solidFill>
-                  <a:srgbClr val="6B6B6B"/>
-                </a:solidFill>
-                <a:latin typeface="Century Schoolbook"/>
-              </a:rPr>
-              <a:t>Which count wins?</a:t>
             </a:r>
           </a:p>
         </p:txBody>
@@ -8546,44 +7765,9 @@
           </a:fontRef>
         </p:style>
       </p:cxnSp>
-      <p:sp>
-        <p:nvSpPr>
-          <p:cNvPr id="5" name="TextBox 4"/>
-          <p:cNvSpPr txBox="1"/>
-          <p:nvPr/>
-        </p:nvSpPr>
-        <p:spPr>
-          <a:xfrm>
-            <a:off x="777240" y="1261872"/>
-            <a:ext cx="10607040" cy="310896"/>
-          </a:xfrm>
-          <a:prstGeom prst="rect">
-            <a:avLst/>
-          </a:prstGeom>
-          <a:noFill/>
-        </p:spPr>
-        <p:txBody>
-          <a:bodyPr wrap="square" lIns="45720" rIns="45720" tIns="18288" bIns="18288" anchor="t">
-            <a:spAutoFit/>
-          </a:bodyPr>
-          <a:lstStyle/>
-          <a:p>
-            <a:pPr algn="l"/>
-            <a:r>
-              <a:rPr sz="1700" b="0" i="1">
-                <a:solidFill>
-                  <a:srgbClr val="6B6B6B"/>
-                </a:solidFill>
-                <a:latin typeface="Century Schoolbook"/>
-              </a:rPr>
-              <a:t>On your own. Four minutes. No notes.</a:t>
-            </a:r>
-          </a:p>
-        </p:txBody>
-      </p:sp>
       <p:cxnSp>
         <p:nvCxnSpPr>
-          <p:cNvPr id="6" name="Connector 5"/>
+          <p:cNvPr id="5" name="Connector 4"/>
           <p:cNvCxnSpPr/>
           <p:nvPr/>
         </p:nvCxnSpPr>
@@ -8618,7 +7802,7 @@
       </p:cxnSp>
       <p:sp>
         <p:nvSpPr>
-          <p:cNvPr id="7" name="TextBox 6"/>
+          <p:cNvPr id="6" name="TextBox 5"/>
           <p:cNvSpPr txBox="1"/>
           <p:nvPr/>
         </p:nvSpPr>
@@ -8653,7 +7837,7 @@
       </p:sp>
       <p:sp>
         <p:nvSpPr>
-          <p:cNvPr id="8" name="TextBox 7"/>
+          <p:cNvPr id="7" name="TextBox 6"/>
           <p:cNvSpPr txBox="1"/>
           <p:nvPr/>
         </p:nvSpPr>
@@ -8688,13 +7872,13 @@
       </p:sp>
       <p:sp>
         <p:nvSpPr>
-          <p:cNvPr id="9" name="TextBox 8"/>
-          <p:cNvSpPr txBox="1"/>
-          <p:nvPr/>
-        </p:nvSpPr>
-        <p:spPr>
-          <a:xfrm>
-            <a:off x="1874519" y="1760220"/>
+          <p:cNvPr id="8" name="TextBox 7"/>
+          <p:cNvSpPr txBox="1"/>
+          <p:nvPr/>
+        </p:nvSpPr>
+        <p:spPr>
+          <a:xfrm>
+            <a:off x="1874519" y="1440180"/>
             <a:ext cx="720605" cy="457200"/>
           </a:xfrm>
           <a:prstGeom prst="rect">
@@ -8723,7 +7907,7 @@
       </p:sp>
       <p:pic>
         <p:nvPicPr>
-          <p:cNvPr id="10" name="Picture 9" descr="aa1e7ea664b07d25.png"/>
+          <p:cNvPr id="9" name="Picture 8" descr="aa1e7ea664b07d25.png"/>
           <p:cNvPicPr>
             <a:picLocks noChangeAspect="1"/>
           </p:cNvPicPr>
@@ -8737,7 +7921,7 @@
         </p:blipFill>
         <p:spPr>
           <a:xfrm>
-            <a:off x="2457965" y="1821180"/>
+            <a:off x="2457965" y="1501140"/>
             <a:ext cx="2441448" cy="335280"/>
           </a:xfrm>
           <a:prstGeom prst="rect">
@@ -8747,13 +7931,13 @@
       </p:pic>
       <p:sp>
         <p:nvSpPr>
-          <p:cNvPr id="11" name="TextBox 10"/>
-          <p:cNvSpPr txBox="1"/>
-          <p:nvPr/>
-        </p:nvSpPr>
-        <p:spPr>
-          <a:xfrm>
-            <a:off x="1874519" y="2372868"/>
+          <p:cNvPr id="10" name="TextBox 9"/>
+          <p:cNvSpPr txBox="1"/>
+          <p:nvPr/>
+        </p:nvSpPr>
+        <p:spPr>
+          <a:xfrm>
+            <a:off x="1874519" y="2052828"/>
             <a:ext cx="726811" cy="457200"/>
           </a:xfrm>
           <a:prstGeom prst="rect">
@@ -8782,7 +7966,7 @@
       </p:sp>
       <p:pic>
         <p:nvPicPr>
-          <p:cNvPr id="12" name="Picture 11" descr="8ddd66cd0c0fdcaa.png"/>
+          <p:cNvPr id="11" name="Picture 10" descr="8ddd66cd0c0fdcaa.png"/>
           <p:cNvPicPr>
             <a:picLocks noChangeAspect="1"/>
           </p:cNvPicPr>
@@ -8796,7 +7980,7 @@
         </p:blipFill>
         <p:spPr>
           <a:xfrm>
-            <a:off x="2464171" y="2433828"/>
+            <a:off x="2464171" y="2113788"/>
             <a:ext cx="3099816" cy="335280"/>
           </a:xfrm>
           <a:prstGeom prst="rect">
@@ -8806,13 +7990,13 @@
       </p:pic>
       <p:sp>
         <p:nvSpPr>
-          <p:cNvPr id="13" name="TextBox 12"/>
-          <p:cNvSpPr txBox="1"/>
-          <p:nvPr/>
-        </p:nvSpPr>
-        <p:spPr>
-          <a:xfrm>
-            <a:off x="1874519" y="2985516"/>
+          <p:cNvPr id="12" name="TextBox 11"/>
+          <p:cNvSpPr txBox="1"/>
+          <p:nvPr/>
+        </p:nvSpPr>
+        <p:spPr>
+          <a:xfrm>
+            <a:off x="1874519" y="2665476"/>
             <a:ext cx="5997709" cy="457200"/>
           </a:xfrm>
           <a:prstGeom prst="rect">
@@ -8841,13 +8025,13 @@
       </p:sp>
       <p:sp>
         <p:nvSpPr>
-          <p:cNvPr id="14" name="TextBox 13"/>
-          <p:cNvSpPr txBox="1"/>
-          <p:nvPr/>
-        </p:nvSpPr>
-        <p:spPr>
-          <a:xfrm>
-            <a:off x="1874519" y="3598164"/>
+          <p:cNvPr id="13" name="TextBox 12"/>
+          <p:cNvSpPr txBox="1"/>
+          <p:nvPr/>
+        </p:nvSpPr>
+        <p:spPr>
+          <a:xfrm>
+            <a:off x="1874519" y="3278124"/>
             <a:ext cx="6461623" cy="457200"/>
           </a:xfrm>
           <a:prstGeom prst="rect">
@@ -8997,44 +8181,9 @@
           </a:fontRef>
         </p:style>
       </p:cxnSp>
-      <p:sp>
-        <p:nvSpPr>
-          <p:cNvPr id="5" name="TextBox 4"/>
-          <p:cNvSpPr txBox="1"/>
-          <p:nvPr/>
-        </p:nvSpPr>
-        <p:spPr>
-          <a:xfrm>
-            <a:off x="777240" y="1261872"/>
-            <a:ext cx="10607040" cy="310896"/>
-          </a:xfrm>
-          <a:prstGeom prst="rect">
-            <a:avLst/>
-          </a:prstGeom>
-          <a:noFill/>
-        </p:spPr>
-        <p:txBody>
-          <a:bodyPr wrap="square" lIns="45720" rIns="45720" tIns="18288" bIns="18288" anchor="t">
-            <a:spAutoFit/>
-          </a:bodyPr>
-          <a:lstStyle/>
-          <a:p>
-            <a:pPr algn="l"/>
-            <a:r>
-              <a:rPr sz="1700" b="0" i="1">
-                <a:solidFill>
-                  <a:srgbClr val="6B6B6B"/>
-                </a:solidFill>
-                <a:latin typeface="Century Schoolbook"/>
-              </a:rPr>
-              <a:t>Answer.</a:t>
-            </a:r>
-          </a:p>
-        </p:txBody>
-      </p:sp>
       <p:cxnSp>
         <p:nvCxnSpPr>
-          <p:cNvPr id="6" name="Connector 5"/>
+          <p:cNvPr id="5" name="Connector 4"/>
           <p:cNvCxnSpPr/>
           <p:nvPr/>
         </p:nvCxnSpPr>
@@ -9069,7 +8218,7 @@
       </p:cxnSp>
       <p:sp>
         <p:nvSpPr>
-          <p:cNvPr id="7" name="TextBox 6"/>
+          <p:cNvPr id="6" name="TextBox 5"/>
           <p:cNvSpPr txBox="1"/>
           <p:nvPr/>
         </p:nvSpPr>
@@ -9104,7 +8253,7 @@
       </p:sp>
       <p:sp>
         <p:nvSpPr>
-          <p:cNvPr id="8" name="TextBox 7"/>
+          <p:cNvPr id="7" name="TextBox 6"/>
           <p:cNvSpPr txBox="1"/>
           <p:nvPr/>
         </p:nvSpPr>
@@ -9139,7 +8288,7 @@
       </p:sp>
       <p:sp>
         <p:nvSpPr>
-          <p:cNvPr id="9" name="TextBox 8"/>
+          <p:cNvPr id="8" name="TextBox 7"/>
           <p:cNvSpPr txBox="1"/>
           <p:nvPr/>
         </p:nvSpPr>
@@ -9174,7 +8323,7 @@
       </p:sp>
       <p:sp>
         <p:nvSpPr>
-          <p:cNvPr id="10" name="TextBox 9"/>
+          <p:cNvPr id="9" name="TextBox 8"/>
           <p:cNvSpPr txBox="1"/>
           <p:nvPr/>
         </p:nvSpPr>
@@ -9209,7 +8358,7 @@
       </p:sp>
       <p:pic>
         <p:nvPicPr>
-          <p:cNvPr id="11" name="Picture 10" descr="b1203184ca7f2d67.png"/>
+          <p:cNvPr id="10" name="Picture 9" descr="b1203184ca7f2d67.png"/>
           <p:cNvPicPr>
             <a:picLocks noChangeAspect="1"/>
           </p:cNvPicPr>
@@ -9233,7 +8382,7 @@
       </p:pic>
       <p:sp>
         <p:nvSpPr>
-          <p:cNvPr id="12" name="TextBox 11"/>
+          <p:cNvPr id="11" name="TextBox 10"/>
           <p:cNvSpPr txBox="1"/>
           <p:nvPr/>
         </p:nvSpPr>
@@ -9268,7 +8417,7 @@
       </p:sp>
       <p:sp>
         <p:nvSpPr>
-          <p:cNvPr id="13" name="TextBox 12"/>
+          <p:cNvPr id="12" name="TextBox 11"/>
           <p:cNvSpPr txBox="1"/>
           <p:nvPr/>
         </p:nvSpPr>
@@ -9303,42 +8452,7 @@
       </p:sp>
       <p:sp>
         <p:nvSpPr>
-          <p:cNvPr id="14" name="TextBox 13"/>
-          <p:cNvSpPr txBox="1"/>
-          <p:nvPr/>
-        </p:nvSpPr>
-        <p:spPr>
-          <a:xfrm>
-            <a:off x="1828800" y="3930727"/>
-            <a:ext cx="8503920" cy="548640"/>
-          </a:xfrm>
-          <a:prstGeom prst="rect">
-            <a:avLst/>
-          </a:prstGeom>
-          <a:noFill/>
-        </p:spPr>
-        <p:txBody>
-          <a:bodyPr wrap="square" lIns="45720" rIns="45720" tIns="18288" bIns="18288" anchor="t">
-            <a:spAutoFit/>
-          </a:bodyPr>
-          <a:lstStyle/>
-          <a:p>
-            <a:pPr algn="ctr"/>
-            <a:r>
-              <a:rPr sz="2400" b="0" i="0">
-                <a:solidFill>
-                  <a:srgbClr val="6B6B6B"/>
-                </a:solidFill>
-                <a:latin typeface="Century Schoolbook"/>
-              </a:rPr>
-              <a:t>the smaller count</a:t>
-            </a:r>
-          </a:p>
-        </p:txBody>
-      </p:sp>
-      <p:sp>
-        <p:nvSpPr>
-          <p:cNvPr id="15" name="TextBox 14"/>
+          <p:cNvPr id="13" name="TextBox 12"/>
           <p:cNvSpPr txBox="1"/>
           <p:nvPr/>
         </p:nvSpPr>
@@ -9503,44 +8617,9 @@
           </a:fontRef>
         </p:style>
       </p:cxnSp>
-      <p:sp>
-        <p:nvSpPr>
-          <p:cNvPr id="5" name="TextBox 4"/>
-          <p:cNvSpPr txBox="1"/>
-          <p:nvPr/>
-        </p:nvSpPr>
-        <p:spPr>
-          <a:xfrm>
-            <a:off x="777240" y="1261872"/>
-            <a:ext cx="10607040" cy="310896"/>
-          </a:xfrm>
-          <a:prstGeom prst="rect">
-            <a:avLst/>
-          </a:prstGeom>
-          <a:noFill/>
-        </p:spPr>
-        <p:txBody>
-          <a:bodyPr wrap="square" lIns="45720" rIns="45720" tIns="18288" bIns="18288" anchor="t">
-            <a:spAutoFit/>
-          </a:bodyPr>
-          <a:lstStyle/>
-          <a:p>
-            <a:pPr algn="l"/>
-            <a:r>
-              <a:rPr sz="1700" b="0" i="1">
-                <a:solidFill>
-                  <a:srgbClr val="6B6B6B"/>
-                </a:solidFill>
-                <a:latin typeface="Century Schoolbook"/>
-              </a:rPr>
-              <a:t>Boards up on three.</a:t>
-            </a:r>
-          </a:p>
-        </p:txBody>
-      </p:sp>
       <p:cxnSp>
         <p:nvCxnSpPr>
-          <p:cNvPr id="6" name="Connector 5"/>
+          <p:cNvPr id="5" name="Connector 4"/>
           <p:cNvCxnSpPr/>
           <p:nvPr/>
         </p:nvCxnSpPr>
@@ -9575,7 +8654,7 @@
       </p:cxnSp>
       <p:sp>
         <p:nvSpPr>
-          <p:cNvPr id="7" name="TextBox 6"/>
+          <p:cNvPr id="6" name="TextBox 5"/>
           <p:cNvSpPr txBox="1"/>
           <p:nvPr/>
         </p:nvSpPr>
@@ -9610,7 +8689,7 @@
       </p:sp>
       <p:sp>
         <p:nvSpPr>
-          <p:cNvPr id="8" name="TextBox 7"/>
+          <p:cNvPr id="7" name="TextBox 6"/>
           <p:cNvSpPr txBox="1"/>
           <p:nvPr/>
         </p:nvSpPr>
@@ -9645,7 +8724,7 @@
       </p:sp>
       <p:pic>
         <p:nvPicPr>
-          <p:cNvPr id="9" name="Picture 8" descr="3f644ac48482c852.png"/>
+          <p:cNvPr id="8" name="Picture 7" descr="3f644ac48482c852.png"/>
           <p:cNvPicPr>
             <a:picLocks noChangeAspect="1"/>
           </p:cNvPicPr>
@@ -9669,7 +8748,7 @@
       </p:pic>
       <p:sp>
         <p:nvSpPr>
-          <p:cNvPr id="10" name="TextBox 9"/>
+          <p:cNvPr id="9" name="TextBox 8"/>
           <p:cNvSpPr txBox="1"/>
           <p:nvPr/>
         </p:nvSpPr>
@@ -9704,7 +8783,7 @@
       </p:sp>
       <p:sp>
         <p:nvSpPr>
-          <p:cNvPr id="11" name="TextBox 10"/>
+          <p:cNvPr id="10" name="TextBox 9"/>
           <p:cNvSpPr txBox="1"/>
           <p:nvPr/>
         </p:nvSpPr>
@@ -9739,7 +8818,7 @@
       </p:sp>
       <p:sp>
         <p:nvSpPr>
-          <p:cNvPr id="12" name="TextBox 11"/>
+          <p:cNvPr id="11" name="TextBox 10"/>
           <p:cNvSpPr txBox="1"/>
           <p:nvPr/>
         </p:nvSpPr>
@@ -9768,41 +8847,6 @@
                 <a:latin typeface="Century Schoolbook"/>
               </a:rPr>
               <a:t>Answer it.</a:t>
-            </a:r>
-          </a:p>
-        </p:txBody>
-      </p:sp>
-      <p:sp>
-        <p:nvSpPr>
-          <p:cNvPr id="13" name="TextBox 12"/>
-          <p:cNvSpPr txBox="1"/>
-          <p:nvPr/>
-        </p:nvSpPr>
-        <p:spPr>
-          <a:xfrm>
-            <a:off x="777240" y="4828032"/>
-            <a:ext cx="10607040" cy="365760"/>
-          </a:xfrm>
-          <a:prstGeom prst="rect">
-            <a:avLst/>
-          </a:prstGeom>
-          <a:noFill/>
-        </p:spPr>
-        <p:txBody>
-          <a:bodyPr wrap="square" lIns="45720" rIns="45720" tIns="18288" bIns="18288" anchor="t">
-            <a:spAutoFit/>
-          </a:bodyPr>
-          <a:lstStyle/>
-          <a:p>
-            <a:pPr algn="ctr"/>
-            <a:r>
-              <a:rPr sz="1900" b="0" i="1">
-                <a:solidFill>
-                  <a:srgbClr val="6B6B6B"/>
-                </a:solidFill>
-                <a:latin typeface="Century Schoolbook"/>
-              </a:rPr>
-              <a:t>Where does each one's last digit sit?</a:t>
             </a:r>
           </a:p>
         </p:txBody>
@@ -9930,44 +8974,9 @@
           </a:fontRef>
         </p:style>
       </p:cxnSp>
-      <p:sp>
-        <p:nvSpPr>
-          <p:cNvPr id="5" name="TextBox 4"/>
-          <p:cNvSpPr txBox="1"/>
-          <p:nvPr/>
-        </p:nvSpPr>
-        <p:spPr>
-          <a:xfrm>
-            <a:off x="777240" y="1261872"/>
-            <a:ext cx="10607040" cy="310896"/>
-          </a:xfrm>
-          <a:prstGeom prst="rect">
-            <a:avLst/>
-          </a:prstGeom>
-          <a:noFill/>
-        </p:spPr>
-        <p:txBody>
-          <a:bodyPr wrap="square" lIns="45720" rIns="45720" tIns="18288" bIns="18288" anchor="t">
-            <a:spAutoFit/>
-          </a:bodyPr>
-          <a:lstStyle/>
-          <a:p>
-            <a:pPr algn="l"/>
-            <a:r>
-              <a:rPr sz="1700" b="0" i="1">
-                <a:solidFill>
-                  <a:srgbClr val="6B6B6B"/>
-                </a:solidFill>
-                <a:latin typeface="Century Schoolbook"/>
-              </a:rPr>
-              <a:t>Answer.</a:t>
-            </a:r>
-          </a:p>
-        </p:txBody>
-      </p:sp>
       <p:cxnSp>
         <p:nvCxnSpPr>
-          <p:cNvPr id="6" name="Connector 5"/>
+          <p:cNvPr id="5" name="Connector 4"/>
           <p:cNvCxnSpPr/>
           <p:nvPr/>
         </p:nvCxnSpPr>
@@ -10002,7 +9011,7 @@
       </p:cxnSp>
       <p:sp>
         <p:nvSpPr>
-          <p:cNvPr id="7" name="TextBox 6"/>
+          <p:cNvPr id="6" name="TextBox 5"/>
           <p:cNvSpPr txBox="1"/>
           <p:nvPr/>
         </p:nvSpPr>
@@ -10037,7 +9046,7 @@
       </p:sp>
       <p:sp>
         <p:nvSpPr>
-          <p:cNvPr id="8" name="TextBox 7"/>
+          <p:cNvPr id="7" name="TextBox 6"/>
           <p:cNvSpPr txBox="1"/>
           <p:nvPr/>
         </p:nvSpPr>
@@ -10072,7 +9081,7 @@
       </p:sp>
       <p:pic>
         <p:nvPicPr>
-          <p:cNvPr id="9" name="Picture 8" descr="da2ed7f30b8d3f5c.png"/>
+          <p:cNvPr id="8" name="Picture 7" descr="da2ed7f30b8d3f5c.png"/>
           <p:cNvPicPr>
             <a:picLocks noChangeAspect="1"/>
           </p:cNvPicPr>
@@ -10096,7 +9105,7 @@
       </p:pic>
       <p:sp>
         <p:nvSpPr>
-          <p:cNvPr id="10" name="TextBox 9"/>
+          <p:cNvPr id="9" name="TextBox 8"/>
           <p:cNvSpPr txBox="1"/>
           <p:nvPr/>
         </p:nvSpPr>
@@ -10131,7 +9140,7 @@
       </p:sp>
       <p:sp>
         <p:nvSpPr>
-          <p:cNvPr id="11" name="TextBox 10"/>
+          <p:cNvPr id="10" name="TextBox 9"/>
           <p:cNvSpPr txBox="1"/>
           <p:nvPr/>
         </p:nvSpPr>
@@ -10166,42 +9175,7 @@
       </p:sp>
       <p:sp>
         <p:nvSpPr>
-          <p:cNvPr id="12" name="TextBox 11"/>
-          <p:cNvSpPr txBox="1"/>
-          <p:nvPr/>
-        </p:nvSpPr>
-        <p:spPr>
-          <a:xfrm>
-            <a:off x="1828800" y="3409519"/>
-            <a:ext cx="8503920" cy="548640"/>
-          </a:xfrm>
-          <a:prstGeom prst="rect">
-            <a:avLst/>
-          </a:prstGeom>
-          <a:noFill/>
-        </p:spPr>
-        <p:txBody>
-          <a:bodyPr wrap="square" lIns="45720" rIns="45720" tIns="18288" bIns="18288" anchor="t">
-            <a:spAutoFit/>
-          </a:bodyPr>
-          <a:lstStyle/>
-          <a:p>
-            <a:pPr algn="ctr"/>
-            <a:r>
-              <a:rPr sz="2400" b="0" i="0">
-                <a:solidFill>
-                  <a:srgbClr val="6B6B6B"/>
-                </a:solidFill>
-                <a:latin typeface="Century Schoolbook"/>
-              </a:rPr>
-              <a:t>2,500 stops at the hundreds</a:t>
-            </a:r>
-          </a:p>
-        </p:txBody>
-      </p:sp>
-      <p:sp>
-        <p:nvSpPr>
-          <p:cNvPr id="13" name="TextBox 12"/>
+          <p:cNvPr id="11" name="TextBox 10"/>
           <p:cNvSpPr txBox="1"/>
           <p:nvPr/>
         </p:nvSpPr>
@@ -10375,44 +9349,9 @@
           </a:fontRef>
         </p:style>
       </p:cxnSp>
-      <p:sp>
-        <p:nvSpPr>
-          <p:cNvPr id="5" name="TextBox 4"/>
-          <p:cNvSpPr txBox="1"/>
-          <p:nvPr/>
-        </p:nvSpPr>
-        <p:spPr>
-          <a:xfrm>
-            <a:off x="777240" y="1261872"/>
-            <a:ext cx="10607040" cy="310896"/>
-          </a:xfrm>
-          <a:prstGeom prst="rect">
-            <a:avLst/>
-          </a:prstGeom>
-          <a:noFill/>
-        </p:spPr>
-        <p:txBody>
-          <a:bodyPr wrap="square" lIns="45720" rIns="45720" tIns="18288" bIns="18288" anchor="t">
-            <a:spAutoFit/>
-          </a:bodyPr>
-          <a:lstStyle/>
-          <a:p>
-            <a:pPr algn="l"/>
-            <a:r>
-              <a:rPr sz="1700" b="0" i="1">
-                <a:solidFill>
-                  <a:srgbClr val="6B6B6B"/>
-                </a:solidFill>
-                <a:latin typeface="Century Schoolbook"/>
-              </a:rPr>
-              <a:t>Boards up on three.</a:t>
-            </a:r>
-          </a:p>
-        </p:txBody>
-      </p:sp>
       <p:cxnSp>
         <p:nvCxnSpPr>
-          <p:cNvPr id="6" name="Connector 5"/>
+          <p:cNvPr id="5" name="Connector 4"/>
           <p:cNvCxnSpPr/>
           <p:nvPr/>
         </p:nvCxnSpPr>
@@ -10447,7 +9386,7 @@
       </p:cxnSp>
       <p:sp>
         <p:nvSpPr>
-          <p:cNvPr id="7" name="TextBox 6"/>
+          <p:cNvPr id="6" name="TextBox 5"/>
           <p:cNvSpPr txBox="1"/>
           <p:nvPr/>
         </p:nvSpPr>
@@ -10482,7 +9421,7 @@
       </p:sp>
       <p:sp>
         <p:nvSpPr>
-          <p:cNvPr id="8" name="TextBox 7"/>
+          <p:cNvPr id="7" name="TextBox 6"/>
           <p:cNvSpPr txBox="1"/>
           <p:nvPr/>
         </p:nvSpPr>
@@ -10517,7 +9456,7 @@
       </p:sp>
       <p:sp>
         <p:nvSpPr>
-          <p:cNvPr id="9" name="TextBox 8"/>
+          <p:cNvPr id="8" name="TextBox 7"/>
           <p:cNvSpPr txBox="1"/>
           <p:nvPr/>
         </p:nvSpPr>
@@ -10552,7 +9491,7 @@
       </p:sp>
       <p:sp>
         <p:nvSpPr>
-          <p:cNvPr id="10" name="TextBox 9"/>
+          <p:cNvPr id="9" name="TextBox 8"/>
           <p:cNvSpPr txBox="1"/>
           <p:nvPr/>
         </p:nvSpPr>
@@ -10596,7 +9535,7 @@
       </p:sp>
       <p:sp>
         <p:nvSpPr>
-          <p:cNvPr id="11" name="TextBox 10"/>
+          <p:cNvPr id="10" name="TextBox 9"/>
           <p:cNvSpPr txBox="1"/>
           <p:nvPr/>
         </p:nvSpPr>
@@ -10640,7 +9579,7 @@
       </p:sp>
       <p:sp>
         <p:nvSpPr>
-          <p:cNvPr id="12" name="TextBox 11"/>
+          <p:cNvPr id="11" name="TextBox 10"/>
           <p:cNvSpPr txBox="1"/>
           <p:nvPr/>
         </p:nvSpPr>
@@ -10684,7 +9623,7 @@
       </p:sp>
       <p:sp>
         <p:nvSpPr>
-          <p:cNvPr id="13" name="TextBox 12"/>
+          <p:cNvPr id="12" name="TextBox 11"/>
           <p:cNvSpPr txBox="1"/>
           <p:nvPr/>
         </p:nvSpPr>
@@ -10728,7 +9667,7 @@
       </p:sp>
       <p:sp>
         <p:nvSpPr>
-          <p:cNvPr id="14" name="TextBox 13"/>
+          <p:cNvPr id="13" name="TextBox 12"/>
           <p:cNvSpPr txBox="1"/>
           <p:nvPr/>
         </p:nvSpPr>
@@ -10884,44 +9823,9 @@
           </a:fontRef>
         </p:style>
       </p:cxnSp>
-      <p:sp>
-        <p:nvSpPr>
-          <p:cNvPr id="5" name="TextBox 4"/>
-          <p:cNvSpPr txBox="1"/>
-          <p:nvPr/>
-        </p:nvSpPr>
-        <p:spPr>
-          <a:xfrm>
-            <a:off x="777240" y="1261872"/>
-            <a:ext cx="10607040" cy="310896"/>
-          </a:xfrm>
-          <a:prstGeom prst="rect">
-            <a:avLst/>
-          </a:prstGeom>
-          <a:noFill/>
-        </p:spPr>
-        <p:txBody>
-          <a:bodyPr wrap="square" lIns="45720" rIns="45720" tIns="18288" bIns="18288" anchor="t">
-            <a:spAutoFit/>
-          </a:bodyPr>
-          <a:lstStyle/>
-          <a:p>
-            <a:pPr algn="l"/>
-            <a:r>
-              <a:rPr sz="1700" b="0" i="1">
-                <a:solidFill>
-                  <a:srgbClr val="6B6B6B"/>
-                </a:solidFill>
-                <a:latin typeface="Century Schoolbook"/>
-              </a:rPr>
-              <a:t>Answer.</a:t>
-            </a:r>
-          </a:p>
-        </p:txBody>
-      </p:sp>
       <p:cxnSp>
         <p:nvCxnSpPr>
-          <p:cNvPr id="6" name="Connector 5"/>
+          <p:cNvPr id="5" name="Connector 4"/>
           <p:cNvCxnSpPr/>
           <p:nvPr/>
         </p:nvCxnSpPr>
@@ -10956,7 +9860,7 @@
       </p:cxnSp>
       <p:sp>
         <p:nvSpPr>
-          <p:cNvPr id="7" name="TextBox 6"/>
+          <p:cNvPr id="6" name="TextBox 5"/>
           <p:cNvSpPr txBox="1"/>
           <p:nvPr/>
         </p:nvSpPr>
@@ -10991,7 +9895,7 @@
       </p:sp>
       <p:sp>
         <p:nvSpPr>
-          <p:cNvPr id="8" name="TextBox 7"/>
+          <p:cNvPr id="7" name="TextBox 6"/>
           <p:cNvSpPr txBox="1"/>
           <p:nvPr/>
         </p:nvSpPr>
@@ -11026,7 +9930,7 @@
       </p:sp>
       <p:sp>
         <p:nvSpPr>
-          <p:cNvPr id="9" name="TextBox 8"/>
+          <p:cNvPr id="8" name="TextBox 7"/>
           <p:cNvSpPr txBox="1"/>
           <p:nvPr/>
         </p:nvSpPr>
@@ -11061,7 +9965,7 @@
       </p:sp>
       <p:sp>
         <p:nvSpPr>
-          <p:cNvPr id="10" name="TextBox 9"/>
+          <p:cNvPr id="9" name="TextBox 8"/>
           <p:cNvSpPr txBox="1"/>
           <p:nvPr/>
         </p:nvSpPr>
@@ -11105,7 +10009,7 @@
       </p:sp>
       <p:sp>
         <p:nvSpPr>
-          <p:cNvPr id="11" name="TextBox 10"/>
+          <p:cNvPr id="10" name="TextBox 9"/>
           <p:cNvSpPr txBox="1"/>
           <p:nvPr/>
         </p:nvSpPr>
@@ -11149,7 +10053,7 @@
       </p:sp>
       <p:sp>
         <p:nvSpPr>
-          <p:cNvPr id="12" name="TextBox 11"/>
+          <p:cNvPr id="11" name="TextBox 10"/>
           <p:cNvSpPr txBox="1"/>
           <p:nvPr/>
         </p:nvSpPr>
@@ -11193,7 +10097,7 @@
       </p:sp>
       <p:sp>
         <p:nvSpPr>
-          <p:cNvPr id="13" name="TextBox 12"/>
+          <p:cNvPr id="12" name="TextBox 11"/>
           <p:cNvSpPr txBox="1"/>
           <p:nvPr/>
         </p:nvSpPr>
@@ -11237,7 +10141,7 @@
       </p:sp>
       <p:sp>
         <p:nvSpPr>
-          <p:cNvPr id="14" name="TextBox 13"/>
+          <p:cNvPr id="13" name="TextBox 12"/>
           <p:cNvSpPr txBox="1"/>
           <p:nvPr/>
         </p:nvSpPr>
@@ -11393,44 +10297,9 @@
           </a:fontRef>
         </p:style>
       </p:cxnSp>
-      <p:sp>
-        <p:nvSpPr>
-          <p:cNvPr id="5" name="TextBox 4"/>
-          <p:cNvSpPr txBox="1"/>
-          <p:nvPr/>
-        </p:nvSpPr>
-        <p:spPr>
-          <a:xfrm>
-            <a:off x="777240" y="1261872"/>
-            <a:ext cx="10607040" cy="310896"/>
-          </a:xfrm>
-          <a:prstGeom prst="rect">
-            <a:avLst/>
-          </a:prstGeom>
-          <a:noFill/>
-        </p:spPr>
-        <p:txBody>
-          <a:bodyPr wrap="square" lIns="45720" rIns="45720" tIns="18288" bIns="18288" anchor="t">
-            <a:spAutoFit/>
-          </a:bodyPr>
-          <a:lstStyle/>
-          <a:p>
-            <a:pPr algn="l"/>
-            <a:r>
-              <a:rPr sz="1700" b="0" i="1">
-                <a:solidFill>
-                  <a:srgbClr val="6B6B6B"/>
-                </a:solidFill>
-                <a:latin typeface="Century Schoolbook"/>
-              </a:rPr>
-              <a:t>Boards up on three.</a:t>
-            </a:r>
-          </a:p>
-        </p:txBody>
-      </p:sp>
       <p:cxnSp>
         <p:nvCxnSpPr>
-          <p:cNvPr id="6" name="Connector 5"/>
+          <p:cNvPr id="5" name="Connector 4"/>
           <p:cNvCxnSpPr/>
           <p:nvPr/>
         </p:nvCxnSpPr>
@@ -11465,7 +10334,7 @@
       </p:cxnSp>
       <p:sp>
         <p:nvSpPr>
-          <p:cNvPr id="7" name="TextBox 6"/>
+          <p:cNvPr id="6" name="TextBox 5"/>
           <p:cNvSpPr txBox="1"/>
           <p:nvPr/>
         </p:nvSpPr>
@@ -11500,7 +10369,7 @@
       </p:sp>
       <p:sp>
         <p:nvSpPr>
-          <p:cNvPr id="8" name="TextBox 7"/>
+          <p:cNvPr id="7" name="TextBox 6"/>
           <p:cNvSpPr txBox="1"/>
           <p:nvPr/>
         </p:nvSpPr>
@@ -11535,7 +10404,7 @@
       </p:sp>
       <p:sp>
         <p:nvSpPr>
-          <p:cNvPr id="9" name="TextBox 8"/>
+          <p:cNvPr id="8" name="TextBox 7"/>
           <p:cNvSpPr txBox="1"/>
           <p:nvPr/>
         </p:nvSpPr>
@@ -11570,7 +10439,7 @@
       </p:sp>
       <p:pic>
         <p:nvPicPr>
-          <p:cNvPr id="10" name="Picture 9" descr="64bbdc3030162890.png"/>
+          <p:cNvPr id="9" name="Picture 8" descr="64bbdc3030162890.png"/>
           <p:cNvPicPr>
             <a:picLocks noChangeAspect="1"/>
           </p:cNvPicPr>
@@ -11594,7 +10463,7 @@
       </p:pic>
       <p:sp>
         <p:nvSpPr>
-          <p:cNvPr id="11" name="TextBox 10"/>
+          <p:cNvPr id="10" name="TextBox 9"/>
           <p:cNvSpPr txBox="1"/>
           <p:nvPr/>
         </p:nvSpPr>
@@ -11629,7 +10498,7 @@
       </p:sp>
       <p:pic>
         <p:nvPicPr>
-          <p:cNvPr id="12" name="Picture 11" descr="feb742ea3ba69b7c.png"/>
+          <p:cNvPr id="11" name="Picture 10" descr="feb742ea3ba69b7c.png"/>
           <p:cNvPicPr>
             <a:picLocks noChangeAspect="1"/>
           </p:cNvPicPr>
@@ -11653,7 +10522,7 @@
       </p:pic>
       <p:sp>
         <p:nvSpPr>
-          <p:cNvPr id="13" name="TextBox 12"/>
+          <p:cNvPr id="12" name="TextBox 11"/>
           <p:cNvSpPr txBox="1"/>
           <p:nvPr/>
         </p:nvSpPr>
@@ -11688,7 +10557,7 @@
       </p:sp>
       <p:sp>
         <p:nvSpPr>
-          <p:cNvPr id="14" name="TextBox 13"/>
+          <p:cNvPr id="13" name="TextBox 12"/>
           <p:cNvSpPr txBox="1"/>
           <p:nvPr/>
         </p:nvSpPr>
@@ -11723,7 +10592,7 @@
       </p:sp>
       <p:sp>
         <p:nvSpPr>
-          <p:cNvPr id="15" name="TextBox 14"/>
+          <p:cNvPr id="14" name="TextBox 13"/>
           <p:cNvSpPr txBox="1"/>
           <p:nvPr/>
         </p:nvSpPr>
@@ -11794,7 +10663,7 @@
       </p:sp>
       <p:sp>
         <p:nvSpPr>
-          <p:cNvPr id="16" name="TextBox 15"/>
+          <p:cNvPr id="15" name="TextBox 14"/>
           <p:cNvSpPr txBox="1"/>
           <p:nvPr/>
         </p:nvSpPr>
@@ -11865,7 +10734,7 @@
       </p:sp>
       <p:sp>
         <p:nvSpPr>
-          <p:cNvPr id="17" name="TextBox 16"/>
+          <p:cNvPr id="16" name="TextBox 15"/>
           <p:cNvSpPr txBox="1"/>
           <p:nvPr/>
         </p:nvSpPr>
@@ -11936,7 +10805,7 @@
       </p:sp>
       <p:sp>
         <p:nvSpPr>
-          <p:cNvPr id="18" name="TextBox 17"/>
+          <p:cNvPr id="17" name="TextBox 16"/>
           <p:cNvSpPr txBox="1"/>
           <p:nvPr/>
         </p:nvSpPr>
@@ -12007,7 +10876,7 @@
       </p:sp>
       <p:sp>
         <p:nvSpPr>
-          <p:cNvPr id="19" name="TextBox 18"/>
+          <p:cNvPr id="18" name="TextBox 17"/>
           <p:cNvSpPr txBox="1"/>
           <p:nvPr/>
         </p:nvSpPr>
@@ -12163,44 +11032,9 @@
           </a:fontRef>
         </p:style>
       </p:cxnSp>
-      <p:sp>
-        <p:nvSpPr>
-          <p:cNvPr id="5" name="TextBox 4"/>
-          <p:cNvSpPr txBox="1"/>
-          <p:nvPr/>
-        </p:nvSpPr>
-        <p:spPr>
-          <a:xfrm>
-            <a:off x="777240" y="1261872"/>
-            <a:ext cx="10607040" cy="310896"/>
-          </a:xfrm>
-          <a:prstGeom prst="rect">
-            <a:avLst/>
-          </a:prstGeom>
-          <a:noFill/>
-        </p:spPr>
-        <p:txBody>
-          <a:bodyPr wrap="square" lIns="45720" rIns="45720" tIns="18288" bIns="18288" anchor="t">
-            <a:spAutoFit/>
-          </a:bodyPr>
-          <a:lstStyle/>
-          <a:p>
-            <a:pPr algn="l"/>
-            <a:r>
-              <a:rPr sz="1700" b="0" i="1">
-                <a:solidFill>
-                  <a:srgbClr val="6B6B6B"/>
-                </a:solidFill>
-                <a:latin typeface="Century Schoolbook"/>
-              </a:rPr>
-              <a:t>Answer.</a:t>
-            </a:r>
-          </a:p>
-        </p:txBody>
-      </p:sp>
       <p:cxnSp>
         <p:nvCxnSpPr>
-          <p:cNvPr id="6" name="Connector 5"/>
+          <p:cNvPr id="5" name="Connector 4"/>
           <p:cNvCxnSpPr/>
           <p:nvPr/>
         </p:nvCxnSpPr>
@@ -12235,7 +11069,7 @@
       </p:cxnSp>
       <p:sp>
         <p:nvSpPr>
-          <p:cNvPr id="7" name="TextBox 6"/>
+          <p:cNvPr id="6" name="TextBox 5"/>
           <p:cNvSpPr txBox="1"/>
           <p:nvPr/>
         </p:nvSpPr>
@@ -12270,7 +11104,7 @@
       </p:sp>
       <p:sp>
         <p:nvSpPr>
-          <p:cNvPr id="8" name="TextBox 7"/>
+          <p:cNvPr id="7" name="TextBox 6"/>
           <p:cNvSpPr txBox="1"/>
           <p:nvPr/>
         </p:nvSpPr>
@@ -12305,7 +11139,7 @@
       </p:sp>
       <p:sp>
         <p:nvSpPr>
-          <p:cNvPr id="9" name="TextBox 8"/>
+          <p:cNvPr id="8" name="TextBox 7"/>
           <p:cNvSpPr txBox="1"/>
           <p:nvPr/>
         </p:nvSpPr>
@@ -12340,7 +11174,7 @@
       </p:sp>
       <p:pic>
         <p:nvPicPr>
-          <p:cNvPr id="10" name="Picture 9" descr="2040ebaec58d50e4.png"/>
+          <p:cNvPr id="9" name="Picture 8" descr="2040ebaec58d50e4.png"/>
           <p:cNvPicPr>
             <a:picLocks noChangeAspect="1"/>
           </p:cNvPicPr>
@@ -12364,7 +11198,7 @@
       </p:pic>
       <p:sp>
         <p:nvSpPr>
-          <p:cNvPr id="11" name="TextBox 10"/>
+          <p:cNvPr id="10" name="TextBox 9"/>
           <p:cNvSpPr txBox="1"/>
           <p:nvPr/>
         </p:nvSpPr>
@@ -12399,7 +11233,7 @@
       </p:sp>
       <p:pic>
         <p:nvPicPr>
-          <p:cNvPr id="12" name="Picture 11" descr="7f74096cc598f7b1.png"/>
+          <p:cNvPr id="11" name="Picture 10" descr="7f74096cc598f7b1.png"/>
           <p:cNvPicPr>
             <a:picLocks noChangeAspect="1"/>
           </p:cNvPicPr>
@@ -12423,7 +11257,7 @@
       </p:pic>
       <p:sp>
         <p:nvSpPr>
-          <p:cNvPr id="13" name="TextBox 12"/>
+          <p:cNvPr id="12" name="TextBox 11"/>
           <p:cNvSpPr txBox="1"/>
           <p:nvPr/>
         </p:nvSpPr>
@@ -12458,7 +11292,7 @@
       </p:sp>
       <p:sp>
         <p:nvSpPr>
-          <p:cNvPr id="14" name="TextBox 13"/>
+          <p:cNvPr id="13" name="TextBox 12"/>
           <p:cNvSpPr txBox="1"/>
           <p:nvPr/>
         </p:nvSpPr>
@@ -12493,7 +11327,7 @@
       </p:sp>
       <p:sp>
         <p:nvSpPr>
-          <p:cNvPr id="15" name="TextBox 14"/>
+          <p:cNvPr id="14" name="TextBox 13"/>
           <p:cNvSpPr txBox="1"/>
           <p:nvPr/>
         </p:nvSpPr>
@@ -12564,7 +11398,7 @@
       </p:sp>
       <p:sp>
         <p:nvSpPr>
-          <p:cNvPr id="16" name="TextBox 15"/>
+          <p:cNvPr id="15" name="TextBox 14"/>
           <p:cNvSpPr txBox="1"/>
           <p:nvPr/>
         </p:nvSpPr>
@@ -12635,7 +11469,7 @@
       </p:sp>
       <p:sp>
         <p:nvSpPr>
-          <p:cNvPr id="17" name="TextBox 16"/>
+          <p:cNvPr id="16" name="TextBox 15"/>
           <p:cNvSpPr txBox="1"/>
           <p:nvPr/>
         </p:nvSpPr>
@@ -12706,7 +11540,7 @@
       </p:sp>
       <p:sp>
         <p:nvSpPr>
-          <p:cNvPr id="18" name="TextBox 17"/>
+          <p:cNvPr id="17" name="TextBox 16"/>
           <p:cNvSpPr txBox="1"/>
           <p:nvPr/>
         </p:nvSpPr>
@@ -12777,7 +11611,7 @@
       </p:sp>
       <p:sp>
         <p:nvSpPr>
-          <p:cNvPr id="19" name="TextBox 18"/>
+          <p:cNvPr id="18" name="TextBox 17"/>
           <p:cNvSpPr txBox="1"/>
           <p:nvPr/>
         </p:nvSpPr>
@@ -12960,44 +11794,9 @@
           </a:fontRef>
         </p:style>
       </p:cxnSp>
-      <p:sp>
-        <p:nvSpPr>
-          <p:cNvPr id="5" name="TextBox 4"/>
-          <p:cNvSpPr txBox="1"/>
-          <p:nvPr/>
-        </p:nvSpPr>
-        <p:spPr>
-          <a:xfrm>
-            <a:off x="777240" y="1261872"/>
-            <a:ext cx="10607040" cy="310896"/>
-          </a:xfrm>
-          <a:prstGeom prst="rect">
-            <a:avLst/>
-          </a:prstGeom>
-          <a:noFill/>
-        </p:spPr>
-        <p:txBody>
-          <a:bodyPr wrap="square" lIns="45720" rIns="45720" tIns="18288" bIns="18288" anchor="t">
-            <a:spAutoFit/>
-          </a:bodyPr>
-          <a:lstStyle/>
-          <a:p>
-            <a:pPr algn="l"/>
-            <a:r>
-              <a:rPr sz="1700" b="0" i="1">
-                <a:solidFill>
-                  <a:srgbClr val="6B6B6B"/>
-                </a:solidFill>
-                <a:latin typeface="Century Schoolbook"/>
-              </a:rPr>
-              <a:t>Boards up on three.</a:t>
-            </a:r>
-          </a:p>
-        </p:txBody>
-      </p:sp>
       <p:cxnSp>
         <p:nvCxnSpPr>
-          <p:cNvPr id="6" name="Connector 5"/>
+          <p:cNvPr id="5" name="Connector 4"/>
           <p:cNvCxnSpPr/>
           <p:nvPr/>
         </p:nvCxnSpPr>
@@ -13032,7 +11831,7 @@
       </p:cxnSp>
       <p:sp>
         <p:nvSpPr>
-          <p:cNvPr id="7" name="TextBox 6"/>
+          <p:cNvPr id="6" name="TextBox 5"/>
           <p:cNvSpPr txBox="1"/>
           <p:nvPr/>
         </p:nvSpPr>
@@ -13067,7 +11866,7 @@
       </p:sp>
       <p:sp>
         <p:nvSpPr>
-          <p:cNvPr id="8" name="TextBox 7"/>
+          <p:cNvPr id="7" name="TextBox 6"/>
           <p:cNvSpPr txBox="1"/>
           <p:nvPr/>
         </p:nvSpPr>
@@ -13102,7 +11901,7 @@
       </p:sp>
       <p:sp>
         <p:nvSpPr>
-          <p:cNvPr id="9" name="TextBox 8"/>
+          <p:cNvPr id="8" name="TextBox 7"/>
           <p:cNvSpPr txBox="1"/>
           <p:nvPr/>
         </p:nvSpPr>
@@ -13137,7 +11936,7 @@
       </p:sp>
       <p:pic>
         <p:nvPicPr>
-          <p:cNvPr id="10" name="Picture 9" descr="a0c3ce9052e643f0.png"/>
+          <p:cNvPr id="9" name="Picture 8" descr="a0c3ce9052e643f0.png"/>
           <p:cNvPicPr>
             <a:picLocks noChangeAspect="1"/>
           </p:cNvPicPr>
@@ -13161,7 +11960,7 @@
       </p:pic>
       <p:sp>
         <p:nvSpPr>
-          <p:cNvPr id="11" name="TextBox 10"/>
+          <p:cNvPr id="10" name="TextBox 9"/>
           <p:cNvSpPr txBox="1"/>
           <p:nvPr/>
         </p:nvSpPr>
@@ -13196,7 +11995,7 @@
       </p:sp>
       <p:sp>
         <p:nvSpPr>
-          <p:cNvPr id="12" name="TextBox 11"/>
+          <p:cNvPr id="11" name="TextBox 10"/>
           <p:cNvSpPr txBox="1"/>
           <p:nvPr/>
         </p:nvSpPr>
@@ -13231,7 +12030,7 @@
       </p:sp>
       <p:sp>
         <p:nvSpPr>
-          <p:cNvPr id="13" name="TextBox 12"/>
+          <p:cNvPr id="12" name="TextBox 11"/>
           <p:cNvSpPr txBox="1"/>
           <p:nvPr/>
         </p:nvSpPr>
@@ -13260,41 +12059,6 @@
                 <a:latin typeface="Century Schoolbook"/>
               </a:rPr>
               <a:t>Answer it.</a:t>
-            </a:r>
-          </a:p>
-        </p:txBody>
-      </p:sp>
-      <p:sp>
-        <p:nvSpPr>
-          <p:cNvPr id="14" name="TextBox 13"/>
-          <p:cNvSpPr txBox="1"/>
-          <p:nvPr/>
-        </p:nvSpPr>
-        <p:spPr>
-          <a:xfrm>
-            <a:off x="777240" y="4828032"/>
-            <a:ext cx="10607040" cy="365760"/>
-          </a:xfrm>
-          <a:prstGeom prst="rect">
-            <a:avLst/>
-          </a:prstGeom>
-          <a:noFill/>
-        </p:spPr>
-        <p:txBody>
-          <a:bodyPr wrap="square" lIns="45720" rIns="45720" tIns="18288" bIns="18288" anchor="t">
-            <a:spAutoFit/>
-          </a:bodyPr>
-          <a:lstStyle/>
-          <a:p>
-            <a:pPr algn="ctr"/>
-            <a:r>
-              <a:rPr sz="1900" b="0" i="1">
-                <a:solidFill>
-                  <a:srgbClr val="6B6B6B"/>
-                </a:solidFill>
-                <a:latin typeface="Century Schoolbook"/>
-              </a:rPr>
-              <a:t>Count both measurements.</a:t>
             </a:r>
           </a:p>
         </p:txBody>
@@ -13422,44 +12186,9 @@
           </a:fontRef>
         </p:style>
       </p:cxnSp>
-      <p:sp>
-        <p:nvSpPr>
-          <p:cNvPr id="5" name="TextBox 4"/>
-          <p:cNvSpPr txBox="1"/>
-          <p:nvPr/>
-        </p:nvSpPr>
-        <p:spPr>
-          <a:xfrm>
-            <a:off x="777240" y="1261872"/>
-            <a:ext cx="10607040" cy="310896"/>
-          </a:xfrm>
-          <a:prstGeom prst="rect">
-            <a:avLst/>
-          </a:prstGeom>
-          <a:noFill/>
-        </p:spPr>
-        <p:txBody>
-          <a:bodyPr wrap="square" lIns="45720" rIns="45720" tIns="18288" bIns="18288" anchor="t">
-            <a:spAutoFit/>
-          </a:bodyPr>
-          <a:lstStyle/>
-          <a:p>
-            <a:pPr algn="l"/>
-            <a:r>
-              <a:rPr sz="1700" b="0" i="1">
-                <a:solidFill>
-                  <a:srgbClr val="6B6B6B"/>
-                </a:solidFill>
-                <a:latin typeface="Century Schoolbook"/>
-              </a:rPr>
-              <a:t>Answer.</a:t>
-            </a:r>
-          </a:p>
-        </p:txBody>
-      </p:sp>
       <p:cxnSp>
         <p:nvCxnSpPr>
-          <p:cNvPr id="6" name="Connector 5"/>
+          <p:cNvPr id="5" name="Connector 4"/>
           <p:cNvCxnSpPr/>
           <p:nvPr/>
         </p:nvCxnSpPr>
@@ -13494,7 +12223,7 @@
       </p:cxnSp>
       <p:sp>
         <p:nvSpPr>
-          <p:cNvPr id="7" name="TextBox 6"/>
+          <p:cNvPr id="6" name="TextBox 5"/>
           <p:cNvSpPr txBox="1"/>
           <p:nvPr/>
         </p:nvSpPr>
@@ -13529,7 +12258,7 @@
       </p:sp>
       <p:sp>
         <p:nvSpPr>
-          <p:cNvPr id="8" name="TextBox 7"/>
+          <p:cNvPr id="7" name="TextBox 6"/>
           <p:cNvSpPr txBox="1"/>
           <p:nvPr/>
         </p:nvSpPr>
@@ -13564,7 +12293,7 @@
       </p:sp>
       <p:sp>
         <p:nvSpPr>
-          <p:cNvPr id="9" name="TextBox 8"/>
+          <p:cNvPr id="8" name="TextBox 7"/>
           <p:cNvSpPr txBox="1"/>
           <p:nvPr/>
         </p:nvSpPr>
@@ -13599,7 +12328,7 @@
       </p:sp>
       <p:pic>
         <p:nvPicPr>
-          <p:cNvPr id="10" name="Picture 9" descr="cb8dbdba9896eb35.png"/>
+          <p:cNvPr id="9" name="Picture 8" descr="cb8dbdba9896eb35.png"/>
           <p:cNvPicPr>
             <a:picLocks noChangeAspect="1"/>
           </p:cNvPicPr>
@@ -13623,7 +12352,7 @@
       </p:pic>
       <p:sp>
         <p:nvSpPr>
-          <p:cNvPr id="11" name="TextBox 10"/>
+          <p:cNvPr id="10" name="TextBox 9"/>
           <p:cNvSpPr txBox="1"/>
           <p:nvPr/>
         </p:nvSpPr>
@@ -13658,7 +12387,7 @@
       </p:sp>
       <p:sp>
         <p:nvSpPr>
-          <p:cNvPr id="12" name="TextBox 11"/>
+          <p:cNvPr id="11" name="TextBox 10"/>
           <p:cNvSpPr txBox="1"/>
           <p:nvPr/>
         </p:nvSpPr>
@@ -13693,42 +12422,7 @@
       </p:sp>
       <p:sp>
         <p:nvSpPr>
-          <p:cNvPr id="13" name="TextBox 12"/>
-          <p:cNvSpPr txBox="1"/>
-          <p:nvPr/>
-        </p:nvSpPr>
-        <p:spPr>
-          <a:xfrm>
-            <a:off x="1828800" y="3355848"/>
-            <a:ext cx="8503920" cy="548640"/>
-          </a:xfrm>
-          <a:prstGeom prst="rect">
-            <a:avLst/>
-          </a:prstGeom>
-          <a:noFill/>
-        </p:spPr>
-        <p:txBody>
-          <a:bodyPr wrap="square" lIns="45720" rIns="45720" tIns="18288" bIns="18288" anchor="t">
-            <a:spAutoFit/>
-          </a:bodyPr>
-          <a:lstStyle/>
-          <a:p>
-            <a:pPr algn="ctr"/>
-            <a:r>
-              <a:rPr sz="2400" b="0" i="0">
-                <a:solidFill>
-                  <a:srgbClr val="6B6B6B"/>
-                </a:solidFill>
-                <a:latin typeface="Century Schoolbook"/>
-              </a:rPr>
-              <a:t>140 exactly, kept to two digits</a:t>
-            </a:r>
-          </a:p>
-        </p:txBody>
-      </p:sp>
-      <p:sp>
-        <p:nvSpPr>
-          <p:cNvPr id="14" name="TextBox 13"/>
+          <p:cNvPr id="12" name="TextBox 11"/>
           <p:cNvSpPr txBox="1"/>
           <p:nvPr/>
         </p:nvSpPr>
@@ -13902,44 +12596,9 @@
           </a:fontRef>
         </p:style>
       </p:cxnSp>
-      <p:sp>
-        <p:nvSpPr>
-          <p:cNvPr id="5" name="TextBox 4"/>
-          <p:cNvSpPr txBox="1"/>
-          <p:nvPr/>
-        </p:nvSpPr>
-        <p:spPr>
-          <a:xfrm>
-            <a:off x="777240" y="1261872"/>
-            <a:ext cx="10607040" cy="310896"/>
-          </a:xfrm>
-          <a:prstGeom prst="rect">
-            <a:avLst/>
-          </a:prstGeom>
-          <a:noFill/>
-        </p:spPr>
-        <p:txBody>
-          <a:bodyPr wrap="square" lIns="45720" rIns="45720" tIns="18288" bIns="18288" anchor="t">
-            <a:spAutoFit/>
-          </a:bodyPr>
-          <a:lstStyle/>
-          <a:p>
-            <a:pPr algn="l"/>
-            <a:r>
-              <a:rPr sz="1700" b="0" i="1">
-                <a:solidFill>
-                  <a:srgbClr val="6B6B6B"/>
-                </a:solidFill>
-                <a:latin typeface="Century Schoolbook"/>
-              </a:rPr>
-              <a:t>Boards up on three.</a:t>
-            </a:r>
-          </a:p>
-        </p:txBody>
-      </p:sp>
       <p:cxnSp>
         <p:nvCxnSpPr>
-          <p:cNvPr id="6" name="Connector 5"/>
+          <p:cNvPr id="5" name="Connector 4"/>
           <p:cNvCxnSpPr/>
           <p:nvPr/>
         </p:nvCxnSpPr>
@@ -13974,7 +12633,7 @@
       </p:cxnSp>
       <p:sp>
         <p:nvSpPr>
-          <p:cNvPr id="7" name="TextBox 6"/>
+          <p:cNvPr id="6" name="TextBox 5"/>
           <p:cNvSpPr txBox="1"/>
           <p:nvPr/>
         </p:nvSpPr>
@@ -14009,7 +12668,7 @@
       </p:sp>
       <p:sp>
         <p:nvSpPr>
-          <p:cNvPr id="8" name="TextBox 7"/>
+          <p:cNvPr id="7" name="TextBox 6"/>
           <p:cNvSpPr txBox="1"/>
           <p:nvPr/>
         </p:nvSpPr>
@@ -14044,7 +12703,7 @@
       </p:sp>
       <p:sp>
         <p:nvSpPr>
-          <p:cNvPr id="9" name="TextBox 8"/>
+          <p:cNvPr id="8" name="TextBox 7"/>
           <p:cNvSpPr txBox="1"/>
           <p:nvPr/>
         </p:nvSpPr>
@@ -14079,7 +12738,7 @@
       </p:sp>
       <p:sp>
         <p:nvSpPr>
-          <p:cNvPr id="10" name="TextBox 9"/>
+          <p:cNvPr id="9" name="TextBox 8"/>
           <p:cNvSpPr txBox="1"/>
           <p:nvPr/>
         </p:nvSpPr>
@@ -14114,7 +12773,7 @@
       </p:sp>
       <p:pic>
         <p:nvPicPr>
-          <p:cNvPr id="11" name="Picture 10" descr="56b3c95944d22948.png"/>
+          <p:cNvPr id="10" name="Picture 9" descr="56b3c95944d22948.png"/>
           <p:cNvPicPr>
             <a:picLocks noChangeAspect="1"/>
           </p:cNvPicPr>
@@ -14138,7 +12797,7 @@
       </p:pic>
       <p:sp>
         <p:nvSpPr>
-          <p:cNvPr id="12" name="TextBox 11"/>
+          <p:cNvPr id="11" name="TextBox 10"/>
           <p:cNvSpPr txBox="1"/>
           <p:nvPr/>
         </p:nvSpPr>
@@ -14191,7 +12850,7 @@
       </p:sp>
       <p:pic>
         <p:nvPicPr>
-          <p:cNvPr id="13" name="Picture 12" descr="05f1b129363955b5.png"/>
+          <p:cNvPr id="12" name="Picture 11" descr="05f1b129363955b5.png"/>
           <p:cNvPicPr>
             <a:picLocks noChangeAspect="1"/>
           </p:cNvPicPr>
@@ -14215,7 +12874,7 @@
       </p:pic>
       <p:sp>
         <p:nvSpPr>
-          <p:cNvPr id="14" name="TextBox 13"/>
+          <p:cNvPr id="13" name="TextBox 12"/>
           <p:cNvSpPr txBox="1"/>
           <p:nvPr/>
         </p:nvSpPr>
@@ -14250,7 +12909,7 @@
       </p:sp>
       <p:sp>
         <p:nvSpPr>
-          <p:cNvPr id="15" name="TextBox 14"/>
+          <p:cNvPr id="14" name="TextBox 13"/>
           <p:cNvSpPr txBox="1"/>
           <p:nvPr/>
         </p:nvSpPr>
@@ -14285,7 +12944,7 @@
       </p:sp>
       <p:sp>
         <p:nvSpPr>
-          <p:cNvPr id="16" name="TextBox 15"/>
+          <p:cNvPr id="15" name="TextBox 14"/>
           <p:cNvSpPr txBox="1"/>
           <p:nvPr/>
         </p:nvSpPr>
@@ -14314,41 +12973,6 @@
                 <a:latin typeface="Century Schoolbook"/>
               </a:rPr>
               <a:t>Answer it.</a:t>
-            </a:r>
-          </a:p>
-        </p:txBody>
-      </p:sp>
-      <p:sp>
-        <p:nvSpPr>
-          <p:cNvPr id="17" name="TextBox 16"/>
-          <p:cNvSpPr txBox="1"/>
-          <p:nvPr/>
-        </p:nvSpPr>
-        <p:spPr>
-          <a:xfrm>
-            <a:off x="777240" y="4828032"/>
-            <a:ext cx="10607040" cy="365760"/>
-          </a:xfrm>
-          <a:prstGeom prst="rect">
-            <a:avLst/>
-          </a:prstGeom>
-          <a:noFill/>
-        </p:spPr>
-        <p:txBody>
-          <a:bodyPr wrap="square" lIns="45720" rIns="45720" tIns="18288" bIns="18288" anchor="t">
-            <a:spAutoFit/>
-          </a:bodyPr>
-          <a:lstStyle/>
-          <a:p>
-            <a:pPr algn="ctr"/>
-            <a:r>
-              <a:rPr sz="1900" b="0" i="1">
-                <a:solidFill>
-                  <a:srgbClr val="6B6B6B"/>
-                </a:solidFill>
-                <a:latin typeface="Century Schoolbook"/>
-              </a:rPr>
-              <a:t>Divide, then count.</a:t>
             </a:r>
           </a:p>
         </p:txBody>
@@ -14476,44 +13100,9 @@
           </a:fontRef>
         </p:style>
       </p:cxnSp>
-      <p:sp>
-        <p:nvSpPr>
-          <p:cNvPr id="5" name="TextBox 4"/>
-          <p:cNvSpPr txBox="1"/>
-          <p:nvPr/>
-        </p:nvSpPr>
-        <p:spPr>
-          <a:xfrm>
-            <a:off x="777240" y="1261872"/>
-            <a:ext cx="10607040" cy="310896"/>
-          </a:xfrm>
-          <a:prstGeom prst="rect">
-            <a:avLst/>
-          </a:prstGeom>
-          <a:noFill/>
-        </p:spPr>
-        <p:txBody>
-          <a:bodyPr wrap="square" lIns="45720" rIns="45720" tIns="18288" bIns="18288" anchor="t">
-            <a:spAutoFit/>
-          </a:bodyPr>
-          <a:lstStyle/>
-          <a:p>
-            <a:pPr algn="l"/>
-            <a:r>
-              <a:rPr sz="1700" b="0" i="1">
-                <a:solidFill>
-                  <a:srgbClr val="6B6B6B"/>
-                </a:solidFill>
-                <a:latin typeface="Century Schoolbook"/>
-              </a:rPr>
-              <a:t>Answers.</a:t>
-            </a:r>
-          </a:p>
-        </p:txBody>
-      </p:sp>
       <p:cxnSp>
         <p:nvCxnSpPr>
-          <p:cNvPr id="6" name="Connector 5"/>
+          <p:cNvPr id="5" name="Connector 4"/>
           <p:cNvCxnSpPr/>
           <p:nvPr/>
         </p:nvCxnSpPr>
@@ -14548,7 +13137,7 @@
       </p:cxnSp>
       <p:sp>
         <p:nvSpPr>
-          <p:cNvPr id="7" name="TextBox 6"/>
+          <p:cNvPr id="6" name="TextBox 5"/>
           <p:cNvSpPr txBox="1"/>
           <p:nvPr/>
         </p:nvSpPr>
@@ -14583,7 +13172,7 @@
       </p:sp>
       <p:sp>
         <p:nvSpPr>
-          <p:cNvPr id="8" name="TextBox 7"/>
+          <p:cNvPr id="7" name="TextBox 6"/>
           <p:cNvSpPr txBox="1"/>
           <p:nvPr/>
         </p:nvSpPr>
@@ -14618,13 +13207,13 @@
       </p:sp>
       <p:sp>
         <p:nvSpPr>
-          <p:cNvPr id="9" name="TextBox 8"/>
-          <p:cNvSpPr txBox="1"/>
-          <p:nvPr/>
-        </p:nvSpPr>
-        <p:spPr>
-          <a:xfrm>
-            <a:off x="1874519" y="1760220"/>
+          <p:cNvPr id="8" name="TextBox 7"/>
+          <p:cNvSpPr txBox="1"/>
+          <p:nvPr/>
+        </p:nvSpPr>
+        <p:spPr>
+          <a:xfrm>
+            <a:off x="1874519" y="1440180"/>
             <a:ext cx="720605" cy="457200"/>
           </a:xfrm>
           <a:prstGeom prst="rect">
@@ -14653,7 +13242,7 @@
       </p:sp>
       <p:pic>
         <p:nvPicPr>
-          <p:cNvPr id="10" name="Picture 9" descr="aa1e7ea664b07d25.png"/>
+          <p:cNvPr id="9" name="Picture 8" descr="aa1e7ea664b07d25.png"/>
           <p:cNvPicPr>
             <a:picLocks noChangeAspect="1"/>
           </p:cNvPicPr>
@@ -14667,7 +13256,7 @@
         </p:blipFill>
         <p:spPr>
           <a:xfrm>
-            <a:off x="2457965" y="1821180"/>
+            <a:off x="2457965" y="1501140"/>
             <a:ext cx="2441448" cy="335280"/>
           </a:xfrm>
           <a:prstGeom prst="rect">
@@ -14677,13 +13266,13 @@
       </p:pic>
       <p:sp>
         <p:nvSpPr>
-          <p:cNvPr id="11" name="TextBox 10"/>
-          <p:cNvSpPr txBox="1"/>
-          <p:nvPr/>
-        </p:nvSpPr>
-        <p:spPr>
-          <a:xfrm>
-            <a:off x="5448053" y="1760220"/>
+          <p:cNvPr id="10" name="TextBox 9"/>
+          <p:cNvSpPr txBox="1"/>
+          <p:nvPr/>
+        </p:nvSpPr>
+        <p:spPr>
+          <a:xfrm>
+            <a:off x="5448053" y="1440180"/>
             <a:ext cx="1451708" cy="457200"/>
           </a:xfrm>
           <a:prstGeom prst="rect">
@@ -14721,13 +13310,13 @@
       </p:sp>
       <p:sp>
         <p:nvSpPr>
-          <p:cNvPr id="12" name="TextBox 11"/>
-          <p:cNvSpPr txBox="1"/>
-          <p:nvPr/>
-        </p:nvSpPr>
-        <p:spPr>
-          <a:xfrm>
-            <a:off x="1874519" y="2372868"/>
+          <p:cNvPr id="11" name="TextBox 10"/>
+          <p:cNvSpPr txBox="1"/>
+          <p:nvPr/>
+        </p:nvSpPr>
+        <p:spPr>
+          <a:xfrm>
+            <a:off x="1874519" y="2052828"/>
             <a:ext cx="726811" cy="457200"/>
           </a:xfrm>
           <a:prstGeom prst="rect">
@@ -14756,7 +13345,7 @@
       </p:sp>
       <p:pic>
         <p:nvPicPr>
-          <p:cNvPr id="13" name="Picture 12" descr="8ddd66cd0c0fdcaa.png"/>
+          <p:cNvPr id="12" name="Picture 11" descr="8ddd66cd0c0fdcaa.png"/>
           <p:cNvPicPr>
             <a:picLocks noChangeAspect="1"/>
           </p:cNvPicPr>
@@ -14770,7 +13359,7 @@
         </p:blipFill>
         <p:spPr>
           <a:xfrm>
-            <a:off x="2464171" y="2433828"/>
+            <a:off x="2464171" y="2113788"/>
             <a:ext cx="3099816" cy="335280"/>
           </a:xfrm>
           <a:prstGeom prst="rect">
@@ -14780,13 +13369,13 @@
       </p:pic>
       <p:sp>
         <p:nvSpPr>
-          <p:cNvPr id="14" name="TextBox 13"/>
-          <p:cNvSpPr txBox="1"/>
-          <p:nvPr/>
-        </p:nvSpPr>
-        <p:spPr>
-          <a:xfrm>
-            <a:off x="6112627" y="2372868"/>
+          <p:cNvPr id="13" name="TextBox 12"/>
+          <p:cNvSpPr txBox="1"/>
+          <p:nvPr/>
+        </p:nvSpPr>
+        <p:spPr>
+          <a:xfrm>
+            <a:off x="6112627" y="2052828"/>
             <a:ext cx="1637178" cy="457200"/>
           </a:xfrm>
           <a:prstGeom prst="rect">
@@ -14824,13 +13413,13 @@
       </p:sp>
       <p:sp>
         <p:nvSpPr>
-          <p:cNvPr id="15" name="TextBox 14"/>
-          <p:cNvSpPr txBox="1"/>
-          <p:nvPr/>
-        </p:nvSpPr>
-        <p:spPr>
-          <a:xfrm>
-            <a:off x="1874519" y="2985516"/>
+          <p:cNvPr id="14" name="TextBox 13"/>
+          <p:cNvSpPr txBox="1"/>
+          <p:nvPr/>
+        </p:nvSpPr>
+        <p:spPr>
+          <a:xfrm>
+            <a:off x="1874519" y="2665476"/>
             <a:ext cx="5997709" cy="457200"/>
           </a:xfrm>
           <a:prstGeom prst="rect">
@@ -14859,13 +13448,13 @@
       </p:sp>
       <p:sp>
         <p:nvSpPr>
-          <p:cNvPr id="16" name="TextBox 15"/>
-          <p:cNvSpPr txBox="1"/>
-          <p:nvPr/>
-        </p:nvSpPr>
-        <p:spPr>
-          <a:xfrm>
-            <a:off x="8283709" y="2985516"/>
+          <p:cNvPr id="15" name="TextBox 14"/>
+          <p:cNvSpPr txBox="1"/>
+          <p:nvPr/>
+        </p:nvSpPr>
+        <p:spPr>
+          <a:xfrm>
+            <a:off x="8283709" y="2665476"/>
             <a:ext cx="1743665" cy="457200"/>
           </a:xfrm>
           <a:prstGeom prst="rect">
@@ -14903,13 +13492,13 @@
       </p:sp>
       <p:sp>
         <p:nvSpPr>
-          <p:cNvPr id="17" name="TextBox 16"/>
-          <p:cNvSpPr txBox="1"/>
-          <p:nvPr/>
-        </p:nvSpPr>
-        <p:spPr>
-          <a:xfrm>
-            <a:off x="1874519" y="3598164"/>
+          <p:cNvPr id="16" name="TextBox 15"/>
+          <p:cNvSpPr txBox="1"/>
+          <p:nvPr/>
+        </p:nvSpPr>
+        <p:spPr>
+          <a:xfrm>
+            <a:off x="1874519" y="3278124"/>
             <a:ext cx="6461623" cy="457200"/>
           </a:xfrm>
           <a:prstGeom prst="rect">
@@ -14938,13 +13527,13 @@
       </p:sp>
       <p:sp>
         <p:nvSpPr>
-          <p:cNvPr id="18" name="TextBox 17"/>
-          <p:cNvSpPr txBox="1"/>
-          <p:nvPr/>
-        </p:nvSpPr>
-        <p:spPr>
-          <a:xfrm>
-            <a:off x="8747623" y="3598164"/>
+          <p:cNvPr id="17" name="TextBox 16"/>
+          <p:cNvSpPr txBox="1"/>
+          <p:nvPr/>
+        </p:nvSpPr>
+        <p:spPr>
+          <a:xfrm>
+            <a:off x="8747623" y="3278124"/>
             <a:ext cx="829616" cy="457200"/>
           </a:xfrm>
           <a:prstGeom prst="rect">
@@ -15094,44 +13683,9 @@
           </a:fontRef>
         </p:style>
       </p:cxnSp>
-      <p:sp>
-        <p:nvSpPr>
-          <p:cNvPr id="5" name="TextBox 4"/>
-          <p:cNvSpPr txBox="1"/>
-          <p:nvPr/>
-        </p:nvSpPr>
-        <p:spPr>
-          <a:xfrm>
-            <a:off x="777240" y="1261872"/>
-            <a:ext cx="10607040" cy="310896"/>
-          </a:xfrm>
-          <a:prstGeom prst="rect">
-            <a:avLst/>
-          </a:prstGeom>
-          <a:noFill/>
-        </p:spPr>
-        <p:txBody>
-          <a:bodyPr wrap="square" lIns="45720" rIns="45720" tIns="18288" bIns="18288" anchor="t">
-            <a:spAutoFit/>
-          </a:bodyPr>
-          <a:lstStyle/>
-          <a:p>
-            <a:pPr algn="l"/>
-            <a:r>
-              <a:rPr sz="1700" b="0" i="1">
-                <a:solidFill>
-                  <a:srgbClr val="6B6B6B"/>
-                </a:solidFill>
-                <a:latin typeface="Century Schoolbook"/>
-              </a:rPr>
-              <a:t>Answer.</a:t>
-            </a:r>
-          </a:p>
-        </p:txBody>
-      </p:sp>
       <p:cxnSp>
         <p:nvCxnSpPr>
-          <p:cNvPr id="6" name="Connector 5"/>
+          <p:cNvPr id="5" name="Connector 4"/>
           <p:cNvCxnSpPr/>
           <p:nvPr/>
         </p:nvCxnSpPr>
@@ -15166,7 +13720,7 @@
       </p:cxnSp>
       <p:sp>
         <p:nvSpPr>
-          <p:cNvPr id="7" name="TextBox 6"/>
+          <p:cNvPr id="6" name="TextBox 5"/>
           <p:cNvSpPr txBox="1"/>
           <p:nvPr/>
         </p:nvSpPr>
@@ -15201,7 +13755,7 @@
       </p:sp>
       <p:sp>
         <p:nvSpPr>
-          <p:cNvPr id="8" name="TextBox 7"/>
+          <p:cNvPr id="7" name="TextBox 6"/>
           <p:cNvSpPr txBox="1"/>
           <p:nvPr/>
         </p:nvSpPr>
@@ -15236,7 +13790,7 @@
       </p:sp>
       <p:sp>
         <p:nvSpPr>
-          <p:cNvPr id="9" name="TextBox 8"/>
+          <p:cNvPr id="8" name="TextBox 7"/>
           <p:cNvSpPr txBox="1"/>
           <p:nvPr/>
         </p:nvSpPr>
@@ -15271,7 +13825,7 @@
       </p:sp>
       <p:sp>
         <p:nvSpPr>
-          <p:cNvPr id="10" name="TextBox 9"/>
+          <p:cNvPr id="9" name="TextBox 8"/>
           <p:cNvSpPr txBox="1"/>
           <p:nvPr/>
         </p:nvSpPr>
@@ -15306,7 +13860,7 @@
       </p:sp>
       <p:pic>
         <p:nvPicPr>
-          <p:cNvPr id="11" name="Picture 10" descr="7257295b37188a90.png"/>
+          <p:cNvPr id="10" name="Picture 9" descr="7257295b37188a90.png"/>
           <p:cNvPicPr>
             <a:picLocks noChangeAspect="1"/>
           </p:cNvPicPr>
@@ -15330,7 +13884,7 @@
       </p:pic>
       <p:sp>
         <p:nvSpPr>
-          <p:cNvPr id="12" name="TextBox 11"/>
+          <p:cNvPr id="11" name="TextBox 10"/>
           <p:cNvSpPr txBox="1"/>
           <p:nvPr/>
         </p:nvSpPr>
@@ -15383,7 +13937,7 @@
       </p:sp>
       <p:pic>
         <p:nvPicPr>
-          <p:cNvPr id="13" name="Picture 12" descr="94cb33e082284147.png"/>
+          <p:cNvPr id="12" name="Picture 11" descr="94cb33e082284147.png"/>
           <p:cNvPicPr>
             <a:picLocks noChangeAspect="1"/>
           </p:cNvPicPr>
@@ -15407,7 +13961,7 @@
       </p:pic>
       <p:sp>
         <p:nvSpPr>
-          <p:cNvPr id="14" name="TextBox 13"/>
+          <p:cNvPr id="13" name="TextBox 12"/>
           <p:cNvSpPr txBox="1"/>
           <p:nvPr/>
         </p:nvSpPr>
@@ -15442,7 +13996,7 @@
       </p:sp>
       <p:sp>
         <p:nvSpPr>
-          <p:cNvPr id="15" name="TextBox 14"/>
+          <p:cNvPr id="14" name="TextBox 13"/>
           <p:cNvSpPr txBox="1"/>
           <p:nvPr/>
         </p:nvSpPr>
@@ -15477,48 +14031,13 @@
       </p:sp>
       <p:sp>
         <p:nvSpPr>
-          <p:cNvPr id="16" name="TextBox 15"/>
-          <p:cNvSpPr txBox="1"/>
-          <p:nvPr/>
-        </p:nvSpPr>
-        <p:spPr>
-          <a:xfrm>
-            <a:off x="1828800" y="3984398"/>
-            <a:ext cx="8503920" cy="548640"/>
-          </a:xfrm>
-          <a:prstGeom prst="rect">
-            <a:avLst/>
-          </a:prstGeom>
-          <a:noFill/>
-        </p:spPr>
-        <p:txBody>
-          <a:bodyPr wrap="square" lIns="45720" rIns="45720" tIns="18288" bIns="18288" anchor="t">
-            <a:spAutoFit/>
-          </a:bodyPr>
-          <a:lstStyle/>
-          <a:p>
-            <a:pPr algn="ctr"/>
-            <a:r>
-              <a:rPr sz="2400" b="0" i="0">
-                <a:solidFill>
-                  <a:srgbClr val="6B6B6B"/>
-                </a:solidFill>
-                <a:latin typeface="Century Schoolbook"/>
-              </a:rPr>
-              <a:t>3,600 ÷ 90</a:t>
-            </a:r>
-          </a:p>
-        </p:txBody>
-      </p:sp>
-      <p:sp>
-        <p:nvSpPr>
-          <p:cNvPr id="17" name="TextBox 16"/>
-          <p:cNvSpPr txBox="1"/>
-          <p:nvPr/>
-        </p:nvSpPr>
-        <p:spPr>
-          <a:xfrm>
-            <a:off x="777240" y="4715918"/>
+          <p:cNvPr id="15" name="TextBox 14"/>
+          <p:cNvSpPr txBox="1"/>
+          <p:nvPr/>
+        </p:nvSpPr>
+        <p:spPr>
+          <a:xfrm>
+            <a:off x="777240" y="4663440"/>
             <a:ext cx="10607040" cy="548640"/>
           </a:xfrm>
           <a:prstGeom prst="rect">
@@ -15686,44 +14205,9 @@
           </a:fontRef>
         </p:style>
       </p:cxnSp>
-      <p:sp>
-        <p:nvSpPr>
-          <p:cNvPr id="5" name="TextBox 4"/>
-          <p:cNvSpPr txBox="1"/>
-          <p:nvPr/>
-        </p:nvSpPr>
-        <p:spPr>
-          <a:xfrm>
-            <a:off x="777240" y="1261872"/>
-            <a:ext cx="10607040" cy="310896"/>
-          </a:xfrm>
-          <a:prstGeom prst="rect">
-            <a:avLst/>
-          </a:prstGeom>
-          <a:noFill/>
-        </p:spPr>
-        <p:txBody>
-          <a:bodyPr wrap="square" lIns="45720" rIns="45720" tIns="18288" bIns="18288" anchor="t">
-            <a:spAutoFit/>
-          </a:bodyPr>
-          <a:lstStyle/>
-          <a:p>
-            <a:pPr algn="l"/>
-            <a:r>
-              <a:rPr sz="1700" b="0" i="1">
-                <a:solidFill>
-                  <a:srgbClr val="6B6B6B"/>
-                </a:solidFill>
-                <a:latin typeface="Century Schoolbook"/>
-              </a:rPr>
-              <a:t>Take your time. Boards up when you have written it.</a:t>
-            </a:r>
-          </a:p>
-        </p:txBody>
-      </p:sp>
       <p:cxnSp>
         <p:nvCxnSpPr>
-          <p:cNvPr id="6" name="Connector 5"/>
+          <p:cNvPr id="5" name="Connector 4"/>
           <p:cNvCxnSpPr/>
           <p:nvPr/>
         </p:nvCxnSpPr>
@@ -15758,7 +14242,7 @@
       </p:cxnSp>
       <p:sp>
         <p:nvSpPr>
-          <p:cNvPr id="7" name="TextBox 6"/>
+          <p:cNvPr id="6" name="TextBox 5"/>
           <p:cNvSpPr txBox="1"/>
           <p:nvPr/>
         </p:nvSpPr>
@@ -15793,7 +14277,7 @@
       </p:sp>
       <p:sp>
         <p:nvSpPr>
-          <p:cNvPr id="8" name="TextBox 7"/>
+          <p:cNvPr id="7" name="TextBox 6"/>
           <p:cNvSpPr txBox="1"/>
           <p:nvPr/>
         </p:nvSpPr>
@@ -15828,7 +14312,7 @@
       </p:sp>
       <p:sp>
         <p:nvSpPr>
-          <p:cNvPr id="9" name="TextBox 8"/>
+          <p:cNvPr id="8" name="TextBox 7"/>
           <p:cNvSpPr txBox="1"/>
           <p:nvPr/>
         </p:nvSpPr>
@@ -15863,7 +14347,7 @@
       </p:sp>
       <p:sp>
         <p:nvSpPr>
-          <p:cNvPr id="10" name="TextBox 9"/>
+          <p:cNvPr id="9" name="TextBox 8"/>
           <p:cNvSpPr txBox="1"/>
           <p:nvPr/>
         </p:nvSpPr>
@@ -15898,7 +14382,7 @@
       </p:sp>
       <p:pic>
         <p:nvPicPr>
-          <p:cNvPr id="11" name="Picture 10" descr="705d48a90c77f252.png"/>
+          <p:cNvPr id="10" name="Picture 9" descr="705d48a90c77f252.png"/>
           <p:cNvPicPr>
             <a:picLocks noChangeAspect="1"/>
           </p:cNvPicPr>
@@ -15922,7 +14406,7 @@
       </p:pic>
       <p:sp>
         <p:nvSpPr>
-          <p:cNvPr id="12" name="TextBox 11"/>
+          <p:cNvPr id="11" name="TextBox 10"/>
           <p:cNvSpPr txBox="1"/>
           <p:nvPr/>
         </p:nvSpPr>
@@ -15957,7 +14441,7 @@
       </p:sp>
       <p:pic>
         <p:nvPicPr>
-          <p:cNvPr id="13" name="Picture 12" descr="1a57ee4fc4052822.png"/>
+          <p:cNvPr id="12" name="Picture 11" descr="1a57ee4fc4052822.png"/>
           <p:cNvPicPr>
             <a:picLocks noChangeAspect="1"/>
           </p:cNvPicPr>
@@ -15981,7 +14465,7 @@
       </p:pic>
       <p:sp>
         <p:nvSpPr>
-          <p:cNvPr id="14" name="TextBox 13"/>
+          <p:cNvPr id="13" name="TextBox 12"/>
           <p:cNvSpPr txBox="1"/>
           <p:nvPr/>
         </p:nvSpPr>
@@ -16016,7 +14500,7 @@
       </p:sp>
       <p:sp>
         <p:nvSpPr>
-          <p:cNvPr id="15" name="TextBox 14"/>
+          <p:cNvPr id="14" name="TextBox 13"/>
           <p:cNvSpPr txBox="1"/>
           <p:nvPr/>
         </p:nvSpPr>
@@ -16051,7 +14535,7 @@
       </p:sp>
       <p:sp>
         <p:nvSpPr>
-          <p:cNvPr id="16" name="TextBox 15"/>
+          <p:cNvPr id="15" name="TextBox 14"/>
           <p:cNvSpPr txBox="1"/>
           <p:nvPr/>
         </p:nvSpPr>
@@ -16080,41 +14564,6 @@
                 <a:latin typeface="Century Schoolbook"/>
               </a:rPr>
               <a:t>Write your answer in sentences.</a:t>
-            </a:r>
-          </a:p>
-        </p:txBody>
-      </p:sp>
-      <p:sp>
-        <p:nvSpPr>
-          <p:cNvPr id="17" name="TextBox 16"/>
-          <p:cNvSpPr txBox="1"/>
-          <p:nvPr/>
-        </p:nvSpPr>
-        <p:spPr>
-          <a:xfrm>
-            <a:off x="777240" y="4828032"/>
-            <a:ext cx="10607040" cy="365760"/>
-          </a:xfrm>
-          <a:prstGeom prst="rect">
-            <a:avLst/>
-          </a:prstGeom>
-          <a:noFill/>
-        </p:spPr>
-        <p:txBody>
-          <a:bodyPr wrap="square" lIns="45720" rIns="45720" tIns="18288" bIns="18288" anchor="t">
-            <a:spAutoFit/>
-          </a:bodyPr>
-          <a:lstStyle/>
-          <a:p>
-            <a:pPr algn="ctr"/>
-            <a:r>
-              <a:rPr sz="1900" b="0" i="1">
-                <a:solidFill>
-                  <a:srgbClr val="6B6B6B"/>
-                </a:solidFill>
-                <a:latin typeface="Century Schoolbook"/>
-              </a:rPr>
-              <a:t>Which rule is for which operation?</a:t>
             </a:r>
           </a:p>
         </p:txBody>
@@ -16242,44 +14691,9 @@
           </a:fontRef>
         </p:style>
       </p:cxnSp>
-      <p:sp>
-        <p:nvSpPr>
-          <p:cNvPr id="5" name="TextBox 4"/>
-          <p:cNvSpPr txBox="1"/>
-          <p:nvPr/>
-        </p:nvSpPr>
-        <p:spPr>
-          <a:xfrm>
-            <a:off x="777240" y="1261872"/>
-            <a:ext cx="10607040" cy="310896"/>
-          </a:xfrm>
-          <a:prstGeom prst="rect">
-            <a:avLst/>
-          </a:prstGeom>
-          <a:noFill/>
-        </p:spPr>
-        <p:txBody>
-          <a:bodyPr wrap="square" lIns="45720" rIns="45720" tIns="18288" bIns="18288" anchor="t">
-            <a:spAutoFit/>
-          </a:bodyPr>
-          <a:lstStyle/>
-          <a:p>
-            <a:pPr algn="l"/>
-            <a:r>
-              <a:rPr sz="1700" b="0" i="1">
-                <a:solidFill>
-                  <a:srgbClr val="6B6B6B"/>
-                </a:solidFill>
-                <a:latin typeface="Century Schoolbook"/>
-              </a:rPr>
-              <a:t>Answer.</a:t>
-            </a:r>
-          </a:p>
-        </p:txBody>
-      </p:sp>
       <p:cxnSp>
         <p:nvCxnSpPr>
-          <p:cNvPr id="6" name="Connector 5"/>
+          <p:cNvPr id="5" name="Connector 4"/>
           <p:cNvCxnSpPr/>
           <p:nvPr/>
         </p:nvCxnSpPr>
@@ -16314,7 +14728,7 @@
       </p:cxnSp>
       <p:sp>
         <p:nvSpPr>
-          <p:cNvPr id="7" name="TextBox 6"/>
+          <p:cNvPr id="6" name="TextBox 5"/>
           <p:cNvSpPr txBox="1"/>
           <p:nvPr/>
         </p:nvSpPr>
@@ -16349,7 +14763,7 @@
       </p:sp>
       <p:sp>
         <p:nvSpPr>
-          <p:cNvPr id="8" name="TextBox 7"/>
+          <p:cNvPr id="7" name="TextBox 6"/>
           <p:cNvSpPr txBox="1"/>
           <p:nvPr/>
         </p:nvSpPr>
@@ -16384,7 +14798,7 @@
       </p:sp>
       <p:sp>
         <p:nvSpPr>
-          <p:cNvPr id="9" name="TextBox 8"/>
+          <p:cNvPr id="8" name="TextBox 7"/>
           <p:cNvSpPr txBox="1"/>
           <p:nvPr/>
         </p:nvSpPr>
@@ -16419,7 +14833,7 @@
       </p:sp>
       <p:sp>
         <p:nvSpPr>
-          <p:cNvPr id="10" name="TextBox 9"/>
+          <p:cNvPr id="9" name="TextBox 8"/>
           <p:cNvSpPr txBox="1"/>
           <p:nvPr/>
         </p:nvSpPr>
@@ -16454,7 +14868,7 @@
       </p:sp>
       <p:pic>
         <p:nvPicPr>
-          <p:cNvPr id="11" name="Picture 10" descr="a825a716d0b1ce30.png"/>
+          <p:cNvPr id="10" name="Picture 9" descr="a825a716d0b1ce30.png"/>
           <p:cNvPicPr>
             <a:picLocks noChangeAspect="1"/>
           </p:cNvPicPr>
@@ -16478,7 +14892,7 @@
       </p:pic>
       <p:sp>
         <p:nvSpPr>
-          <p:cNvPr id="12" name="TextBox 11"/>
+          <p:cNvPr id="11" name="TextBox 10"/>
           <p:cNvSpPr txBox="1"/>
           <p:nvPr/>
         </p:nvSpPr>
@@ -16513,7 +14927,7 @@
       </p:sp>
       <p:pic>
         <p:nvPicPr>
-          <p:cNvPr id="13" name="Picture 12" descr="1d3c8ee25f946d95.png"/>
+          <p:cNvPr id="12" name="Picture 11" descr="1d3c8ee25f946d95.png"/>
           <p:cNvPicPr>
             <a:picLocks noChangeAspect="1"/>
           </p:cNvPicPr>
@@ -16537,7 +14951,7 @@
       </p:pic>
       <p:sp>
         <p:nvSpPr>
-          <p:cNvPr id="14" name="TextBox 13"/>
+          <p:cNvPr id="13" name="TextBox 12"/>
           <p:cNvSpPr txBox="1"/>
           <p:nvPr/>
         </p:nvSpPr>
@@ -16572,7 +14986,7 @@
       </p:sp>
       <p:sp>
         <p:nvSpPr>
-          <p:cNvPr id="15" name="TextBox 14"/>
+          <p:cNvPr id="14" name="TextBox 13"/>
           <p:cNvSpPr txBox="1"/>
           <p:nvPr/>
         </p:nvSpPr>
@@ -16607,48 +15021,13 @@
       </p:sp>
       <p:sp>
         <p:nvSpPr>
-          <p:cNvPr id="16" name="TextBox 15"/>
-          <p:cNvSpPr txBox="1"/>
-          <p:nvPr/>
-        </p:nvSpPr>
-        <p:spPr>
-          <a:xfrm>
-            <a:off x="1828800" y="3984398"/>
-            <a:ext cx="8503920" cy="548640"/>
-          </a:xfrm>
-          <a:prstGeom prst="rect">
-            <a:avLst/>
-          </a:prstGeom>
-          <a:noFill/>
-        </p:spPr>
-        <p:txBody>
-          <a:bodyPr wrap="square" lIns="45720" rIns="45720" tIns="18288" bIns="18288" anchor="t">
-            <a:spAutoFit/>
-          </a:bodyPr>
-          <a:lstStyle/>
-          <a:p>
-            <a:pPr algn="ctr"/>
-            <a:r>
-              <a:rPr sz="2400" b="0" i="0">
-                <a:solidFill>
-                  <a:srgbClr val="6B6B6B"/>
-                </a:solidFill>
-                <a:latin typeface="Century Schoolbook"/>
-              </a:rPr>
-              <a:t>products count digits; sums count places</a:t>
-            </a:r>
-          </a:p>
-        </p:txBody>
-      </p:sp>
-      <p:sp>
-        <p:nvSpPr>
-          <p:cNvPr id="17" name="TextBox 16"/>
-          <p:cNvSpPr txBox="1"/>
-          <p:nvPr/>
-        </p:nvSpPr>
-        <p:spPr>
-          <a:xfrm>
-            <a:off x="777240" y="4715918"/>
+          <p:cNvPr id="15" name="TextBox 14"/>
+          <p:cNvSpPr txBox="1"/>
+          <p:nvPr/>
+        </p:nvSpPr>
+        <p:spPr>
+          <a:xfrm>
+            <a:off x="777240" y="4663440"/>
             <a:ext cx="10607040" cy="548640"/>
           </a:xfrm>
           <a:prstGeom prst="rect">
@@ -16807,44 +15186,9 @@
           </a:fontRef>
         </p:style>
       </p:cxnSp>
-      <p:sp>
-        <p:nvSpPr>
-          <p:cNvPr id="5" name="TextBox 4"/>
-          <p:cNvSpPr txBox="1"/>
-          <p:nvPr/>
-        </p:nvSpPr>
-        <p:spPr>
-          <a:xfrm>
-            <a:off x="777240" y="1261872"/>
-            <a:ext cx="10607040" cy="310896"/>
-          </a:xfrm>
-          <a:prstGeom prst="rect">
-            <a:avLst/>
-          </a:prstGeom>
-          <a:noFill/>
-        </p:spPr>
-        <p:txBody>
-          <a:bodyPr wrap="square" lIns="45720" rIns="45720" tIns="18288" bIns="18288" anchor="t">
-            <a:spAutoFit/>
-          </a:bodyPr>
-          <a:lstStyle/>
-          <a:p>
-            <a:pPr algn="l"/>
-            <a:r>
-              <a:rPr sz="1700" b="0" i="1">
-                <a:solidFill>
-                  <a:srgbClr val="6B6B6B"/>
-                </a:solidFill>
-                <a:latin typeface="Century Schoolbook"/>
-              </a:rPr>
-              <a:t>Six questions. On your own, in silence.</a:t>
-            </a:r>
-          </a:p>
-        </p:txBody>
-      </p:sp>
       <p:cxnSp>
         <p:nvCxnSpPr>
-          <p:cNvPr id="6" name="Connector 5"/>
+          <p:cNvPr id="5" name="Connector 4"/>
           <p:cNvCxnSpPr/>
           <p:nvPr/>
         </p:nvCxnSpPr>
@@ -16879,7 +15223,7 @@
       </p:cxnSp>
       <p:sp>
         <p:nvSpPr>
-          <p:cNvPr id="7" name="TextBox 6"/>
+          <p:cNvPr id="6" name="TextBox 5"/>
           <p:cNvSpPr txBox="1"/>
           <p:nvPr/>
         </p:nvSpPr>
@@ -16914,7 +15258,7 @@
       </p:sp>
       <p:sp>
         <p:nvSpPr>
-          <p:cNvPr id="8" name="TextBox 7"/>
+          <p:cNvPr id="7" name="TextBox 6"/>
           <p:cNvSpPr txBox="1"/>
           <p:nvPr/>
         </p:nvSpPr>
@@ -16949,7 +15293,7 @@
       </p:sp>
       <p:sp>
         <p:nvSpPr>
-          <p:cNvPr id="9" name="TextBox 8"/>
+          <p:cNvPr id="8" name="TextBox 7"/>
           <p:cNvSpPr txBox="1"/>
           <p:nvPr/>
         </p:nvSpPr>
@@ -16984,7 +15328,7 @@
       </p:sp>
       <p:sp>
         <p:nvSpPr>
-          <p:cNvPr id="10" name="TextBox 9"/>
+          <p:cNvPr id="9" name="TextBox 8"/>
           <p:cNvSpPr txBox="1"/>
           <p:nvPr/>
         </p:nvSpPr>
@@ -17019,7 +15363,7 @@
       </p:sp>
       <p:sp>
         <p:nvSpPr>
-          <p:cNvPr id="11" name="TextBox 10"/>
+          <p:cNvPr id="10" name="TextBox 9"/>
           <p:cNvSpPr txBox="1"/>
           <p:nvPr/>
         </p:nvSpPr>
@@ -17054,7 +15398,7 @@
       </p:sp>
       <p:sp>
         <p:nvSpPr>
-          <p:cNvPr id="12" name="TextBox 11"/>
+          <p:cNvPr id="11" name="TextBox 10"/>
           <p:cNvSpPr txBox="1"/>
           <p:nvPr/>
         </p:nvSpPr>
@@ -17089,7 +15433,7 @@
       </p:sp>
       <p:sp>
         <p:nvSpPr>
-          <p:cNvPr id="13" name="TextBox 12"/>
+          <p:cNvPr id="12" name="TextBox 11"/>
           <p:cNvSpPr txBox="1"/>
           <p:nvPr/>
         </p:nvSpPr>
@@ -17124,7 +15468,7 @@
       </p:sp>
       <p:sp>
         <p:nvSpPr>
-          <p:cNvPr id="14" name="TextBox 13"/>
+          <p:cNvPr id="13" name="TextBox 12"/>
           <p:cNvSpPr txBox="1"/>
           <p:nvPr/>
         </p:nvSpPr>
@@ -17280,44 +15624,9 @@
           </a:fontRef>
         </p:style>
       </p:cxnSp>
-      <p:sp>
-        <p:nvSpPr>
-          <p:cNvPr id="5" name="TextBox 4"/>
-          <p:cNvSpPr txBox="1"/>
-          <p:nvPr/>
-        </p:nvSpPr>
-        <p:spPr>
-          <a:xfrm>
-            <a:off x="777240" y="1261872"/>
-            <a:ext cx="10607040" cy="310896"/>
-          </a:xfrm>
-          <a:prstGeom prst="rect">
-            <a:avLst/>
-          </a:prstGeom>
-          <a:noFill/>
-        </p:spPr>
-        <p:txBody>
-          <a:bodyPr wrap="square" lIns="45720" rIns="45720" tIns="18288" bIns="18288" anchor="t">
-            <a:spAutoFit/>
-          </a:bodyPr>
-          <a:lstStyle/>
-          <a:p>
-            <a:pPr algn="l"/>
-            <a:r>
-              <a:rPr sz="1700" b="0" i="1">
-                <a:solidFill>
-                  <a:srgbClr val="6B6B6B"/>
-                </a:solidFill>
-                <a:latin typeface="Century Schoolbook"/>
-              </a:rPr>
-              <a:t>Last five minutes.</a:t>
-            </a:r>
-          </a:p>
-        </p:txBody>
-      </p:sp>
       <p:cxnSp>
         <p:nvCxnSpPr>
-          <p:cNvPr id="6" name="Connector 5"/>
+          <p:cNvPr id="5" name="Connector 4"/>
           <p:cNvCxnSpPr/>
           <p:nvPr/>
         </p:nvCxnSpPr>
@@ -17352,7 +15661,7 @@
       </p:cxnSp>
       <p:sp>
         <p:nvSpPr>
-          <p:cNvPr id="7" name="TextBox 6"/>
+          <p:cNvPr id="6" name="TextBox 5"/>
           <p:cNvSpPr txBox="1"/>
           <p:nvPr/>
         </p:nvSpPr>
@@ -17387,7 +15696,7 @@
       </p:sp>
       <p:sp>
         <p:nvSpPr>
-          <p:cNvPr id="8" name="TextBox 7"/>
+          <p:cNvPr id="7" name="TextBox 6"/>
           <p:cNvSpPr txBox="1"/>
           <p:nvPr/>
         </p:nvSpPr>
@@ -17422,7 +15731,7 @@
       </p:sp>
       <p:sp>
         <p:nvSpPr>
-          <p:cNvPr id="9" name="TextBox 8"/>
+          <p:cNvPr id="8" name="TextBox 7"/>
           <p:cNvSpPr txBox="1"/>
           <p:nvPr/>
         </p:nvSpPr>
@@ -17457,7 +15766,7 @@
       </p:sp>
       <p:sp>
         <p:nvSpPr>
-          <p:cNvPr id="10" name="TextBox 9"/>
+          <p:cNvPr id="9" name="TextBox 8"/>
           <p:cNvSpPr txBox="1"/>
           <p:nvPr/>
         </p:nvSpPr>
@@ -17492,7 +15801,7 @@
       </p:sp>
       <p:sp>
         <p:nvSpPr>
-          <p:cNvPr id="11" name="TextBox 10"/>
+          <p:cNvPr id="10" name="TextBox 9"/>
           <p:cNvSpPr txBox="1"/>
           <p:nvPr/>
         </p:nvSpPr>
@@ -17527,7 +15836,7 @@
       </p:sp>
       <p:sp>
         <p:nvSpPr>
-          <p:cNvPr id="12" name="TextBox 11"/>
+          <p:cNvPr id="11" name="TextBox 10"/>
           <p:cNvSpPr txBox="1"/>
           <p:nvPr/>
         </p:nvSpPr>
@@ -17562,7 +15871,7 @@
       </p:sp>
       <p:sp>
         <p:nvSpPr>
-          <p:cNvPr id="13" name="TextBox 12"/>
+          <p:cNvPr id="12" name="TextBox 11"/>
           <p:cNvSpPr txBox="1"/>
           <p:nvPr/>
         </p:nvSpPr>
@@ -17597,7 +15906,7 @@
       </p:sp>
       <p:sp>
         <p:nvSpPr>
-          <p:cNvPr id="14" name="TextBox 13"/>
+          <p:cNvPr id="13" name="TextBox 12"/>
           <p:cNvSpPr txBox="1"/>
           <p:nvPr/>
         </p:nvSpPr>
@@ -17632,7 +15941,7 @@
       </p:sp>
       <p:sp>
         <p:nvSpPr>
-          <p:cNvPr id="15" name="TextBox 14"/>
+          <p:cNvPr id="14" name="TextBox 13"/>
           <p:cNvSpPr txBox="1"/>
           <p:nvPr/>
         </p:nvSpPr>
@@ -17667,7 +15976,7 @@
       </p:sp>
       <p:sp>
         <p:nvSpPr>
-          <p:cNvPr id="16" name="TextBox 15"/>
+          <p:cNvPr id="15" name="TextBox 14"/>
           <p:cNvSpPr txBox="1"/>
           <p:nvPr/>
         </p:nvSpPr>
@@ -17823,44 +16132,9 @@
           </a:fontRef>
         </p:style>
       </p:cxnSp>
-      <p:sp>
-        <p:nvSpPr>
-          <p:cNvPr id="5" name="TextBox 4"/>
-          <p:cNvSpPr txBox="1"/>
-          <p:nvPr/>
-        </p:nvSpPr>
-        <p:spPr>
-          <a:xfrm>
-            <a:off x="777240" y="1261872"/>
-            <a:ext cx="10607040" cy="310896"/>
-          </a:xfrm>
-          <a:prstGeom prst="rect">
-            <a:avLst/>
-          </a:prstGeom>
-          <a:noFill/>
-        </p:spPr>
-        <p:txBody>
-          <a:bodyPr wrap="square" lIns="45720" rIns="45720" tIns="18288" bIns="18288" anchor="t">
-            <a:spAutoFit/>
-          </a:bodyPr>
-          <a:lstStyle/>
-          <a:p>
-            <a:pPr algn="l"/>
-            <a:r>
-              <a:rPr sz="1700" b="0" i="1">
-                <a:solidFill>
-                  <a:srgbClr val="6B6B6B"/>
-                </a:solidFill>
-                <a:latin typeface="Century Schoolbook"/>
-              </a:rPr>
-              <a:t>Copy the table.</a:t>
-            </a:r>
-          </a:p>
-        </p:txBody>
-      </p:sp>
       <p:cxnSp>
         <p:nvCxnSpPr>
-          <p:cNvPr id="6" name="Connector 5"/>
+          <p:cNvPr id="5" name="Connector 4"/>
           <p:cNvCxnSpPr/>
           <p:nvPr/>
         </p:nvCxnSpPr>
@@ -17895,7 +16169,7 @@
       </p:cxnSp>
       <p:sp>
         <p:nvSpPr>
-          <p:cNvPr id="7" name="TextBox 6"/>
+          <p:cNvPr id="6" name="TextBox 5"/>
           <p:cNvSpPr txBox="1"/>
           <p:nvPr/>
         </p:nvSpPr>
@@ -17930,7 +16204,7 @@
       </p:sp>
       <p:sp>
         <p:nvSpPr>
-          <p:cNvPr id="8" name="TextBox 7"/>
+          <p:cNvPr id="7" name="TextBox 6"/>
           <p:cNvSpPr txBox="1"/>
           <p:nvPr/>
         </p:nvSpPr>
@@ -17965,13 +16239,13 @@
       </p:sp>
       <p:sp>
         <p:nvSpPr>
-          <p:cNvPr id="9" name="TextBox 8"/>
-          <p:cNvSpPr txBox="1"/>
-          <p:nvPr/>
-        </p:nvSpPr>
-        <p:spPr>
-          <a:xfrm>
-            <a:off x="777240" y="1737360"/>
+          <p:cNvPr id="8" name="TextBox 7"/>
+          <p:cNvSpPr txBox="1"/>
+          <p:nvPr/>
+        </p:nvSpPr>
+        <p:spPr>
+          <a:xfrm>
+            <a:off x="777240" y="1389888"/>
             <a:ext cx="10607040" cy="402336"/>
           </a:xfrm>
           <a:prstGeom prst="rect">
@@ -18000,13 +16274,13 @@
       </p:sp>
       <p:cxnSp>
         <p:nvCxnSpPr>
-          <p:cNvPr id="10" name="Connector 9"/>
+          <p:cNvPr id="9" name="Connector 8"/>
           <p:cNvCxnSpPr/>
           <p:nvPr/>
         </p:nvCxnSpPr>
         <p:spPr>
           <a:xfrm>
-            <a:off x="777240" y="2176272"/>
+            <a:off x="777240" y="1828800"/>
             <a:ext cx="10607040" cy="0"/>
           </a:xfrm>
           <a:prstGeom prst="line">
@@ -18035,14 +16309,14 @@
       </p:cxnSp>
       <p:graphicFrame>
         <p:nvGraphicFramePr>
-          <p:cNvPr id="11" name="Table 10"/>
+          <p:cNvPr id="10" name="Table 9"/>
           <p:cNvGraphicFramePr>
             <a:graphicFrameLocks noGrp="1"/>
           </p:cNvGraphicFramePr>
           <p:nvPr/>
         </p:nvGraphicFramePr>
         <p:xfrm>
-          <a:off x="2285999" y="2340864"/>
+          <a:off x="2285999" y="1993392"/>
           <a:ext cx="7589520" cy="1920240"/>
         </p:xfrm>
         <a:graphic>
@@ -19011,7 +17285,7 @@
         </p:nvSpPr>
         <p:spPr>
           <a:xfrm>
-            <a:off x="777240" y="1737360"/>
+            <a:off x="777240" y="1389888"/>
             <a:ext cx="10607040" cy="402336"/>
           </a:xfrm>
           <a:prstGeom prst="rect">
@@ -19046,7 +17320,7 @@
         </p:nvCxnSpPr>
         <p:spPr>
           <a:xfrm>
-            <a:off x="777240" y="2176272"/>
+            <a:off x="777240" y="1828800"/>
             <a:ext cx="10607040" cy="0"/>
           </a:xfrm>
           <a:prstGeom prst="line">
@@ -19089,7 +17363,7 @@
         </p:blipFill>
         <p:spPr>
           <a:xfrm>
-            <a:off x="3043428" y="2340864"/>
+            <a:off x="3043428" y="1993392"/>
             <a:ext cx="6074664" cy="411480"/>
           </a:xfrm>
           <a:prstGeom prst="rect">
@@ -19105,7 +17379,7 @@
         </p:nvSpPr>
         <p:spPr>
           <a:xfrm>
-            <a:off x="1305746" y="3003804"/>
+            <a:off x="1305746" y="2656332"/>
             <a:ext cx="8306442" cy="457200"/>
           </a:xfrm>
           <a:prstGeom prst="rect">
@@ -19148,7 +17422,7 @@
         </p:blipFill>
         <p:spPr>
           <a:xfrm>
-            <a:off x="9475029" y="3055620"/>
+            <a:off x="9475029" y="2708148"/>
             <a:ext cx="1380744" cy="353568"/>
           </a:xfrm>
           <a:prstGeom prst="rect">
@@ -19164,7 +17438,7 @@
         </p:nvSpPr>
         <p:spPr>
           <a:xfrm>
-            <a:off x="987552" y="3776472"/>
+            <a:off x="987552" y="3429000"/>
             <a:ext cx="10131551" cy="950976"/>
           </a:xfrm>
           <a:prstGeom prst="rect">
@@ -19314,44 +17588,9 @@
           </a:fontRef>
         </p:style>
       </p:cxnSp>
-      <p:sp>
-        <p:nvSpPr>
-          <p:cNvPr id="5" name="TextBox 4"/>
-          <p:cNvSpPr txBox="1"/>
-          <p:nvPr/>
-        </p:nvSpPr>
-        <p:spPr>
-          <a:xfrm>
-            <a:off x="777240" y="1261872"/>
-            <a:ext cx="10607040" cy="310896"/>
-          </a:xfrm>
-          <a:prstGeom prst="rect">
-            <a:avLst/>
-          </a:prstGeom>
-          <a:noFill/>
-        </p:spPr>
-        <p:txBody>
-          <a:bodyPr wrap="square" lIns="45720" rIns="45720" tIns="18288" bIns="18288" anchor="t">
-            <a:spAutoFit/>
-          </a:bodyPr>
-          <a:lstStyle/>
-          <a:p>
-            <a:pPr algn="l"/>
-            <a:r>
-              <a:rPr sz="1700" b="0" i="1">
-                <a:solidFill>
-                  <a:srgbClr val="6B6B6B"/>
-                </a:solidFill>
-                <a:latin typeface="Century Schoolbook"/>
-              </a:rPr>
-              <a:t>Copy all three lines.</a:t>
-            </a:r>
-          </a:p>
-        </p:txBody>
-      </p:sp>
       <p:cxnSp>
         <p:nvCxnSpPr>
-          <p:cNvPr id="6" name="Connector 5"/>
+          <p:cNvPr id="5" name="Connector 4"/>
           <p:cNvCxnSpPr/>
           <p:nvPr/>
         </p:nvCxnSpPr>
@@ -19386,7 +17625,7 @@
       </p:cxnSp>
       <p:sp>
         <p:nvSpPr>
-          <p:cNvPr id="7" name="TextBox 6"/>
+          <p:cNvPr id="6" name="TextBox 5"/>
           <p:cNvSpPr txBox="1"/>
           <p:nvPr/>
         </p:nvSpPr>
@@ -19421,7 +17660,7 @@
       </p:sp>
       <p:sp>
         <p:nvSpPr>
-          <p:cNvPr id="8" name="TextBox 7"/>
+          <p:cNvPr id="7" name="TextBox 6"/>
           <p:cNvSpPr txBox="1"/>
           <p:nvPr/>
         </p:nvSpPr>
@@ -19456,13 +17695,13 @@
       </p:sp>
       <p:sp>
         <p:nvSpPr>
-          <p:cNvPr id="9" name="TextBox 8"/>
-          <p:cNvSpPr txBox="1"/>
-          <p:nvPr/>
-        </p:nvSpPr>
-        <p:spPr>
-          <a:xfrm>
-            <a:off x="777240" y="1737360"/>
+          <p:cNvPr id="8" name="TextBox 7"/>
+          <p:cNvSpPr txBox="1"/>
+          <p:nvPr/>
+        </p:nvSpPr>
+        <p:spPr>
+          <a:xfrm>
+            <a:off x="777240" y="1389888"/>
             <a:ext cx="10607040" cy="402336"/>
           </a:xfrm>
           <a:prstGeom prst="rect">
@@ -19491,13 +17730,13 @@
       </p:sp>
       <p:cxnSp>
         <p:nvCxnSpPr>
-          <p:cNvPr id="10" name="Connector 9"/>
+          <p:cNvPr id="9" name="Connector 8"/>
           <p:cNvCxnSpPr/>
           <p:nvPr/>
         </p:nvCxnSpPr>
         <p:spPr>
           <a:xfrm>
-            <a:off x="777240" y="2176272"/>
+            <a:off x="777240" y="1828800"/>
             <a:ext cx="10607040" cy="0"/>
           </a:xfrm>
           <a:prstGeom prst="line">
@@ -19526,7 +17765,7 @@
       </p:cxnSp>
       <p:pic>
         <p:nvPicPr>
-          <p:cNvPr id="11" name="Picture 10" descr="b19428082cb99cfa.png"/>
+          <p:cNvPr id="10" name="Picture 9" descr="b19428082cb99cfa.png"/>
           <p:cNvPicPr>
             <a:picLocks noChangeAspect="1"/>
           </p:cNvPicPr>
@@ -19540,7 +17779,7 @@
         </p:blipFill>
         <p:spPr>
           <a:xfrm>
-            <a:off x="4390643" y="2377440"/>
+            <a:off x="4390643" y="2029968"/>
             <a:ext cx="3380232" cy="338328"/>
           </a:xfrm>
           <a:prstGeom prst="rect">
@@ -19550,13 +17789,13 @@
       </p:pic>
       <p:sp>
         <p:nvSpPr>
-          <p:cNvPr id="12" name="TextBox 11"/>
-          <p:cNvSpPr txBox="1"/>
-          <p:nvPr/>
-        </p:nvSpPr>
-        <p:spPr>
-          <a:xfrm>
-            <a:off x="1794714" y="3003804"/>
+          <p:cNvPr id="11" name="TextBox 10"/>
+          <p:cNvSpPr txBox="1"/>
+          <p:nvPr/>
+        </p:nvSpPr>
+        <p:spPr>
+          <a:xfrm>
+            <a:off x="1794714" y="2656332"/>
             <a:ext cx="8709251" cy="457200"/>
           </a:xfrm>
           <a:prstGeom prst="rect">
@@ -19585,13 +17824,13 @@
       </p:sp>
       <p:sp>
         <p:nvSpPr>
-          <p:cNvPr id="13" name="TextBox 12"/>
-          <p:cNvSpPr txBox="1"/>
-          <p:nvPr/>
-        </p:nvSpPr>
-        <p:spPr>
-          <a:xfrm>
-            <a:off x="1561688" y="3689604"/>
+          <p:cNvPr id="12" name="TextBox 11"/>
+          <p:cNvSpPr txBox="1"/>
+          <p:nvPr/>
+        </p:nvSpPr>
+        <p:spPr>
+          <a:xfrm>
+            <a:off x="1561688" y="3342132"/>
             <a:ext cx="6078534" cy="457200"/>
           </a:xfrm>
           <a:prstGeom prst="rect">
@@ -19620,7 +17859,7 @@
       </p:sp>
       <p:pic>
         <p:nvPicPr>
-          <p:cNvPr id="14" name="Picture 13" descr="4090bfd67d1032c8.png"/>
+          <p:cNvPr id="13" name="Picture 12" descr="4090bfd67d1032c8.png"/>
           <p:cNvPicPr>
             <a:picLocks noChangeAspect="1"/>
           </p:cNvPicPr>
@@ -19634,7 +17873,7 @@
         </p:blipFill>
         <p:spPr>
           <a:xfrm>
-            <a:off x="7503063" y="3718560"/>
+            <a:off x="7503063" y="3371088"/>
             <a:ext cx="3096768" cy="399288"/>
           </a:xfrm>
           <a:prstGeom prst="rect">
@@ -19644,13 +17883,13 @@
       </p:pic>
       <p:sp>
         <p:nvSpPr>
-          <p:cNvPr id="15" name="TextBox 14"/>
-          <p:cNvSpPr txBox="1"/>
-          <p:nvPr/>
-        </p:nvSpPr>
-        <p:spPr>
-          <a:xfrm>
-            <a:off x="987552" y="4462272"/>
+          <p:cNvPr id="14" name="TextBox 13"/>
+          <p:cNvSpPr txBox="1"/>
+          <p:nvPr/>
+        </p:nvSpPr>
+        <p:spPr>
+          <a:xfrm>
+            <a:off x="987552" y="4114800"/>
             <a:ext cx="10131551" cy="475488"/>
           </a:xfrm>
           <a:prstGeom prst="rect">
@@ -19800,44 +18039,9 @@
           </a:fontRef>
         </p:style>
       </p:cxnSp>
-      <p:sp>
-        <p:nvSpPr>
-          <p:cNvPr id="5" name="TextBox 4"/>
-          <p:cNvSpPr txBox="1"/>
-          <p:nvPr/>
-        </p:nvSpPr>
-        <p:spPr>
-          <a:xfrm>
-            <a:off x="777240" y="1261872"/>
-            <a:ext cx="10607040" cy="310896"/>
-          </a:xfrm>
-          <a:prstGeom prst="rect">
-            <a:avLst/>
-          </a:prstGeom>
-          <a:noFill/>
-        </p:spPr>
-        <p:txBody>
-          <a:bodyPr wrap="square" lIns="45720" rIns="45720" tIns="18288" bIns="18288" anchor="t">
-            <a:spAutoFit/>
-          </a:bodyPr>
-          <a:lstStyle/>
-          <a:p>
-            <a:pPr algn="l"/>
-            <a:r>
-              <a:rPr sz="1700" b="0" i="1">
-                <a:solidFill>
-                  <a:srgbClr val="6B6B6B"/>
-                </a:solidFill>
-                <a:latin typeface="Century Schoolbook"/>
-              </a:rPr>
-              <a:t>A product of two measurements.</a:t>
-            </a:r>
-          </a:p>
-        </p:txBody>
-      </p:sp>
       <p:cxnSp>
         <p:nvCxnSpPr>
-          <p:cNvPr id="6" name="Connector 5"/>
+          <p:cNvPr id="5" name="Connector 4"/>
           <p:cNvCxnSpPr/>
           <p:nvPr/>
         </p:nvCxnSpPr>
@@ -19872,7 +18076,7 @@
       </p:cxnSp>
       <p:sp>
         <p:nvSpPr>
-          <p:cNvPr id="7" name="TextBox 6"/>
+          <p:cNvPr id="6" name="TextBox 5"/>
           <p:cNvSpPr txBox="1"/>
           <p:nvPr/>
         </p:nvSpPr>
@@ -19907,7 +18111,7 @@
       </p:sp>
       <p:sp>
         <p:nvSpPr>
-          <p:cNvPr id="8" name="TextBox 7"/>
+          <p:cNvPr id="7" name="TextBox 6"/>
           <p:cNvSpPr txBox="1"/>
           <p:nvPr/>
         </p:nvSpPr>
@@ -19942,13 +18146,13 @@
       </p:sp>
       <p:sp>
         <p:nvSpPr>
-          <p:cNvPr id="9" name="TextBox 8"/>
-          <p:cNvSpPr txBox="1"/>
-          <p:nvPr/>
-        </p:nvSpPr>
-        <p:spPr>
-          <a:xfrm>
-            <a:off x="1609368" y="2080260"/>
+          <p:cNvPr id="8" name="TextBox 7"/>
+          <p:cNvSpPr txBox="1"/>
+          <p:nvPr/>
+        </p:nvSpPr>
+        <p:spPr>
+          <a:xfrm>
+            <a:off x="1609368" y="1714500"/>
             <a:ext cx="4175239" cy="457200"/>
           </a:xfrm>
           <a:prstGeom prst="rect">
@@ -19977,7 +18181,7 @@
       </p:sp>
       <p:pic>
         <p:nvPicPr>
-          <p:cNvPr id="10" name="Picture 9" descr="7ad9bfb61548f81e.png"/>
+          <p:cNvPr id="9" name="Picture 8" descr="7ad9bfb61548f81e.png"/>
           <p:cNvPicPr>
             <a:picLocks noChangeAspect="1"/>
           </p:cNvPicPr>
@@ -19991,7 +18195,7 @@
         </p:blipFill>
         <p:spPr>
           <a:xfrm>
-            <a:off x="5647447" y="2135124"/>
+            <a:off x="5647447" y="1769363"/>
             <a:ext cx="1594104" cy="347472"/>
           </a:xfrm>
           <a:prstGeom prst="rect">
@@ -20001,13 +18205,13 @@
       </p:pic>
       <p:sp>
         <p:nvSpPr>
-          <p:cNvPr id="11" name="TextBox 10"/>
-          <p:cNvSpPr txBox="1"/>
-          <p:nvPr/>
-        </p:nvSpPr>
-        <p:spPr>
-          <a:xfrm>
-            <a:off x="7241551" y="2080260"/>
+          <p:cNvPr id="10" name="TextBox 9"/>
+          <p:cNvSpPr txBox="1"/>
+          <p:nvPr/>
+        </p:nvSpPr>
+        <p:spPr>
+          <a:xfrm>
+            <a:off x="7241551" y="1714500"/>
             <a:ext cx="1381716" cy="457200"/>
           </a:xfrm>
           <a:prstGeom prst="rect">
@@ -20036,7 +18240,7 @@
       </p:sp>
       <p:pic>
         <p:nvPicPr>
-          <p:cNvPr id="12" name="Picture 11" descr="82188a05fd74b54c.png"/>
+          <p:cNvPr id="11" name="Picture 10" descr="82188a05fd74b54c.png"/>
           <p:cNvPicPr>
             <a:picLocks noChangeAspect="1"/>
           </p:cNvPicPr>
@@ -20050,7 +18254,7 @@
         </p:blipFill>
         <p:spPr>
           <a:xfrm>
-            <a:off x="8486108" y="2133599"/>
+            <a:off x="8486108" y="1767839"/>
             <a:ext cx="1389888" cy="350520"/>
           </a:xfrm>
           <a:prstGeom prst="rect">
@@ -20060,13 +18264,13 @@
       </p:pic>
       <p:sp>
         <p:nvSpPr>
-          <p:cNvPr id="13" name="TextBox 12"/>
-          <p:cNvSpPr txBox="1"/>
-          <p:nvPr/>
-        </p:nvSpPr>
-        <p:spPr>
-          <a:xfrm>
-            <a:off x="9875996" y="2080260"/>
+          <p:cNvPr id="12" name="TextBox 11"/>
+          <p:cNvSpPr txBox="1"/>
+          <p:nvPr/>
+        </p:nvSpPr>
+        <p:spPr>
+          <a:xfrm>
+            <a:off x="9875996" y="1714500"/>
             <a:ext cx="813314" cy="457200"/>
           </a:xfrm>
           <a:prstGeom prst="rect">
@@ -20095,13 +18299,13 @@
       </p:sp>
       <p:sp>
         <p:nvSpPr>
-          <p:cNvPr id="14" name="TextBox 13"/>
-          <p:cNvSpPr txBox="1"/>
-          <p:nvPr/>
-        </p:nvSpPr>
-        <p:spPr>
-          <a:xfrm>
-            <a:off x="777240" y="2834640"/>
+          <p:cNvPr id="13" name="TextBox 12"/>
+          <p:cNvSpPr txBox="1"/>
+          <p:nvPr/>
+        </p:nvSpPr>
+        <p:spPr>
+          <a:xfrm>
+            <a:off x="777240" y="2468880"/>
             <a:ext cx="10607040" cy="429370"/>
           </a:xfrm>
           <a:prstGeom prst="rect">
@@ -20130,13 +18334,13 @@
       </p:sp>
       <p:sp>
         <p:nvSpPr>
-          <p:cNvPr id="15" name="TextBox 14"/>
-          <p:cNvSpPr txBox="1"/>
-          <p:nvPr/>
-        </p:nvSpPr>
-        <p:spPr>
-          <a:xfrm>
-            <a:off x="777240" y="3556618"/>
+          <p:cNvPr id="14" name="TextBox 13"/>
+          <p:cNvSpPr txBox="1"/>
+          <p:nvPr/>
+        </p:nvSpPr>
+        <p:spPr>
+          <a:xfrm>
+            <a:off x="777240" y="3190858"/>
             <a:ext cx="10607040" cy="429370"/>
           </a:xfrm>
           <a:prstGeom prst="rect">
@@ -20286,44 +18490,9 @@
           </a:fontRef>
         </p:style>
       </p:cxnSp>
-      <p:sp>
-        <p:nvSpPr>
-          <p:cNvPr id="5" name="TextBox 4"/>
-          <p:cNvSpPr txBox="1"/>
-          <p:nvPr/>
-        </p:nvSpPr>
-        <p:spPr>
-          <a:xfrm>
-            <a:off x="777240" y="1261872"/>
-            <a:ext cx="10607040" cy="310896"/>
-          </a:xfrm>
-          <a:prstGeom prst="rect">
-            <a:avLst/>
-          </a:prstGeom>
-          <a:noFill/>
-        </p:spPr>
-        <p:txBody>
-          <a:bodyPr wrap="square" lIns="45720" rIns="45720" tIns="18288" bIns="18288" anchor="t">
-            <a:spAutoFit/>
-          </a:bodyPr>
-          <a:lstStyle/>
-          <a:p>
-            <a:pPr algn="l"/>
-            <a:r>
-              <a:rPr sz="1700" b="0" i="1">
-                <a:solidFill>
-                  <a:srgbClr val="6B6B6B"/>
-                </a:solidFill>
-                <a:latin typeface="Century Schoolbook"/>
-              </a:rPr>
-              <a:t>Worked.</a:t>
-            </a:r>
-          </a:p>
-        </p:txBody>
-      </p:sp>
       <p:cxnSp>
         <p:nvCxnSpPr>
-          <p:cNvPr id="6" name="Connector 5"/>
+          <p:cNvPr id="5" name="Connector 4"/>
           <p:cNvCxnSpPr/>
           <p:nvPr/>
         </p:nvCxnSpPr>
@@ -20358,7 +18527,7 @@
       </p:cxnSp>
       <p:sp>
         <p:nvSpPr>
-          <p:cNvPr id="7" name="TextBox 6"/>
+          <p:cNvPr id="6" name="TextBox 5"/>
           <p:cNvSpPr txBox="1"/>
           <p:nvPr/>
         </p:nvSpPr>
@@ -20393,7 +18562,7 @@
       </p:sp>
       <p:sp>
         <p:nvSpPr>
-          <p:cNvPr id="8" name="TextBox 7"/>
+          <p:cNvPr id="7" name="TextBox 6"/>
           <p:cNvSpPr txBox="1"/>
           <p:nvPr/>
         </p:nvSpPr>
@@ -20428,7 +18597,7 @@
       </p:sp>
       <p:pic>
         <p:nvPicPr>
-          <p:cNvPr id="9" name="Picture 8" descr="8831760cab574e03.png"/>
+          <p:cNvPr id="8" name="Picture 7" descr="8831760cab574e03.png"/>
           <p:cNvPicPr>
             <a:picLocks noChangeAspect="1"/>
           </p:cNvPicPr>
@@ -20450,44 +18619,9 @@
           </a:prstGeom>
         </p:spPr>
       </p:pic>
-      <p:sp>
-        <p:nvSpPr>
-          <p:cNvPr id="10" name="TextBox 9"/>
-          <p:cNvSpPr txBox="1"/>
-          <p:nvPr/>
-        </p:nvSpPr>
-        <p:spPr>
-          <a:xfrm>
-            <a:off x="7437120" y="1895856"/>
-            <a:ext cx="3947160" cy="502920"/>
-          </a:xfrm>
-          <a:prstGeom prst="rect">
-            <a:avLst/>
-          </a:prstGeom>
-          <a:noFill/>
-        </p:spPr>
-        <p:txBody>
-          <a:bodyPr wrap="square" lIns="45720" rIns="45720" tIns="18288" bIns="18288" anchor="ctr">
-            <a:spAutoFit/>
-          </a:bodyPr>
-          <a:lstStyle/>
-          <a:p>
-            <a:pPr algn="l"/>
-            <a:r>
-              <a:rPr sz="2100" b="0" i="1">
-                <a:solidFill>
-                  <a:srgbClr val="6B6B6B"/>
-                </a:solidFill>
-                <a:latin typeface="Century Schoolbook"/>
-              </a:rPr>
-              <a:t>multiply in full</a:t>
-            </a:r>
-          </a:p>
-        </p:txBody>
-      </p:sp>
       <p:pic>
         <p:nvPicPr>
-          <p:cNvPr id="11" name="Picture 10" descr="30f7ea4290ce6530.png"/>
+          <p:cNvPr id="9" name="Picture 8" descr="30f7ea4290ce6530.png"/>
           <p:cNvPicPr>
             <a:picLocks noChangeAspect="1"/>
           </p:cNvPicPr>
@@ -20509,44 +18643,9 @@
           </a:prstGeom>
         </p:spPr>
       </p:pic>
-      <p:sp>
-        <p:nvSpPr>
-          <p:cNvPr id="12" name="TextBox 11"/>
-          <p:cNvSpPr txBox="1"/>
-          <p:nvPr/>
-        </p:nvSpPr>
-        <p:spPr>
-          <a:xfrm>
-            <a:off x="7296912" y="2557272"/>
-            <a:ext cx="4087367" cy="502920"/>
-          </a:xfrm>
-          <a:prstGeom prst="rect">
-            <a:avLst/>
-          </a:prstGeom>
-          <a:noFill/>
-        </p:spPr>
-        <p:txBody>
-          <a:bodyPr wrap="square" lIns="45720" rIns="45720" tIns="18288" bIns="18288" anchor="ctr">
-            <a:spAutoFit/>
-          </a:bodyPr>
-          <a:lstStyle/>
-          <a:p>
-            <a:pPr algn="l"/>
-            <a:r>
-              <a:rPr sz="2100" b="0" i="1">
-                <a:solidFill>
-                  <a:srgbClr val="6B6B6B"/>
-                </a:solidFill>
-                <a:latin typeface="Century Schoolbook"/>
-              </a:rPr>
-              <a:t>the answer keeps 2</a:t>
-            </a:r>
-          </a:p>
-        </p:txBody>
-      </p:sp>
       <p:pic>
         <p:nvPicPr>
-          <p:cNvPr id="13" name="Picture 12" descr="ae705d3f714a20af.png"/>
+          <p:cNvPr id="10" name="Picture 9" descr="ae705d3f714a20af.png"/>
           <p:cNvPicPr>
             <a:picLocks noChangeAspect="1"/>
           </p:cNvPicPr>
@@ -20570,42 +18669,7 @@
       </p:pic>
       <p:sp>
         <p:nvSpPr>
-          <p:cNvPr id="14" name="TextBox 13"/>
-          <p:cNvSpPr txBox="1"/>
-          <p:nvPr/>
-        </p:nvSpPr>
-        <p:spPr>
-          <a:xfrm>
-            <a:off x="6803136" y="3215640"/>
-            <a:ext cx="4581143" cy="502920"/>
-          </a:xfrm>
-          <a:prstGeom prst="rect">
-            <a:avLst/>
-          </a:prstGeom>
-          <a:noFill/>
-        </p:spPr>
-        <p:txBody>
-          <a:bodyPr wrap="square" lIns="45720" rIns="45720" tIns="18288" bIns="18288" anchor="ctr">
-            <a:spAutoFit/>
-          </a:bodyPr>
-          <a:lstStyle/>
-          <a:p>
-            <a:pPr algn="l"/>
-            <a:r>
-              <a:rPr sz="2100" b="0" i="1">
-                <a:solidFill>
-                  <a:srgbClr val="6B6B6B"/>
-                </a:solidFill>
-                <a:latin typeface="Century Schoolbook"/>
-              </a:rPr>
-              <a:t>round once, at the end</a:t>
-            </a:r>
-          </a:p>
-        </p:txBody>
-      </p:sp>
-      <p:sp>
-        <p:nvSpPr>
-          <p:cNvPr id="15" name="TextBox 14"/>
+          <p:cNvPr id="11" name="TextBox 10"/>
           <p:cNvSpPr txBox="1"/>
           <p:nvPr/>
         </p:nvSpPr>
@@ -20779,44 +18843,9 @@
           </a:fontRef>
         </p:style>
       </p:cxnSp>
-      <p:sp>
-        <p:nvSpPr>
-          <p:cNvPr id="5" name="TextBox 4"/>
-          <p:cNvSpPr txBox="1"/>
-          <p:nvPr/>
-        </p:nvSpPr>
-        <p:spPr>
-          <a:xfrm>
-            <a:off x="777240" y="1261872"/>
-            <a:ext cx="10607040" cy="310896"/>
-          </a:xfrm>
-          <a:prstGeom prst="rect">
-            <a:avLst/>
-          </a:prstGeom>
-          <a:noFill/>
-        </p:spPr>
-        <p:txBody>
-          <a:bodyPr wrap="square" lIns="45720" rIns="45720" tIns="18288" bIns="18288" anchor="t">
-            <a:spAutoFit/>
-          </a:bodyPr>
-          <a:lstStyle/>
-          <a:p>
-            <a:pPr algn="l"/>
-            <a:r>
-              <a:rPr sz="1700" b="0" i="1">
-                <a:solidFill>
-                  <a:srgbClr val="6B6B6B"/>
-                </a:solidFill>
-                <a:latin typeface="Century Schoolbook"/>
-              </a:rPr>
-              <a:t>Same steps, your numbers. Boards up when done.</a:t>
-            </a:r>
-          </a:p>
-        </p:txBody>
-      </p:sp>
       <p:cxnSp>
         <p:nvCxnSpPr>
-          <p:cNvPr id="6" name="Connector 5"/>
+          <p:cNvPr id="5" name="Connector 4"/>
           <p:cNvCxnSpPr/>
           <p:nvPr/>
         </p:nvCxnSpPr>
@@ -20851,7 +18880,7 @@
       </p:cxnSp>
       <p:sp>
         <p:nvSpPr>
-          <p:cNvPr id="7" name="TextBox 6"/>
+          <p:cNvPr id="6" name="TextBox 5"/>
           <p:cNvSpPr txBox="1"/>
           <p:nvPr/>
         </p:nvSpPr>
@@ -20886,7 +18915,7 @@
       </p:sp>
       <p:sp>
         <p:nvSpPr>
-          <p:cNvPr id="8" name="TextBox 7"/>
+          <p:cNvPr id="7" name="TextBox 6"/>
           <p:cNvSpPr txBox="1"/>
           <p:nvPr/>
         </p:nvSpPr>
@@ -20921,7 +18950,7 @@
       </p:sp>
       <p:sp>
         <p:nvSpPr>
-          <p:cNvPr id="9" name="TextBox 8"/>
+          <p:cNvPr id="8" name="TextBox 7"/>
           <p:cNvSpPr txBox="1"/>
           <p:nvPr/>
         </p:nvSpPr>
@@ -20956,7 +18985,7 @@
       </p:sp>
       <p:pic>
         <p:nvPicPr>
-          <p:cNvPr id="10" name="Picture 9" descr="d18dbc9ddd0d98f4.png"/>
+          <p:cNvPr id="9" name="Picture 8" descr="d18dbc9ddd0d98f4.png"/>
           <p:cNvPicPr>
             <a:picLocks noChangeAspect="1"/>
           </p:cNvPicPr>
@@ -20980,7 +19009,7 @@
       </p:pic>
       <p:sp>
         <p:nvSpPr>
-          <p:cNvPr id="11" name="TextBox 10"/>
+          <p:cNvPr id="10" name="TextBox 9"/>
           <p:cNvSpPr txBox="1"/>
           <p:nvPr/>
         </p:nvSpPr>
@@ -21015,7 +19044,7 @@
       </p:sp>
       <p:pic>
         <p:nvPicPr>
-          <p:cNvPr id="12" name="Picture 11" descr="e2afadd128af9cbc.png"/>
+          <p:cNvPr id="11" name="Picture 10" descr="e2afadd128af9cbc.png"/>
           <p:cNvPicPr>
             <a:picLocks noChangeAspect="1"/>
           </p:cNvPicPr>
@@ -21039,7 +19068,7 @@
       </p:pic>
       <p:sp>
         <p:nvSpPr>
-          <p:cNvPr id="13" name="TextBox 12"/>
+          <p:cNvPr id="12" name="TextBox 11"/>
           <p:cNvSpPr txBox="1"/>
           <p:nvPr/>
         </p:nvSpPr>
@@ -21074,7 +19103,7 @@
       </p:sp>
       <p:sp>
         <p:nvSpPr>
-          <p:cNvPr id="14" name="TextBox 13"/>
+          <p:cNvPr id="13" name="TextBox 12"/>
           <p:cNvSpPr txBox="1"/>
           <p:nvPr/>
         </p:nvSpPr>

--- a/a7/packages/A7 Unit 4 - Solving Problems with Rational Numbers/Lessons/4.04/A7 4.04 Real-World Problems and Significant Digits - Slides.pptx
+++ b/a7/packages/A7 Unit 4 - Solving Problems with Rational Numbers/Lessons/4.04/A7 4.04 Real-World Problems and Significant Digits - Slides.pptx
@@ -15299,23 +15299,23 @@
         </p:nvSpPr>
         <p:spPr>
           <a:xfrm>
-            <a:off x="960120" y="2011680"/>
-            <a:ext cx="548640" cy="356616"/>
-          </a:xfrm>
-          <a:prstGeom prst="rect">
-            <a:avLst/>
-          </a:prstGeom>
-          <a:noFill/>
-        </p:spPr>
-        <p:txBody>
-          <a:bodyPr wrap="square" lIns="45720" rIns="45720" tIns="18288" bIns="18288" anchor="t">
+            <a:off x="960120" y="1499019"/>
+            <a:ext cx="548640" cy="377686"/>
+          </a:xfrm>
+          <a:prstGeom prst="rect">
+            <a:avLst/>
+          </a:prstGeom>
+          <a:noFill/>
+        </p:spPr>
+        <p:txBody>
+          <a:bodyPr wrap="square" lIns="45720" rIns="45720" tIns="18288" bIns="18288" anchor="ctr">
             <a:spAutoFit/>
           </a:bodyPr>
           <a:lstStyle/>
           <a:p>
             <a:pPr algn="l"/>
             <a:r>
-              <a:rPr sz="2100" b="1" i="0">
+              <a:rPr sz="1900" b="1" i="0">
                 <a:solidFill>
                   <a:srgbClr val="0B5394"/>
                 </a:solidFill>
@@ -15334,169 +15334,744 @@
         </p:nvSpPr>
         <p:spPr>
           <a:xfrm>
-            <a:off x="1554480" y="2011680"/>
-            <a:ext cx="9829800" cy="411480"/>
-          </a:xfrm>
-          <a:prstGeom prst="rect">
-            <a:avLst/>
-          </a:prstGeom>
-          <a:noFill/>
-        </p:spPr>
-        <p:txBody>
-          <a:bodyPr wrap="square" lIns="45720" rIns="45720" tIns="18288" bIns="18288" anchor="t">
+            <a:off x="1554480" y="1499019"/>
+            <a:ext cx="6057710" cy="377686"/>
+          </a:xfrm>
+          <a:prstGeom prst="rect">
+            <a:avLst/>
+          </a:prstGeom>
+          <a:noFill/>
+        </p:spPr>
+        <p:txBody>
+          <a:bodyPr wrap="none" lIns="45720" rIns="45720" tIns="18288" bIns="18288" anchor="ctr">
+            <a:noAutofit/>
+          </a:bodyPr>
+          <a:lstStyle/>
+          <a:p>
+            <a:pPr algn="l"/>
+            <a:r>
+              <a:rPr sz="1900" b="0" i="0">
+                <a:solidFill>
+                  <a:srgbClr val="1A1A1A"/>
+                </a:solidFill>
+                <a:latin typeface="Century Schoolbook"/>
+              </a:rPr>
+              <a:t>How many significant digits are in  6,030  grams?</a:t>
+            </a:r>
+          </a:p>
+        </p:txBody>
+      </p:sp>
+      <p:sp>
+        <p:nvSpPr>
+          <p:cNvPr id="10" name="TextBox 9"/>
+          <p:cNvSpPr txBox="1"/>
+          <p:nvPr/>
+        </p:nvSpPr>
+        <p:spPr>
+          <a:xfrm>
+            <a:off x="960120" y="1966953"/>
+            <a:ext cx="548640" cy="377686"/>
+          </a:xfrm>
+          <a:prstGeom prst="rect">
+            <a:avLst/>
+          </a:prstGeom>
+          <a:noFill/>
+        </p:spPr>
+        <p:txBody>
+          <a:bodyPr wrap="square" lIns="45720" rIns="45720" tIns="18288" bIns="18288" anchor="ctr">
             <a:spAutoFit/>
           </a:bodyPr>
           <a:lstStyle/>
           <a:p>
             <a:pPr algn="l"/>
             <a:r>
-              <a:rPr sz="2100" b="0" i="0">
-                <a:solidFill>
-                  <a:srgbClr val="1A1A1A"/>
-                </a:solidFill>
-                <a:latin typeface="Century Schoolbook"/>
-              </a:rPr>
-              <a:t>Six questions. Work down the page.</a:t>
-            </a:r>
-          </a:p>
-        </p:txBody>
-      </p:sp>
-      <p:sp>
-        <p:nvSpPr>
-          <p:cNvPr id="10" name="TextBox 9"/>
-          <p:cNvSpPr txBox="1"/>
-          <p:nvPr/>
-        </p:nvSpPr>
-        <p:spPr>
-          <a:xfrm>
-            <a:off x="960120" y="2551176"/>
-            <a:ext cx="548640" cy="356616"/>
-          </a:xfrm>
-          <a:prstGeom prst="rect">
-            <a:avLst/>
-          </a:prstGeom>
-          <a:noFill/>
-        </p:spPr>
-        <p:txBody>
-          <a:bodyPr wrap="square" lIns="45720" rIns="45720" tIns="18288" bIns="18288" anchor="t">
+              <a:rPr sz="1900" b="1" i="0">
+                <a:solidFill>
+                  <a:srgbClr val="0B5394"/>
+                </a:solidFill>
+                <a:latin typeface="Century Schoolbook"/>
+              </a:rPr>
+              <a:t>2.</a:t>
+            </a:r>
+          </a:p>
+        </p:txBody>
+      </p:sp>
+      <p:sp>
+        <p:nvSpPr>
+          <p:cNvPr id="11" name="TextBox 10"/>
+          <p:cNvSpPr txBox="1"/>
+          <p:nvPr/>
+        </p:nvSpPr>
+        <p:spPr>
+          <a:xfrm>
+            <a:off x="1554480" y="1966953"/>
+            <a:ext cx="6408826" cy="377686"/>
+          </a:xfrm>
+          <a:prstGeom prst="rect">
+            <a:avLst/>
+          </a:prstGeom>
+          <a:noFill/>
+        </p:spPr>
+        <p:txBody>
+          <a:bodyPr wrap="none" lIns="45720" rIns="45720" tIns="18288" bIns="18288" anchor="ctr">
+            <a:noAutofit/>
+          </a:bodyPr>
+          <a:lstStyle/>
+          <a:p>
+            <a:pPr algn="l"/>
+            <a:r>
+              <a:rPr sz="1900" b="0" i="0">
+                <a:solidFill>
+                  <a:srgbClr val="1A1A1A"/>
+                </a:solidFill>
+                <a:latin typeface="Century Schoolbook"/>
+              </a:rPr>
+              <a:t>How many significant digits are in  0.00710  meters?</a:t>
+            </a:r>
+          </a:p>
+        </p:txBody>
+      </p:sp>
+      <p:sp>
+        <p:nvSpPr>
+          <p:cNvPr id="12" name="TextBox 11"/>
+          <p:cNvSpPr txBox="1"/>
+          <p:nvPr/>
+        </p:nvSpPr>
+        <p:spPr>
+          <a:xfrm>
+            <a:off x="960120" y="2434888"/>
+            <a:ext cx="548640" cy="377686"/>
+          </a:xfrm>
+          <a:prstGeom prst="rect">
+            <a:avLst/>
+          </a:prstGeom>
+          <a:noFill/>
+        </p:spPr>
+        <p:txBody>
+          <a:bodyPr wrap="square" lIns="45720" rIns="45720" tIns="18288" bIns="18288" anchor="ctr">
             <a:spAutoFit/>
           </a:bodyPr>
           <a:lstStyle/>
           <a:p>
             <a:pPr algn="l"/>
             <a:r>
-              <a:rPr sz="2100" b="1" i="0">
+              <a:rPr sz="1900" b="1" i="0">
                 <a:solidFill>
                   <a:srgbClr val="0B5394"/>
                 </a:solidFill>
                 <a:latin typeface="Century Schoolbook"/>
               </a:rPr>
-              <a:t>2.</a:t>
-            </a:r>
-          </a:p>
-        </p:txBody>
-      </p:sp>
-      <p:sp>
-        <p:nvSpPr>
-          <p:cNvPr id="11" name="TextBox 10"/>
-          <p:cNvSpPr txBox="1"/>
-          <p:nvPr/>
-        </p:nvSpPr>
-        <p:spPr>
-          <a:xfrm>
-            <a:off x="1554480" y="2551176"/>
-            <a:ext cx="9829800" cy="411480"/>
-          </a:xfrm>
-          <a:prstGeom prst="rect">
-            <a:avLst/>
-          </a:prstGeom>
-          <a:noFill/>
-        </p:spPr>
-        <p:txBody>
-          <a:bodyPr wrap="square" lIns="45720" rIns="45720" tIns="18288" bIns="18288" anchor="t">
+              <a:t>3.</a:t>
+            </a:r>
+          </a:p>
+        </p:txBody>
+      </p:sp>
+      <p:sp>
+        <p:nvSpPr>
+          <p:cNvPr id="13" name="TextBox 12"/>
+          <p:cNvSpPr txBox="1"/>
+          <p:nvPr/>
+        </p:nvSpPr>
+        <p:spPr>
+          <a:xfrm>
+            <a:off x="1554480" y="2434888"/>
+            <a:ext cx="2908969" cy="377686"/>
+          </a:xfrm>
+          <a:prstGeom prst="rect">
+            <a:avLst/>
+          </a:prstGeom>
+          <a:noFill/>
+        </p:spPr>
+        <p:txBody>
+          <a:bodyPr wrap="none" lIns="45720" rIns="45720" tIns="18288" bIns="18288" anchor="ctr">
+            <a:noAutofit/>
+          </a:bodyPr>
+          <a:lstStyle/>
+          <a:p>
+            <a:pPr algn="l"/>
+            <a:r>
+              <a:rPr sz="1900" b="0" i="0">
+                <a:solidFill>
+                  <a:srgbClr val="1A1A1A"/>
+                </a:solidFill>
+                <a:latin typeface="Century Schoolbook"/>
+              </a:rPr>
+              <a:t>A rectangle measures  </a:t>
+            </a:r>
+          </a:p>
+        </p:txBody>
+      </p:sp>
+      <p:pic>
+        <p:nvPicPr>
+          <p:cNvPr id="14" name="Picture 13" descr="455a5450e4ac9801.png"/>
+          <p:cNvPicPr>
+            <a:picLocks noChangeAspect="1"/>
+          </p:cNvPicPr>
+          <p:nvPr/>
+        </p:nvPicPr>
+        <p:blipFill>
+          <a:blip r:embed="rId2"/>
+          <a:stretch>
+            <a:fillRect/>
+          </a:stretch>
+        </p:blipFill>
+        <p:spPr>
+          <a:xfrm>
+            <a:off x="4326289" y="2506648"/>
+            <a:ext cx="954289" cy="234165"/>
+          </a:xfrm>
+          <a:prstGeom prst="rect">
+            <a:avLst/>
+          </a:prstGeom>
+        </p:spPr>
+      </p:pic>
+      <p:sp>
+        <p:nvSpPr>
+          <p:cNvPr id="15" name="TextBox 14"/>
+          <p:cNvSpPr txBox="1"/>
+          <p:nvPr/>
+        </p:nvSpPr>
+        <p:spPr>
+          <a:xfrm>
+            <a:off x="5280578" y="2434888"/>
+            <a:ext cx="1066305" cy="377686"/>
+          </a:xfrm>
+          <a:prstGeom prst="rect">
+            <a:avLst/>
+          </a:prstGeom>
+          <a:noFill/>
+        </p:spPr>
+        <p:txBody>
+          <a:bodyPr wrap="none" lIns="45720" rIns="45720" tIns="18288" bIns="18288" anchor="ctr">
+            <a:noAutofit/>
+          </a:bodyPr>
+          <a:lstStyle/>
+          <a:p>
+            <a:pPr algn="l"/>
+            <a:r>
+              <a:rPr sz="1900" b="0" i="0">
+                <a:solidFill>
+                  <a:srgbClr val="1A1A1A"/>
+                </a:solidFill>
+                <a:latin typeface="Century Schoolbook"/>
+              </a:rPr>
+              <a:t>  m by  </a:t>
+            </a:r>
+          </a:p>
+        </p:txBody>
+      </p:sp>
+      <p:pic>
+        <p:nvPicPr>
+          <p:cNvPr id="16" name="Picture 15" descr="bb8fc48a8c32d166.png"/>
+          <p:cNvPicPr>
+            <a:picLocks noChangeAspect="1"/>
+          </p:cNvPicPr>
+          <p:nvPr/>
+        </p:nvPicPr>
+        <p:blipFill>
+          <a:blip r:embed="rId3"/>
+          <a:stretch>
+            <a:fillRect/>
+          </a:stretch>
+        </p:blipFill>
+        <p:spPr>
+          <a:xfrm>
+            <a:off x="6209724" y="2506648"/>
+            <a:ext cx="1087738" cy="234165"/>
+          </a:xfrm>
+          <a:prstGeom prst="rect">
+            <a:avLst/>
+          </a:prstGeom>
+        </p:spPr>
+      </p:pic>
+      <p:sp>
+        <p:nvSpPr>
+          <p:cNvPr id="17" name="TextBox 16"/>
+          <p:cNvSpPr txBox="1"/>
+          <p:nvPr/>
+        </p:nvSpPr>
+        <p:spPr>
+          <a:xfrm>
+            <a:off x="7297463" y="2434888"/>
+            <a:ext cx="4024107" cy="377686"/>
+          </a:xfrm>
+          <a:prstGeom prst="rect">
+            <a:avLst/>
+          </a:prstGeom>
+          <a:noFill/>
+        </p:spPr>
+        <p:txBody>
+          <a:bodyPr wrap="none" lIns="45720" rIns="45720" tIns="18288" bIns="18288" anchor="ctr">
+            <a:noAutofit/>
+          </a:bodyPr>
+          <a:lstStyle/>
+          <a:p>
+            <a:pPr algn="l"/>
+            <a:r>
+              <a:rPr sz="1900" b="0" i="0">
+                <a:solidFill>
+                  <a:srgbClr val="1A1A1A"/>
+                </a:solidFill>
+                <a:latin typeface="Century Schoolbook"/>
+              </a:rPr>
+              <a:t>  m. Find its area, to the correct </a:t>
+            </a:r>
+          </a:p>
+        </p:txBody>
+      </p:sp>
+      <p:sp>
+        <p:nvSpPr>
+          <p:cNvPr id="18" name="TextBox 17"/>
+          <p:cNvSpPr txBox="1"/>
+          <p:nvPr/>
+        </p:nvSpPr>
+        <p:spPr>
+          <a:xfrm>
+            <a:off x="1554480" y="2802238"/>
+            <a:ext cx="3535636" cy="377686"/>
+          </a:xfrm>
+          <a:prstGeom prst="rect">
+            <a:avLst/>
+          </a:prstGeom>
+          <a:noFill/>
+        </p:spPr>
+        <p:txBody>
+          <a:bodyPr wrap="none" lIns="45720" rIns="45720" tIns="18288" bIns="18288" anchor="ctr">
+            <a:noAutofit/>
+          </a:bodyPr>
+          <a:lstStyle/>
+          <a:p>
+            <a:pPr algn="l"/>
+            <a:r>
+              <a:rPr sz="1900" b="0" i="0">
+                <a:solidFill>
+                  <a:srgbClr val="1A1A1A"/>
+                </a:solidFill>
+                <a:latin typeface="Century Schoolbook"/>
+              </a:rPr>
+              <a:t>number of significant digits.</a:t>
+            </a:r>
+          </a:p>
+        </p:txBody>
+      </p:sp>
+      <p:sp>
+        <p:nvSpPr>
+          <p:cNvPr id="19" name="TextBox 18"/>
+          <p:cNvSpPr txBox="1"/>
+          <p:nvPr/>
+        </p:nvSpPr>
+        <p:spPr>
+          <a:xfrm>
+            <a:off x="960120" y="3270172"/>
+            <a:ext cx="548640" cy="377686"/>
+          </a:xfrm>
+          <a:prstGeom prst="rect">
+            <a:avLst/>
+          </a:prstGeom>
+          <a:noFill/>
+        </p:spPr>
+        <p:txBody>
+          <a:bodyPr wrap="square" lIns="45720" rIns="45720" tIns="18288" bIns="18288" anchor="ctr">
             <a:spAutoFit/>
           </a:bodyPr>
           <a:lstStyle/>
           <a:p>
             <a:pPr algn="l"/>
             <a:r>
-              <a:rPr sz="2100" b="0" i="0">
-                <a:solidFill>
-                  <a:srgbClr val="1A1A1A"/>
-                </a:solidFill>
-                <a:latin typeface="Century Schoolbook"/>
-              </a:rPr>
-              <a:t>Show the step that does the work, not just the answer.</a:t>
-            </a:r>
-          </a:p>
-        </p:txBody>
-      </p:sp>
-      <p:sp>
-        <p:nvSpPr>
-          <p:cNvPr id="12" name="TextBox 11"/>
-          <p:cNvSpPr txBox="1"/>
-          <p:nvPr/>
-        </p:nvSpPr>
-        <p:spPr>
-          <a:xfrm>
-            <a:off x="960120" y="3090672"/>
-            <a:ext cx="548640" cy="356616"/>
-          </a:xfrm>
-          <a:prstGeom prst="rect">
-            <a:avLst/>
-          </a:prstGeom>
-          <a:noFill/>
-        </p:spPr>
-        <p:txBody>
-          <a:bodyPr wrap="square" lIns="45720" rIns="45720" tIns="18288" bIns="18288" anchor="t">
+              <a:rPr sz="1900" b="1" i="0">
+                <a:solidFill>
+                  <a:srgbClr val="0B5394"/>
+                </a:solidFill>
+                <a:latin typeface="Century Schoolbook"/>
+              </a:rPr>
+              <a:t>4.</a:t>
+            </a:r>
+          </a:p>
+        </p:txBody>
+      </p:sp>
+      <p:pic>
+        <p:nvPicPr>
+          <p:cNvPr id="20" name="Picture 19" descr="1b1c445e0e5cd7a5.png"/>
+          <p:cNvPicPr>
+            <a:picLocks noChangeAspect="1"/>
+          </p:cNvPicPr>
+          <p:nvPr/>
+        </p:nvPicPr>
+        <p:blipFill>
+          <a:blip r:embed="rId4"/>
+          <a:stretch>
+            <a:fillRect/>
+          </a:stretch>
+        </p:blipFill>
+        <p:spPr>
+          <a:xfrm>
+            <a:off x="1627632" y="3320530"/>
+            <a:ext cx="2696684" cy="276970"/>
+          </a:xfrm>
+          <a:prstGeom prst="rect">
+            <a:avLst/>
+          </a:prstGeom>
+        </p:spPr>
+      </p:pic>
+      <p:sp>
+        <p:nvSpPr>
+          <p:cNvPr id="21" name="TextBox 20"/>
+          <p:cNvSpPr txBox="1"/>
+          <p:nvPr/>
+        </p:nvSpPr>
+        <p:spPr>
+          <a:xfrm>
+            <a:off x="4324316" y="3270172"/>
+            <a:ext cx="6903239" cy="377686"/>
+          </a:xfrm>
+          <a:prstGeom prst="rect">
+            <a:avLst/>
+          </a:prstGeom>
+          <a:noFill/>
+        </p:spPr>
+        <p:txBody>
+          <a:bodyPr wrap="none" lIns="45720" rIns="45720" tIns="18288" bIns="18288" anchor="ctr">
+            <a:noAutofit/>
+          </a:bodyPr>
+          <a:lstStyle/>
+          <a:p>
+            <a:pPr algn="l"/>
+            <a:r>
+              <a:rPr sz="1900" b="0" i="0">
+                <a:solidFill>
+                  <a:srgbClr val="1A1A1A"/>
+                </a:solidFill>
+                <a:latin typeface="Century Schoolbook"/>
+              </a:rPr>
+              <a:t>  meters, both measured. Write the sum with the correct </a:t>
+            </a:r>
+          </a:p>
+        </p:txBody>
+      </p:sp>
+      <p:sp>
+        <p:nvSpPr>
+          <p:cNvPr id="22" name="TextBox 21"/>
+          <p:cNvSpPr txBox="1"/>
+          <p:nvPr/>
+        </p:nvSpPr>
+        <p:spPr>
+          <a:xfrm>
+            <a:off x="1554480" y="3637522"/>
+            <a:ext cx="1347009" cy="377686"/>
+          </a:xfrm>
+          <a:prstGeom prst="rect">
+            <a:avLst/>
+          </a:prstGeom>
+          <a:noFill/>
+        </p:spPr>
+        <p:txBody>
+          <a:bodyPr wrap="none" lIns="45720" rIns="45720" tIns="18288" bIns="18288" anchor="ctr">
+            <a:noAutofit/>
+          </a:bodyPr>
+          <a:lstStyle/>
+          <a:p>
+            <a:pPr algn="l"/>
+            <a:r>
+              <a:rPr sz="1900" b="0" i="0">
+                <a:solidFill>
+                  <a:srgbClr val="1A1A1A"/>
+                </a:solidFill>
+                <a:latin typeface="Century Schoolbook"/>
+              </a:rPr>
+              <a:t>precision.</a:t>
+            </a:r>
+          </a:p>
+        </p:txBody>
+      </p:sp>
+      <p:sp>
+        <p:nvSpPr>
+          <p:cNvPr id="23" name="TextBox 22"/>
+          <p:cNvSpPr txBox="1"/>
+          <p:nvPr/>
+        </p:nvSpPr>
+        <p:spPr>
+          <a:xfrm>
+            <a:off x="960120" y="4105457"/>
+            <a:ext cx="548640" cy="377686"/>
+          </a:xfrm>
+          <a:prstGeom prst="rect">
+            <a:avLst/>
+          </a:prstGeom>
+          <a:noFill/>
+        </p:spPr>
+        <p:txBody>
+          <a:bodyPr wrap="square" lIns="45720" rIns="45720" tIns="18288" bIns="18288" anchor="ctr">
             <a:spAutoFit/>
           </a:bodyPr>
           <a:lstStyle/>
           <a:p>
             <a:pPr algn="l"/>
             <a:r>
-              <a:rPr sz="2100" b="1" i="0">
+              <a:rPr sz="1900" b="1" i="0">
                 <a:solidFill>
                   <a:srgbClr val="0B5394"/>
                 </a:solidFill>
                 <a:latin typeface="Century Schoolbook"/>
               </a:rPr>
-              <a:t>3.</a:t>
-            </a:r>
-          </a:p>
-        </p:txBody>
-      </p:sp>
-      <p:sp>
-        <p:nvSpPr>
-          <p:cNvPr id="13" name="TextBox 12"/>
-          <p:cNvSpPr txBox="1"/>
-          <p:nvPr/>
-        </p:nvSpPr>
-        <p:spPr>
-          <a:xfrm>
-            <a:off x="1554480" y="3090672"/>
-            <a:ext cx="9829800" cy="411480"/>
-          </a:xfrm>
-          <a:prstGeom prst="rect">
-            <a:avLst/>
-          </a:prstGeom>
-          <a:noFill/>
-        </p:spPr>
-        <p:txBody>
-          <a:bodyPr wrap="square" lIns="45720" rIns="45720" tIns="18288" bIns="18288" anchor="t">
+              <a:t>5.</a:t>
+            </a:r>
+          </a:p>
+        </p:txBody>
+      </p:sp>
+      <p:sp>
+        <p:nvSpPr>
+          <p:cNvPr id="24" name="TextBox 23"/>
+          <p:cNvSpPr txBox="1"/>
+          <p:nvPr/>
+        </p:nvSpPr>
+        <p:spPr>
+          <a:xfrm>
+            <a:off x="1554480" y="4105457"/>
+            <a:ext cx="1851624" cy="377686"/>
+          </a:xfrm>
+          <a:prstGeom prst="rect">
+            <a:avLst/>
+          </a:prstGeom>
+          <a:noFill/>
+        </p:spPr>
+        <p:txBody>
+          <a:bodyPr wrap="none" lIns="45720" rIns="45720" tIns="18288" bIns="18288" anchor="ctr">
+            <a:noAutofit/>
+          </a:bodyPr>
+          <a:lstStyle/>
+          <a:p>
+            <a:pPr algn="l"/>
+            <a:r>
+              <a:rPr sz="1900" b="0" i="0">
+                <a:solidFill>
+                  <a:srgbClr val="1A1A1A"/>
+                </a:solidFill>
+                <a:latin typeface="Century Schoolbook"/>
+              </a:rPr>
+              <a:t>A car travels  </a:t>
+            </a:r>
+          </a:p>
+        </p:txBody>
+      </p:sp>
+      <p:pic>
+        <p:nvPicPr>
+          <p:cNvPr id="25" name="Picture 24" descr="e70ffa874200d03c.png"/>
+          <p:cNvPicPr>
+            <a:picLocks noChangeAspect="1"/>
+          </p:cNvPicPr>
+          <p:nvPr/>
+        </p:nvPicPr>
+        <p:blipFill>
+          <a:blip r:embed="rId5"/>
+          <a:stretch>
+            <a:fillRect/>
+          </a:stretch>
+        </p:blipFill>
+        <p:spPr>
+          <a:xfrm>
+            <a:off x="3268944" y="4177217"/>
+            <a:ext cx="1067595" cy="234165"/>
+          </a:xfrm>
+          <a:prstGeom prst="rect">
+            <a:avLst/>
+          </a:prstGeom>
+        </p:spPr>
+      </p:pic>
+      <p:sp>
+        <p:nvSpPr>
+          <p:cNvPr id="26" name="TextBox 25"/>
+          <p:cNvSpPr txBox="1"/>
+          <p:nvPr/>
+        </p:nvSpPr>
+        <p:spPr>
+          <a:xfrm>
+            <a:off x="4336539" y="4105457"/>
+            <a:ext cx="6919699" cy="377686"/>
+          </a:xfrm>
+          <a:prstGeom prst="rect">
+            <a:avLst/>
+          </a:prstGeom>
+          <a:noFill/>
+        </p:spPr>
+        <p:txBody>
+          <a:bodyPr wrap="none" lIns="45720" rIns="45720" tIns="18288" bIns="18288" anchor="ctr">
+            <a:noAutofit/>
+          </a:bodyPr>
+          <a:lstStyle/>
+          <a:p>
+            <a:pPr algn="l"/>
+            <a:r>
+              <a:rPr sz="1900" b="0" i="0">
+                <a:solidFill>
+                  <a:srgbClr val="1A1A1A"/>
+                </a:solidFill>
+                <a:latin typeface="Century Schoolbook"/>
+              </a:rPr>
+              <a:t>  km in  4.0  hours. Find its average speed, to the correct </a:t>
+            </a:r>
+          </a:p>
+        </p:txBody>
+      </p:sp>
+      <p:sp>
+        <p:nvSpPr>
+          <p:cNvPr id="27" name="TextBox 26"/>
+          <p:cNvSpPr txBox="1"/>
+          <p:nvPr/>
+        </p:nvSpPr>
+        <p:spPr>
+          <a:xfrm>
+            <a:off x="1554480" y="4472807"/>
+            <a:ext cx="3535636" cy="377686"/>
+          </a:xfrm>
+          <a:prstGeom prst="rect">
+            <a:avLst/>
+          </a:prstGeom>
+          <a:noFill/>
+        </p:spPr>
+        <p:txBody>
+          <a:bodyPr wrap="none" lIns="45720" rIns="45720" tIns="18288" bIns="18288" anchor="ctr">
+            <a:noAutofit/>
+          </a:bodyPr>
+          <a:lstStyle/>
+          <a:p>
+            <a:pPr algn="l"/>
+            <a:r>
+              <a:rPr sz="1900" b="0" i="0">
+                <a:solidFill>
+                  <a:srgbClr val="1A1A1A"/>
+                </a:solidFill>
+                <a:latin typeface="Century Schoolbook"/>
+              </a:rPr>
+              <a:t>number of significant digits.</a:t>
+            </a:r>
+          </a:p>
+        </p:txBody>
+      </p:sp>
+      <p:sp>
+        <p:nvSpPr>
+          <p:cNvPr id="28" name="TextBox 27"/>
+          <p:cNvSpPr txBox="1"/>
+          <p:nvPr/>
+        </p:nvSpPr>
+        <p:spPr>
+          <a:xfrm>
+            <a:off x="960120" y="4940741"/>
+            <a:ext cx="548640" cy="377686"/>
+          </a:xfrm>
+          <a:prstGeom prst="rect">
+            <a:avLst/>
+          </a:prstGeom>
+          <a:noFill/>
+        </p:spPr>
+        <p:txBody>
+          <a:bodyPr wrap="square" lIns="45720" rIns="45720" tIns="18288" bIns="18288" anchor="ctr">
             <a:spAutoFit/>
           </a:bodyPr>
           <a:lstStyle/>
           <a:p>
             <a:pPr algn="l"/>
             <a:r>
-              <a:rPr sz="2100" b="0" i="0">
-                <a:solidFill>
-                  <a:srgbClr val="1A1A1A"/>
-                </a:solidFill>
-                <a:latin typeface="Century Schoolbook"/>
-              </a:rPr>
-              <a:t>Silence until the six minutes are up.</a:t>
+              <a:rPr sz="1900" b="1" i="0">
+                <a:solidFill>
+                  <a:srgbClr val="0B5394"/>
+                </a:solidFill>
+                <a:latin typeface="Century Schoolbook"/>
+              </a:rPr>
+              <a:t>6.</a:t>
+            </a:r>
+          </a:p>
+        </p:txBody>
+      </p:sp>
+      <p:pic>
+        <p:nvPicPr>
+          <p:cNvPr id="29" name="Picture 28" descr="98201dc88cb6851c.png"/>
+          <p:cNvPicPr>
+            <a:picLocks noChangeAspect="1"/>
+          </p:cNvPicPr>
+          <p:nvPr/>
+        </p:nvPicPr>
+        <p:blipFill>
+          <a:blip r:embed="rId6"/>
+          <a:stretch>
+            <a:fillRect/>
+          </a:stretch>
+        </p:blipFill>
+        <p:spPr>
+          <a:xfrm>
+            <a:off x="1627632" y="4991100"/>
+            <a:ext cx="2958547" cy="276970"/>
+          </a:xfrm>
+          <a:prstGeom prst="rect">
+            <a:avLst/>
+          </a:prstGeom>
+        </p:spPr>
+      </p:pic>
+      <p:sp>
+        <p:nvSpPr>
+          <p:cNvPr id="30" name="TextBox 29"/>
+          <p:cNvSpPr txBox="1"/>
+          <p:nvPr/>
+        </p:nvSpPr>
+        <p:spPr>
+          <a:xfrm>
+            <a:off x="4586179" y="4940741"/>
+            <a:ext cx="6603237" cy="377686"/>
+          </a:xfrm>
+          <a:prstGeom prst="rect">
+            <a:avLst/>
+          </a:prstGeom>
+          <a:noFill/>
+        </p:spPr>
+        <p:txBody>
+          <a:bodyPr wrap="none" lIns="45720" rIns="45720" tIns="18288" bIns="18288" anchor="ctr">
+            <a:noAutofit/>
+          </a:bodyPr>
+          <a:lstStyle/>
+          <a:p>
+            <a:pPr algn="l"/>
+            <a:r>
+              <a:rPr sz="1900" b="0" i="0">
+                <a:solidFill>
+                  <a:srgbClr val="1A1A1A"/>
+                </a:solidFill>
+                <a:latin typeface="Century Schoolbook"/>
+              </a:rPr>
+              <a:t>  grams, both measured. Write the difference with the </a:t>
+            </a:r>
+          </a:p>
+        </p:txBody>
+      </p:sp>
+      <p:sp>
+        <p:nvSpPr>
+          <p:cNvPr id="31" name="TextBox 30"/>
+          <p:cNvSpPr txBox="1"/>
+          <p:nvPr/>
+        </p:nvSpPr>
+        <p:spPr>
+          <a:xfrm>
+            <a:off x="1554480" y="5308092"/>
+            <a:ext cx="2232819" cy="377686"/>
+          </a:xfrm>
+          <a:prstGeom prst="rect">
+            <a:avLst/>
+          </a:prstGeom>
+          <a:noFill/>
+        </p:spPr>
+        <p:txBody>
+          <a:bodyPr wrap="none" lIns="45720" rIns="45720" tIns="18288" bIns="18288" anchor="ctr">
+            <a:noAutofit/>
+          </a:bodyPr>
+          <a:lstStyle/>
+          <a:p>
+            <a:pPr algn="l"/>
+            <a:r>
+              <a:rPr sz="1900" b="0" i="0">
+                <a:solidFill>
+                  <a:srgbClr val="1A1A1A"/>
+                </a:solidFill>
+                <a:latin typeface="Century Schoolbook"/>
+              </a:rPr>
+              <a:t>correct precision.</a:t>
             </a:r>
           </a:p>
         </p:txBody>

--- a/a7/packages/A7 Unit 4 - Solving Problems with Rational Numbers/Lessons/4.04/A7 4.04 Real-World Problems and Significant Digits - Slides.pptx
+++ b/a7/packages/A7 Unit 4 - Solving Problems with Rational Numbers/Lessons/4.04/A7 4.04 Real-World Problems and Significant Digits - Slides.pptx
@@ -3145,11 +3145,11 @@
           <a:p>
             <a:pPr algn="ctr"/>
             <a:r>
-              <a:rPr sz="1500" b="0" i="0">
+              <a:rPr sz="1420" b="0" i="0">
                 <a:solidFill>
                   <a:srgbClr val="6B6B6B"/>
                 </a:solidFill>
-                <a:latin typeface="Century Schoolbook"/>
+                <a:latin typeface="Lexend"/>
               </a:rPr>
               <a:t>GRADE 7 ACCELERATED  ·  UNIT 4  ·  LESSON 4</a:t>
             </a:r>
@@ -3180,11 +3180,11 @@
           <a:p>
             <a:pPr algn="ctr"/>
             <a:r>
-              <a:rPr sz="3400" b="1" i="0">
-                <a:solidFill>
-                  <a:srgbClr val="1A1A1A"/>
-                </a:solidFill>
-                <a:latin typeface="Century Schoolbook"/>
+              <a:rPr sz="3229" b="1" i="0">
+                <a:solidFill>
+                  <a:srgbClr val="1A1A1A"/>
+                </a:solidFill>
+                <a:latin typeface="Lexend"/>
               </a:rPr>
               <a:t>Real-World Problems and Significant Digits</a:t>
             </a:r>
@@ -3285,11 +3285,11 @@
           <a:p>
             <a:pPr algn="ctr"/>
             <a:r>
-              <a:rPr sz="1600" b="1" i="0">
-                <a:solidFill>
-                  <a:srgbClr val="1A1A1A"/>
-                </a:solidFill>
-                <a:latin typeface="Century Schoolbook"/>
+              <a:rPr sz="1520" b="1" i="0">
+                <a:solidFill>
+                  <a:srgbClr val="1A1A1A"/>
+                </a:solidFill>
+                <a:latin typeface="Lexend"/>
               </a:rPr>
               <a:t>MA.8.NSO.1.6</a:t>
             </a:r>
@@ -3320,11 +3320,11 @@
           <a:p>
             <a:pPr algn="ctr"/>
             <a:r>
-              <a:rPr sz="1900" b="0" i="1">
-                <a:solidFill>
-                  <a:srgbClr val="1A1A1A"/>
-                </a:solidFill>
-                <a:latin typeface="Century Schoolbook"/>
+              <a:rPr sz="1810" b="0" i="0">
+                <a:solidFill>
+                  <a:srgbClr val="1A1A1A"/>
+                </a:solidFill>
+                <a:latin typeface="Lexend"/>
               </a:rPr>
               <a:t>I can solve a real-world problem with numbers in scientific notation and report the answer with the right number of significant digits.</a:t>
             </a:r>
@@ -3390,11 +3390,11 @@
           <a:p>
             <a:pPr algn="l"/>
             <a:r>
-              <a:rPr sz="1100" b="0" i="1">
+              <a:rPr sz="1040" b="0" i="0">
                 <a:solidFill>
                   <a:srgbClr val="6B6B6B"/>
                 </a:solidFill>
-                <a:latin typeface="Century Schoolbook"/>
+                <a:latin typeface="Lexend"/>
               </a:rPr>
               <a:t>Grade 7 Accelerated · Unit 4 · Lesson 4 — Real-World Problems and Significant Digits</a:t>
             </a:r>
@@ -3425,11 +3425,11 @@
           <a:p>
             <a:pPr algn="r"/>
             <a:r>
-              <a:rPr sz="1100" b="0" i="0">
+              <a:rPr sz="1040" b="0" i="0">
                 <a:solidFill>
                   <a:srgbClr val="6B6B6B"/>
                 </a:solidFill>
-                <a:latin typeface="Century Schoolbook"/>
+                <a:latin typeface="Lexend"/>
               </a:rPr>
               <a:t>1</a:t>
             </a:r>
@@ -3478,11 +3478,11 @@
           <a:p>
             <a:pPr algn="l"/>
             <a:r>
-              <a:rPr sz="3600" b="1" i="0">
-                <a:solidFill>
-                  <a:srgbClr val="1A1A1A"/>
-                </a:solidFill>
-                <a:latin typeface="Century Schoolbook"/>
+              <a:rPr sz="3420" b="1" i="0">
+                <a:solidFill>
+                  <a:srgbClr val="1A1A1A"/>
+                </a:solidFill>
+                <a:latin typeface="Lexend"/>
               </a:rPr>
               <a:t>Your Turn</a:t>
             </a:r>
@@ -3618,11 +3618,11 @@
           <a:p>
             <a:pPr algn="l"/>
             <a:r>
-              <a:rPr sz="1100" b="0" i="1">
+              <a:rPr sz="1040" b="0" i="0">
                 <a:solidFill>
                   <a:srgbClr val="6B6B6B"/>
                 </a:solidFill>
-                <a:latin typeface="Century Schoolbook"/>
+                <a:latin typeface="Lexend"/>
               </a:rPr>
               <a:t>Grade 7 Accelerated · Unit 4 · Lesson 4 — Real-World Problems and Significant Digits</a:t>
             </a:r>
@@ -3653,11 +3653,11 @@
           <a:p>
             <a:pPr algn="r"/>
             <a:r>
-              <a:rPr sz="1100" b="0" i="0">
+              <a:rPr sz="1040" b="0" i="0">
                 <a:solidFill>
                   <a:srgbClr val="6B6B6B"/>
                 </a:solidFill>
-                <a:latin typeface="Century Schoolbook"/>
+                <a:latin typeface="Lexend"/>
               </a:rPr>
               <a:t>10</a:t>
             </a:r>
@@ -3672,8 +3672,8 @@
         </p:nvSpPr>
         <p:spPr>
           <a:xfrm>
-            <a:off x="1727171" y="2185415"/>
-            <a:ext cx="3101434" cy="457200"/>
+            <a:off x="1769101" y="1583436"/>
+            <a:ext cx="3077173" cy="457200"/>
           </a:xfrm>
           <a:prstGeom prst="rect">
             <a:avLst/>
@@ -3688,11 +3688,11 @@
           <a:p>
             <a:pPr algn="l"/>
             <a:r>
-              <a:rPr sz="2600" b="0" i="0">
-                <a:solidFill>
-                  <a:srgbClr val="1A1A1A"/>
-                </a:solidFill>
-                <a:latin typeface="Century Schoolbook"/>
+              <a:rPr sz="2470" b="0" i="0">
+                <a:solidFill>
+                  <a:srgbClr val="1A1A1A"/>
+                </a:solidFill>
+                <a:latin typeface="Lexend"/>
               </a:rPr>
               <a:t>A field measures  </a:t>
             </a:r>
@@ -3701,7 +3701,7 @@
       </p:sp>
       <p:pic>
         <p:nvPicPr>
-          <p:cNvPr id="9" name="Picture 8" descr="2ea2d2cafb18840a.png"/>
+          <p:cNvPr id="9" name="Picture 8" descr="19219eb587cce93d.png"/>
           <p:cNvPicPr>
             <a:picLocks noChangeAspect="1"/>
           </p:cNvPicPr>
@@ -3715,8 +3715,8 @@
         </p:blipFill>
         <p:spPr>
           <a:xfrm>
-            <a:off x="4691445" y="2194560"/>
-            <a:ext cx="1789176" cy="438912"/>
+            <a:off x="4709115" y="1600200"/>
+            <a:ext cx="1792224" cy="423672"/>
           </a:xfrm>
           <a:prstGeom prst="rect">
             <a:avLst/>
@@ -3731,8 +3731,8 @@
         </p:nvSpPr>
         <p:spPr>
           <a:xfrm>
-            <a:off x="6480621" y="2185415"/>
-            <a:ext cx="1381716" cy="457200"/>
+            <a:off x="6501339" y="1583436"/>
+            <a:ext cx="1378148" cy="457200"/>
           </a:xfrm>
           <a:prstGeom prst="rect">
             <a:avLst/>
@@ -3747,11 +3747,11 @@
           <a:p>
             <a:pPr algn="l"/>
             <a:r>
-              <a:rPr sz="2600" b="0" i="0">
-                <a:solidFill>
-                  <a:srgbClr val="1A1A1A"/>
-                </a:solidFill>
-                <a:latin typeface="Century Schoolbook"/>
+              <a:rPr sz="2470" b="0" i="0">
+                <a:solidFill>
+                  <a:srgbClr val="1A1A1A"/>
+                </a:solidFill>
+                <a:latin typeface="Lexend"/>
               </a:rPr>
               <a:t>  m by  </a:t>
             </a:r>
@@ -3760,7 +3760,7 @@
       </p:sp>
       <p:pic>
         <p:nvPicPr>
-          <p:cNvPr id="11" name="Picture 10" descr="798bb70a13d738fd.png"/>
+          <p:cNvPr id="11" name="Picture 10" descr="acda4b72b75ce9a7.png"/>
           <p:cNvPicPr>
             <a:picLocks noChangeAspect="1"/>
           </p:cNvPicPr>
@@ -3774,8 +3774,8 @@
         </p:blipFill>
         <p:spPr>
           <a:xfrm>
-            <a:off x="7725177" y="2194560"/>
-            <a:ext cx="2033015" cy="438912"/>
+            <a:off x="7742327" y="1600200"/>
+            <a:ext cx="2008632" cy="423672"/>
           </a:xfrm>
           <a:prstGeom prst="rect">
             <a:avLst/>
@@ -3790,8 +3790,8 @@
         </p:nvSpPr>
         <p:spPr>
           <a:xfrm>
-            <a:off x="9758193" y="2185415"/>
-            <a:ext cx="813314" cy="457200"/>
+            <a:off x="9750959" y="1583436"/>
+            <a:ext cx="778618" cy="457200"/>
           </a:xfrm>
           <a:prstGeom prst="rect">
             <a:avLst/>
@@ -3806,11 +3806,11 @@
           <a:p>
             <a:pPr algn="l"/>
             <a:r>
-              <a:rPr sz="2600" b="0" i="0">
-                <a:solidFill>
-                  <a:srgbClr val="1A1A1A"/>
-                </a:solidFill>
-                <a:latin typeface="Century Schoolbook"/>
+              <a:rPr sz="2470" b="0" i="0">
+                <a:solidFill>
+                  <a:srgbClr val="1A1A1A"/>
+                </a:solidFill>
+                <a:latin typeface="Lexend"/>
               </a:rPr>
               <a:t>  m.</a:t>
             </a:r>
@@ -3825,7 +3825,7 @@
         </p:nvSpPr>
         <p:spPr>
           <a:xfrm>
-            <a:off x="777240" y="2953512"/>
+            <a:off x="777240" y="2343912"/>
             <a:ext cx="10607040" cy="429370"/>
           </a:xfrm>
           <a:prstGeom prst="rect">
@@ -3841,20 +3841,186 @@
           <a:p>
             <a:pPr algn="ctr"/>
             <a:r>
-              <a:rPr sz="2400" b="0" i="0">
-                <a:solidFill>
-                  <a:srgbClr val="1A1A1A"/>
-                </a:solidFill>
-                <a:latin typeface="Century Schoolbook"/>
+              <a:rPr sz="2280" b="0" i="0">
+                <a:solidFill>
+                  <a:srgbClr val="1A1A1A"/>
+                </a:solidFill>
+                <a:latin typeface="Lexend"/>
               </a:rPr>
               <a:t>What is its area?</a:t>
             </a:r>
           </a:p>
         </p:txBody>
       </p:sp>
-      <p:sp>
-        <p:nvSpPr>
-          <p:cNvPr id="14" name="TextBox 13"/>
+      <p:pic>
+        <p:nvPicPr>
+          <p:cNvPr id="14" name="Picture 13" descr="94a8240adc6e96da.png"/>
+          <p:cNvPicPr>
+            <a:picLocks noChangeAspect="1"/>
+          </p:cNvPicPr>
+          <p:nvPr/>
+        </p:nvPicPr>
+        <p:blipFill>
+          <a:blip r:embed="rId4"/>
+          <a:stretch>
+            <a:fillRect/>
+          </a:stretch>
+        </p:blipFill>
+        <p:spPr>
+          <a:xfrm>
+            <a:off x="2765957" y="3055222"/>
+            <a:ext cx="2185416" cy="213360"/>
+          </a:xfrm>
+          <a:prstGeom prst="rect">
+            <a:avLst/>
+          </a:prstGeom>
+        </p:spPr>
+      </p:pic>
+      <p:sp>
+        <p:nvSpPr>
+          <p:cNvPr id="15" name="TextBox 14"/>
+          <p:cNvSpPr txBox="1"/>
+          <p:nvPr/>
+        </p:nvSpPr>
+        <p:spPr>
+          <a:xfrm>
+            <a:off x="4951373" y="2933302"/>
+            <a:ext cx="1320048" cy="457200"/>
+          </a:xfrm>
+          <a:prstGeom prst="rect">
+            <a:avLst/>
+          </a:prstGeom>
+          <a:noFill/>
+        </p:spPr>
+        <p:txBody>
+          <a:bodyPr wrap="none" lIns="45720" rIns="45720" tIns="18288" bIns="18288" anchor="ctr">
+            <a:noAutofit/>
+          </a:bodyPr>
+          <a:lstStyle/>
+          <a:p>
+            <a:pPr algn="l"/>
+            <a:r>
+              <a:rPr sz="2330" b="0" i="0">
+                <a:solidFill>
+                  <a:srgbClr val="1A1A1A"/>
+                </a:solidFill>
+                <a:latin typeface="Lexend"/>
+              </a:rPr>
+              <a:t>   and   </a:t>
+            </a:r>
+          </a:p>
+        </p:txBody>
+      </p:sp>
+      <p:pic>
+        <p:nvPicPr>
+          <p:cNvPr id="16" name="Picture 15" descr="6dc7d095c18b4262.png"/>
+          <p:cNvPicPr>
+            <a:picLocks noChangeAspect="1"/>
+          </p:cNvPicPr>
+          <p:nvPr/>
+        </p:nvPicPr>
+        <p:blipFill>
+          <a:blip r:embed="rId5"/>
+          <a:stretch>
+            <a:fillRect/>
+          </a:stretch>
+        </p:blipFill>
+        <p:spPr>
+          <a:xfrm>
+            <a:off x="6134261" y="3030838"/>
+            <a:ext cx="1859280" cy="262128"/>
+          </a:xfrm>
+          <a:prstGeom prst="rect">
+            <a:avLst/>
+          </a:prstGeom>
+        </p:spPr>
+      </p:pic>
+      <p:pic>
+        <p:nvPicPr>
+          <p:cNvPr id="17" name="Picture 16" descr="c8c5f1b26c2cdc8a.png"/>
+          <p:cNvPicPr>
+            <a:picLocks noChangeAspect="1"/>
+          </p:cNvPicPr>
+          <p:nvPr/>
+        </p:nvPicPr>
+        <p:blipFill>
+          <a:blip r:embed="rId6"/>
+          <a:stretch>
+            <a:fillRect/>
+          </a:stretch>
+        </p:blipFill>
+        <p:spPr>
+          <a:xfrm>
+            <a:off x="2765957" y="3509374"/>
+            <a:ext cx="2758440" cy="310896"/>
+          </a:xfrm>
+          <a:prstGeom prst="rect">
+            <a:avLst/>
+          </a:prstGeom>
+        </p:spPr>
+      </p:pic>
+      <p:sp>
+        <p:nvSpPr>
+          <p:cNvPr id="18" name="TextBox 17"/>
+          <p:cNvSpPr txBox="1"/>
+          <p:nvPr/>
+        </p:nvSpPr>
+        <p:spPr>
+          <a:xfrm>
+            <a:off x="2711093" y="3939142"/>
+            <a:ext cx="5849317" cy="457200"/>
+          </a:xfrm>
+          <a:prstGeom prst="rect">
+            <a:avLst/>
+          </a:prstGeom>
+          <a:noFill/>
+        </p:spPr>
+        <p:txBody>
+          <a:bodyPr wrap="none" lIns="45720" rIns="45720" tIns="18288" bIns="18288" anchor="ctr">
+            <a:noAutofit/>
+          </a:bodyPr>
+          <a:lstStyle/>
+          <a:p>
+            <a:pPr algn="l"/>
+            <a:r>
+              <a:rPr sz="2330" b="0" i="0">
+                <a:solidFill>
+                  <a:srgbClr val="1A1A1A"/>
+                </a:solidFill>
+                <a:latin typeface="Lexend"/>
+              </a:rPr>
+              <a:t>Keep 2 significant digits (4.6 has 2):   </a:t>
+            </a:r>
+          </a:p>
+        </p:txBody>
+      </p:sp>
+      <p:pic>
+        <p:nvPicPr>
+          <p:cNvPr id="19" name="Picture 18" descr="7eec2dad996b77df.png"/>
+          <p:cNvPicPr>
+            <a:picLocks noChangeAspect="1"/>
+          </p:cNvPicPr>
+          <p:nvPr/>
+        </p:nvPicPr>
+        <p:blipFill>
+          <a:blip r:embed="rId7"/>
+          <a:stretch>
+            <a:fillRect/>
+          </a:stretch>
+        </p:blipFill>
+        <p:spPr>
+          <a:xfrm>
+            <a:off x="8423250" y="4039726"/>
+            <a:ext cx="1030224" cy="256032"/>
+          </a:xfrm>
+          <a:prstGeom prst="rect">
+            <a:avLst/>
+          </a:prstGeom>
+        </p:spPr>
+      </p:pic>
+      <p:sp>
+        <p:nvSpPr>
+          <p:cNvPr id="20" name="TextBox 19"/>
           <p:cNvSpPr txBox="1"/>
           <p:nvPr/>
         </p:nvSpPr>
@@ -3876,29 +4042,29 @@
           <a:p>
             <a:pPr algn="ctr"/>
             <a:r>
-              <a:rPr sz="3200" b="1" i="0">
+              <a:rPr sz="3040" b="1" i="0">
                 <a:solidFill>
                   <a:srgbClr val="9E1B32"/>
                 </a:solidFill>
-                <a:latin typeface="Century Schoolbook"/>
+                <a:latin typeface="Lexend"/>
               </a:rPr>
               <a:t>Answer:   1.1 × 10</a:t>
             </a:r>
             <a:r>
-              <a:rPr sz="3200" b="1" i="0" baseline="30000">
+              <a:rPr sz="3040" b="1" i="0" baseline="30000">
                 <a:solidFill>
                   <a:srgbClr val="9E1B32"/>
                 </a:solidFill>
-                <a:latin typeface="Century Schoolbook"/>
+                <a:latin typeface="Lexend"/>
               </a:rPr>
               <a:t>5</a:t>
             </a:r>
             <a:r>
-              <a:rPr sz="3200" b="1" i="0">
+              <a:rPr sz="3040" b="1" i="0">
                 <a:solidFill>
                   <a:srgbClr val="9E1B32"/>
                 </a:solidFill>
-                <a:latin typeface="Century Schoolbook"/>
+                <a:latin typeface="Lexend"/>
               </a:rPr>
               <a:t> square meters</a:t>
             </a:r>
@@ -3947,11 +4113,11 @@
           <a:p>
             <a:pPr algn="l"/>
             <a:r>
-              <a:rPr sz="3600" b="1" i="0">
-                <a:solidFill>
-                  <a:srgbClr val="1A1A1A"/>
-                </a:solidFill>
-                <a:latin typeface="Century Schoolbook"/>
+              <a:rPr sz="3420" b="1" i="0">
+                <a:solidFill>
+                  <a:srgbClr val="1A1A1A"/>
+                </a:solidFill>
+                <a:latin typeface="Lexend"/>
               </a:rPr>
               <a:t>Example 2</a:t>
             </a:r>
@@ -4087,11 +4253,11 @@
           <a:p>
             <a:pPr algn="l"/>
             <a:r>
-              <a:rPr sz="1100" b="0" i="1">
+              <a:rPr sz="1040" b="0" i="0">
                 <a:solidFill>
                   <a:srgbClr val="6B6B6B"/>
                 </a:solidFill>
-                <a:latin typeface="Century Schoolbook"/>
+                <a:latin typeface="Lexend"/>
               </a:rPr>
               <a:t>Grade 7 Accelerated · Unit 4 · Lesson 4 — Real-World Problems and Significant Digits</a:t>
             </a:r>
@@ -4122,11 +4288,11 @@
           <a:p>
             <a:pPr algn="r"/>
             <a:r>
-              <a:rPr sz="1100" b="0" i="0">
+              <a:rPr sz="1040" b="0" i="0">
                 <a:solidFill>
                   <a:srgbClr val="6B6B6B"/>
                 </a:solidFill>
-                <a:latin typeface="Century Schoolbook"/>
+                <a:latin typeface="Lexend"/>
               </a:rPr>
               <a:t>11</a:t>
             </a:r>
@@ -4141,8 +4307,8 @@
         </p:nvSpPr>
         <p:spPr>
           <a:xfrm>
-            <a:off x="1973513" y="1714500"/>
-            <a:ext cx="3245624" cy="457200"/>
+            <a:off x="1989331" y="1714500"/>
+            <a:ext cx="3203813" cy="457200"/>
           </a:xfrm>
           <a:prstGeom prst="rect">
             <a:avLst/>
@@ -4157,11 +4323,11 @@
           <a:p>
             <a:pPr algn="l"/>
             <a:r>
-              <a:rPr sz="2600" b="0" i="0">
-                <a:solidFill>
-                  <a:srgbClr val="1A1A1A"/>
-                </a:solidFill>
-                <a:latin typeface="Century Schoolbook"/>
+              <a:rPr sz="2470" b="0" i="0">
+                <a:solidFill>
+                  <a:srgbClr val="1A1A1A"/>
+                </a:solidFill>
+                <a:latin typeface="Lexend"/>
               </a:rPr>
               <a:t>A container holds  </a:t>
             </a:r>
@@ -4170,7 +4336,7 @@
       </p:sp>
       <p:pic>
         <p:nvPicPr>
-          <p:cNvPr id="9" name="Picture 8" descr="2cd8b9426e72708f.png"/>
+          <p:cNvPr id="9" name="Picture 8" descr="14e0b9b3df93fbb2.png"/>
           <p:cNvPicPr>
             <a:picLocks noChangeAspect="1"/>
           </p:cNvPicPr>
@@ -4184,8 +4350,8 @@
         </p:blipFill>
         <p:spPr>
           <a:xfrm>
-            <a:off x="5081977" y="1767839"/>
-            <a:ext cx="1804416" cy="350520"/>
+            <a:off x="5055985" y="1773936"/>
+            <a:ext cx="1783080" cy="338328"/>
           </a:xfrm>
           <a:prstGeom prst="rect">
             <a:avLst/>
@@ -4200,8 +4366,8 @@
         </p:nvSpPr>
         <p:spPr>
           <a:xfrm>
-            <a:off x="6886393" y="1714500"/>
-            <a:ext cx="3438773" cy="457200"/>
+            <a:off x="6839065" y="1714500"/>
+            <a:ext cx="3470282" cy="457200"/>
           </a:xfrm>
           <a:prstGeom prst="rect">
             <a:avLst/>
@@ -4216,11 +4382,11 @@
           <a:p>
             <a:pPr algn="l"/>
             <a:r>
-              <a:rPr sz="2600" b="0" i="0">
-                <a:solidFill>
-                  <a:srgbClr val="1A1A1A"/>
-                </a:solidFill>
-                <a:latin typeface="Century Schoolbook"/>
+              <a:rPr sz="2470" b="0" i="0">
+                <a:solidFill>
+                  <a:srgbClr val="1A1A1A"/>
+                </a:solidFill>
+                <a:latin typeface="Lexend"/>
               </a:rPr>
               <a:t>  cubic feet of liquid.</a:t>
             </a:r>
@@ -4229,7 +4395,7 @@
       </p:sp>
       <p:pic>
         <p:nvPicPr>
-          <p:cNvPr id="11" name="Picture 10" descr="96c6bbe36750af3e.png"/>
+          <p:cNvPr id="11" name="Picture 10" descr="a3b236c4480db311.png"/>
           <p:cNvPicPr>
             <a:picLocks noChangeAspect="1"/>
           </p:cNvPicPr>
@@ -4243,8 +4409,8 @@
         </p:blipFill>
         <p:spPr>
           <a:xfrm>
-            <a:off x="3217029" y="2497836"/>
-            <a:ext cx="2008632" cy="353568"/>
+            <a:off x="3160625" y="2506980"/>
+            <a:ext cx="1999487" cy="335280"/>
           </a:xfrm>
           <a:prstGeom prst="rect">
             <a:avLst/>
@@ -4259,8 +4425,8 @@
         </p:nvSpPr>
         <p:spPr>
           <a:xfrm>
-            <a:off x="5225661" y="2446020"/>
-            <a:ext cx="3855989" cy="457200"/>
+            <a:off x="5160113" y="2446020"/>
+            <a:ext cx="3977941" cy="457200"/>
           </a:xfrm>
           <a:prstGeom prst="rect">
             <a:avLst/>
@@ -4275,11 +4441,11 @@
           <a:p>
             <a:pPr algn="l"/>
             <a:r>
-              <a:rPr sz="2600" b="0" i="0">
-                <a:solidFill>
-                  <a:srgbClr val="1A1A1A"/>
-                </a:solidFill>
-                <a:latin typeface="Century Schoolbook"/>
+              <a:rPr sz="2470" b="0" i="0">
+                <a:solidFill>
+                  <a:srgbClr val="1A1A1A"/>
+                </a:solidFill>
+                <a:latin typeface="Lexend"/>
               </a:rPr>
               <a:t>  cubic feet evaporates.</a:t>
             </a:r>
@@ -4310,11 +4476,11 @@
           <a:p>
             <a:pPr algn="ctr"/>
             <a:r>
-              <a:rPr sz="2400" b="1" i="0">
-                <a:solidFill>
-                  <a:srgbClr val="1A1A1A"/>
-                </a:solidFill>
-                <a:latin typeface="Century Schoolbook"/>
+              <a:rPr sz="2280" b="1" i="0">
+                <a:solidFill>
+                  <a:srgbClr val="1A1A1A"/>
+                </a:solidFill>
+                <a:latin typeface="Lexend"/>
               </a:rPr>
               <a:t>How much is left? Give the answer with the correct precision.</a:t>
             </a:r>
@@ -4363,11 +4529,11 @@
           <a:p>
             <a:pPr algn="l"/>
             <a:r>
-              <a:rPr sz="3600" b="1" i="0">
-                <a:solidFill>
-                  <a:srgbClr val="1A1A1A"/>
-                </a:solidFill>
-                <a:latin typeface="Century Schoolbook"/>
+              <a:rPr sz="3420" b="1" i="0">
+                <a:solidFill>
+                  <a:srgbClr val="1A1A1A"/>
+                </a:solidFill>
+                <a:latin typeface="Lexend"/>
               </a:rPr>
               <a:t>Example 2</a:t>
             </a:r>
@@ -4503,11 +4669,11 @@
           <a:p>
             <a:pPr algn="l"/>
             <a:r>
-              <a:rPr sz="1100" b="0" i="1">
+              <a:rPr sz="1040" b="0" i="0">
                 <a:solidFill>
                   <a:srgbClr val="6B6B6B"/>
                 </a:solidFill>
-                <a:latin typeface="Century Schoolbook"/>
+                <a:latin typeface="Lexend"/>
               </a:rPr>
               <a:t>Grade 7 Accelerated · Unit 4 · Lesson 4 — Real-World Problems and Significant Digits</a:t>
             </a:r>
@@ -4538,11 +4704,11 @@
           <a:p>
             <a:pPr algn="r"/>
             <a:r>
-              <a:rPr sz="1100" b="0" i="0">
+              <a:rPr sz="1040" b="0" i="0">
                 <a:solidFill>
                   <a:srgbClr val="6B6B6B"/>
                 </a:solidFill>
-                <a:latin typeface="Century Schoolbook"/>
+                <a:latin typeface="Lexend"/>
               </a:rPr>
               <a:t>12</a:t>
             </a:r>
@@ -4551,7 +4717,7 @@
       </p:sp>
       <p:pic>
         <p:nvPicPr>
-          <p:cNvPr id="8" name="Picture 7" descr="799fbcd94df55113.png"/>
+          <p:cNvPr id="8" name="Picture 7" descr="7330ec204f774807.png"/>
           <p:cNvPicPr>
             <a:picLocks noChangeAspect="1"/>
           </p:cNvPicPr>
@@ -4566,7 +4732,7 @@
         <p:spPr>
           <a:xfrm>
             <a:off x="1828800" y="1920240"/>
-            <a:ext cx="5946648" cy="289560"/>
+            <a:ext cx="6358128" cy="280416"/>
           </a:xfrm>
           <a:prstGeom prst="rect">
             <a:avLst/>
@@ -4575,7 +4741,7 @@
       </p:pic>
       <p:pic>
         <p:nvPicPr>
-          <p:cNvPr id="9" name="Picture 8" descr="22b44a67be12e9b0.png"/>
+          <p:cNvPr id="9" name="Picture 8" descr="4fefc32bca2ec8cd.png"/>
           <p:cNvPicPr>
             <a:picLocks noChangeAspect="1"/>
           </p:cNvPicPr>
@@ -4589,8 +4755,8 @@
         </p:blipFill>
         <p:spPr>
           <a:xfrm>
-            <a:off x="1828800" y="2484120"/>
-            <a:ext cx="3867912" cy="429768"/>
+            <a:off x="1828800" y="2474976"/>
+            <a:ext cx="4276344" cy="417576"/>
           </a:xfrm>
           <a:prstGeom prst="rect">
             <a:avLst/>
@@ -4599,7 +4765,7 @@
       </p:pic>
       <p:pic>
         <p:nvPicPr>
-          <p:cNvPr id="10" name="Picture 9" descr="4629515b15c2b4c2.png"/>
+          <p:cNvPr id="10" name="Picture 9" descr="6b86362e5b517e0b.png"/>
           <p:cNvPicPr>
             <a:picLocks noChangeAspect="1"/>
           </p:cNvPicPr>
@@ -4613,8 +4779,8 @@
         </p:blipFill>
         <p:spPr>
           <a:xfrm>
-            <a:off x="1828800" y="3188207"/>
-            <a:ext cx="5955792" cy="350520"/>
+            <a:off x="1828800" y="3166871"/>
+            <a:ext cx="6184392" cy="338328"/>
           </a:xfrm>
           <a:prstGeom prst="rect">
             <a:avLst/>
@@ -4645,29 +4811,29 @@
           <a:p>
             <a:pPr algn="ctr"/>
             <a:r>
-              <a:rPr sz="3200" b="1" i="0">
+              <a:rPr sz="3040" b="1" i="0">
                 <a:solidFill>
                   <a:srgbClr val="9E1B32"/>
                 </a:solidFill>
-                <a:latin typeface="Century Schoolbook"/>
+                <a:latin typeface="Lexend"/>
               </a:rPr>
               <a:t>Answer:   3.06 × 10</a:t>
             </a:r>
             <a:r>
-              <a:rPr sz="3200" b="1" i="0" baseline="30000">
+              <a:rPr sz="3040" b="1" i="0" baseline="30000">
                 <a:solidFill>
                   <a:srgbClr val="9E1B32"/>
                 </a:solidFill>
-                <a:latin typeface="Century Schoolbook"/>
+                <a:latin typeface="Lexend"/>
               </a:rPr>
               <a:t>-3</a:t>
             </a:r>
             <a:r>
-              <a:rPr sz="3200" b="1" i="0">
+              <a:rPr sz="3040" b="1" i="0">
                 <a:solidFill>
                   <a:srgbClr val="9E1B32"/>
                 </a:solidFill>
-                <a:latin typeface="Century Schoolbook"/>
+                <a:latin typeface="Lexend"/>
               </a:rPr>
               <a:t> cubic feet</a:t>
             </a:r>
@@ -4716,11 +4882,11 @@
           <a:p>
             <a:pPr algn="l"/>
             <a:r>
-              <a:rPr sz="3600" b="1" i="0">
-                <a:solidFill>
-                  <a:srgbClr val="1A1A1A"/>
-                </a:solidFill>
-                <a:latin typeface="Century Schoolbook"/>
+              <a:rPr sz="3420" b="1" i="0">
+                <a:solidFill>
+                  <a:srgbClr val="1A1A1A"/>
+                </a:solidFill>
+                <a:latin typeface="Lexend"/>
               </a:rPr>
               <a:t>Your Turn</a:t>
             </a:r>
@@ -4856,11 +5022,11 @@
           <a:p>
             <a:pPr algn="l"/>
             <a:r>
-              <a:rPr sz="1100" b="0" i="1">
+              <a:rPr sz="1040" b="0" i="0">
                 <a:solidFill>
                   <a:srgbClr val="6B6B6B"/>
                 </a:solidFill>
-                <a:latin typeface="Century Schoolbook"/>
+                <a:latin typeface="Lexend"/>
               </a:rPr>
               <a:t>Grade 7 Accelerated · Unit 4 · Lesson 4 — Real-World Problems and Significant Digits</a:t>
             </a:r>
@@ -4891,11 +5057,11 @@
           <a:p>
             <a:pPr algn="r"/>
             <a:r>
-              <a:rPr sz="1100" b="0" i="0">
+              <a:rPr sz="1040" b="0" i="0">
                 <a:solidFill>
                   <a:srgbClr val="6B6B6B"/>
                 </a:solidFill>
-                <a:latin typeface="Century Schoolbook"/>
+                <a:latin typeface="Lexend"/>
               </a:rPr>
               <a:t>13</a:t>
             </a:r>
@@ -4910,8 +5076,8 @@
         </p:nvSpPr>
         <p:spPr>
           <a:xfrm>
-            <a:off x="3488002" y="2183892"/>
-            <a:ext cx="1850467" cy="457200"/>
+            <a:off x="3509636" y="1581912"/>
+            <a:ext cx="1819665" cy="457200"/>
           </a:xfrm>
           <a:prstGeom prst="rect">
             <a:avLst/>
@@ -4926,11 +5092,11 @@
           <a:p>
             <a:pPr algn="l"/>
             <a:r>
-              <a:rPr sz="2600" b="0" i="0">
-                <a:solidFill>
-                  <a:srgbClr val="1A1A1A"/>
-                </a:solidFill>
-                <a:latin typeface="Century Schoolbook"/>
+              <a:rPr sz="2470" b="0" i="0">
+                <a:solidFill>
+                  <a:srgbClr val="1A1A1A"/>
+                </a:solidFill>
+                <a:latin typeface="Lexend"/>
               </a:rPr>
               <a:t>A road is  </a:t>
             </a:r>
@@ -4939,7 +5105,7 @@
       </p:sp>
       <p:pic>
         <p:nvPicPr>
-          <p:cNvPr id="9" name="Picture 8" descr="6fe96bec24508838.png"/>
+          <p:cNvPr id="9" name="Picture 8" descr="7085e71197c76ea8.png"/>
           <p:cNvPicPr>
             <a:picLocks noChangeAspect="1"/>
           </p:cNvPicPr>
@@ -4953,8 +5119,8 @@
         </p:blipFill>
         <p:spPr>
           <a:xfrm>
-            <a:off x="5201310" y="2194560"/>
-            <a:ext cx="2011680" cy="435864"/>
+            <a:off x="5192141" y="1600200"/>
+            <a:ext cx="2026920" cy="420624"/>
           </a:xfrm>
           <a:prstGeom prst="rect">
             <a:avLst/>
@@ -4969,8 +5135,8 @@
         </p:nvSpPr>
         <p:spPr>
           <a:xfrm>
-            <a:off x="7212990" y="2183892"/>
-            <a:ext cx="1597686" cy="457200"/>
+            <a:off x="7219061" y="1581912"/>
+            <a:ext cx="1569981" cy="457200"/>
           </a:xfrm>
           <a:prstGeom prst="rect">
             <a:avLst/>
@@ -4985,11 +5151,11 @@
           <a:p>
             <a:pPr algn="l"/>
             <a:r>
-              <a:rPr sz="2600" b="0" i="0">
-                <a:solidFill>
-                  <a:srgbClr val="1A1A1A"/>
-                </a:solidFill>
-                <a:latin typeface="Century Schoolbook"/>
+              <a:rPr sz="2470" b="0" i="0">
+                <a:solidFill>
+                  <a:srgbClr val="1A1A1A"/>
+                </a:solidFill>
+                <a:latin typeface="Lexend"/>
               </a:rPr>
               <a:t>  m long.</a:t>
             </a:r>
@@ -5004,8 +5170,8 @@
         </p:nvSpPr>
         <p:spPr>
           <a:xfrm>
-            <a:off x="2593365" y="2942844"/>
-            <a:ext cx="1882649" cy="457200"/>
+            <a:off x="2593031" y="2324100"/>
+            <a:ext cx="1876815" cy="457200"/>
           </a:xfrm>
           <a:prstGeom prst="rect">
             <a:avLst/>
@@ -5020,11 +5186,11 @@
           <a:p>
             <a:pPr algn="l"/>
             <a:r>
-              <a:rPr sz="2600" b="0" i="0">
-                <a:solidFill>
-                  <a:srgbClr val="1A1A1A"/>
-                </a:solidFill>
-                <a:latin typeface="Century Schoolbook"/>
+              <a:rPr sz="2470" b="0" i="0">
+                <a:solidFill>
+                  <a:srgbClr val="1A1A1A"/>
+                </a:solidFill>
+                <a:latin typeface="Lexend"/>
               </a:rPr>
               <a:t>A section  </a:t>
             </a:r>
@@ -5033,7 +5199,7 @@
       </p:sp>
       <p:pic>
         <p:nvPicPr>
-          <p:cNvPr id="12" name="Picture 11" descr="e7c28ca8c59a9fff.png"/>
+          <p:cNvPr id="12" name="Picture 11" descr="8ca2d2fd49f849d4.png"/>
           <p:cNvPicPr>
             <a:picLocks noChangeAspect="1"/>
           </p:cNvPicPr>
@@ -5047,8 +5213,8 @@
         </p:blipFill>
         <p:spPr>
           <a:xfrm>
-            <a:off x="4338855" y="2950464"/>
-            <a:ext cx="2033015" cy="441960"/>
+            <a:off x="4332686" y="2340864"/>
+            <a:ext cx="2036064" cy="423672"/>
           </a:xfrm>
           <a:prstGeom prst="rect">
             <a:avLst/>
@@ -5063,8 +5229,8 @@
         </p:nvSpPr>
         <p:spPr>
           <a:xfrm>
-            <a:off x="6371871" y="2942844"/>
-            <a:ext cx="3333443" cy="457200"/>
+            <a:off x="6368750" y="2324100"/>
+            <a:ext cx="3336898" cy="457200"/>
           </a:xfrm>
           <a:prstGeom prst="rect">
             <a:avLst/>
@@ -5079,11 +5245,11 @@
           <a:p>
             <a:pPr algn="l"/>
             <a:r>
-              <a:rPr sz="2600" b="0" i="0">
-                <a:solidFill>
-                  <a:srgbClr val="1A1A1A"/>
-                </a:solidFill>
-                <a:latin typeface="Century Schoolbook"/>
+              <a:rPr sz="2470" b="0" i="0">
+                <a:solidFill>
+                  <a:srgbClr val="1A1A1A"/>
+                </a:solidFill>
+                <a:latin typeface="Lexend"/>
               </a:rPr>
               <a:t>  m long is repaved.</a:t>
             </a:r>
@@ -5098,7 +5264,7 @@
         </p:nvSpPr>
         <p:spPr>
           <a:xfrm>
-            <a:off x="777240" y="3712463"/>
+            <a:off x="777240" y="3084576"/>
             <a:ext cx="10607040" cy="429370"/>
           </a:xfrm>
           <a:prstGeom prst="rect">
@@ -5114,11 +5280,11 @@
           <a:p>
             <a:pPr algn="ctr"/>
             <a:r>
-              <a:rPr sz="2400" b="0" i="0">
-                <a:solidFill>
-                  <a:srgbClr val="1A1A1A"/>
-                </a:solidFill>
-                <a:latin typeface="Century Schoolbook"/>
+              <a:rPr sz="2280" b="0" i="0">
+                <a:solidFill>
+                  <a:srgbClr val="1A1A1A"/>
+                </a:solidFill>
+                <a:latin typeface="Lexend"/>
               </a:rPr>
               <a:t>How much of the road is not repaved?</a:t>
             </a:r>
@@ -5167,11 +5333,11 @@
           <a:p>
             <a:pPr algn="l"/>
             <a:r>
-              <a:rPr sz="3600" b="1" i="0">
-                <a:solidFill>
-                  <a:srgbClr val="1A1A1A"/>
-                </a:solidFill>
-                <a:latin typeface="Century Schoolbook"/>
+              <a:rPr sz="3420" b="1" i="0">
+                <a:solidFill>
+                  <a:srgbClr val="1A1A1A"/>
+                </a:solidFill>
+                <a:latin typeface="Lexend"/>
               </a:rPr>
               <a:t>Your Turn</a:t>
             </a:r>
@@ -5307,11 +5473,11 @@
           <a:p>
             <a:pPr algn="l"/>
             <a:r>
-              <a:rPr sz="1100" b="0" i="1">
+              <a:rPr sz="1040" b="0" i="0">
                 <a:solidFill>
                   <a:srgbClr val="6B6B6B"/>
                 </a:solidFill>
-                <a:latin typeface="Century Schoolbook"/>
+                <a:latin typeface="Lexend"/>
               </a:rPr>
               <a:t>Grade 7 Accelerated · Unit 4 · Lesson 4 — Real-World Problems and Significant Digits</a:t>
             </a:r>
@@ -5342,11 +5508,11 @@
           <a:p>
             <a:pPr algn="r"/>
             <a:r>
-              <a:rPr sz="1100" b="0" i="0">
+              <a:rPr sz="1040" b="0" i="0">
                 <a:solidFill>
                   <a:srgbClr val="6B6B6B"/>
                 </a:solidFill>
-                <a:latin typeface="Century Schoolbook"/>
+                <a:latin typeface="Lexend"/>
               </a:rPr>
               <a:t>14</a:t>
             </a:r>
@@ -5361,8 +5527,8 @@
         </p:nvSpPr>
         <p:spPr>
           <a:xfrm>
-            <a:off x="3488002" y="2183892"/>
-            <a:ext cx="1850467" cy="457200"/>
+            <a:off x="3508112" y="1581912"/>
+            <a:ext cx="1819665" cy="457200"/>
           </a:xfrm>
           <a:prstGeom prst="rect">
             <a:avLst/>
@@ -5377,11 +5543,11 @@
           <a:p>
             <a:pPr algn="l"/>
             <a:r>
-              <a:rPr sz="2600" b="0" i="0">
-                <a:solidFill>
-                  <a:srgbClr val="1A1A1A"/>
-                </a:solidFill>
-                <a:latin typeface="Century Schoolbook"/>
+              <a:rPr sz="2470" b="0" i="0">
+                <a:solidFill>
+                  <a:srgbClr val="1A1A1A"/>
+                </a:solidFill>
+                <a:latin typeface="Lexend"/>
               </a:rPr>
               <a:t>A road is  </a:t>
             </a:r>
@@ -5390,7 +5556,7 @@
       </p:sp>
       <p:pic>
         <p:nvPicPr>
-          <p:cNvPr id="9" name="Picture 8" descr="8579fbd842756a60.png"/>
+          <p:cNvPr id="9" name="Picture 8" descr="792d949c5a21a618.png"/>
           <p:cNvPicPr>
             <a:picLocks noChangeAspect="1"/>
           </p:cNvPicPr>
@@ -5404,8 +5570,8 @@
         </p:blipFill>
         <p:spPr>
           <a:xfrm>
-            <a:off x="5201310" y="2194560"/>
-            <a:ext cx="2011680" cy="435864"/>
+            <a:off x="5190617" y="1600200"/>
+            <a:ext cx="2029968" cy="420624"/>
           </a:xfrm>
           <a:prstGeom prst="rect">
             <a:avLst/>
@@ -5420,8 +5586,8 @@
         </p:nvSpPr>
         <p:spPr>
           <a:xfrm>
-            <a:off x="7212990" y="2183892"/>
-            <a:ext cx="1597686" cy="457200"/>
+            <a:off x="7220585" y="1581912"/>
+            <a:ext cx="1569981" cy="457200"/>
           </a:xfrm>
           <a:prstGeom prst="rect">
             <a:avLst/>
@@ -5436,11 +5602,11 @@
           <a:p>
             <a:pPr algn="l"/>
             <a:r>
-              <a:rPr sz="2600" b="0" i="0">
-                <a:solidFill>
-                  <a:srgbClr val="1A1A1A"/>
-                </a:solidFill>
-                <a:latin typeface="Century Schoolbook"/>
+              <a:rPr sz="2470" b="0" i="0">
+                <a:solidFill>
+                  <a:srgbClr val="1A1A1A"/>
+                </a:solidFill>
+                <a:latin typeface="Lexend"/>
               </a:rPr>
               <a:t>  m long.</a:t>
             </a:r>
@@ -5455,8 +5621,8 @@
         </p:nvSpPr>
         <p:spPr>
           <a:xfrm>
-            <a:off x="2593365" y="2941320"/>
-            <a:ext cx="1882649" cy="457200"/>
+            <a:off x="2591507" y="2324100"/>
+            <a:ext cx="1876815" cy="457200"/>
           </a:xfrm>
           <a:prstGeom prst="rect">
             <a:avLst/>
@@ -5471,11 +5637,11 @@
           <a:p>
             <a:pPr algn="l"/>
             <a:r>
-              <a:rPr sz="2600" b="0" i="0">
-                <a:solidFill>
-                  <a:srgbClr val="1A1A1A"/>
-                </a:solidFill>
-                <a:latin typeface="Century Schoolbook"/>
+              <a:rPr sz="2470" b="0" i="0">
+                <a:solidFill>
+                  <a:srgbClr val="1A1A1A"/>
+                </a:solidFill>
+                <a:latin typeface="Lexend"/>
               </a:rPr>
               <a:t>A section  </a:t>
             </a:r>
@@ -5484,7 +5650,7 @@
       </p:sp>
       <p:pic>
         <p:nvPicPr>
-          <p:cNvPr id="12" name="Picture 11" descr="522cffef3ffba4df.png"/>
+          <p:cNvPr id="12" name="Picture 11" descr="b395e7df8785e028.png"/>
           <p:cNvPicPr>
             <a:picLocks noChangeAspect="1"/>
           </p:cNvPicPr>
@@ -5498,8 +5664,8 @@
         </p:blipFill>
         <p:spPr>
           <a:xfrm>
-            <a:off x="4338855" y="2950464"/>
-            <a:ext cx="2033015" cy="438912"/>
+            <a:off x="4331162" y="2340864"/>
+            <a:ext cx="2039112" cy="423672"/>
           </a:xfrm>
           <a:prstGeom prst="rect">
             <a:avLst/>
@@ -5514,8 +5680,8 @@
         </p:nvSpPr>
         <p:spPr>
           <a:xfrm>
-            <a:off x="6371871" y="2941320"/>
-            <a:ext cx="3333443" cy="457200"/>
+            <a:off x="6370274" y="2324100"/>
+            <a:ext cx="3336898" cy="457200"/>
           </a:xfrm>
           <a:prstGeom prst="rect">
             <a:avLst/>
@@ -5530,11 +5696,11 @@
           <a:p>
             <a:pPr algn="l"/>
             <a:r>
-              <a:rPr sz="2600" b="0" i="0">
-                <a:solidFill>
-                  <a:srgbClr val="1A1A1A"/>
-                </a:solidFill>
-                <a:latin typeface="Century Schoolbook"/>
+              <a:rPr sz="2470" b="0" i="0">
+                <a:solidFill>
+                  <a:srgbClr val="1A1A1A"/>
+                </a:solidFill>
+                <a:latin typeface="Lexend"/>
               </a:rPr>
               <a:t>  m long is repaved.</a:t>
             </a:r>
@@ -5549,7 +5715,7 @@
         </p:nvSpPr>
         <p:spPr>
           <a:xfrm>
-            <a:off x="777240" y="3709416"/>
+            <a:off x="777240" y="3084576"/>
             <a:ext cx="10607040" cy="429370"/>
           </a:xfrm>
           <a:prstGeom prst="rect">
@@ -5565,26 +5731,109 @@
           <a:p>
             <a:pPr algn="ctr"/>
             <a:r>
-              <a:rPr sz="2400" b="0" i="0">
-                <a:solidFill>
-                  <a:srgbClr val="1A1A1A"/>
-                </a:solidFill>
-                <a:latin typeface="Century Schoolbook"/>
+              <a:rPr sz="2280" b="0" i="0">
+                <a:solidFill>
+                  <a:srgbClr val="1A1A1A"/>
+                </a:solidFill>
+                <a:latin typeface="Lexend"/>
               </a:rPr>
               <a:t>How much of the road is not repaved?</a:t>
             </a:r>
           </a:p>
         </p:txBody>
       </p:sp>
-      <p:sp>
-        <p:nvSpPr>
-          <p:cNvPr id="15" name="TextBox 14"/>
-          <p:cNvSpPr txBox="1"/>
-          <p:nvPr/>
-        </p:nvSpPr>
-        <p:spPr>
-          <a:xfrm>
-            <a:off x="777240" y="4572000"/>
+      <p:pic>
+        <p:nvPicPr>
+          <p:cNvPr id="15" name="Picture 14" descr="df3a7677f047d40b.png"/>
+          <p:cNvPicPr>
+            <a:picLocks noChangeAspect="1"/>
+          </p:cNvPicPr>
+          <p:nvPr/>
+        </p:nvPicPr>
+        <p:blipFill>
+          <a:blip r:embed="rId4"/>
+          <a:stretch>
+            <a:fillRect/>
+          </a:stretch>
+        </p:blipFill>
+        <p:spPr>
+          <a:xfrm>
+            <a:off x="2110235" y="3768454"/>
+            <a:ext cx="2529840" cy="268224"/>
+          </a:xfrm>
+          <a:prstGeom prst="rect">
+            <a:avLst/>
+          </a:prstGeom>
+        </p:spPr>
+      </p:pic>
+      <p:sp>
+        <p:nvSpPr>
+          <p:cNvPr id="16" name="TextBox 15"/>
+          <p:cNvSpPr txBox="1"/>
+          <p:nvPr/>
+        </p:nvSpPr>
+        <p:spPr>
+          <a:xfrm>
+            <a:off x="2055371" y="4176886"/>
+            <a:ext cx="8187937" cy="457200"/>
+          </a:xfrm>
+          <a:prstGeom prst="rect">
+            <a:avLst/>
+          </a:prstGeom>
+          <a:noFill/>
+        </p:spPr>
+        <p:txBody>
+          <a:bodyPr wrap="none" lIns="45720" rIns="45720" tIns="18288" bIns="18288" anchor="ctr">
+            <a:noAutofit/>
+          </a:bodyPr>
+          <a:lstStyle/>
+          <a:p>
+            <a:pPr algn="l"/>
+            <a:r>
+              <a:rPr sz="2330" b="0" i="0">
+                <a:solidFill>
+                  <a:srgbClr val="1A1A1A"/>
+                </a:solidFill>
+                <a:latin typeface="Lexend"/>
+              </a:rPr>
+              <a:t>3,850 stops at the tens place, so round to tens:  3,580</a:t>
+            </a:r>
+          </a:p>
+        </p:txBody>
+      </p:sp>
+      <p:pic>
+        <p:nvPicPr>
+          <p:cNvPr id="17" name="Picture 16" descr="e2ff5572229200e5.png"/>
+          <p:cNvPicPr>
+            <a:picLocks noChangeAspect="1"/>
+          </p:cNvPicPr>
+          <p:nvPr/>
+        </p:nvPicPr>
+        <p:blipFill>
+          <a:blip r:embed="rId5"/>
+          <a:stretch>
+            <a:fillRect/>
+          </a:stretch>
+        </p:blipFill>
+        <p:spPr>
+          <a:xfrm>
+            <a:off x="2110235" y="4752958"/>
+            <a:ext cx="2270760" cy="310896"/>
+          </a:xfrm>
+          <a:prstGeom prst="rect">
+            <a:avLst/>
+          </a:prstGeom>
+        </p:spPr>
+      </p:pic>
+      <p:sp>
+        <p:nvSpPr>
+          <p:cNvPr id="18" name="TextBox 17"/>
+          <p:cNvSpPr txBox="1"/>
+          <p:nvPr/>
+        </p:nvSpPr>
+        <p:spPr>
+          <a:xfrm>
+            <a:off x="777240" y="5251306"/>
             <a:ext cx="10607040" cy="548640"/>
           </a:xfrm>
           <a:prstGeom prst="rect">
@@ -5600,29 +5849,29 @@
           <a:p>
             <a:pPr algn="ctr"/>
             <a:r>
-              <a:rPr sz="3200" b="1" i="0">
+              <a:rPr sz="3040" b="1" i="0">
                 <a:solidFill>
                   <a:srgbClr val="9E1B32"/>
                 </a:solidFill>
-                <a:latin typeface="Century Schoolbook"/>
+                <a:latin typeface="Lexend"/>
               </a:rPr>
               <a:t>Answer:   3.58 × 10</a:t>
             </a:r>
             <a:r>
-              <a:rPr sz="3200" b="1" i="0" baseline="30000">
+              <a:rPr sz="3040" b="1" i="0" baseline="30000">
                 <a:solidFill>
                   <a:srgbClr val="9E1B32"/>
                 </a:solidFill>
-                <a:latin typeface="Century Schoolbook"/>
+                <a:latin typeface="Lexend"/>
               </a:rPr>
               <a:t>3</a:t>
             </a:r>
             <a:r>
-              <a:rPr sz="3200" b="1" i="0">
+              <a:rPr sz="3040" b="1" i="0">
                 <a:solidFill>
                   <a:srgbClr val="9E1B32"/>
                 </a:solidFill>
-                <a:latin typeface="Century Schoolbook"/>
+                <a:latin typeface="Lexend"/>
               </a:rPr>
               <a:t> m</a:t>
             </a:r>
@@ -5671,11 +5920,11 @@
           <a:p>
             <a:pPr algn="l"/>
             <a:r>
-              <a:rPr sz="3400" b="1" i="0">
-                <a:solidFill>
-                  <a:srgbClr val="1A1A1A"/>
-                </a:solidFill>
-                <a:latin typeface="Century Schoolbook"/>
+              <a:rPr sz="3229" b="1" i="0">
+                <a:solidFill>
+                  <a:srgbClr val="1A1A1A"/>
+                </a:solidFill>
+                <a:latin typeface="Lexend"/>
               </a:rPr>
               <a:t>Whiteboards   ·   Question 1 of 9</a:t>
             </a:r>
@@ -5811,11 +6060,11 @@
           <a:p>
             <a:pPr algn="l"/>
             <a:r>
-              <a:rPr sz="1100" b="0" i="1">
+              <a:rPr sz="1040" b="0" i="0">
                 <a:solidFill>
                   <a:srgbClr val="6B6B6B"/>
                 </a:solidFill>
-                <a:latin typeface="Century Schoolbook"/>
+                <a:latin typeface="Lexend"/>
               </a:rPr>
               <a:t>Grade 7 Accelerated · Unit 4 · Lesson 4 — Real-World Problems and Significant Digits</a:t>
             </a:r>
@@ -5846,11 +6095,11 @@
           <a:p>
             <a:pPr algn="r"/>
             <a:r>
-              <a:rPr sz="1100" b="0" i="0">
+              <a:rPr sz="1040" b="0" i="0">
                 <a:solidFill>
                   <a:srgbClr val="6B6B6B"/>
                 </a:solidFill>
-                <a:latin typeface="Century Schoolbook"/>
+                <a:latin typeface="Lexend"/>
               </a:rPr>
               <a:t>15</a:t>
             </a:r>
@@ -5881,11 +6130,11 @@
           <a:p>
             <a:pPr algn="ctr"/>
             <a:r>
-              <a:rPr sz="2600" b="0" i="0">
-                <a:solidFill>
-                  <a:srgbClr val="1A1A1A"/>
-                </a:solidFill>
-                <a:latin typeface="Century Schoolbook"/>
+              <a:rPr sz="2470" b="0" i="0">
+                <a:solidFill>
+                  <a:srgbClr val="1A1A1A"/>
+                </a:solidFill>
+                <a:latin typeface="Lexend"/>
               </a:rPr>
               <a:t>How many significant digits are in  0.00470 ?</a:t>
             </a:r>
@@ -5916,11 +6165,11 @@
           <a:p>
             <a:pPr algn="ctr"/>
             <a:r>
-              <a:rPr sz="2600" b="1" i="0">
-                <a:solidFill>
-                  <a:srgbClr val="1A1A1A"/>
-                </a:solidFill>
-                <a:latin typeface="Century Schoolbook"/>
+              <a:rPr sz="2470" b="1" i="0">
+                <a:solidFill>
+                  <a:srgbClr val="1A1A1A"/>
+                </a:solidFill>
+                <a:latin typeface="Lexend"/>
               </a:rPr>
               <a:t>Answer it.</a:t>
             </a:r>
@@ -5969,11 +6218,11 @@
           <a:p>
             <a:pPr algn="l"/>
             <a:r>
-              <a:rPr sz="3400" b="1" i="0">
-                <a:solidFill>
-                  <a:srgbClr val="1A1A1A"/>
-                </a:solidFill>
-                <a:latin typeface="Century Schoolbook"/>
+              <a:rPr sz="3229" b="1" i="0">
+                <a:solidFill>
+                  <a:srgbClr val="1A1A1A"/>
+                </a:solidFill>
+                <a:latin typeface="Lexend"/>
               </a:rPr>
               <a:t>Whiteboards   ·   Question 1 of 9</a:t>
             </a:r>
@@ -6109,11 +6358,11 @@
           <a:p>
             <a:pPr algn="l"/>
             <a:r>
-              <a:rPr sz="1100" b="0" i="1">
+              <a:rPr sz="1040" b="0" i="0">
                 <a:solidFill>
                   <a:srgbClr val="6B6B6B"/>
                 </a:solidFill>
-                <a:latin typeface="Century Schoolbook"/>
+                <a:latin typeface="Lexend"/>
               </a:rPr>
               <a:t>Grade 7 Accelerated · Unit 4 · Lesson 4 — Real-World Problems and Significant Digits</a:t>
             </a:r>
@@ -6144,11 +6393,11 @@
           <a:p>
             <a:pPr algn="r"/>
             <a:r>
-              <a:rPr sz="1100" b="0" i="0">
+              <a:rPr sz="1040" b="0" i="0">
                 <a:solidFill>
                   <a:srgbClr val="6B6B6B"/>
                 </a:solidFill>
-                <a:latin typeface="Century Schoolbook"/>
+                <a:latin typeface="Lexend"/>
               </a:rPr>
               <a:t>16</a:t>
             </a:r>
@@ -6179,11 +6428,11 @@
           <a:p>
             <a:pPr algn="ctr"/>
             <a:r>
-              <a:rPr sz="2600" b="0" i="0">
-                <a:solidFill>
-                  <a:srgbClr val="1A1A1A"/>
-                </a:solidFill>
-                <a:latin typeface="Century Schoolbook"/>
+              <a:rPr sz="2470" b="0" i="0">
+                <a:solidFill>
+                  <a:srgbClr val="1A1A1A"/>
+                </a:solidFill>
+                <a:latin typeface="Lexend"/>
               </a:rPr>
               <a:t>How many significant digits are in  0.00470 ?</a:t>
             </a:r>
@@ -6193,6 +6442,76 @@
       <p:sp>
         <p:nvSpPr>
           <p:cNvPr id="9" name="TextBox 8"/>
+          <p:cNvSpPr txBox="1"/>
+          <p:nvPr/>
+        </p:nvSpPr>
+        <p:spPr>
+          <a:xfrm>
+            <a:off x="2640987" y="2728291"/>
+            <a:ext cx="5230654" cy="457200"/>
+          </a:xfrm>
+          <a:prstGeom prst="rect">
+            <a:avLst/>
+          </a:prstGeom>
+          <a:noFill/>
+        </p:spPr>
+        <p:txBody>
+          <a:bodyPr wrap="none" lIns="45720" rIns="45720" tIns="18288" bIns="18288" anchor="ctr">
+            <a:noAutofit/>
+          </a:bodyPr>
+          <a:lstStyle/>
+          <a:p>
+            <a:pPr algn="l"/>
+            <a:r>
+              <a:rPr sz="2330" b="0" i="0">
+                <a:solidFill>
+                  <a:srgbClr val="1A1A1A"/>
+                </a:solidFill>
+                <a:latin typeface="Lexend"/>
+              </a:rPr>
+              <a:t>Leading zeros do not count:  0.00</a:t>
+            </a:r>
+          </a:p>
+        </p:txBody>
+      </p:sp>
+      <p:sp>
+        <p:nvSpPr>
+          <p:cNvPr id="10" name="TextBox 9"/>
+          <p:cNvSpPr txBox="1"/>
+          <p:nvPr/>
+        </p:nvSpPr>
+        <p:spPr>
+          <a:xfrm>
+            <a:off x="2640987" y="3231211"/>
+            <a:ext cx="7016704" cy="457200"/>
+          </a:xfrm>
+          <a:prstGeom prst="rect">
+            <a:avLst/>
+          </a:prstGeom>
+          <a:noFill/>
+        </p:spPr>
+        <p:txBody>
+          <a:bodyPr wrap="none" lIns="45720" rIns="45720" tIns="18288" bIns="18288" anchor="ctr">
+            <a:noAutofit/>
+          </a:bodyPr>
+          <a:lstStyle/>
+          <a:p>
+            <a:pPr algn="l"/>
+            <a:r>
+              <a:rPr sz="2330" b="0" i="0">
+                <a:solidFill>
+                  <a:srgbClr val="1A1A1A"/>
+                </a:solidFill>
+                <a:latin typeface="Lexend"/>
+              </a:rPr>
+              <a:t>4, 7 and the final 0 count:  3 significant digits</a:t>
+            </a:r>
+          </a:p>
+        </p:txBody>
+      </p:sp>
+      <p:sp>
+        <p:nvSpPr>
+          <p:cNvPr id="11" name="TextBox 10"/>
           <p:cNvSpPr txBox="1"/>
           <p:nvPr/>
         </p:nvSpPr>
@@ -6214,11 +6533,11 @@
           <a:p>
             <a:pPr algn="ctr"/>
             <a:r>
-              <a:rPr sz="3200" b="1" i="0">
+              <a:rPr sz="3040" b="1" i="0">
                 <a:solidFill>
                   <a:srgbClr val="9E1B32"/>
                 </a:solidFill>
-                <a:latin typeface="Century Schoolbook"/>
+                <a:latin typeface="Lexend"/>
               </a:rPr>
               <a:t>Answer:   3</a:t>
             </a:r>
@@ -6267,11 +6586,11 @@
           <a:p>
             <a:pPr algn="l"/>
             <a:r>
-              <a:rPr sz="3400" b="1" i="0">
-                <a:solidFill>
-                  <a:srgbClr val="1A1A1A"/>
-                </a:solidFill>
-                <a:latin typeface="Century Schoolbook"/>
+              <a:rPr sz="3229" b="1" i="0">
+                <a:solidFill>
+                  <a:srgbClr val="1A1A1A"/>
+                </a:solidFill>
+                <a:latin typeface="Lexend"/>
               </a:rPr>
               <a:t>Whiteboards   ·   Question 2 of 9</a:t>
             </a:r>
@@ -6407,11 +6726,11 @@
           <a:p>
             <a:pPr algn="l"/>
             <a:r>
-              <a:rPr sz="1100" b="0" i="1">
+              <a:rPr sz="1040" b="0" i="0">
                 <a:solidFill>
                   <a:srgbClr val="6B6B6B"/>
                 </a:solidFill>
-                <a:latin typeface="Century Schoolbook"/>
+                <a:latin typeface="Lexend"/>
               </a:rPr>
               <a:t>Grade 7 Accelerated · Unit 4 · Lesson 4 — Real-World Problems and Significant Digits</a:t>
             </a:r>
@@ -6442,11 +6761,11 @@
           <a:p>
             <a:pPr algn="r"/>
             <a:r>
-              <a:rPr sz="1100" b="0" i="0">
+              <a:rPr sz="1040" b="0" i="0">
                 <a:solidFill>
                   <a:srgbClr val="6B6B6B"/>
                 </a:solidFill>
-                <a:latin typeface="Century Schoolbook"/>
+                <a:latin typeface="Lexend"/>
               </a:rPr>
               <a:t>17</a:t>
             </a:r>
@@ -6462,7 +6781,7 @@
         <p:spPr>
           <a:xfrm>
             <a:off x="1234440" y="1851660"/>
-            <a:ext cx="4352401" cy="457200"/>
+            <a:ext cx="4367054" cy="457200"/>
           </a:xfrm>
           <a:prstGeom prst="rect">
             <a:avLst/>
@@ -6477,11 +6796,11 @@
           <a:p>
             <a:pPr algn="l"/>
             <a:r>
-              <a:rPr sz="2400" b="0" i="0">
-                <a:solidFill>
-                  <a:srgbClr val="1A1A1A"/>
-                </a:solidFill>
-                <a:latin typeface="Century Schoolbook"/>
+              <a:rPr sz="2280" b="0" i="0">
+                <a:solidFill>
+                  <a:srgbClr val="1A1A1A"/>
+                </a:solidFill>
+                <a:latin typeface="Lexend"/>
               </a:rPr>
               <a:t>A pond's surface measures  </a:t>
             </a:r>
@@ -6490,7 +6809,7 @@
       </p:sp>
       <p:pic>
         <p:nvPicPr>
-          <p:cNvPr id="9" name="Picture 8" descr="69f46df5ecb064d7.png"/>
+          <p:cNvPr id="9" name="Picture 8" descr="cb6705e7e3c13403.png"/>
           <p:cNvPicPr>
             <a:picLocks noChangeAspect="1"/>
           </p:cNvPicPr>
@@ -6504,8 +6823,8 @@
         </p:blipFill>
         <p:spPr>
           <a:xfrm>
-            <a:off x="5449681" y="1938527"/>
-            <a:ext cx="1127760" cy="283464"/>
+            <a:off x="5464334" y="1941575"/>
+            <a:ext cx="1130808" cy="277368"/>
           </a:xfrm>
           <a:prstGeom prst="rect">
             <a:avLst/>
@@ -6520,8 +6839,8 @@
         </p:nvSpPr>
         <p:spPr>
           <a:xfrm>
-            <a:off x="6577441" y="1851660"/>
-            <a:ext cx="1291636" cy="457200"/>
+            <a:off x="6595142" y="1851660"/>
+            <a:ext cx="1288226" cy="457200"/>
           </a:xfrm>
           <a:prstGeom prst="rect">
             <a:avLst/>
@@ -6536,11 +6855,11 @@
           <a:p>
             <a:pPr algn="l"/>
             <a:r>
-              <a:rPr sz="2400" b="0" i="0">
-                <a:solidFill>
-                  <a:srgbClr val="1A1A1A"/>
-                </a:solidFill>
-                <a:latin typeface="Century Schoolbook"/>
+              <a:rPr sz="2280" b="0" i="0">
+                <a:solidFill>
+                  <a:srgbClr val="1A1A1A"/>
+                </a:solidFill>
+                <a:latin typeface="Lexend"/>
               </a:rPr>
               <a:t>  m by  </a:t>
             </a:r>
@@ -6549,7 +6868,7 @@
       </p:sp>
       <p:pic>
         <p:nvPicPr>
-          <p:cNvPr id="11" name="Picture 10" descr="dd823fb368db84d4.png"/>
+          <p:cNvPr id="11" name="Picture 10" descr="fe2d8d13976231c4.png"/>
           <p:cNvPicPr>
             <a:picLocks noChangeAspect="1"/>
           </p:cNvPicPr>
@@ -6563,8 +6882,8 @@
         </p:blipFill>
         <p:spPr>
           <a:xfrm>
-            <a:off x="7731917" y="1937003"/>
-            <a:ext cx="1127760" cy="286512"/>
+            <a:off x="7746208" y="1941575"/>
+            <a:ext cx="1127760" cy="277368"/>
           </a:xfrm>
           <a:prstGeom prst="rect">
             <a:avLst/>
@@ -6579,8 +6898,8 @@
         </p:nvSpPr>
         <p:spPr>
           <a:xfrm>
-            <a:off x="8859677" y="1851660"/>
-            <a:ext cx="766986" cy="457200"/>
+            <a:off x="8873968" y="1851660"/>
+            <a:ext cx="734856" cy="457200"/>
           </a:xfrm>
           <a:prstGeom prst="rect">
             <a:avLst/>
@@ -6595,11 +6914,11 @@
           <a:p>
             <a:pPr algn="l"/>
             <a:r>
-              <a:rPr sz="2400" b="0" i="0">
-                <a:solidFill>
-                  <a:srgbClr val="1A1A1A"/>
-                </a:solidFill>
-                <a:latin typeface="Century Schoolbook"/>
+              <a:rPr sz="2280" b="0" i="0">
+                <a:solidFill>
+                  <a:srgbClr val="1A1A1A"/>
+                </a:solidFill>
+                <a:latin typeface="Lexend"/>
               </a:rPr>
               <a:t>  m.</a:t>
             </a:r>
@@ -6630,11 +6949,11 @@
           <a:p>
             <a:pPr algn="l"/>
             <a:r>
-              <a:rPr sz="2400" b="0" i="0">
-                <a:solidFill>
-                  <a:srgbClr val="1A1A1A"/>
-                </a:solidFill>
-                <a:latin typeface="Century Schoolbook"/>
+              <a:rPr sz="2280" b="0" i="0">
+                <a:solidFill>
+                  <a:srgbClr val="1A1A1A"/>
+                </a:solidFill>
+                <a:latin typeface="Lexend"/>
               </a:rPr>
               <a:t>The pond is 3 meters deep.</a:t>
             </a:r>
@@ -6665,11 +6984,11 @@
           <a:p>
             <a:pPr algn="l"/>
             <a:r>
-              <a:rPr sz="2400" b="1" i="0">
-                <a:solidFill>
-                  <a:srgbClr val="1A1A1A"/>
-                </a:solidFill>
-                <a:latin typeface="Century Schoolbook"/>
+              <a:rPr sz="2280" b="1" i="0">
+                <a:solidFill>
+                  <a:srgbClr val="1A1A1A"/>
+                </a:solidFill>
+                <a:latin typeface="Lexend"/>
               </a:rPr>
               <a:t>Find the surface area. Round to the correct number of significant digits.</a:t>
             </a:r>
@@ -6700,11 +7019,11 @@
           <a:p>
             <a:pPr algn="ctr"/>
             <a:r>
-              <a:rPr sz="2600" b="1" i="0">
-                <a:solidFill>
-                  <a:srgbClr val="1A1A1A"/>
-                </a:solidFill>
-                <a:latin typeface="Century Schoolbook"/>
+              <a:rPr sz="2470" b="1" i="0">
+                <a:solidFill>
+                  <a:srgbClr val="1A1A1A"/>
+                </a:solidFill>
+                <a:latin typeface="Lexend"/>
               </a:rPr>
               <a:t>Answer it.</a:t>
             </a:r>
@@ -6753,11 +7072,11 @@
           <a:p>
             <a:pPr algn="l"/>
             <a:r>
-              <a:rPr sz="3400" b="1" i="0">
-                <a:solidFill>
-                  <a:srgbClr val="1A1A1A"/>
-                </a:solidFill>
-                <a:latin typeface="Century Schoolbook"/>
+              <a:rPr sz="3229" b="1" i="0">
+                <a:solidFill>
+                  <a:srgbClr val="1A1A1A"/>
+                </a:solidFill>
+                <a:latin typeface="Lexend"/>
               </a:rPr>
               <a:t>Whiteboards   ·   Question 2 of 9</a:t>
             </a:r>
@@ -6893,11 +7212,11 @@
           <a:p>
             <a:pPr algn="l"/>
             <a:r>
-              <a:rPr sz="1100" b="0" i="1">
+              <a:rPr sz="1040" b="0" i="0">
                 <a:solidFill>
                   <a:srgbClr val="6B6B6B"/>
                 </a:solidFill>
-                <a:latin typeface="Century Schoolbook"/>
+                <a:latin typeface="Lexend"/>
               </a:rPr>
               <a:t>Grade 7 Accelerated · Unit 4 · Lesson 4 — Real-World Problems and Significant Digits</a:t>
             </a:r>
@@ -6928,11 +7247,11 @@
           <a:p>
             <a:pPr algn="r"/>
             <a:r>
-              <a:rPr sz="1100" b="0" i="0">
+              <a:rPr sz="1040" b="0" i="0">
                 <a:solidFill>
                   <a:srgbClr val="6B6B6B"/>
                 </a:solidFill>
-                <a:latin typeface="Century Schoolbook"/>
+                <a:latin typeface="Lexend"/>
               </a:rPr>
               <a:t>18</a:t>
             </a:r>
@@ -6948,7 +7267,7 @@
         <p:spPr>
           <a:xfrm>
             <a:off x="1234440" y="1851660"/>
-            <a:ext cx="4352401" cy="457200"/>
+            <a:ext cx="4367054" cy="457200"/>
           </a:xfrm>
           <a:prstGeom prst="rect">
             <a:avLst/>
@@ -6963,11 +7282,11 @@
           <a:p>
             <a:pPr algn="l"/>
             <a:r>
-              <a:rPr sz="2400" b="0" i="0">
-                <a:solidFill>
-                  <a:srgbClr val="1A1A1A"/>
-                </a:solidFill>
-                <a:latin typeface="Century Schoolbook"/>
+              <a:rPr sz="2280" b="0" i="0">
+                <a:solidFill>
+                  <a:srgbClr val="1A1A1A"/>
+                </a:solidFill>
+                <a:latin typeface="Lexend"/>
               </a:rPr>
               <a:t>A pond's surface measures  </a:t>
             </a:r>
@@ -6976,7 +7295,7 @@
       </p:sp>
       <p:pic>
         <p:nvPicPr>
-          <p:cNvPr id="9" name="Picture 8" descr="877de329d13d7ebe.png"/>
+          <p:cNvPr id="9" name="Picture 8" descr="14e1bd54084a469a.png"/>
           <p:cNvPicPr>
             <a:picLocks noChangeAspect="1"/>
           </p:cNvPicPr>
@@ -6990,8 +7309,8 @@
         </p:blipFill>
         <p:spPr>
           <a:xfrm>
-            <a:off x="5449681" y="1938527"/>
-            <a:ext cx="1127760" cy="283464"/>
+            <a:off x="5464334" y="1941575"/>
+            <a:ext cx="1130808" cy="277368"/>
           </a:xfrm>
           <a:prstGeom prst="rect">
             <a:avLst/>
@@ -7006,8 +7325,8 @@
         </p:nvSpPr>
         <p:spPr>
           <a:xfrm>
-            <a:off x="6577441" y="1851660"/>
-            <a:ext cx="1291636" cy="457200"/>
+            <a:off x="6595142" y="1851660"/>
+            <a:ext cx="1288226" cy="457200"/>
           </a:xfrm>
           <a:prstGeom prst="rect">
             <a:avLst/>
@@ -7022,11 +7341,11 @@
           <a:p>
             <a:pPr algn="l"/>
             <a:r>
-              <a:rPr sz="2400" b="0" i="0">
-                <a:solidFill>
-                  <a:srgbClr val="1A1A1A"/>
-                </a:solidFill>
-                <a:latin typeface="Century Schoolbook"/>
+              <a:rPr sz="2280" b="0" i="0">
+                <a:solidFill>
+                  <a:srgbClr val="1A1A1A"/>
+                </a:solidFill>
+                <a:latin typeface="Lexend"/>
               </a:rPr>
               <a:t>  m by  </a:t>
             </a:r>
@@ -7035,7 +7354,7 @@
       </p:sp>
       <p:pic>
         <p:nvPicPr>
-          <p:cNvPr id="11" name="Picture 10" descr="98384e6b1ba1215b.png"/>
+          <p:cNvPr id="11" name="Picture 10" descr="5ace9ec43120721e.png"/>
           <p:cNvPicPr>
             <a:picLocks noChangeAspect="1"/>
           </p:cNvPicPr>
@@ -7049,8 +7368,8 @@
         </p:blipFill>
         <p:spPr>
           <a:xfrm>
-            <a:off x="7731917" y="1938527"/>
-            <a:ext cx="1130808" cy="283464"/>
+            <a:off x="7746208" y="1941575"/>
+            <a:ext cx="1127760" cy="277368"/>
           </a:xfrm>
           <a:prstGeom prst="rect">
             <a:avLst/>
@@ -7065,8 +7384,8 @@
         </p:nvSpPr>
         <p:spPr>
           <a:xfrm>
-            <a:off x="8862725" y="1851660"/>
-            <a:ext cx="766986" cy="457200"/>
+            <a:off x="8873968" y="1851660"/>
+            <a:ext cx="734856" cy="457200"/>
           </a:xfrm>
           <a:prstGeom prst="rect">
             <a:avLst/>
@@ -7081,11 +7400,11 @@
           <a:p>
             <a:pPr algn="l"/>
             <a:r>
-              <a:rPr sz="2400" b="0" i="0">
-                <a:solidFill>
-                  <a:srgbClr val="1A1A1A"/>
-                </a:solidFill>
-                <a:latin typeface="Century Schoolbook"/>
+              <a:rPr sz="2280" b="0" i="0">
+                <a:solidFill>
+                  <a:srgbClr val="1A1A1A"/>
+                </a:solidFill>
+                <a:latin typeface="Lexend"/>
               </a:rPr>
               <a:t>  m.</a:t>
             </a:r>
@@ -7116,11 +7435,11 @@
           <a:p>
             <a:pPr algn="l"/>
             <a:r>
-              <a:rPr sz="2400" b="0" i="0">
-                <a:solidFill>
-                  <a:srgbClr val="1A1A1A"/>
-                </a:solidFill>
-                <a:latin typeface="Century Schoolbook"/>
+              <a:rPr sz="2280" b="0" i="0">
+                <a:solidFill>
+                  <a:srgbClr val="1A1A1A"/>
+                </a:solidFill>
+                <a:latin typeface="Lexend"/>
               </a:rPr>
               <a:t>The pond is 3 meters deep.</a:t>
             </a:r>
@@ -7151,26 +7470,192 @@
           <a:p>
             <a:pPr algn="l"/>
             <a:r>
-              <a:rPr sz="2400" b="1" i="0">
-                <a:solidFill>
-                  <a:srgbClr val="1A1A1A"/>
-                </a:solidFill>
-                <a:latin typeface="Century Schoolbook"/>
+              <a:rPr sz="2280" b="1" i="0">
+                <a:solidFill>
+                  <a:srgbClr val="1A1A1A"/>
+                </a:solidFill>
+                <a:latin typeface="Lexend"/>
               </a:rPr>
               <a:t>Find the surface area. Round to the correct number of significant digits.</a:t>
             </a:r>
           </a:p>
         </p:txBody>
       </p:sp>
-      <p:sp>
-        <p:nvSpPr>
-          <p:cNvPr id="15" name="TextBox 14"/>
-          <p:cNvSpPr txBox="1"/>
-          <p:nvPr/>
-        </p:nvSpPr>
-        <p:spPr>
-          <a:xfrm>
-            <a:off x="777240" y="4663440"/>
+      <p:pic>
+        <p:nvPicPr>
+          <p:cNvPr id="15" name="Picture 14" descr="0dcb6b3604aaf1a1.png"/>
+          <p:cNvPicPr>
+            <a:picLocks noChangeAspect="1"/>
+          </p:cNvPicPr>
+          <p:nvPr/>
+        </p:nvPicPr>
+        <p:blipFill>
+          <a:blip r:embed="rId4"/>
+          <a:stretch>
+            <a:fillRect/>
+          </a:stretch>
+        </p:blipFill>
+        <p:spPr>
+          <a:xfrm>
+            <a:off x="3571929" y="4212667"/>
+            <a:ext cx="1825752" cy="213360"/>
+          </a:xfrm>
+          <a:prstGeom prst="rect">
+            <a:avLst/>
+          </a:prstGeom>
+        </p:spPr>
+      </p:pic>
+      <p:sp>
+        <p:nvSpPr>
+          <p:cNvPr id="16" name="TextBox 15"/>
+          <p:cNvSpPr txBox="1"/>
+          <p:nvPr/>
+        </p:nvSpPr>
+        <p:spPr>
+          <a:xfrm>
+            <a:off x="5397681" y="4090747"/>
+            <a:ext cx="1320048" cy="457200"/>
+          </a:xfrm>
+          <a:prstGeom prst="rect">
+            <a:avLst/>
+          </a:prstGeom>
+          <a:noFill/>
+        </p:spPr>
+        <p:txBody>
+          <a:bodyPr wrap="none" lIns="45720" rIns="45720" tIns="18288" bIns="18288" anchor="ctr">
+            <a:noAutofit/>
+          </a:bodyPr>
+          <a:lstStyle/>
+          <a:p>
+            <a:pPr algn="l"/>
+            <a:r>
+              <a:rPr sz="2330" b="0" i="0">
+                <a:solidFill>
+                  <a:srgbClr val="1A1A1A"/>
+                </a:solidFill>
+                <a:latin typeface="Lexend"/>
+              </a:rPr>
+              <a:t>   and   </a:t>
+            </a:r>
+          </a:p>
+        </p:txBody>
+      </p:sp>
+      <p:pic>
+        <p:nvPicPr>
+          <p:cNvPr id="17" name="Picture 16" descr="a732557401dc8add.png"/>
+          <p:cNvPicPr>
+            <a:picLocks noChangeAspect="1"/>
+          </p:cNvPicPr>
+          <p:nvPr/>
+        </p:nvPicPr>
+        <p:blipFill>
+          <a:blip r:embed="rId5"/>
+          <a:stretch>
+            <a:fillRect/>
+          </a:stretch>
+        </p:blipFill>
+        <p:spPr>
+          <a:xfrm>
+            <a:off x="6580570" y="4188283"/>
+            <a:ext cx="1831848" cy="262128"/>
+          </a:xfrm>
+          <a:prstGeom prst="rect">
+            <a:avLst/>
+          </a:prstGeom>
+        </p:spPr>
+      </p:pic>
+      <p:pic>
+        <p:nvPicPr>
+          <p:cNvPr id="18" name="Picture 17" descr="ca43b17f8102147f.png"/>
+          <p:cNvPicPr>
+            <a:picLocks noChangeAspect="1"/>
+          </p:cNvPicPr>
+          <p:nvPr/>
+        </p:nvPicPr>
+        <p:blipFill>
+          <a:blip r:embed="rId6"/>
+          <a:stretch>
+            <a:fillRect/>
+          </a:stretch>
+        </p:blipFill>
+        <p:spPr>
+          <a:xfrm>
+            <a:off x="3571929" y="4666819"/>
+            <a:ext cx="2362200" cy="310896"/>
+          </a:xfrm>
+          <a:prstGeom prst="rect">
+            <a:avLst/>
+          </a:prstGeom>
+        </p:spPr>
+      </p:pic>
+      <p:sp>
+        <p:nvSpPr>
+          <p:cNvPr id="19" name="TextBox 18"/>
+          <p:cNvSpPr txBox="1"/>
+          <p:nvPr/>
+        </p:nvSpPr>
+        <p:spPr>
+          <a:xfrm>
+            <a:off x="3517065" y="5096587"/>
+            <a:ext cx="4209940" cy="457200"/>
+          </a:xfrm>
+          <a:prstGeom prst="rect">
+            <a:avLst/>
+          </a:prstGeom>
+          <a:noFill/>
+        </p:spPr>
+        <p:txBody>
+          <a:bodyPr wrap="none" lIns="45720" rIns="45720" tIns="18288" bIns="18288" anchor="ctr">
+            <a:noAutofit/>
+          </a:bodyPr>
+          <a:lstStyle/>
+          <a:p>
+            <a:pPr algn="l"/>
+            <a:r>
+              <a:rPr sz="2330" b="0" i="0">
+                <a:solidFill>
+                  <a:srgbClr val="1A1A1A"/>
+                </a:solidFill>
+                <a:latin typeface="Lexend"/>
+              </a:rPr>
+              <a:t>Keep 2 significant digits:   </a:t>
+            </a:r>
+          </a:p>
+        </p:txBody>
+      </p:sp>
+      <p:pic>
+        <p:nvPicPr>
+          <p:cNvPr id="20" name="Picture 19" descr="018e3913f4d433d2.png"/>
+          <p:cNvPicPr>
+            <a:picLocks noChangeAspect="1"/>
+          </p:cNvPicPr>
+          <p:nvPr/>
+        </p:nvPicPr>
+        <p:blipFill>
+          <a:blip r:embed="rId7"/>
+          <a:stretch>
+            <a:fillRect/>
+          </a:stretch>
+        </p:blipFill>
+        <p:spPr>
+          <a:xfrm>
+            <a:off x="7589846" y="5197171"/>
+            <a:ext cx="1057656" cy="256032"/>
+          </a:xfrm>
+          <a:prstGeom prst="rect">
+            <a:avLst/>
+          </a:prstGeom>
+        </p:spPr>
+      </p:pic>
+      <p:sp>
+        <p:nvSpPr>
+          <p:cNvPr id="21" name="TextBox 20"/>
+          <p:cNvSpPr txBox="1"/>
+          <p:nvPr/>
+        </p:nvSpPr>
+        <p:spPr>
+          <a:xfrm>
+            <a:off x="777240" y="5668087"/>
             <a:ext cx="10607040" cy="548640"/>
           </a:xfrm>
           <a:prstGeom prst="rect">
@@ -7186,29 +7671,29 @@
           <a:p>
             <a:pPr algn="ctr"/>
             <a:r>
-              <a:rPr sz="3200" b="1" i="0">
+              <a:rPr sz="3040" b="1" i="0">
                 <a:solidFill>
                   <a:srgbClr val="9E1B32"/>
                 </a:solidFill>
-                <a:latin typeface="Century Schoolbook"/>
+                <a:latin typeface="Lexend"/>
               </a:rPr>
               <a:t>Answer:   1.2 × 10</a:t>
             </a:r>
             <a:r>
-              <a:rPr sz="3200" b="1" i="0" baseline="30000">
+              <a:rPr sz="3040" b="1" i="0" baseline="30000">
                 <a:solidFill>
                   <a:srgbClr val="9E1B32"/>
                 </a:solidFill>
-                <a:latin typeface="Century Schoolbook"/>
+                <a:latin typeface="Lexend"/>
               </a:rPr>
               <a:t>4</a:t>
             </a:r>
             <a:r>
-              <a:rPr sz="3200" b="1" i="0">
+              <a:rPr sz="3040" b="1" i="0">
                 <a:solidFill>
                   <a:srgbClr val="9E1B32"/>
                 </a:solidFill>
-                <a:latin typeface="Century Schoolbook"/>
+                <a:latin typeface="Lexend"/>
               </a:rPr>
               <a:t> square meters</a:t>
             </a:r>
@@ -7257,11 +7742,11 @@
           <a:p>
             <a:pPr algn="l"/>
             <a:r>
-              <a:rPr sz="3400" b="1" i="0">
-                <a:solidFill>
-                  <a:srgbClr val="1A1A1A"/>
-                </a:solidFill>
-                <a:latin typeface="Century Schoolbook"/>
+              <a:rPr sz="3229" b="1" i="0">
+                <a:solidFill>
+                  <a:srgbClr val="1A1A1A"/>
+                </a:solidFill>
+                <a:latin typeface="Lexend"/>
               </a:rPr>
               <a:t>Whiteboards   ·   Question 3 of 9</a:t>
             </a:r>
@@ -7397,11 +7882,11 @@
           <a:p>
             <a:pPr algn="l"/>
             <a:r>
-              <a:rPr sz="1100" b="0" i="1">
+              <a:rPr sz="1040" b="0" i="0">
                 <a:solidFill>
                   <a:srgbClr val="6B6B6B"/>
                 </a:solidFill>
-                <a:latin typeface="Century Schoolbook"/>
+                <a:latin typeface="Lexend"/>
               </a:rPr>
               <a:t>Grade 7 Accelerated · Unit 4 · Lesson 4 — Real-World Problems and Significant Digits</a:t>
             </a:r>
@@ -7432,11 +7917,11 @@
           <a:p>
             <a:pPr algn="r"/>
             <a:r>
-              <a:rPr sz="1100" b="0" i="0">
+              <a:rPr sz="1040" b="0" i="0">
                 <a:solidFill>
                   <a:srgbClr val="6B6B6B"/>
                 </a:solidFill>
-                <a:latin typeface="Century Schoolbook"/>
+                <a:latin typeface="Lexend"/>
               </a:rPr>
               <a:t>19</a:t>
             </a:r>
@@ -7467,11 +7952,11 @@
           <a:p>
             <a:pPr algn="ctr"/>
             <a:r>
-              <a:rPr sz="2300" b="0" i="0">
-                <a:solidFill>
-                  <a:srgbClr val="1A1A1A"/>
-                </a:solidFill>
-                <a:latin typeface="Century Schoolbook"/>
+              <a:rPr sz="2180" b="0" i="0">
+                <a:solidFill>
+                  <a:srgbClr val="1A1A1A"/>
+                </a:solidFill>
+                <a:latin typeface="Lexend"/>
               </a:rPr>
               <a:t>Two measurements are multiplied. One has 3 significant digits</a:t>
             </a:r>
@@ -7486,8 +7971,8 @@
         </p:nvSpPr>
         <p:spPr>
           <a:xfrm>
-            <a:off x="1551793" y="2692908"/>
-            <a:ext cx="6997736" cy="457200"/>
+            <a:off x="1580585" y="2692908"/>
+            <a:ext cx="6958554" cy="457200"/>
           </a:xfrm>
           <a:prstGeom prst="rect">
             <a:avLst/>
@@ -7502,11 +7987,11 @@
           <a:p>
             <a:pPr algn="l"/>
             <a:r>
-              <a:rPr sz="2600" b="0" i="0">
-                <a:solidFill>
-                  <a:srgbClr val="1A1A1A"/>
-                </a:solidFill>
-                <a:latin typeface="Century Schoolbook"/>
+              <a:rPr sz="2470" b="0" i="0">
+                <a:solidFill>
+                  <a:srgbClr val="1A1A1A"/>
+                </a:solidFill>
+                <a:latin typeface="Lexend"/>
               </a:rPr>
               <a:t>and the other has 5. The exact product is  </a:t>
             </a:r>
@@ -7515,7 +8000,7 @@
       </p:sp>
       <p:pic>
         <p:nvPicPr>
-          <p:cNvPr id="10" name="Picture 9" descr="f1f759a641dda94a.png"/>
+          <p:cNvPr id="10" name="Picture 9" descr="f5a6805642b36028.png"/>
           <p:cNvPicPr>
             <a:picLocks noChangeAspect="1"/>
           </p:cNvPicPr>
@@ -7529,8 +8014,8 @@
         </p:blipFill>
         <p:spPr>
           <a:xfrm>
-            <a:off x="8412370" y="2744724"/>
-            <a:ext cx="2026920" cy="353568"/>
+            <a:off x="8401980" y="2753867"/>
+            <a:ext cx="2029968" cy="335280"/>
           </a:xfrm>
           <a:prstGeom prst="rect">
             <a:avLst/>
@@ -7545,8 +8030,8 @@
         </p:nvSpPr>
         <p:spPr>
           <a:xfrm>
-            <a:off x="10439290" y="2692908"/>
-            <a:ext cx="307595" cy="457200"/>
+            <a:off x="10431948" y="2692908"/>
+            <a:ext cx="286146" cy="457200"/>
           </a:xfrm>
           <a:prstGeom prst="rect">
             <a:avLst/>
@@ -7561,11 +8046,11 @@
           <a:p>
             <a:pPr algn="l"/>
             <a:r>
-              <a:rPr sz="2600" b="0" i="0">
-                <a:solidFill>
-                  <a:srgbClr val="1A1A1A"/>
-                </a:solidFill>
-                <a:latin typeface="Century Schoolbook"/>
+              <a:rPr sz="2470" b="0" i="0">
+                <a:solidFill>
+                  <a:srgbClr val="1A1A1A"/>
+                </a:solidFill>
+                <a:latin typeface="Lexend"/>
               </a:rPr>
               <a:t>.</a:t>
             </a:r>
@@ -7596,11 +8081,11 @@
           <a:p>
             <a:pPr algn="ctr"/>
             <a:r>
-              <a:rPr sz="2600" b="0" i="0">
-                <a:solidFill>
-                  <a:srgbClr val="1A1A1A"/>
-                </a:solidFill>
-                <a:latin typeface="Century Schoolbook"/>
+              <a:rPr sz="2470" b="0" i="0">
+                <a:solidFill>
+                  <a:srgbClr val="1A1A1A"/>
+                </a:solidFill>
+                <a:latin typeface="Lexend"/>
               </a:rPr>
               <a:t>How should the answer be written?</a:t>
             </a:r>
@@ -7631,11 +8116,11 @@
           <a:p>
             <a:pPr algn="ctr"/>
             <a:r>
-              <a:rPr sz="2600" b="1" i="0">
-                <a:solidFill>
-                  <a:srgbClr val="1A1A1A"/>
-                </a:solidFill>
-                <a:latin typeface="Century Schoolbook"/>
+              <a:rPr sz="2470" b="1" i="0">
+                <a:solidFill>
+                  <a:srgbClr val="1A1A1A"/>
+                </a:solidFill>
+                <a:latin typeface="Lexend"/>
               </a:rPr>
               <a:t>Answer it.</a:t>
             </a:r>
@@ -7684,11 +8169,11 @@
           <a:p>
             <a:pPr algn="l"/>
             <a:r>
-              <a:rPr sz="3600" b="1" i="0">
-                <a:solidFill>
-                  <a:srgbClr val="1A1A1A"/>
-                </a:solidFill>
-                <a:latin typeface="Century Schoolbook"/>
+              <a:rPr sz="3420" b="1" i="0">
+                <a:solidFill>
+                  <a:srgbClr val="1A1A1A"/>
+                </a:solidFill>
+                <a:latin typeface="Lexend"/>
               </a:rPr>
               <a:t>Warm-Up</a:t>
             </a:r>
@@ -7824,11 +8309,11 @@
           <a:p>
             <a:pPr algn="l"/>
             <a:r>
-              <a:rPr sz="1100" b="0" i="1">
+              <a:rPr sz="1040" b="0" i="0">
                 <a:solidFill>
                   <a:srgbClr val="6B6B6B"/>
                 </a:solidFill>
-                <a:latin typeface="Century Schoolbook"/>
+                <a:latin typeface="Lexend"/>
               </a:rPr>
               <a:t>Grade 7 Accelerated · Unit 4 · Lesson 4 — Real-World Problems and Significant Digits</a:t>
             </a:r>
@@ -7859,11 +8344,11 @@
           <a:p>
             <a:pPr algn="r"/>
             <a:r>
-              <a:rPr sz="1100" b="0" i="0">
+              <a:rPr sz="1040" b="0" i="0">
                 <a:solidFill>
                   <a:srgbClr val="6B6B6B"/>
                 </a:solidFill>
-                <a:latin typeface="Century Schoolbook"/>
+                <a:latin typeface="Lexend"/>
               </a:rPr>
               <a:t>2</a:t>
             </a:r>
@@ -7879,7 +8364,7 @@
         <p:spPr>
           <a:xfrm>
             <a:off x="1874519" y="1440180"/>
-            <a:ext cx="720605" cy="457200"/>
+            <a:ext cx="671561" cy="457200"/>
           </a:xfrm>
           <a:prstGeom prst="rect">
             <a:avLst/>
@@ -7894,11 +8379,11 @@
           <a:p>
             <a:pPr algn="l"/>
             <a:r>
-              <a:rPr sz="2300" b="0" i="0">
-                <a:solidFill>
-                  <a:srgbClr val="1A1A1A"/>
-                </a:solidFill>
-                <a:latin typeface="Century Schoolbook"/>
+              <a:rPr sz="2180" b="0" i="0">
+                <a:solidFill>
+                  <a:srgbClr val="1A1A1A"/>
+                </a:solidFill>
+                <a:latin typeface="Lexend"/>
               </a:rPr>
               <a:t>1.   </a:t>
             </a:r>
@@ -7907,7 +8392,7 @@
       </p:sp>
       <p:pic>
         <p:nvPicPr>
-          <p:cNvPr id="9" name="Picture 8" descr="aa1e7ea664b07d25.png"/>
+          <p:cNvPr id="9" name="Picture 8" descr="9ef93e9422ec8078.png"/>
           <p:cNvPicPr>
             <a:picLocks noChangeAspect="1"/>
           </p:cNvPicPr>
@@ -7921,8 +8406,8 @@
         </p:blipFill>
         <p:spPr>
           <a:xfrm>
-            <a:off x="2457965" y="1501140"/>
-            <a:ext cx="2441448" cy="335280"/>
+            <a:off x="2408921" y="1501140"/>
+            <a:ext cx="2417064" cy="335280"/>
           </a:xfrm>
           <a:prstGeom prst="rect">
             <a:avLst/>
@@ -7938,7 +8423,7 @@
         <p:spPr>
           <a:xfrm>
             <a:off x="1874519" y="2052828"/>
-            <a:ext cx="726811" cy="457200"/>
+            <a:ext cx="685699" cy="457200"/>
           </a:xfrm>
           <a:prstGeom prst="rect">
             <a:avLst/>
@@ -7953,11 +8438,11 @@
           <a:p>
             <a:pPr algn="l"/>
             <a:r>
-              <a:rPr sz="2300" b="0" i="0">
-                <a:solidFill>
-                  <a:srgbClr val="1A1A1A"/>
-                </a:solidFill>
-                <a:latin typeface="Century Schoolbook"/>
+              <a:rPr sz="2180" b="0" i="0">
+                <a:solidFill>
+                  <a:srgbClr val="1A1A1A"/>
+                </a:solidFill>
+                <a:latin typeface="Lexend"/>
               </a:rPr>
               <a:t>2.   </a:t>
             </a:r>
@@ -7966,7 +8451,7 @@
       </p:sp>
       <p:pic>
         <p:nvPicPr>
-          <p:cNvPr id="11" name="Picture 10" descr="8ddd66cd0c0fdcaa.png"/>
+          <p:cNvPr id="11" name="Picture 10" descr="872c396e107e432d.png"/>
           <p:cNvPicPr>
             <a:picLocks noChangeAspect="1"/>
           </p:cNvPicPr>
@@ -7980,8 +8465,8 @@
         </p:blipFill>
         <p:spPr>
           <a:xfrm>
-            <a:off x="2464171" y="2113788"/>
-            <a:ext cx="3099816" cy="335280"/>
+            <a:off x="2423059" y="2115312"/>
+            <a:ext cx="3057144" cy="332232"/>
           </a:xfrm>
           <a:prstGeom prst="rect">
             <a:avLst/>
@@ -7997,7 +8482,7 @@
         <p:spPr>
           <a:xfrm>
             <a:off x="1874519" y="2665476"/>
-            <a:ext cx="5997709" cy="457200"/>
+            <a:ext cx="5859958" cy="457200"/>
           </a:xfrm>
           <a:prstGeom prst="rect">
             <a:avLst/>
@@ -8012,11 +8497,11 @@
           <a:p>
             <a:pPr algn="l"/>
             <a:r>
-              <a:rPr sz="2300" b="0" i="0">
-                <a:solidFill>
-                  <a:srgbClr val="1A1A1A"/>
-                </a:solidFill>
-                <a:latin typeface="Century Schoolbook"/>
+              <a:rPr sz="2180" b="0" i="0">
+                <a:solidFill>
+                  <a:srgbClr val="1A1A1A"/>
+                </a:solidFill>
+                <a:latin typeface="Lexend"/>
               </a:rPr>
               <a:t>3.   Write  0.00902  in scientific notation.</a:t>
             </a:r>
@@ -8032,7 +8517,7 @@
         <p:spPr>
           <a:xfrm>
             <a:off x="1874519" y="3278124"/>
-            <a:ext cx="6461623" cy="457200"/>
+            <a:ext cx="6301924" cy="457200"/>
           </a:xfrm>
           <a:prstGeom prst="rect">
             <a:avLst/>
@@ -8047,11 +8532,11 @@
           <a:p>
             <a:pPr algn="l"/>
             <a:r>
-              <a:rPr sz="2300" b="0" i="0">
-                <a:solidFill>
-                  <a:srgbClr val="1A1A1A"/>
-                </a:solidFill>
-                <a:latin typeface="Century Schoolbook"/>
+              <a:rPr sz="2180" b="0" i="0">
+                <a:solidFill>
+                  <a:srgbClr val="1A1A1A"/>
+                </a:solidFill>
+                <a:latin typeface="Lexend"/>
               </a:rPr>
               <a:t>4.   Round  4.738  to the nearest hundredth.</a:t>
             </a:r>
@@ -8100,11 +8585,11 @@
           <a:p>
             <a:pPr algn="l"/>
             <a:r>
-              <a:rPr sz="3400" b="1" i="0">
-                <a:solidFill>
-                  <a:srgbClr val="1A1A1A"/>
-                </a:solidFill>
-                <a:latin typeface="Century Schoolbook"/>
+              <a:rPr sz="3229" b="1" i="0">
+                <a:solidFill>
+                  <a:srgbClr val="1A1A1A"/>
+                </a:solidFill>
+                <a:latin typeface="Lexend"/>
               </a:rPr>
               <a:t>Whiteboards   ·   Question 3 of 9</a:t>
             </a:r>
@@ -8240,11 +8725,11 @@
           <a:p>
             <a:pPr algn="l"/>
             <a:r>
-              <a:rPr sz="1100" b="0" i="1">
+              <a:rPr sz="1040" b="0" i="0">
                 <a:solidFill>
                   <a:srgbClr val="6B6B6B"/>
                 </a:solidFill>
-                <a:latin typeface="Century Schoolbook"/>
+                <a:latin typeface="Lexend"/>
               </a:rPr>
               <a:t>Grade 7 Accelerated · Unit 4 · Lesson 4 — Real-World Problems and Significant Digits</a:t>
             </a:r>
@@ -8275,11 +8760,11 @@
           <a:p>
             <a:pPr algn="r"/>
             <a:r>
-              <a:rPr sz="1100" b="0" i="0">
+              <a:rPr sz="1040" b="0" i="0">
                 <a:solidFill>
                   <a:srgbClr val="6B6B6B"/>
                 </a:solidFill>
-                <a:latin typeface="Century Schoolbook"/>
+                <a:latin typeface="Lexend"/>
               </a:rPr>
               <a:t>20</a:t>
             </a:r>
@@ -8310,11 +8795,11 @@
           <a:p>
             <a:pPr algn="ctr"/>
             <a:r>
-              <a:rPr sz="2300" b="0" i="0">
-                <a:solidFill>
-                  <a:srgbClr val="1A1A1A"/>
-                </a:solidFill>
-                <a:latin typeface="Century Schoolbook"/>
+              <a:rPr sz="2180" b="0" i="0">
+                <a:solidFill>
+                  <a:srgbClr val="1A1A1A"/>
+                </a:solidFill>
+                <a:latin typeface="Lexend"/>
               </a:rPr>
               <a:t>Two measurements are multiplied. One has 3 significant digits</a:t>
             </a:r>
@@ -8329,8 +8814,8 @@
         </p:nvSpPr>
         <p:spPr>
           <a:xfrm>
-            <a:off x="1551793" y="2601468"/>
-            <a:ext cx="6997736" cy="457200"/>
+            <a:off x="1580585" y="2601468"/>
+            <a:ext cx="6958554" cy="457200"/>
           </a:xfrm>
           <a:prstGeom prst="rect">
             <a:avLst/>
@@ -8345,11 +8830,11 @@
           <a:p>
             <a:pPr algn="l"/>
             <a:r>
-              <a:rPr sz="2600" b="0" i="0">
-                <a:solidFill>
-                  <a:srgbClr val="1A1A1A"/>
-                </a:solidFill>
-                <a:latin typeface="Century Schoolbook"/>
+              <a:rPr sz="2470" b="0" i="0">
+                <a:solidFill>
+                  <a:srgbClr val="1A1A1A"/>
+                </a:solidFill>
+                <a:latin typeface="Lexend"/>
               </a:rPr>
               <a:t>and the other has 5. The exact product is  </a:t>
             </a:r>
@@ -8358,7 +8843,7 @@
       </p:sp>
       <p:pic>
         <p:nvPicPr>
-          <p:cNvPr id="10" name="Picture 9" descr="b1203184ca7f2d67.png"/>
+          <p:cNvPr id="10" name="Picture 9" descr="b41e0e74d053423f.png"/>
           <p:cNvPicPr>
             <a:picLocks noChangeAspect="1"/>
           </p:cNvPicPr>
@@ -8372,8 +8857,8 @@
         </p:blipFill>
         <p:spPr>
           <a:xfrm>
-            <a:off x="8412370" y="2653284"/>
-            <a:ext cx="2026920" cy="353568"/>
+            <a:off x="8401980" y="2662428"/>
+            <a:ext cx="2029968" cy="335280"/>
           </a:xfrm>
           <a:prstGeom prst="rect">
             <a:avLst/>
@@ -8388,8 +8873,8 @@
         </p:nvSpPr>
         <p:spPr>
           <a:xfrm>
-            <a:off x="10439290" y="2601468"/>
-            <a:ext cx="307595" cy="457200"/>
+            <a:off x="10431948" y="2601468"/>
+            <a:ext cx="286146" cy="457200"/>
           </a:xfrm>
           <a:prstGeom prst="rect">
             <a:avLst/>
@@ -8404,11 +8889,11 @@
           <a:p>
             <a:pPr algn="l"/>
             <a:r>
-              <a:rPr sz="2600" b="0" i="0">
-                <a:solidFill>
-                  <a:srgbClr val="1A1A1A"/>
-                </a:solidFill>
-                <a:latin typeface="Century Schoolbook"/>
+              <a:rPr sz="2470" b="0" i="0">
+                <a:solidFill>
+                  <a:srgbClr val="1A1A1A"/>
+                </a:solidFill>
+                <a:latin typeface="Lexend"/>
               </a:rPr>
               <a:t>.</a:t>
             </a:r>
@@ -8439,11 +8924,11 @@
           <a:p>
             <a:pPr algn="ctr"/>
             <a:r>
-              <a:rPr sz="2600" b="0" i="0">
-                <a:solidFill>
-                  <a:srgbClr val="1A1A1A"/>
-                </a:solidFill>
-                <a:latin typeface="Century Schoolbook"/>
+              <a:rPr sz="2470" b="0" i="0">
+                <a:solidFill>
+                  <a:srgbClr val="1A1A1A"/>
+                </a:solidFill>
+                <a:latin typeface="Lexend"/>
               </a:rPr>
               <a:t>How should the answer be written?</a:t>
             </a:r>
@@ -8458,7 +8943,125 @@
         </p:nvSpPr>
         <p:spPr>
           <a:xfrm>
-            <a:off x="777240" y="4663440"/>
+            <a:off x="1826369" y="3935299"/>
+            <a:ext cx="8645940" cy="457200"/>
+          </a:xfrm>
+          <a:prstGeom prst="rect">
+            <a:avLst/>
+          </a:prstGeom>
+          <a:noFill/>
+        </p:spPr>
+        <p:txBody>
+          <a:bodyPr wrap="none" lIns="45720" rIns="45720" tIns="18288" bIns="18288" anchor="ctr">
+            <a:noAutofit/>
+          </a:bodyPr>
+          <a:lstStyle/>
+          <a:p>
+            <a:pPr algn="l"/>
+            <a:r>
+              <a:rPr sz="2330" b="0" i="0">
+                <a:solidFill>
+                  <a:srgbClr val="1A1A1A"/>
+                </a:solidFill>
+                <a:latin typeface="Lexend"/>
+              </a:rPr>
+              <a:t>The answer keeps the smaller count: 3 significant digits.</a:t>
+            </a:r>
+          </a:p>
+        </p:txBody>
+      </p:sp>
+      <p:pic>
+        <p:nvPicPr>
+          <p:cNvPr id="14" name="Picture 13" descr="40ace4bdf802fbb0.png"/>
+          <p:cNvPicPr>
+            <a:picLocks noChangeAspect="1"/>
+          </p:cNvPicPr>
+          <p:nvPr/>
+        </p:nvPicPr>
+        <p:blipFill>
+          <a:blip r:embed="rId3"/>
+          <a:stretch>
+            <a:fillRect/>
+          </a:stretch>
+        </p:blipFill>
+        <p:spPr>
+          <a:xfrm>
+            <a:off x="1881233" y="4538803"/>
+            <a:ext cx="1557528" cy="256032"/>
+          </a:xfrm>
+          <a:prstGeom prst="rect">
+            <a:avLst/>
+          </a:prstGeom>
+        </p:spPr>
+      </p:pic>
+      <p:sp>
+        <p:nvSpPr>
+          <p:cNvPr id="15" name="TextBox 14"/>
+          <p:cNvSpPr txBox="1"/>
+          <p:nvPr/>
+        </p:nvSpPr>
+        <p:spPr>
+          <a:xfrm>
+            <a:off x="3438761" y="4438219"/>
+            <a:ext cx="2100221" cy="457200"/>
+          </a:xfrm>
+          <a:prstGeom prst="rect">
+            <a:avLst/>
+          </a:prstGeom>
+          <a:noFill/>
+        </p:spPr>
+        <p:txBody>
+          <a:bodyPr wrap="none" lIns="45720" rIns="45720" tIns="18288" bIns="18288" anchor="ctr">
+            <a:noAutofit/>
+          </a:bodyPr>
+          <a:lstStyle/>
+          <a:p>
+            <a:pPr algn="l"/>
+            <a:r>
+              <a:rPr sz="2330" b="0" i="0">
+                <a:solidFill>
+                  <a:srgbClr val="1A1A1A"/>
+                </a:solidFill>
+                <a:latin typeface="Lexend"/>
+              </a:rPr>
+              <a:t>   becomes   </a:t>
+            </a:r>
+          </a:p>
+        </p:txBody>
+      </p:sp>
+      <p:pic>
+        <p:nvPicPr>
+          <p:cNvPr id="16" name="Picture 15" descr="ecdbdf53729bbd0a.png"/>
+          <p:cNvPicPr>
+            <a:picLocks noChangeAspect="1"/>
+          </p:cNvPicPr>
+          <p:nvPr/>
+        </p:nvPicPr>
+        <p:blipFill>
+          <a:blip r:embed="rId4"/>
+          <a:stretch>
+            <a:fillRect/>
+          </a:stretch>
+        </p:blipFill>
+        <p:spPr>
+          <a:xfrm>
+            <a:off x="5401823" y="4538803"/>
+            <a:ext cx="1231392" cy="256032"/>
+          </a:xfrm>
+          <a:prstGeom prst="rect">
+            <a:avLst/>
+          </a:prstGeom>
+        </p:spPr>
+      </p:pic>
+      <p:sp>
+        <p:nvSpPr>
+          <p:cNvPr id="17" name="TextBox 16"/>
+          <p:cNvSpPr txBox="1"/>
+          <p:nvPr/>
+        </p:nvSpPr>
+        <p:spPr>
+          <a:xfrm>
+            <a:off x="777240" y="5009719"/>
             <a:ext cx="10607040" cy="548640"/>
           </a:xfrm>
           <a:prstGeom prst="rect">
@@ -8474,20 +9077,20 @@
           <a:p>
             <a:pPr algn="ctr"/>
             <a:r>
-              <a:rPr sz="3200" b="1" i="0">
+              <a:rPr sz="3040" b="1" i="0">
                 <a:solidFill>
                   <a:srgbClr val="9E1B32"/>
                 </a:solidFill>
-                <a:latin typeface="Century Schoolbook"/>
+                <a:latin typeface="Lexend"/>
               </a:rPr>
               <a:t>Answer:   7.41 × 10</a:t>
             </a:r>
             <a:r>
-              <a:rPr sz="3200" b="1" i="0" baseline="30000">
+              <a:rPr sz="3040" b="1" i="0" baseline="30000">
                 <a:solidFill>
                   <a:srgbClr val="9E1B32"/>
                 </a:solidFill>
-                <a:latin typeface="Century Schoolbook"/>
+                <a:latin typeface="Lexend"/>
               </a:rPr>
               <a:t>5</a:t>
             </a:r>
@@ -8536,11 +9139,11 @@
           <a:p>
             <a:pPr algn="l"/>
             <a:r>
-              <a:rPr sz="3400" b="1" i="0">
-                <a:solidFill>
-                  <a:srgbClr val="1A1A1A"/>
-                </a:solidFill>
-                <a:latin typeface="Century Schoolbook"/>
+              <a:rPr sz="3229" b="1" i="0">
+                <a:solidFill>
+                  <a:srgbClr val="1A1A1A"/>
+                </a:solidFill>
+                <a:latin typeface="Lexend"/>
               </a:rPr>
               <a:t>Whiteboards   ·   Question 4 of 9</a:t>
             </a:r>
@@ -8676,11 +9279,11 @@
           <a:p>
             <a:pPr algn="l"/>
             <a:r>
-              <a:rPr sz="1100" b="0" i="1">
+              <a:rPr sz="1040" b="0" i="0">
                 <a:solidFill>
                   <a:srgbClr val="6B6B6B"/>
                 </a:solidFill>
-                <a:latin typeface="Century Schoolbook"/>
+                <a:latin typeface="Lexend"/>
               </a:rPr>
               <a:t>Grade 7 Accelerated · Unit 4 · Lesson 4 — Real-World Problems and Significant Digits</a:t>
             </a:r>
@@ -8711,11 +9314,11 @@
           <a:p>
             <a:pPr algn="r"/>
             <a:r>
-              <a:rPr sz="1100" b="0" i="0">
+              <a:rPr sz="1040" b="0" i="0">
                 <a:solidFill>
                   <a:srgbClr val="6B6B6B"/>
                 </a:solidFill>
-                <a:latin typeface="Century Schoolbook"/>
+                <a:latin typeface="Lexend"/>
               </a:rPr>
               <a:t>21</a:t>
             </a:r>
@@ -8724,7 +9327,7 @@
       </p:sp>
       <p:pic>
         <p:nvPicPr>
-          <p:cNvPr id="8" name="Picture 7" descr="3f644ac48482c852.png"/>
+          <p:cNvPr id="8" name="Picture 7" descr="c7912e820c52de7b.png"/>
           <p:cNvPicPr>
             <a:picLocks noChangeAspect="1"/>
           </p:cNvPicPr>
@@ -8738,8 +9341,8 @@
         </p:blipFill>
         <p:spPr>
           <a:xfrm>
-            <a:off x="1989302" y="2194560"/>
-            <a:ext cx="4020312" cy="411480"/>
+            <a:off x="2007740" y="2194560"/>
+            <a:ext cx="3983736" cy="411480"/>
           </a:xfrm>
           <a:prstGeom prst="rect">
             <a:avLst/>
@@ -8754,8 +9357,8 @@
         </p:nvSpPr>
         <p:spPr>
           <a:xfrm>
-            <a:off x="6009614" y="2171700"/>
-            <a:ext cx="4299762" cy="457200"/>
+            <a:off x="5991476" y="2171700"/>
+            <a:ext cx="4299462" cy="457200"/>
           </a:xfrm>
           <a:prstGeom prst="rect">
             <a:avLst/>
@@ -8770,11 +9373,11 @@
           <a:p>
             <a:pPr algn="l"/>
             <a:r>
-              <a:rPr sz="2600" b="0" i="0">
-                <a:solidFill>
-                  <a:srgbClr val="1A1A1A"/>
-                </a:solidFill>
-                <a:latin typeface="Century Schoolbook"/>
+              <a:rPr sz="2470" b="0" i="0">
+                <a:solidFill>
+                  <a:srgbClr val="1A1A1A"/>
+                </a:solidFill>
+                <a:latin typeface="Lexend"/>
               </a:rPr>
               <a:t>   meters, both measured.</a:t>
             </a:r>
@@ -8805,11 +9408,11 @@
           <a:p>
             <a:pPr algn="ctr"/>
             <a:r>
-              <a:rPr sz="2600" b="0" i="0">
-                <a:solidFill>
-                  <a:srgbClr val="1A1A1A"/>
-                </a:solidFill>
-                <a:latin typeface="Century Schoolbook"/>
+              <a:rPr sz="2470" b="0" i="0">
+                <a:solidFill>
+                  <a:srgbClr val="1A1A1A"/>
+                </a:solidFill>
+                <a:latin typeface="Lexend"/>
               </a:rPr>
               <a:t>Write the sum with the correct precision.</a:t>
             </a:r>
@@ -8840,11 +9443,11 @@
           <a:p>
             <a:pPr algn="ctr"/>
             <a:r>
-              <a:rPr sz="2600" b="1" i="0">
-                <a:solidFill>
-                  <a:srgbClr val="1A1A1A"/>
-                </a:solidFill>
-                <a:latin typeface="Century Schoolbook"/>
+              <a:rPr sz="2470" b="1" i="0">
+                <a:solidFill>
+                  <a:srgbClr val="1A1A1A"/>
+                </a:solidFill>
+                <a:latin typeface="Lexend"/>
               </a:rPr>
               <a:t>Answer it.</a:t>
             </a:r>
@@ -8893,11 +9496,11 @@
           <a:p>
             <a:pPr algn="l"/>
             <a:r>
-              <a:rPr sz="3400" b="1" i="0">
-                <a:solidFill>
-                  <a:srgbClr val="1A1A1A"/>
-                </a:solidFill>
-                <a:latin typeface="Century Schoolbook"/>
+              <a:rPr sz="3229" b="1" i="0">
+                <a:solidFill>
+                  <a:srgbClr val="1A1A1A"/>
+                </a:solidFill>
+                <a:latin typeface="Lexend"/>
               </a:rPr>
               <a:t>Whiteboards   ·   Question 4 of 9</a:t>
             </a:r>
@@ -9033,11 +9636,11 @@
           <a:p>
             <a:pPr algn="l"/>
             <a:r>
-              <a:rPr sz="1100" b="0" i="1">
+              <a:rPr sz="1040" b="0" i="0">
                 <a:solidFill>
                   <a:srgbClr val="6B6B6B"/>
                 </a:solidFill>
-                <a:latin typeface="Century Schoolbook"/>
+                <a:latin typeface="Lexend"/>
               </a:rPr>
               <a:t>Grade 7 Accelerated · Unit 4 · Lesson 4 — Real-World Problems and Significant Digits</a:t>
             </a:r>
@@ -9068,11 +9671,11 @@
           <a:p>
             <a:pPr algn="r"/>
             <a:r>
-              <a:rPr sz="1100" b="0" i="0">
+              <a:rPr sz="1040" b="0" i="0">
                 <a:solidFill>
                   <a:srgbClr val="6B6B6B"/>
                 </a:solidFill>
-                <a:latin typeface="Century Schoolbook"/>
+                <a:latin typeface="Lexend"/>
               </a:rPr>
               <a:t>22</a:t>
             </a:r>
@@ -9081,7 +9684,7 @@
       </p:sp>
       <p:pic>
         <p:nvPicPr>
-          <p:cNvPr id="8" name="Picture 7" descr="da2ed7f30b8d3f5c.png"/>
+          <p:cNvPr id="8" name="Picture 7" descr="d295e21d6a5af5d7.png"/>
           <p:cNvPicPr>
             <a:picLocks noChangeAspect="1"/>
           </p:cNvPicPr>
@@ -9095,8 +9698,8 @@
         </p:blipFill>
         <p:spPr>
           <a:xfrm>
-            <a:off x="1987778" y="2104643"/>
-            <a:ext cx="4023360" cy="408432"/>
+            <a:off x="2006216" y="2103120"/>
+            <a:ext cx="3986784" cy="411480"/>
           </a:xfrm>
           <a:prstGeom prst="rect">
             <a:avLst/>
@@ -9111,8 +9714,8 @@
         </p:nvSpPr>
         <p:spPr>
           <a:xfrm>
-            <a:off x="6011138" y="2080260"/>
-            <a:ext cx="4299762" cy="457200"/>
+            <a:off x="5993000" y="2080260"/>
+            <a:ext cx="4299462" cy="457200"/>
           </a:xfrm>
           <a:prstGeom prst="rect">
             <a:avLst/>
@@ -9127,11 +9730,11 @@
           <a:p>
             <a:pPr algn="l"/>
             <a:r>
-              <a:rPr sz="2600" b="0" i="0">
-                <a:solidFill>
-                  <a:srgbClr val="1A1A1A"/>
-                </a:solidFill>
-                <a:latin typeface="Century Schoolbook"/>
+              <a:rPr sz="2470" b="0" i="0">
+                <a:solidFill>
+                  <a:srgbClr val="1A1A1A"/>
+                </a:solidFill>
+                <a:latin typeface="Lexend"/>
               </a:rPr>
               <a:t>   meters, both measured.</a:t>
             </a:r>
@@ -9162,26 +9765,109 @@
           <a:p>
             <a:pPr algn="ctr"/>
             <a:r>
-              <a:rPr sz="2600" b="0" i="0">
-                <a:solidFill>
-                  <a:srgbClr val="1A1A1A"/>
-                </a:solidFill>
-                <a:latin typeface="Century Schoolbook"/>
+              <a:rPr sz="2470" b="0" i="0">
+                <a:solidFill>
+                  <a:srgbClr val="1A1A1A"/>
+                </a:solidFill>
+                <a:latin typeface="Lexend"/>
               </a:rPr>
               <a:t>Write the sum with the correct precision.</a:t>
             </a:r>
           </a:p>
         </p:txBody>
       </p:sp>
-      <p:sp>
-        <p:nvSpPr>
-          <p:cNvPr id="11" name="TextBox 10"/>
-          <p:cNvSpPr txBox="1"/>
-          <p:nvPr/>
-        </p:nvSpPr>
-        <p:spPr>
-          <a:xfrm>
-            <a:off x="777240" y="4663440"/>
+      <p:pic>
+        <p:nvPicPr>
+          <p:cNvPr id="11" name="Picture 10" descr="9677988c74c08a0c.png"/>
+          <p:cNvPicPr>
+            <a:picLocks noChangeAspect="1"/>
+          </p:cNvPicPr>
+          <p:nvPr/>
+        </p:nvPicPr>
+        <p:blipFill>
+          <a:blip r:embed="rId3"/>
+          <a:stretch>
+            <a:fillRect/>
+          </a:stretch>
+        </p:blipFill>
+        <p:spPr>
+          <a:xfrm>
+            <a:off x="1318422" y="3508579"/>
+            <a:ext cx="2499360" cy="268224"/>
+          </a:xfrm>
+          <a:prstGeom prst="rect">
+            <a:avLst/>
+          </a:prstGeom>
+        </p:spPr>
+      </p:pic>
+      <p:sp>
+        <p:nvSpPr>
+          <p:cNvPr id="12" name="TextBox 11"/>
+          <p:cNvSpPr txBox="1"/>
+          <p:nvPr/>
+        </p:nvSpPr>
+        <p:spPr>
+          <a:xfrm>
+            <a:off x="1263558" y="3917011"/>
+            <a:ext cx="9771563" cy="457200"/>
+          </a:xfrm>
+          <a:prstGeom prst="rect">
+            <a:avLst/>
+          </a:prstGeom>
+          <a:noFill/>
+        </p:spPr>
+        <p:txBody>
+          <a:bodyPr wrap="none" lIns="45720" rIns="45720" tIns="18288" bIns="18288" anchor="ctr">
+            <a:noAutofit/>
+          </a:bodyPr>
+          <a:lstStyle/>
+          <a:p>
+            <a:pPr algn="l"/>
+            <a:r>
+              <a:rPr sz="2330" b="0" i="0">
+                <a:solidFill>
+                  <a:srgbClr val="1A1A1A"/>
+                </a:solidFill>
+                <a:latin typeface="Lexend"/>
+              </a:rPr>
+              <a:t>2,500 stops at the hundreds place, so round to hundreds:  3,000</a:t>
+            </a:r>
+          </a:p>
+        </p:txBody>
+      </p:sp>
+      <p:pic>
+        <p:nvPicPr>
+          <p:cNvPr id="13" name="Picture 12" descr="1b2a94b567e4496f.png"/>
+          <p:cNvPicPr>
+            <a:picLocks noChangeAspect="1"/>
+          </p:cNvPicPr>
+          <p:nvPr/>
+        </p:nvPicPr>
+        <p:blipFill>
+          <a:blip r:embed="rId4"/>
+          <a:stretch>
+            <a:fillRect/>
+          </a:stretch>
+        </p:blipFill>
+        <p:spPr>
+          <a:xfrm>
+            <a:off x="1318422" y="4493083"/>
+            <a:ext cx="2130552" cy="310896"/>
+          </a:xfrm>
+          <a:prstGeom prst="rect">
+            <a:avLst/>
+          </a:prstGeom>
+        </p:spPr>
+      </p:pic>
+      <p:sp>
+        <p:nvSpPr>
+          <p:cNvPr id="14" name="TextBox 13"/>
+          <p:cNvSpPr txBox="1"/>
+          <p:nvPr/>
+        </p:nvSpPr>
+        <p:spPr>
+          <a:xfrm>
+            <a:off x="777240" y="4991431"/>
             <a:ext cx="10607040" cy="548640"/>
           </a:xfrm>
           <a:prstGeom prst="rect">
@@ -9197,29 +9883,29 @@
           <a:p>
             <a:pPr algn="ctr"/>
             <a:r>
-              <a:rPr sz="3200" b="1" i="0">
+              <a:rPr sz="3040" b="1" i="0">
                 <a:solidFill>
                   <a:srgbClr val="9E1B32"/>
                 </a:solidFill>
-                <a:latin typeface="Century Schoolbook"/>
+                <a:latin typeface="Lexend"/>
               </a:rPr>
               <a:t>Answer:   3.0 × 10</a:t>
             </a:r>
             <a:r>
-              <a:rPr sz="3200" b="1" i="0" baseline="30000">
+              <a:rPr sz="3040" b="1" i="0" baseline="30000">
                 <a:solidFill>
                   <a:srgbClr val="9E1B32"/>
                 </a:solidFill>
-                <a:latin typeface="Century Schoolbook"/>
+                <a:latin typeface="Lexend"/>
               </a:rPr>
               <a:t>3</a:t>
             </a:r>
             <a:r>
-              <a:rPr sz="3200" b="1" i="0">
+              <a:rPr sz="3040" b="1" i="0">
                 <a:solidFill>
                   <a:srgbClr val="9E1B32"/>
                 </a:solidFill>
-                <a:latin typeface="Century Schoolbook"/>
+                <a:latin typeface="Lexend"/>
               </a:rPr>
               <a:t> m</a:t>
             </a:r>
@@ -9268,11 +9954,11 @@
           <a:p>
             <a:pPr algn="l"/>
             <a:r>
-              <a:rPr sz="3400" b="1" i="0">
-                <a:solidFill>
-                  <a:srgbClr val="1A1A1A"/>
-                </a:solidFill>
-                <a:latin typeface="Century Schoolbook"/>
+              <a:rPr sz="3229" b="1" i="0">
+                <a:solidFill>
+                  <a:srgbClr val="1A1A1A"/>
+                </a:solidFill>
+                <a:latin typeface="Lexend"/>
               </a:rPr>
               <a:t>Whiteboards   ·   Question 5 of 9</a:t>
             </a:r>
@@ -9408,11 +10094,11 @@
           <a:p>
             <a:pPr algn="l"/>
             <a:r>
-              <a:rPr sz="1100" b="0" i="1">
+              <a:rPr sz="1040" b="0" i="0">
                 <a:solidFill>
                   <a:srgbClr val="6B6B6B"/>
                 </a:solidFill>
-                <a:latin typeface="Century Schoolbook"/>
+                <a:latin typeface="Lexend"/>
               </a:rPr>
               <a:t>Grade 7 Accelerated · Unit 4 · Lesson 4 — Real-World Problems and Significant Digits</a:t>
             </a:r>
@@ -9443,11 +10129,11 @@
           <a:p>
             <a:pPr algn="r"/>
             <a:r>
-              <a:rPr sz="1100" b="0" i="0">
+              <a:rPr sz="1040" b="0" i="0">
                 <a:solidFill>
                   <a:srgbClr val="6B6B6B"/>
                 </a:solidFill>
-                <a:latin typeface="Century Schoolbook"/>
+                <a:latin typeface="Lexend"/>
               </a:rPr>
               <a:t>23</a:t>
             </a:r>
@@ -9478,11 +10164,11 @@
           <a:p>
             <a:pPr algn="ctr"/>
             <a:r>
-              <a:rPr sz="2600" b="0" i="0">
-                <a:solidFill>
-                  <a:srgbClr val="1A1A1A"/>
-                </a:solidFill>
-                <a:latin typeface="Century Schoolbook"/>
+              <a:rPr sz="2470" b="0" i="0">
+                <a:solidFill>
+                  <a:srgbClr val="1A1A1A"/>
+                </a:solidFill>
+                <a:latin typeface="Lexend"/>
               </a:rPr>
               <a:t>How many significant digits are in  0.03080 ?</a:t>
             </a:r>
@@ -9513,20 +10199,20 @@
           <a:p>
             <a:pPr algn="l"/>
             <a:r>
-              <a:rPr sz="2400" b="1" i="0">
-                <a:solidFill>
-                  <a:srgbClr val="1A1A1A"/>
-                </a:solidFill>
-                <a:latin typeface="Century Schoolbook"/>
+              <a:rPr sz="2280" b="1" i="0">
+                <a:solidFill>
+                  <a:srgbClr val="1A1A1A"/>
+                </a:solidFill>
+                <a:latin typeface="Lexend"/>
               </a:rPr>
               <a:t>A.   </a:t>
             </a:r>
             <a:r>
-              <a:rPr sz="2400" b="0" i="0">
-                <a:solidFill>
-                  <a:srgbClr val="1A1A1A"/>
-                </a:solidFill>
-                <a:latin typeface="Century Schoolbook"/>
+              <a:rPr sz="2280" b="0" i="0">
+                <a:solidFill>
+                  <a:srgbClr val="1A1A1A"/>
+                </a:solidFill>
+                <a:latin typeface="Lexend"/>
               </a:rPr>
               <a:t>4</a:t>
             </a:r>
@@ -9557,20 +10243,20 @@
           <a:p>
             <a:pPr algn="l"/>
             <a:r>
-              <a:rPr sz="2400" b="1" i="0">
-                <a:solidFill>
-                  <a:srgbClr val="1A1A1A"/>
-                </a:solidFill>
-                <a:latin typeface="Century Schoolbook"/>
+              <a:rPr sz="2280" b="1" i="0">
+                <a:solidFill>
+                  <a:srgbClr val="1A1A1A"/>
+                </a:solidFill>
+                <a:latin typeface="Lexend"/>
               </a:rPr>
               <a:t>B.   </a:t>
             </a:r>
             <a:r>
-              <a:rPr sz="2400" b="0" i="0">
-                <a:solidFill>
-                  <a:srgbClr val="1A1A1A"/>
-                </a:solidFill>
-                <a:latin typeface="Century Schoolbook"/>
+              <a:rPr sz="2280" b="0" i="0">
+                <a:solidFill>
+                  <a:srgbClr val="1A1A1A"/>
+                </a:solidFill>
+                <a:latin typeface="Lexend"/>
               </a:rPr>
               <a:t>2</a:t>
             </a:r>
@@ -9601,20 +10287,20 @@
           <a:p>
             <a:pPr algn="l"/>
             <a:r>
-              <a:rPr sz="2400" b="1" i="0">
-                <a:solidFill>
-                  <a:srgbClr val="1A1A1A"/>
-                </a:solidFill>
-                <a:latin typeface="Century Schoolbook"/>
+              <a:rPr sz="2280" b="1" i="0">
+                <a:solidFill>
+                  <a:srgbClr val="1A1A1A"/>
+                </a:solidFill>
+                <a:latin typeface="Lexend"/>
               </a:rPr>
               <a:t>C.   </a:t>
             </a:r>
             <a:r>
-              <a:rPr sz="2400" b="0" i="0">
-                <a:solidFill>
-                  <a:srgbClr val="1A1A1A"/>
-                </a:solidFill>
-                <a:latin typeface="Century Schoolbook"/>
+              <a:rPr sz="2280" b="0" i="0">
+                <a:solidFill>
+                  <a:srgbClr val="1A1A1A"/>
+                </a:solidFill>
+                <a:latin typeface="Lexend"/>
               </a:rPr>
               <a:t>5</a:t>
             </a:r>
@@ -9645,20 +10331,20 @@
           <a:p>
             <a:pPr algn="l"/>
             <a:r>
-              <a:rPr sz="2400" b="1" i="0">
-                <a:solidFill>
-                  <a:srgbClr val="1A1A1A"/>
-                </a:solidFill>
-                <a:latin typeface="Century Schoolbook"/>
+              <a:rPr sz="2280" b="1" i="0">
+                <a:solidFill>
+                  <a:srgbClr val="1A1A1A"/>
+                </a:solidFill>
+                <a:latin typeface="Lexend"/>
               </a:rPr>
               <a:t>D.   </a:t>
             </a:r>
             <a:r>
-              <a:rPr sz="2400" b="0" i="0">
-                <a:solidFill>
-                  <a:srgbClr val="1A1A1A"/>
-                </a:solidFill>
-                <a:latin typeface="Century Schoolbook"/>
+              <a:rPr sz="2280" b="0" i="0">
+                <a:solidFill>
+                  <a:srgbClr val="1A1A1A"/>
+                </a:solidFill>
+                <a:latin typeface="Lexend"/>
               </a:rPr>
               <a:t>3</a:t>
             </a:r>
@@ -9689,11 +10375,11 @@
           <a:p>
             <a:pPr algn="ctr"/>
             <a:r>
-              <a:rPr sz="2600" b="1" i="0">
-                <a:solidFill>
-                  <a:srgbClr val="1A1A1A"/>
-                </a:solidFill>
-                <a:latin typeface="Century Schoolbook"/>
+              <a:rPr sz="2470" b="1" i="0">
+                <a:solidFill>
+                  <a:srgbClr val="1A1A1A"/>
+                </a:solidFill>
+                <a:latin typeface="Lexend"/>
               </a:rPr>
               <a:t>Answer it.</a:t>
             </a:r>
@@ -9742,11 +10428,11 @@
           <a:p>
             <a:pPr algn="l"/>
             <a:r>
-              <a:rPr sz="3400" b="1" i="0">
-                <a:solidFill>
-                  <a:srgbClr val="1A1A1A"/>
-                </a:solidFill>
-                <a:latin typeface="Century Schoolbook"/>
+              <a:rPr sz="3229" b="1" i="0">
+                <a:solidFill>
+                  <a:srgbClr val="1A1A1A"/>
+                </a:solidFill>
+                <a:latin typeface="Lexend"/>
               </a:rPr>
               <a:t>Whiteboards   ·   Question 5 of 9</a:t>
             </a:r>
@@ -9882,11 +10568,11 @@
           <a:p>
             <a:pPr algn="l"/>
             <a:r>
-              <a:rPr sz="1100" b="0" i="1">
+              <a:rPr sz="1040" b="0" i="0">
                 <a:solidFill>
                   <a:srgbClr val="6B6B6B"/>
                 </a:solidFill>
-                <a:latin typeface="Century Schoolbook"/>
+                <a:latin typeface="Lexend"/>
               </a:rPr>
               <a:t>Grade 7 Accelerated · Unit 4 · Lesson 4 — Real-World Problems and Significant Digits</a:t>
             </a:r>
@@ -9917,11 +10603,11 @@
           <a:p>
             <a:pPr algn="r"/>
             <a:r>
-              <a:rPr sz="1100" b="0" i="0">
+              <a:rPr sz="1040" b="0" i="0">
                 <a:solidFill>
                   <a:srgbClr val="6B6B6B"/>
                 </a:solidFill>
-                <a:latin typeface="Century Schoolbook"/>
+                <a:latin typeface="Lexend"/>
               </a:rPr>
               <a:t>24</a:t>
             </a:r>
@@ -9952,11 +10638,11 @@
           <a:p>
             <a:pPr algn="ctr"/>
             <a:r>
-              <a:rPr sz="2600" b="0" i="0">
-                <a:solidFill>
-                  <a:srgbClr val="1A1A1A"/>
-                </a:solidFill>
-                <a:latin typeface="Century Schoolbook"/>
+              <a:rPr sz="2470" b="0" i="0">
+                <a:solidFill>
+                  <a:srgbClr val="1A1A1A"/>
+                </a:solidFill>
+                <a:latin typeface="Lexend"/>
               </a:rPr>
               <a:t>How many significant digits are in  0.03080 ?</a:t>
             </a:r>
@@ -9971,8 +10657,78 @@
         </p:nvSpPr>
         <p:spPr>
           <a:xfrm>
-            <a:off x="1874519" y="2769439"/>
-            <a:ext cx="4572000" cy="548640"/>
+            <a:off x="2454399" y="2728291"/>
+            <a:ext cx="5040469" cy="457200"/>
+          </a:xfrm>
+          <a:prstGeom prst="rect">
+            <a:avLst/>
+          </a:prstGeom>
+          <a:noFill/>
+        </p:spPr>
+        <p:txBody>
+          <a:bodyPr wrap="none" lIns="45720" rIns="45720" tIns="18288" bIns="18288" anchor="ctr">
+            <a:noAutofit/>
+          </a:bodyPr>
+          <a:lstStyle/>
+          <a:p>
+            <a:pPr algn="l"/>
+            <a:r>
+              <a:rPr sz="2330" b="0" i="0">
+                <a:solidFill>
+                  <a:srgbClr val="1A1A1A"/>
+                </a:solidFill>
+                <a:latin typeface="Lexend"/>
+              </a:rPr>
+              <a:t>Leading zeros do not count:  0.0</a:t>
+            </a:r>
+          </a:p>
+        </p:txBody>
+      </p:sp>
+      <p:sp>
+        <p:nvSpPr>
+          <p:cNvPr id="10" name="TextBox 9"/>
+          <p:cNvSpPr txBox="1"/>
+          <p:nvPr/>
+        </p:nvSpPr>
+        <p:spPr>
+          <a:xfrm>
+            <a:off x="2454399" y="3231211"/>
+            <a:ext cx="7389880" cy="457200"/>
+          </a:xfrm>
+          <a:prstGeom prst="rect">
+            <a:avLst/>
+          </a:prstGeom>
+          <a:noFill/>
+        </p:spPr>
+        <p:txBody>
+          <a:bodyPr wrap="none" lIns="45720" rIns="45720" tIns="18288" bIns="18288" anchor="ctr">
+            <a:noAutofit/>
+          </a:bodyPr>
+          <a:lstStyle/>
+          <a:p>
+            <a:pPr algn="l"/>
+            <a:r>
+              <a:rPr sz="2330" b="0" i="0">
+                <a:solidFill>
+                  <a:srgbClr val="1A1A1A"/>
+                </a:solidFill>
+                <a:latin typeface="Lexend"/>
+              </a:rPr>
+              <a:t>3, 0, 8 and the final 0 count:  4 significant digits</a:t>
+            </a:r>
+          </a:p>
+        </p:txBody>
+      </p:sp>
+      <p:sp>
+        <p:nvSpPr>
+          <p:cNvPr id="11" name="TextBox 10"/>
+          <p:cNvSpPr txBox="1"/>
+          <p:nvPr/>
+        </p:nvSpPr>
+        <p:spPr>
+          <a:xfrm>
+            <a:off x="777240" y="4663440"/>
+            <a:ext cx="10607040" cy="548640"/>
           </a:xfrm>
           <a:prstGeom prst="rect">
             <a:avLst/>
@@ -9985,189 +10741,13 @@
           </a:bodyPr>
           <a:lstStyle/>
           <a:p>
-            <a:pPr algn="l"/>
-            <a:r>
-              <a:rPr sz="2400" b="1" i="0">
+            <a:pPr algn="ctr"/>
+            <a:r>
+              <a:rPr sz="3040" b="1" i="0">
                 <a:solidFill>
                   <a:srgbClr val="9E1B32"/>
                 </a:solidFill>
-                <a:latin typeface="Century Schoolbook"/>
-              </a:rPr>
-              <a:t>A.   </a:t>
-            </a:r>
-            <a:r>
-              <a:rPr sz="2400" b="1" i="0">
-                <a:solidFill>
-                  <a:srgbClr val="9E1B32"/>
-                </a:solidFill>
-                <a:latin typeface="Century Schoolbook"/>
-              </a:rPr>
-              <a:t>4</a:t>
-            </a:r>
-          </a:p>
-        </p:txBody>
-      </p:sp>
-      <p:sp>
-        <p:nvSpPr>
-          <p:cNvPr id="10" name="TextBox 9"/>
-          <p:cNvSpPr txBox="1"/>
-          <p:nvPr/>
-        </p:nvSpPr>
-        <p:spPr>
-          <a:xfrm>
-            <a:off x="6629400" y="2769439"/>
-            <a:ext cx="4572000" cy="548640"/>
-          </a:xfrm>
-          <a:prstGeom prst="rect">
-            <a:avLst/>
-          </a:prstGeom>
-          <a:noFill/>
-        </p:spPr>
-        <p:txBody>
-          <a:bodyPr wrap="square" lIns="45720" rIns="45720" tIns="18288" bIns="18288" anchor="t">
-            <a:spAutoFit/>
-          </a:bodyPr>
-          <a:lstStyle/>
-          <a:p>
-            <a:pPr algn="l"/>
-            <a:r>
-              <a:rPr sz="2400" b="1" i="0">
-                <a:solidFill>
-                  <a:srgbClr val="1A1A1A"/>
-                </a:solidFill>
-                <a:latin typeface="Century Schoolbook"/>
-              </a:rPr>
-              <a:t>B.   </a:t>
-            </a:r>
-            <a:r>
-              <a:rPr sz="2400" b="0" i="0">
-                <a:solidFill>
-                  <a:srgbClr val="1A1A1A"/>
-                </a:solidFill>
-                <a:latin typeface="Century Schoolbook"/>
-              </a:rPr>
-              <a:t>2</a:t>
-            </a:r>
-          </a:p>
-        </p:txBody>
-      </p:sp>
-      <p:sp>
-        <p:nvSpPr>
-          <p:cNvPr id="11" name="TextBox 10"/>
-          <p:cNvSpPr txBox="1"/>
-          <p:nvPr/>
-        </p:nvSpPr>
-        <p:spPr>
-          <a:xfrm>
-            <a:off x="1874519" y="3455239"/>
-            <a:ext cx="4572000" cy="548640"/>
-          </a:xfrm>
-          <a:prstGeom prst="rect">
-            <a:avLst/>
-          </a:prstGeom>
-          <a:noFill/>
-        </p:spPr>
-        <p:txBody>
-          <a:bodyPr wrap="square" lIns="45720" rIns="45720" tIns="18288" bIns="18288" anchor="t">
-            <a:spAutoFit/>
-          </a:bodyPr>
-          <a:lstStyle/>
-          <a:p>
-            <a:pPr algn="l"/>
-            <a:r>
-              <a:rPr sz="2400" b="1" i="0">
-                <a:solidFill>
-                  <a:srgbClr val="1A1A1A"/>
-                </a:solidFill>
-                <a:latin typeface="Century Schoolbook"/>
-              </a:rPr>
-              <a:t>C.   </a:t>
-            </a:r>
-            <a:r>
-              <a:rPr sz="2400" b="0" i="0">
-                <a:solidFill>
-                  <a:srgbClr val="1A1A1A"/>
-                </a:solidFill>
-                <a:latin typeface="Century Schoolbook"/>
-              </a:rPr>
-              <a:t>5</a:t>
-            </a:r>
-          </a:p>
-        </p:txBody>
-      </p:sp>
-      <p:sp>
-        <p:nvSpPr>
-          <p:cNvPr id="12" name="TextBox 11"/>
-          <p:cNvSpPr txBox="1"/>
-          <p:nvPr/>
-        </p:nvSpPr>
-        <p:spPr>
-          <a:xfrm>
-            <a:off x="6629400" y="3455239"/>
-            <a:ext cx="4572000" cy="548640"/>
-          </a:xfrm>
-          <a:prstGeom prst="rect">
-            <a:avLst/>
-          </a:prstGeom>
-          <a:noFill/>
-        </p:spPr>
-        <p:txBody>
-          <a:bodyPr wrap="square" lIns="45720" rIns="45720" tIns="18288" bIns="18288" anchor="t">
-            <a:spAutoFit/>
-          </a:bodyPr>
-          <a:lstStyle/>
-          <a:p>
-            <a:pPr algn="l"/>
-            <a:r>
-              <a:rPr sz="2400" b="1" i="0">
-                <a:solidFill>
-                  <a:srgbClr val="1A1A1A"/>
-                </a:solidFill>
-                <a:latin typeface="Century Schoolbook"/>
-              </a:rPr>
-              <a:t>D.   </a:t>
-            </a:r>
-            <a:r>
-              <a:rPr sz="2400" b="0" i="0">
-                <a:solidFill>
-                  <a:srgbClr val="1A1A1A"/>
-                </a:solidFill>
-                <a:latin typeface="Century Schoolbook"/>
-              </a:rPr>
-              <a:t>3</a:t>
-            </a:r>
-          </a:p>
-        </p:txBody>
-      </p:sp>
-      <p:sp>
-        <p:nvSpPr>
-          <p:cNvPr id="13" name="TextBox 12"/>
-          <p:cNvSpPr txBox="1"/>
-          <p:nvPr/>
-        </p:nvSpPr>
-        <p:spPr>
-          <a:xfrm>
-            <a:off x="777240" y="4663440"/>
-            <a:ext cx="10607040" cy="548640"/>
-          </a:xfrm>
-          <a:prstGeom prst="rect">
-            <a:avLst/>
-          </a:prstGeom>
-          <a:noFill/>
-        </p:spPr>
-        <p:txBody>
-          <a:bodyPr wrap="square" lIns="45720" rIns="45720" tIns="18288" bIns="18288" anchor="t">
-            <a:spAutoFit/>
-          </a:bodyPr>
-          <a:lstStyle/>
-          <a:p>
-            <a:pPr algn="ctr"/>
-            <a:r>
-              <a:rPr sz="3200" b="1" i="0">
-                <a:solidFill>
-                  <a:srgbClr val="9E1B32"/>
-                </a:solidFill>
-                <a:latin typeface="Century Schoolbook"/>
+                <a:latin typeface="Lexend"/>
               </a:rPr>
               <a:t>Answer:   A — 4</a:t>
             </a:r>
@@ -10216,11 +10796,11 @@
           <a:p>
             <a:pPr algn="l"/>
             <a:r>
-              <a:rPr sz="3400" b="1" i="0">
-                <a:solidFill>
-                  <a:srgbClr val="1A1A1A"/>
-                </a:solidFill>
-                <a:latin typeface="Century Schoolbook"/>
+              <a:rPr sz="3229" b="1" i="0">
+                <a:solidFill>
+                  <a:srgbClr val="1A1A1A"/>
+                </a:solidFill>
+                <a:latin typeface="Lexend"/>
               </a:rPr>
               <a:t>Whiteboards   ·   Question 6 of 9</a:t>
             </a:r>
@@ -10356,11 +10936,11 @@
           <a:p>
             <a:pPr algn="l"/>
             <a:r>
-              <a:rPr sz="1100" b="0" i="1">
+              <a:rPr sz="1040" b="0" i="0">
                 <a:solidFill>
                   <a:srgbClr val="6B6B6B"/>
                 </a:solidFill>
-                <a:latin typeface="Century Schoolbook"/>
+                <a:latin typeface="Lexend"/>
               </a:rPr>
               <a:t>Grade 7 Accelerated · Unit 4 · Lesson 4 — Real-World Problems and Significant Digits</a:t>
             </a:r>
@@ -10391,11 +10971,11 @@
           <a:p>
             <a:pPr algn="r"/>
             <a:r>
-              <a:rPr sz="1100" b="0" i="0">
+              <a:rPr sz="1040" b="0" i="0">
                 <a:solidFill>
                   <a:srgbClr val="6B6B6B"/>
                 </a:solidFill>
-                <a:latin typeface="Century Schoolbook"/>
+                <a:latin typeface="Lexend"/>
               </a:rPr>
               <a:t>25</a:t>
             </a:r>
@@ -10410,8 +10990,8 @@
         </p:nvSpPr>
         <p:spPr>
           <a:xfrm>
-            <a:off x="1553414" y="2171700"/>
-            <a:ext cx="3903212" cy="457200"/>
+            <a:off x="1553716" y="2171700"/>
+            <a:ext cx="3892815" cy="457200"/>
           </a:xfrm>
           <a:prstGeom prst="rect">
             <a:avLst/>
@@ -10426,11 +11006,11 @@
           <a:p>
             <a:pPr algn="l"/>
             <a:r>
-              <a:rPr sz="2600" b="0" i="0">
-                <a:solidFill>
-                  <a:srgbClr val="1A1A1A"/>
-                </a:solidFill>
-                <a:latin typeface="Century Schoolbook"/>
+              <a:rPr sz="2470" b="0" i="0">
+                <a:solidFill>
+                  <a:srgbClr val="1A1A1A"/>
+                </a:solidFill>
+                <a:latin typeface="Lexend"/>
               </a:rPr>
               <a:t>A rectangle measures  </a:t>
             </a:r>
@@ -10439,7 +11019,7 @@
       </p:sp>
       <p:pic>
         <p:nvPicPr>
-          <p:cNvPr id="9" name="Picture 8" descr="64bbdc3030162890.png"/>
+          <p:cNvPr id="9" name="Picture 8" descr="bdf46868d006cd9f.png"/>
           <p:cNvPicPr>
             <a:picLocks noChangeAspect="1"/>
           </p:cNvPicPr>
@@ -10453,8 +11033,8 @@
         </p:blipFill>
         <p:spPr>
           <a:xfrm>
-            <a:off x="5319466" y="2226564"/>
-            <a:ext cx="1423416" cy="347472"/>
+            <a:off x="5309372" y="2229612"/>
+            <a:ext cx="1420368" cy="341376"/>
           </a:xfrm>
           <a:prstGeom prst="rect">
             <a:avLst/>
@@ -10469,8 +11049,8 @@
         </p:nvSpPr>
         <p:spPr>
           <a:xfrm>
-            <a:off x="6742882" y="2171700"/>
-            <a:ext cx="1537107" cy="457200"/>
+            <a:off x="6729740" y="2171700"/>
+            <a:ext cx="1556043" cy="457200"/>
           </a:xfrm>
           <a:prstGeom prst="rect">
             <a:avLst/>
@@ -10485,11 +11065,11 @@
           <a:p>
             <a:pPr algn="l"/>
             <a:r>
-              <a:rPr sz="2600" b="0" i="0">
-                <a:solidFill>
-                  <a:srgbClr val="1A1A1A"/>
-                </a:solidFill>
-                <a:latin typeface="Century Schoolbook"/>
+              <a:rPr sz="2470" b="0" i="0">
+                <a:solidFill>
+                  <a:srgbClr val="1A1A1A"/>
+                </a:solidFill>
+                <a:latin typeface="Lexend"/>
               </a:rPr>
               <a:t>  cm by  </a:t>
             </a:r>
@@ -10498,7 +11078,7 @@
       </p:sp>
       <p:pic>
         <p:nvPicPr>
-          <p:cNvPr id="11" name="Picture 10" descr="feb742ea3ba69b7c.png"/>
+          <p:cNvPr id="11" name="Picture 10" descr="4ada1bcfda5f9a87.png"/>
           <p:cNvPicPr>
             <a:picLocks noChangeAspect="1"/>
           </p:cNvPicPr>
@@ -10512,8 +11092,8 @@
         </p:blipFill>
         <p:spPr>
           <a:xfrm>
-            <a:off x="8142830" y="2226564"/>
-            <a:ext cx="1633728" cy="347472"/>
+            <a:off x="8148624" y="2229612"/>
+            <a:ext cx="1639824" cy="341376"/>
           </a:xfrm>
           <a:prstGeom prst="rect">
             <a:avLst/>
@@ -10528,8 +11108,8 @@
         </p:nvSpPr>
         <p:spPr>
           <a:xfrm>
-            <a:off x="9776558" y="2171700"/>
-            <a:ext cx="968706" cy="457200"/>
+            <a:off x="9788448" y="2171700"/>
+            <a:ext cx="956514" cy="457200"/>
           </a:xfrm>
           <a:prstGeom prst="rect">
             <a:avLst/>
@@ -10544,11 +11124,11 @@
           <a:p>
             <a:pPr algn="l"/>
             <a:r>
-              <a:rPr sz="2600" b="0" i="0">
-                <a:solidFill>
-                  <a:srgbClr val="1A1A1A"/>
-                </a:solidFill>
-                <a:latin typeface="Century Schoolbook"/>
+              <a:rPr sz="2470" b="0" i="0">
+                <a:solidFill>
+                  <a:srgbClr val="1A1A1A"/>
+                </a:solidFill>
+                <a:latin typeface="Lexend"/>
               </a:rPr>
               <a:t>  cm.</a:t>
             </a:r>
@@ -10579,11 +11159,11 @@
           <a:p>
             <a:pPr algn="ctr"/>
             <a:r>
-              <a:rPr sz="2600" b="0" i="0">
-                <a:solidFill>
-                  <a:srgbClr val="1A1A1A"/>
-                </a:solidFill>
-                <a:latin typeface="Century Schoolbook"/>
+              <a:rPr sz="2470" b="0" i="0">
+                <a:solidFill>
+                  <a:srgbClr val="1A1A1A"/>
+                </a:solidFill>
+                <a:latin typeface="Lexend"/>
               </a:rPr>
               <a:t>Which is the area, to the correct significant digits?</a:t>
             </a:r>
@@ -10614,47 +11194,47 @@
           <a:p>
             <a:pPr algn="l"/>
             <a:r>
-              <a:rPr sz="2400" b="1" i="0">
-                <a:solidFill>
-                  <a:srgbClr val="1A1A1A"/>
-                </a:solidFill>
-                <a:latin typeface="Century Schoolbook"/>
+              <a:rPr sz="2280" b="1" i="0">
+                <a:solidFill>
+                  <a:srgbClr val="1A1A1A"/>
+                </a:solidFill>
+                <a:latin typeface="Lexend"/>
               </a:rPr>
               <a:t>A.   </a:t>
             </a:r>
             <a:r>
-              <a:rPr sz="2400" b="0" i="0">
-                <a:solidFill>
-                  <a:srgbClr val="1A1A1A"/>
-                </a:solidFill>
-                <a:latin typeface="Century Schoolbook"/>
+              <a:rPr sz="2280" b="0" i="0">
+                <a:solidFill>
+                  <a:srgbClr val="1A1A1A"/>
+                </a:solidFill>
+                <a:latin typeface="Lexend"/>
               </a:rPr>
               <a:t>26.1 × 10</a:t>
             </a:r>
             <a:r>
-              <a:rPr sz="2400" b="0" i="0" baseline="30000">
-                <a:solidFill>
-                  <a:srgbClr val="1A1A1A"/>
-                </a:solidFill>
-                <a:latin typeface="Century Schoolbook"/>
+              <a:rPr sz="2280" b="0" i="0" baseline="30000">
+                <a:solidFill>
+                  <a:srgbClr val="1A1A1A"/>
+                </a:solidFill>
+                <a:latin typeface="Lexend"/>
               </a:rPr>
               <a:t>4</a:t>
             </a:r>
             <a:r>
-              <a:rPr sz="2400" b="0" i="0">
-                <a:solidFill>
-                  <a:srgbClr val="1A1A1A"/>
-                </a:solidFill>
-                <a:latin typeface="Century Schoolbook"/>
+              <a:rPr sz="2280" b="0" i="0">
+                <a:solidFill>
+                  <a:srgbClr val="1A1A1A"/>
+                </a:solidFill>
+                <a:latin typeface="Lexend"/>
               </a:rPr>
               <a:t> cm</a:t>
             </a:r>
             <a:r>
-              <a:rPr sz="2400" b="0" i="0" baseline="30000">
-                <a:solidFill>
-                  <a:srgbClr val="1A1A1A"/>
-                </a:solidFill>
-                <a:latin typeface="Century Schoolbook"/>
+              <a:rPr sz="2280" b="0" i="0" baseline="30000">
+                <a:solidFill>
+                  <a:srgbClr val="1A1A1A"/>
+                </a:solidFill>
+                <a:latin typeface="Lexend"/>
               </a:rPr>
               <a:t>2</a:t>
             </a:r>
@@ -10685,47 +11265,47 @@
           <a:p>
             <a:pPr algn="l"/>
             <a:r>
-              <a:rPr sz="2400" b="1" i="0">
-                <a:solidFill>
-                  <a:srgbClr val="1A1A1A"/>
-                </a:solidFill>
-                <a:latin typeface="Century Schoolbook"/>
+              <a:rPr sz="2280" b="1" i="0">
+                <a:solidFill>
+                  <a:srgbClr val="1A1A1A"/>
+                </a:solidFill>
+                <a:latin typeface="Lexend"/>
               </a:rPr>
               <a:t>B.   </a:t>
             </a:r>
             <a:r>
-              <a:rPr sz="2400" b="0" i="0">
-                <a:solidFill>
-                  <a:srgbClr val="1A1A1A"/>
-                </a:solidFill>
-                <a:latin typeface="Century Schoolbook"/>
+              <a:rPr sz="2280" b="0" i="0">
+                <a:solidFill>
+                  <a:srgbClr val="1A1A1A"/>
+                </a:solidFill>
+                <a:latin typeface="Lexend"/>
               </a:rPr>
               <a:t>2.6 × 10</a:t>
             </a:r>
             <a:r>
-              <a:rPr sz="2400" b="0" i="0" baseline="30000">
-                <a:solidFill>
-                  <a:srgbClr val="1A1A1A"/>
-                </a:solidFill>
-                <a:latin typeface="Century Schoolbook"/>
+              <a:rPr sz="2280" b="0" i="0" baseline="30000">
+                <a:solidFill>
+                  <a:srgbClr val="1A1A1A"/>
+                </a:solidFill>
+                <a:latin typeface="Lexend"/>
               </a:rPr>
               <a:t>5</a:t>
             </a:r>
             <a:r>
-              <a:rPr sz="2400" b="0" i="0">
-                <a:solidFill>
-                  <a:srgbClr val="1A1A1A"/>
-                </a:solidFill>
-                <a:latin typeface="Century Schoolbook"/>
+              <a:rPr sz="2280" b="0" i="0">
+                <a:solidFill>
+                  <a:srgbClr val="1A1A1A"/>
+                </a:solidFill>
+                <a:latin typeface="Lexend"/>
               </a:rPr>
               <a:t> cm</a:t>
             </a:r>
             <a:r>
-              <a:rPr sz="2400" b="0" i="0" baseline="30000">
-                <a:solidFill>
-                  <a:srgbClr val="1A1A1A"/>
-                </a:solidFill>
-                <a:latin typeface="Century Schoolbook"/>
+              <a:rPr sz="2280" b="0" i="0" baseline="30000">
+                <a:solidFill>
+                  <a:srgbClr val="1A1A1A"/>
+                </a:solidFill>
+                <a:latin typeface="Lexend"/>
               </a:rPr>
               <a:t>2</a:t>
             </a:r>
@@ -10756,47 +11336,47 @@
           <a:p>
             <a:pPr algn="l"/>
             <a:r>
-              <a:rPr sz="2400" b="1" i="0">
-                <a:solidFill>
-                  <a:srgbClr val="1A1A1A"/>
-                </a:solidFill>
-                <a:latin typeface="Century Schoolbook"/>
+              <a:rPr sz="2280" b="1" i="0">
+                <a:solidFill>
+                  <a:srgbClr val="1A1A1A"/>
+                </a:solidFill>
+                <a:latin typeface="Lexend"/>
               </a:rPr>
               <a:t>C.   </a:t>
             </a:r>
             <a:r>
-              <a:rPr sz="2400" b="0" i="0">
-                <a:solidFill>
-                  <a:srgbClr val="1A1A1A"/>
-                </a:solidFill>
-                <a:latin typeface="Century Schoolbook"/>
+              <a:rPr sz="2280" b="0" i="0">
+                <a:solidFill>
+                  <a:srgbClr val="1A1A1A"/>
+                </a:solidFill>
+                <a:latin typeface="Lexend"/>
               </a:rPr>
               <a:t>2.6 × 10</a:t>
             </a:r>
             <a:r>
-              <a:rPr sz="2400" b="0" i="0" baseline="30000">
-                <a:solidFill>
-                  <a:srgbClr val="1A1A1A"/>
-                </a:solidFill>
-                <a:latin typeface="Century Schoolbook"/>
+              <a:rPr sz="2280" b="0" i="0" baseline="30000">
+                <a:solidFill>
+                  <a:srgbClr val="1A1A1A"/>
+                </a:solidFill>
+                <a:latin typeface="Lexend"/>
               </a:rPr>
               <a:t>4</a:t>
             </a:r>
             <a:r>
-              <a:rPr sz="2400" b="0" i="0">
-                <a:solidFill>
-                  <a:srgbClr val="1A1A1A"/>
-                </a:solidFill>
-                <a:latin typeface="Century Schoolbook"/>
+              <a:rPr sz="2280" b="0" i="0">
+                <a:solidFill>
+                  <a:srgbClr val="1A1A1A"/>
+                </a:solidFill>
+                <a:latin typeface="Lexend"/>
               </a:rPr>
               <a:t> cm</a:t>
             </a:r>
             <a:r>
-              <a:rPr sz="2400" b="0" i="0" baseline="30000">
-                <a:solidFill>
-                  <a:srgbClr val="1A1A1A"/>
-                </a:solidFill>
-                <a:latin typeface="Century Schoolbook"/>
+              <a:rPr sz="2280" b="0" i="0" baseline="30000">
+                <a:solidFill>
+                  <a:srgbClr val="1A1A1A"/>
+                </a:solidFill>
+                <a:latin typeface="Lexend"/>
               </a:rPr>
               <a:t>2</a:t>
             </a:r>
@@ -10827,47 +11407,47 @@
           <a:p>
             <a:pPr algn="l"/>
             <a:r>
-              <a:rPr sz="2400" b="1" i="0">
-                <a:solidFill>
-                  <a:srgbClr val="1A1A1A"/>
-                </a:solidFill>
-                <a:latin typeface="Century Schoolbook"/>
+              <a:rPr sz="2280" b="1" i="0">
+                <a:solidFill>
+                  <a:srgbClr val="1A1A1A"/>
+                </a:solidFill>
+                <a:latin typeface="Lexend"/>
               </a:rPr>
               <a:t>D.   </a:t>
             </a:r>
             <a:r>
-              <a:rPr sz="2400" b="0" i="0">
-                <a:solidFill>
-                  <a:srgbClr val="1A1A1A"/>
-                </a:solidFill>
-                <a:latin typeface="Century Schoolbook"/>
+              <a:rPr sz="2280" b="0" i="0">
+                <a:solidFill>
+                  <a:srgbClr val="1A1A1A"/>
+                </a:solidFill>
+                <a:latin typeface="Lexend"/>
               </a:rPr>
               <a:t>2.61 × 10</a:t>
             </a:r>
             <a:r>
-              <a:rPr sz="2400" b="0" i="0" baseline="30000">
-                <a:solidFill>
-                  <a:srgbClr val="1A1A1A"/>
-                </a:solidFill>
-                <a:latin typeface="Century Schoolbook"/>
+              <a:rPr sz="2280" b="0" i="0" baseline="30000">
+                <a:solidFill>
+                  <a:srgbClr val="1A1A1A"/>
+                </a:solidFill>
+                <a:latin typeface="Lexend"/>
               </a:rPr>
               <a:t>5</a:t>
             </a:r>
             <a:r>
-              <a:rPr sz="2400" b="0" i="0">
-                <a:solidFill>
-                  <a:srgbClr val="1A1A1A"/>
-                </a:solidFill>
-                <a:latin typeface="Century Schoolbook"/>
+              <a:rPr sz="2280" b="0" i="0">
+                <a:solidFill>
+                  <a:srgbClr val="1A1A1A"/>
+                </a:solidFill>
+                <a:latin typeface="Lexend"/>
               </a:rPr>
               <a:t> cm</a:t>
             </a:r>
             <a:r>
-              <a:rPr sz="2400" b="0" i="0" baseline="30000">
-                <a:solidFill>
-                  <a:srgbClr val="1A1A1A"/>
-                </a:solidFill>
-                <a:latin typeface="Century Schoolbook"/>
+              <a:rPr sz="2280" b="0" i="0" baseline="30000">
+                <a:solidFill>
+                  <a:srgbClr val="1A1A1A"/>
+                </a:solidFill>
+                <a:latin typeface="Lexend"/>
               </a:rPr>
               <a:t>2</a:t>
             </a:r>
@@ -10898,11 +11478,11 @@
           <a:p>
             <a:pPr algn="ctr"/>
             <a:r>
-              <a:rPr sz="2600" b="1" i="0">
-                <a:solidFill>
-                  <a:srgbClr val="1A1A1A"/>
-                </a:solidFill>
-                <a:latin typeface="Century Schoolbook"/>
+              <a:rPr sz="2470" b="1" i="0">
+                <a:solidFill>
+                  <a:srgbClr val="1A1A1A"/>
+                </a:solidFill>
+                <a:latin typeface="Lexend"/>
               </a:rPr>
               <a:t>Answer it.</a:t>
             </a:r>
@@ -10951,11 +11531,11 @@
           <a:p>
             <a:pPr algn="l"/>
             <a:r>
-              <a:rPr sz="3400" b="1" i="0">
-                <a:solidFill>
-                  <a:srgbClr val="1A1A1A"/>
-                </a:solidFill>
-                <a:latin typeface="Century Schoolbook"/>
+              <a:rPr sz="3229" b="1" i="0">
+                <a:solidFill>
+                  <a:srgbClr val="1A1A1A"/>
+                </a:solidFill>
+                <a:latin typeface="Lexend"/>
               </a:rPr>
               <a:t>Whiteboards   ·   Question 6 of 9</a:t>
             </a:r>
@@ -11091,11 +11671,11 @@
           <a:p>
             <a:pPr algn="l"/>
             <a:r>
-              <a:rPr sz="1100" b="0" i="1">
+              <a:rPr sz="1040" b="0" i="0">
                 <a:solidFill>
                   <a:srgbClr val="6B6B6B"/>
                 </a:solidFill>
-                <a:latin typeface="Century Schoolbook"/>
+                <a:latin typeface="Lexend"/>
               </a:rPr>
               <a:t>Grade 7 Accelerated · Unit 4 · Lesson 4 — Real-World Problems and Significant Digits</a:t>
             </a:r>
@@ -11126,11 +11706,11 @@
           <a:p>
             <a:pPr algn="r"/>
             <a:r>
-              <a:rPr sz="1100" b="0" i="0">
+              <a:rPr sz="1040" b="0" i="0">
                 <a:solidFill>
                   <a:srgbClr val="6B6B6B"/>
                 </a:solidFill>
-                <a:latin typeface="Century Schoolbook"/>
+                <a:latin typeface="Lexend"/>
               </a:rPr>
               <a:t>26</a:t>
             </a:r>
@@ -11145,8 +11725,8 @@
         </p:nvSpPr>
         <p:spPr>
           <a:xfrm>
-            <a:off x="1551890" y="2080260"/>
-            <a:ext cx="3903212" cy="457200"/>
+            <a:off x="1552192" y="2080260"/>
+            <a:ext cx="3892815" cy="457200"/>
           </a:xfrm>
           <a:prstGeom prst="rect">
             <a:avLst/>
@@ -11161,11 +11741,11 @@
           <a:p>
             <a:pPr algn="l"/>
             <a:r>
-              <a:rPr sz="2600" b="0" i="0">
-                <a:solidFill>
-                  <a:srgbClr val="1A1A1A"/>
-                </a:solidFill>
-                <a:latin typeface="Century Schoolbook"/>
+              <a:rPr sz="2470" b="0" i="0">
+                <a:solidFill>
+                  <a:srgbClr val="1A1A1A"/>
+                </a:solidFill>
+                <a:latin typeface="Lexend"/>
               </a:rPr>
               <a:t>A rectangle measures  </a:t>
             </a:r>
@@ -11174,7 +11754,7 @@
       </p:sp>
       <p:pic>
         <p:nvPicPr>
-          <p:cNvPr id="9" name="Picture 8" descr="2040ebaec58d50e4.png"/>
+          <p:cNvPr id="9" name="Picture 8" descr="1aaeee8bfa6e8447.png"/>
           <p:cNvPicPr>
             <a:picLocks noChangeAspect="1"/>
           </p:cNvPicPr>
@@ -11188,8 +11768,8 @@
         </p:blipFill>
         <p:spPr>
           <a:xfrm>
-            <a:off x="5317942" y="2135124"/>
-            <a:ext cx="1426464" cy="347472"/>
+            <a:off x="5307848" y="2138171"/>
+            <a:ext cx="1423416" cy="341376"/>
           </a:xfrm>
           <a:prstGeom prst="rect">
             <a:avLst/>
@@ -11204,8 +11784,8 @@
         </p:nvSpPr>
         <p:spPr>
           <a:xfrm>
-            <a:off x="6744406" y="2080260"/>
-            <a:ext cx="1537107" cy="457200"/>
+            <a:off x="6731264" y="2080260"/>
+            <a:ext cx="1556043" cy="457200"/>
           </a:xfrm>
           <a:prstGeom prst="rect">
             <a:avLst/>
@@ -11220,11 +11800,11 @@
           <a:p>
             <a:pPr algn="l"/>
             <a:r>
-              <a:rPr sz="2600" b="0" i="0">
-                <a:solidFill>
-                  <a:srgbClr val="1A1A1A"/>
-                </a:solidFill>
-                <a:latin typeface="Century Schoolbook"/>
+              <a:rPr sz="2470" b="0" i="0">
+                <a:solidFill>
+                  <a:srgbClr val="1A1A1A"/>
+                </a:solidFill>
+                <a:latin typeface="Lexend"/>
               </a:rPr>
               <a:t>  cm by  </a:t>
             </a:r>
@@ -11233,7 +11813,7 @@
       </p:sp>
       <p:pic>
         <p:nvPicPr>
-          <p:cNvPr id="11" name="Picture 10" descr="7f74096cc598f7b1.png"/>
+          <p:cNvPr id="11" name="Picture 10" descr="ba0b2a6dbe833f87.png"/>
           <p:cNvPicPr>
             <a:picLocks noChangeAspect="1"/>
           </p:cNvPicPr>
@@ -11247,8 +11827,8 @@
         </p:blipFill>
         <p:spPr>
           <a:xfrm>
-            <a:off x="8144354" y="2135124"/>
-            <a:ext cx="1633728" cy="347472"/>
+            <a:off x="8150148" y="2138171"/>
+            <a:ext cx="1639824" cy="341376"/>
           </a:xfrm>
           <a:prstGeom prst="rect">
             <a:avLst/>
@@ -11263,8 +11843,8 @@
         </p:nvSpPr>
         <p:spPr>
           <a:xfrm>
-            <a:off x="9778082" y="2080260"/>
-            <a:ext cx="968706" cy="457200"/>
+            <a:off x="9789972" y="2080260"/>
+            <a:ext cx="956514" cy="457200"/>
           </a:xfrm>
           <a:prstGeom prst="rect">
             <a:avLst/>
@@ -11279,11 +11859,11 @@
           <a:p>
             <a:pPr algn="l"/>
             <a:r>
-              <a:rPr sz="2600" b="0" i="0">
-                <a:solidFill>
-                  <a:srgbClr val="1A1A1A"/>
-                </a:solidFill>
-                <a:latin typeface="Century Schoolbook"/>
+              <a:rPr sz="2470" b="0" i="0">
+                <a:solidFill>
+                  <a:srgbClr val="1A1A1A"/>
+                </a:solidFill>
+                <a:latin typeface="Lexend"/>
               </a:rPr>
               <a:t>  cm.</a:t>
             </a:r>
@@ -11314,27 +11894,193 @@
           <a:p>
             <a:pPr algn="ctr"/>
             <a:r>
-              <a:rPr sz="2600" b="0" i="0">
-                <a:solidFill>
-                  <a:srgbClr val="1A1A1A"/>
-                </a:solidFill>
-                <a:latin typeface="Century Schoolbook"/>
+              <a:rPr sz="2470" b="0" i="0">
+                <a:solidFill>
+                  <a:srgbClr val="1A1A1A"/>
+                </a:solidFill>
+                <a:latin typeface="Lexend"/>
               </a:rPr>
               <a:t>Which is the area, to the correct significant digits?</a:t>
             </a:r>
           </a:p>
         </p:txBody>
       </p:sp>
-      <p:sp>
-        <p:nvSpPr>
-          <p:cNvPr id="14" name="TextBox 13"/>
-          <p:cNvSpPr txBox="1"/>
-          <p:nvPr/>
-        </p:nvSpPr>
-        <p:spPr>
-          <a:xfrm>
-            <a:off x="1874519" y="3455239"/>
-            <a:ext cx="4572000" cy="548640"/>
+      <p:pic>
+        <p:nvPicPr>
+          <p:cNvPr id="14" name="Picture 13" descr="7be216ecf24c5d81.png"/>
+          <p:cNvPicPr>
+            <a:picLocks noChangeAspect="1"/>
+          </p:cNvPicPr>
+          <p:nvPr/>
+        </p:nvPicPr>
+        <p:blipFill>
+          <a:blip r:embed="rId4"/>
+          <a:stretch>
+            <a:fillRect/>
+          </a:stretch>
+        </p:blipFill>
+        <p:spPr>
+          <a:xfrm>
+            <a:off x="2746669" y="3536011"/>
+            <a:ext cx="2029968" cy="213360"/>
+          </a:xfrm>
+          <a:prstGeom prst="rect">
+            <a:avLst/>
+          </a:prstGeom>
+        </p:spPr>
+      </p:pic>
+      <p:sp>
+        <p:nvSpPr>
+          <p:cNvPr id="15" name="TextBox 14"/>
+          <p:cNvSpPr txBox="1"/>
+          <p:nvPr/>
+        </p:nvSpPr>
+        <p:spPr>
+          <a:xfrm>
+            <a:off x="4776637" y="3414091"/>
+            <a:ext cx="1320048" cy="457200"/>
+          </a:xfrm>
+          <a:prstGeom prst="rect">
+            <a:avLst/>
+          </a:prstGeom>
+          <a:noFill/>
+        </p:spPr>
+        <p:txBody>
+          <a:bodyPr wrap="none" lIns="45720" rIns="45720" tIns="18288" bIns="18288" anchor="ctr">
+            <a:noAutofit/>
+          </a:bodyPr>
+          <a:lstStyle/>
+          <a:p>
+            <a:pPr algn="l"/>
+            <a:r>
+              <a:rPr sz="2330" b="0" i="0">
+                <a:solidFill>
+                  <a:srgbClr val="1A1A1A"/>
+                </a:solidFill>
+                <a:latin typeface="Lexend"/>
+              </a:rPr>
+              <a:t>   and   </a:t>
+            </a:r>
+          </a:p>
+        </p:txBody>
+      </p:sp>
+      <p:pic>
+        <p:nvPicPr>
+          <p:cNvPr id="16" name="Picture 15" descr="6dc7d095c18b4262.png"/>
+          <p:cNvPicPr>
+            <a:picLocks noChangeAspect="1"/>
+          </p:cNvPicPr>
+          <p:nvPr/>
+        </p:nvPicPr>
+        <p:blipFill>
+          <a:blip r:embed="rId5"/>
+          <a:stretch>
+            <a:fillRect/>
+          </a:stretch>
+        </p:blipFill>
+        <p:spPr>
+          <a:xfrm>
+            <a:off x="5959526" y="3511627"/>
+            <a:ext cx="1859280" cy="262128"/>
+          </a:xfrm>
+          <a:prstGeom prst="rect">
+            <a:avLst/>
+          </a:prstGeom>
+        </p:spPr>
+      </p:pic>
+      <p:pic>
+        <p:nvPicPr>
+          <p:cNvPr id="17" name="Picture 16" descr="35eed8d154d098e1.png"/>
+          <p:cNvPicPr>
+            <a:picLocks noChangeAspect="1"/>
+          </p:cNvPicPr>
+          <p:nvPr/>
+        </p:nvPicPr>
+        <p:blipFill>
+          <a:blip r:embed="rId6"/>
+          <a:stretch>
+            <a:fillRect/>
+          </a:stretch>
+        </p:blipFill>
+        <p:spPr>
+          <a:xfrm>
+            <a:off x="2746669" y="3990163"/>
+            <a:ext cx="2602992" cy="310896"/>
+          </a:xfrm>
+          <a:prstGeom prst="rect">
+            <a:avLst/>
+          </a:prstGeom>
+        </p:spPr>
+      </p:pic>
+      <p:sp>
+        <p:nvSpPr>
+          <p:cNvPr id="18" name="TextBox 17"/>
+          <p:cNvSpPr txBox="1"/>
+          <p:nvPr/>
+        </p:nvSpPr>
+        <p:spPr>
+          <a:xfrm>
+            <a:off x="2691805" y="4419931"/>
+            <a:ext cx="5845221" cy="457200"/>
+          </a:xfrm>
+          <a:prstGeom prst="rect">
+            <a:avLst/>
+          </a:prstGeom>
+          <a:noFill/>
+        </p:spPr>
+        <p:txBody>
+          <a:bodyPr wrap="none" lIns="45720" rIns="45720" tIns="18288" bIns="18288" anchor="ctr">
+            <a:noAutofit/>
+          </a:bodyPr>
+          <a:lstStyle/>
+          <a:p>
+            <a:pPr algn="l"/>
+            <a:r>
+              <a:rPr sz="2330" b="0" i="0">
+                <a:solidFill>
+                  <a:srgbClr val="1A1A1A"/>
+                </a:solidFill>
+                <a:latin typeface="Lexend"/>
+              </a:rPr>
+              <a:t>Keep 2 significant digits (6.0 has 2):   </a:t>
+            </a:r>
+          </a:p>
+        </p:txBody>
+      </p:sp>
+      <p:pic>
+        <p:nvPicPr>
+          <p:cNvPr id="19" name="Picture 18" descr="9b8a502d8aaa20ea.png"/>
+          <p:cNvPicPr>
+            <a:picLocks noChangeAspect="1"/>
+          </p:cNvPicPr>
+          <p:nvPr/>
+        </p:nvPicPr>
+        <p:blipFill>
+          <a:blip r:embed="rId7"/>
+          <a:stretch>
+            <a:fillRect/>
+          </a:stretch>
+        </p:blipFill>
+        <p:spPr>
+          <a:xfrm>
+            <a:off x="8399866" y="4520515"/>
+            <a:ext cx="1069848" cy="256032"/>
+          </a:xfrm>
+          <a:prstGeom prst="rect">
+            <a:avLst/>
+          </a:prstGeom>
+        </p:spPr>
+      </p:pic>
+      <p:sp>
+        <p:nvSpPr>
+          <p:cNvPr id="20" name="TextBox 19"/>
+          <p:cNvSpPr txBox="1"/>
+          <p:nvPr/>
+        </p:nvSpPr>
+        <p:spPr>
+          <a:xfrm>
+            <a:off x="777240" y="4991431"/>
+            <a:ext cx="10607040" cy="548640"/>
           </a:xfrm>
           <a:prstGeom prst="rect">
             <a:avLst/>
@@ -11347,324 +12093,40 @@
           </a:bodyPr>
           <a:lstStyle/>
           <a:p>
-            <a:pPr algn="l"/>
-            <a:r>
-              <a:rPr sz="2400" b="1" i="0">
-                <a:solidFill>
-                  <a:srgbClr val="1A1A1A"/>
-                </a:solidFill>
-                <a:latin typeface="Century Schoolbook"/>
-              </a:rPr>
-              <a:t>A.   </a:t>
-            </a:r>
-            <a:r>
-              <a:rPr sz="2400" b="0" i="0">
-                <a:solidFill>
-                  <a:srgbClr val="1A1A1A"/>
-                </a:solidFill>
-                <a:latin typeface="Century Schoolbook"/>
-              </a:rPr>
-              <a:t>26.1 × 10</a:t>
-            </a:r>
-            <a:r>
-              <a:rPr sz="2400" b="0" i="0" baseline="30000">
-                <a:solidFill>
-                  <a:srgbClr val="1A1A1A"/>
-                </a:solidFill>
-                <a:latin typeface="Century Schoolbook"/>
-              </a:rPr>
-              <a:t>4</a:t>
-            </a:r>
-            <a:r>
-              <a:rPr sz="2400" b="0" i="0">
-                <a:solidFill>
-                  <a:srgbClr val="1A1A1A"/>
-                </a:solidFill>
-                <a:latin typeface="Century Schoolbook"/>
+            <a:pPr algn="ctr"/>
+            <a:r>
+              <a:rPr sz="3040" b="1" i="0">
+                <a:solidFill>
+                  <a:srgbClr val="9E1B32"/>
+                </a:solidFill>
+                <a:latin typeface="Lexend"/>
+              </a:rPr>
+              <a:t>Answer:   B — 2.6 × 10</a:t>
+            </a:r>
+            <a:r>
+              <a:rPr sz="3040" b="1" i="0" baseline="30000">
+                <a:solidFill>
+                  <a:srgbClr val="9E1B32"/>
+                </a:solidFill>
+                <a:latin typeface="Lexend"/>
+              </a:rPr>
+              <a:t>5</a:t>
+            </a:r>
+            <a:r>
+              <a:rPr sz="3040" b="1" i="0">
+                <a:solidFill>
+                  <a:srgbClr val="9E1B32"/>
+                </a:solidFill>
+                <a:latin typeface="Lexend"/>
               </a:rPr>
               <a:t> cm</a:t>
             </a:r>
             <a:r>
-              <a:rPr sz="2400" b="0" i="0" baseline="30000">
-                <a:solidFill>
-                  <a:srgbClr val="1A1A1A"/>
-                </a:solidFill>
-                <a:latin typeface="Century Schoolbook"/>
-              </a:rPr>
-              <a:t>2</a:t>
-            </a:r>
-          </a:p>
-        </p:txBody>
-      </p:sp>
-      <p:sp>
-        <p:nvSpPr>
-          <p:cNvPr id="15" name="TextBox 14"/>
-          <p:cNvSpPr txBox="1"/>
-          <p:nvPr/>
-        </p:nvSpPr>
-        <p:spPr>
-          <a:xfrm>
-            <a:off x="6629400" y="3455239"/>
-            <a:ext cx="4572000" cy="548640"/>
-          </a:xfrm>
-          <a:prstGeom prst="rect">
-            <a:avLst/>
-          </a:prstGeom>
-          <a:noFill/>
-        </p:spPr>
-        <p:txBody>
-          <a:bodyPr wrap="square" lIns="45720" rIns="45720" tIns="18288" bIns="18288" anchor="t">
-            <a:spAutoFit/>
-          </a:bodyPr>
-          <a:lstStyle/>
-          <a:p>
-            <a:pPr algn="l"/>
-            <a:r>
-              <a:rPr sz="2400" b="1" i="0">
+              <a:rPr sz="3040" b="1" i="0" baseline="30000">
                 <a:solidFill>
                   <a:srgbClr val="9E1B32"/>
                 </a:solidFill>
-                <a:latin typeface="Century Schoolbook"/>
-              </a:rPr>
-              <a:t>B.   </a:t>
-            </a:r>
-            <a:r>
-              <a:rPr sz="2400" b="1" i="0">
-                <a:solidFill>
-                  <a:srgbClr val="9E1B32"/>
-                </a:solidFill>
-                <a:latin typeface="Century Schoolbook"/>
-              </a:rPr>
-              <a:t>2.6 × 10</a:t>
-            </a:r>
-            <a:r>
-              <a:rPr sz="2400" b="1" i="0" baseline="30000">
-                <a:solidFill>
-                  <a:srgbClr val="9E1B32"/>
-                </a:solidFill>
-                <a:latin typeface="Century Schoolbook"/>
-              </a:rPr>
-              <a:t>5</a:t>
-            </a:r>
-            <a:r>
-              <a:rPr sz="2400" b="1" i="0">
-                <a:solidFill>
-                  <a:srgbClr val="9E1B32"/>
-                </a:solidFill>
-                <a:latin typeface="Century Schoolbook"/>
-              </a:rPr>
-              <a:t> cm</a:t>
-            </a:r>
-            <a:r>
-              <a:rPr sz="2400" b="1" i="0" baseline="30000">
-                <a:solidFill>
-                  <a:srgbClr val="9E1B32"/>
-                </a:solidFill>
-                <a:latin typeface="Century Schoolbook"/>
-              </a:rPr>
-              <a:t>2</a:t>
-            </a:r>
-          </a:p>
-        </p:txBody>
-      </p:sp>
-      <p:sp>
-        <p:nvSpPr>
-          <p:cNvPr id="16" name="TextBox 15"/>
-          <p:cNvSpPr txBox="1"/>
-          <p:nvPr/>
-        </p:nvSpPr>
-        <p:spPr>
-          <a:xfrm>
-            <a:off x="1874519" y="4141039"/>
-            <a:ext cx="4572000" cy="548640"/>
-          </a:xfrm>
-          <a:prstGeom prst="rect">
-            <a:avLst/>
-          </a:prstGeom>
-          <a:noFill/>
-        </p:spPr>
-        <p:txBody>
-          <a:bodyPr wrap="square" lIns="45720" rIns="45720" tIns="18288" bIns="18288" anchor="t">
-            <a:spAutoFit/>
-          </a:bodyPr>
-          <a:lstStyle/>
-          <a:p>
-            <a:pPr algn="l"/>
-            <a:r>
-              <a:rPr sz="2400" b="1" i="0">
-                <a:solidFill>
-                  <a:srgbClr val="1A1A1A"/>
-                </a:solidFill>
-                <a:latin typeface="Century Schoolbook"/>
-              </a:rPr>
-              <a:t>C.   </a:t>
-            </a:r>
-            <a:r>
-              <a:rPr sz="2400" b="0" i="0">
-                <a:solidFill>
-                  <a:srgbClr val="1A1A1A"/>
-                </a:solidFill>
-                <a:latin typeface="Century Schoolbook"/>
-              </a:rPr>
-              <a:t>2.6 × 10</a:t>
-            </a:r>
-            <a:r>
-              <a:rPr sz="2400" b="0" i="0" baseline="30000">
-                <a:solidFill>
-                  <a:srgbClr val="1A1A1A"/>
-                </a:solidFill>
-                <a:latin typeface="Century Schoolbook"/>
-              </a:rPr>
-              <a:t>4</a:t>
-            </a:r>
-            <a:r>
-              <a:rPr sz="2400" b="0" i="0">
-                <a:solidFill>
-                  <a:srgbClr val="1A1A1A"/>
-                </a:solidFill>
-                <a:latin typeface="Century Schoolbook"/>
-              </a:rPr>
-              <a:t> cm</a:t>
-            </a:r>
-            <a:r>
-              <a:rPr sz="2400" b="0" i="0" baseline="30000">
-                <a:solidFill>
-                  <a:srgbClr val="1A1A1A"/>
-                </a:solidFill>
-                <a:latin typeface="Century Schoolbook"/>
-              </a:rPr>
-              <a:t>2</a:t>
-            </a:r>
-          </a:p>
-        </p:txBody>
-      </p:sp>
-      <p:sp>
-        <p:nvSpPr>
-          <p:cNvPr id="17" name="TextBox 16"/>
-          <p:cNvSpPr txBox="1"/>
-          <p:nvPr/>
-        </p:nvSpPr>
-        <p:spPr>
-          <a:xfrm>
-            <a:off x="6629400" y="4141039"/>
-            <a:ext cx="4572000" cy="548640"/>
-          </a:xfrm>
-          <a:prstGeom prst="rect">
-            <a:avLst/>
-          </a:prstGeom>
-          <a:noFill/>
-        </p:spPr>
-        <p:txBody>
-          <a:bodyPr wrap="square" lIns="45720" rIns="45720" tIns="18288" bIns="18288" anchor="t">
-            <a:spAutoFit/>
-          </a:bodyPr>
-          <a:lstStyle/>
-          <a:p>
-            <a:pPr algn="l"/>
-            <a:r>
-              <a:rPr sz="2400" b="1" i="0">
-                <a:solidFill>
-                  <a:srgbClr val="1A1A1A"/>
-                </a:solidFill>
-                <a:latin typeface="Century Schoolbook"/>
-              </a:rPr>
-              <a:t>D.   </a:t>
-            </a:r>
-            <a:r>
-              <a:rPr sz="2400" b="0" i="0">
-                <a:solidFill>
-                  <a:srgbClr val="1A1A1A"/>
-                </a:solidFill>
-                <a:latin typeface="Century Schoolbook"/>
-              </a:rPr>
-              <a:t>2.61 × 10</a:t>
-            </a:r>
-            <a:r>
-              <a:rPr sz="2400" b="0" i="0" baseline="30000">
-                <a:solidFill>
-                  <a:srgbClr val="1A1A1A"/>
-                </a:solidFill>
-                <a:latin typeface="Century Schoolbook"/>
-              </a:rPr>
-              <a:t>5</a:t>
-            </a:r>
-            <a:r>
-              <a:rPr sz="2400" b="0" i="0">
-                <a:solidFill>
-                  <a:srgbClr val="1A1A1A"/>
-                </a:solidFill>
-                <a:latin typeface="Century Schoolbook"/>
-              </a:rPr>
-              <a:t> cm</a:t>
-            </a:r>
-            <a:r>
-              <a:rPr sz="2400" b="0" i="0" baseline="30000">
-                <a:solidFill>
-                  <a:srgbClr val="1A1A1A"/>
-                </a:solidFill>
-                <a:latin typeface="Century Schoolbook"/>
-              </a:rPr>
-              <a:t>2</a:t>
-            </a:r>
-          </a:p>
-        </p:txBody>
-      </p:sp>
-      <p:sp>
-        <p:nvSpPr>
-          <p:cNvPr id="18" name="TextBox 17"/>
-          <p:cNvSpPr txBox="1"/>
-          <p:nvPr/>
-        </p:nvSpPr>
-        <p:spPr>
-          <a:xfrm>
-            <a:off x="777240" y="5146879"/>
-            <a:ext cx="10607040" cy="548640"/>
-          </a:xfrm>
-          <a:prstGeom prst="rect">
-            <a:avLst/>
-          </a:prstGeom>
-          <a:noFill/>
-        </p:spPr>
-        <p:txBody>
-          <a:bodyPr wrap="square" lIns="45720" rIns="45720" tIns="18288" bIns="18288" anchor="t">
-            <a:spAutoFit/>
-          </a:bodyPr>
-          <a:lstStyle/>
-          <a:p>
-            <a:pPr algn="ctr"/>
-            <a:r>
-              <a:rPr sz="3200" b="1" i="0">
-                <a:solidFill>
-                  <a:srgbClr val="9E1B32"/>
-                </a:solidFill>
-                <a:latin typeface="Century Schoolbook"/>
-              </a:rPr>
-              <a:t>Answer:   B — 2.6 × 10</a:t>
-            </a:r>
-            <a:r>
-              <a:rPr sz="3200" b="1" i="0" baseline="30000">
-                <a:solidFill>
-                  <a:srgbClr val="9E1B32"/>
-                </a:solidFill>
-                <a:latin typeface="Century Schoolbook"/>
-              </a:rPr>
-              <a:t>5</a:t>
-            </a:r>
-            <a:r>
-              <a:rPr sz="3200" b="1" i="0">
-                <a:solidFill>
-                  <a:srgbClr val="9E1B32"/>
-                </a:solidFill>
-                <a:latin typeface="Century Schoolbook"/>
-              </a:rPr>
-              <a:t> cm</a:t>
-            </a:r>
-            <a:r>
-              <a:rPr sz="3200" b="1" i="0" baseline="30000">
-                <a:solidFill>
-                  <a:srgbClr val="9E1B32"/>
-                </a:solidFill>
-                <a:latin typeface="Century Schoolbook"/>
+                <a:latin typeface="Lexend"/>
               </a:rPr>
               <a:t>2</a:t>
             </a:r>
@@ -11713,11 +12175,11 @@
           <a:p>
             <a:pPr algn="l"/>
             <a:r>
-              <a:rPr sz="3400" b="1" i="0">
-                <a:solidFill>
-                  <a:srgbClr val="1A1A1A"/>
-                </a:solidFill>
-                <a:latin typeface="Century Schoolbook"/>
+              <a:rPr sz="3229" b="1" i="0">
+                <a:solidFill>
+                  <a:srgbClr val="1A1A1A"/>
+                </a:solidFill>
+                <a:latin typeface="Lexend"/>
               </a:rPr>
               <a:t>Whiteboards   ·   Question 7 of 9</a:t>
             </a:r>
@@ -11853,11 +12315,11 @@
           <a:p>
             <a:pPr algn="l"/>
             <a:r>
-              <a:rPr sz="1100" b="0" i="1">
+              <a:rPr sz="1040" b="0" i="0">
                 <a:solidFill>
                   <a:srgbClr val="6B6B6B"/>
                 </a:solidFill>
-                <a:latin typeface="Century Schoolbook"/>
+                <a:latin typeface="Lexend"/>
               </a:rPr>
               <a:t>Grade 7 Accelerated · Unit 4 · Lesson 4 — Real-World Problems and Significant Digits</a:t>
             </a:r>
@@ -11888,11 +12350,11 @@
           <a:p>
             <a:pPr algn="r"/>
             <a:r>
-              <a:rPr sz="1100" b="0" i="0">
+              <a:rPr sz="1040" b="0" i="0">
                 <a:solidFill>
                   <a:srgbClr val="6B6B6B"/>
                 </a:solidFill>
-                <a:latin typeface="Century Schoolbook"/>
+                <a:latin typeface="Lexend"/>
               </a:rPr>
               <a:t>27</a:t>
             </a:r>
@@ -11907,8 +12369,8 @@
         </p:nvSpPr>
         <p:spPr>
           <a:xfrm>
-            <a:off x="2553822" y="2171700"/>
-            <a:ext cx="2456309" cy="457200"/>
+            <a:off x="2639605" y="2171700"/>
+            <a:ext cx="2421842" cy="457200"/>
           </a:xfrm>
           <a:prstGeom prst="rect">
             <a:avLst/>
@@ -11923,11 +12385,11 @@
           <a:p>
             <a:pPr algn="l"/>
             <a:r>
-              <a:rPr sz="2600" b="0" i="0">
-                <a:solidFill>
-                  <a:srgbClr val="1A1A1A"/>
-                </a:solidFill>
-                <a:latin typeface="Century Schoolbook"/>
+              <a:rPr sz="2470" b="0" i="0">
+                <a:solidFill>
+                  <a:srgbClr val="1A1A1A"/>
+                </a:solidFill>
+                <a:latin typeface="Lexend"/>
               </a:rPr>
               <a:t>A car travels  </a:t>
             </a:r>
@@ -11936,7 +12398,7 @@
       </p:sp>
       <p:pic>
         <p:nvPicPr>
-          <p:cNvPr id="9" name="Picture 8" descr="a0c3ce9052e643f0.png"/>
+          <p:cNvPr id="9" name="Picture 8" descr="b5f5674feeb41d04.png"/>
           <p:cNvPicPr>
             <a:picLocks noChangeAspect="1"/>
           </p:cNvPicPr>
@@ -11950,8 +12412,8 @@
         </p:blipFill>
         <p:spPr>
           <a:xfrm>
-            <a:off x="4872972" y="2226564"/>
-            <a:ext cx="1633728" cy="347472"/>
+            <a:off x="4924287" y="2229612"/>
+            <a:ext cx="1661160" cy="341376"/>
           </a:xfrm>
           <a:prstGeom prst="rect">
             <a:avLst/>
@@ -11966,8 +12428,8 @@
         </p:nvSpPr>
         <p:spPr>
           <a:xfrm>
-            <a:off x="6506700" y="2171700"/>
-            <a:ext cx="3238157" cy="457200"/>
+            <a:off x="6585447" y="2171700"/>
+            <a:ext cx="3073626" cy="457200"/>
           </a:xfrm>
           <a:prstGeom prst="rect">
             <a:avLst/>
@@ -11982,11 +12444,11 @@
           <a:p>
             <a:pPr algn="l"/>
             <a:r>
-              <a:rPr sz="2600" b="0" i="0">
-                <a:solidFill>
-                  <a:srgbClr val="1A1A1A"/>
-                </a:solidFill>
-                <a:latin typeface="Century Schoolbook"/>
+              <a:rPr sz="2470" b="0" i="0">
+                <a:solidFill>
+                  <a:srgbClr val="1A1A1A"/>
+                </a:solidFill>
+                <a:latin typeface="Lexend"/>
               </a:rPr>
               <a:t>  km in  3.0  hours.</a:t>
             </a:r>
@@ -12017,11 +12479,11 @@
           <a:p>
             <a:pPr algn="ctr"/>
             <a:r>
-              <a:rPr sz="2300" b="0" i="0">
-                <a:solidFill>
-                  <a:srgbClr val="1A1A1A"/>
-                </a:solidFill>
-                <a:latin typeface="Century Schoolbook"/>
+              <a:rPr sz="2180" b="0" i="0">
+                <a:solidFill>
+                  <a:srgbClr val="1A1A1A"/>
+                </a:solidFill>
+                <a:latin typeface="Lexend"/>
               </a:rPr>
               <a:t>What is its average speed, to the right number of significant digits?</a:t>
             </a:r>
@@ -12052,11 +12514,11 @@
           <a:p>
             <a:pPr algn="ctr"/>
             <a:r>
-              <a:rPr sz="2600" b="1" i="0">
-                <a:solidFill>
-                  <a:srgbClr val="1A1A1A"/>
-                </a:solidFill>
-                <a:latin typeface="Century Schoolbook"/>
+              <a:rPr sz="2470" b="1" i="0">
+                <a:solidFill>
+                  <a:srgbClr val="1A1A1A"/>
+                </a:solidFill>
+                <a:latin typeface="Lexend"/>
               </a:rPr>
               <a:t>Answer it.</a:t>
             </a:r>
@@ -12105,11 +12567,11 @@
           <a:p>
             <a:pPr algn="l"/>
             <a:r>
-              <a:rPr sz="3400" b="1" i="0">
-                <a:solidFill>
-                  <a:srgbClr val="1A1A1A"/>
-                </a:solidFill>
-                <a:latin typeface="Century Schoolbook"/>
+              <a:rPr sz="3229" b="1" i="0">
+                <a:solidFill>
+                  <a:srgbClr val="1A1A1A"/>
+                </a:solidFill>
+                <a:latin typeface="Lexend"/>
               </a:rPr>
               <a:t>Whiteboards   ·   Question 7 of 9</a:t>
             </a:r>
@@ -12245,11 +12707,11 @@
           <a:p>
             <a:pPr algn="l"/>
             <a:r>
-              <a:rPr sz="1100" b="0" i="1">
+              <a:rPr sz="1040" b="0" i="0">
                 <a:solidFill>
                   <a:srgbClr val="6B6B6B"/>
                 </a:solidFill>
-                <a:latin typeface="Century Schoolbook"/>
+                <a:latin typeface="Lexend"/>
               </a:rPr>
               <a:t>Grade 7 Accelerated · Unit 4 · Lesson 4 — Real-World Problems and Significant Digits</a:t>
             </a:r>
@@ -12280,11 +12742,11 @@
           <a:p>
             <a:pPr algn="r"/>
             <a:r>
-              <a:rPr sz="1100" b="0" i="0">
+              <a:rPr sz="1040" b="0" i="0">
                 <a:solidFill>
                   <a:srgbClr val="6B6B6B"/>
                 </a:solidFill>
-                <a:latin typeface="Century Schoolbook"/>
+                <a:latin typeface="Lexend"/>
               </a:rPr>
               <a:t>28</a:t>
             </a:r>
@@ -12299,8 +12761,8 @@
         </p:nvSpPr>
         <p:spPr>
           <a:xfrm>
-            <a:off x="2553822" y="2080260"/>
-            <a:ext cx="2456309" cy="457200"/>
+            <a:off x="2639605" y="2080260"/>
+            <a:ext cx="2421842" cy="457200"/>
           </a:xfrm>
           <a:prstGeom prst="rect">
             <a:avLst/>
@@ -12315,11 +12777,11 @@
           <a:p>
             <a:pPr algn="l"/>
             <a:r>
-              <a:rPr sz="2600" b="0" i="0">
-                <a:solidFill>
-                  <a:srgbClr val="1A1A1A"/>
-                </a:solidFill>
-                <a:latin typeface="Century Schoolbook"/>
+              <a:rPr sz="2470" b="0" i="0">
+                <a:solidFill>
+                  <a:srgbClr val="1A1A1A"/>
+                </a:solidFill>
+                <a:latin typeface="Lexend"/>
               </a:rPr>
               <a:t>A car travels  </a:t>
             </a:r>
@@ -12328,7 +12790,7 @@
       </p:sp>
       <p:pic>
         <p:nvPicPr>
-          <p:cNvPr id="9" name="Picture 8" descr="cb8dbdba9896eb35.png"/>
+          <p:cNvPr id="9" name="Picture 8" descr="4947c0dc47f86ab9.png"/>
           <p:cNvPicPr>
             <a:picLocks noChangeAspect="1"/>
           </p:cNvPicPr>
@@ -12342,8 +12804,8 @@
         </p:blipFill>
         <p:spPr>
           <a:xfrm>
-            <a:off x="4872972" y="2135124"/>
-            <a:ext cx="1633728" cy="347472"/>
+            <a:off x="4924287" y="2138171"/>
+            <a:ext cx="1661160" cy="341376"/>
           </a:xfrm>
           <a:prstGeom prst="rect">
             <a:avLst/>
@@ -12358,8 +12820,8 @@
         </p:nvSpPr>
         <p:spPr>
           <a:xfrm>
-            <a:off x="6506700" y="2080260"/>
-            <a:ext cx="3238157" cy="457200"/>
+            <a:off x="6585447" y="2080260"/>
+            <a:ext cx="3073626" cy="457200"/>
           </a:xfrm>
           <a:prstGeom prst="rect">
             <a:avLst/>
@@ -12374,11 +12836,11 @@
           <a:p>
             <a:pPr algn="l"/>
             <a:r>
-              <a:rPr sz="2600" b="0" i="0">
-                <a:solidFill>
-                  <a:srgbClr val="1A1A1A"/>
-                </a:solidFill>
-                <a:latin typeface="Century Schoolbook"/>
+              <a:rPr sz="2470" b="0" i="0">
+                <a:solidFill>
+                  <a:srgbClr val="1A1A1A"/>
+                </a:solidFill>
+                <a:latin typeface="Lexend"/>
               </a:rPr>
               <a:t>  km in  3.0  hours.</a:t>
             </a:r>
@@ -12409,20 +12871,103 @@
           <a:p>
             <a:pPr algn="ctr"/>
             <a:r>
-              <a:rPr sz="2300" b="0" i="0">
-                <a:solidFill>
-                  <a:srgbClr val="1A1A1A"/>
-                </a:solidFill>
-                <a:latin typeface="Century Schoolbook"/>
+              <a:rPr sz="2180" b="0" i="0">
+                <a:solidFill>
+                  <a:srgbClr val="1A1A1A"/>
+                </a:solidFill>
+                <a:latin typeface="Lexend"/>
               </a:rPr>
               <a:t>What is its average speed, to the right number of significant digits?</a:t>
             </a:r>
           </a:p>
         </p:txBody>
       </p:sp>
-      <p:sp>
-        <p:nvSpPr>
-          <p:cNvPr id="12" name="TextBox 11"/>
+      <p:pic>
+        <p:nvPicPr>
+          <p:cNvPr id="12" name="Picture 11" descr="b7f3f89b7670fbcf.png"/>
+          <p:cNvPicPr>
+            <a:picLocks noChangeAspect="1"/>
+          </p:cNvPicPr>
+          <p:nvPr/>
+        </p:nvPicPr>
+        <p:blipFill>
+          <a:blip r:embed="rId3"/>
+          <a:stretch>
+            <a:fillRect/>
+          </a:stretch>
+        </p:blipFill>
+        <p:spPr>
+          <a:xfrm>
+            <a:off x="2635366" y="3482340"/>
+            <a:ext cx="1981199" cy="213360"/>
+          </a:xfrm>
+          <a:prstGeom prst="rect">
+            <a:avLst/>
+          </a:prstGeom>
+        </p:spPr>
+      </p:pic>
+      <p:sp>
+        <p:nvSpPr>
+          <p:cNvPr id="13" name="TextBox 12"/>
+          <p:cNvSpPr txBox="1"/>
+          <p:nvPr/>
+        </p:nvSpPr>
+        <p:spPr>
+          <a:xfrm>
+            <a:off x="2580502" y="3863339"/>
+            <a:ext cx="6076970" cy="457200"/>
+          </a:xfrm>
+          <a:prstGeom prst="rect">
+            <a:avLst/>
+          </a:prstGeom>
+          <a:noFill/>
+        </p:spPr>
+        <p:txBody>
+          <a:bodyPr wrap="none" lIns="45720" rIns="45720" tIns="18288" bIns="18288" anchor="ctr">
+            <a:noAutofit/>
+          </a:bodyPr>
+          <a:lstStyle/>
+          <a:p>
+            <a:pPr algn="l"/>
+            <a:r>
+              <a:rPr sz="2330" b="0" i="0">
+                <a:solidFill>
+                  <a:srgbClr val="1A1A1A"/>
+                </a:solidFill>
+                <a:latin typeface="Lexend"/>
+              </a:rPr>
+              <a:t>3.0 has 2 significant digits, so keep 2:   </a:t>
+            </a:r>
+          </a:p>
+        </p:txBody>
+      </p:sp>
+      <p:pic>
+        <p:nvPicPr>
+          <p:cNvPr id="14" name="Picture 13" descr="a617e99eac0e9963.png"/>
+          <p:cNvPicPr>
+            <a:picLocks noChangeAspect="1"/>
+          </p:cNvPicPr>
+          <p:nvPr/>
+        </p:nvPicPr>
+        <p:blipFill>
+          <a:blip r:embed="rId4"/>
+          <a:stretch>
+            <a:fillRect/>
+          </a:stretch>
+        </p:blipFill>
+        <p:spPr>
+          <a:xfrm>
+            <a:off x="8520313" y="3960876"/>
+            <a:ext cx="1063752" cy="262128"/>
+          </a:xfrm>
+          <a:prstGeom prst="rect">
+            <a:avLst/>
+          </a:prstGeom>
+        </p:spPr>
+      </p:pic>
+      <p:sp>
+        <p:nvSpPr>
+          <p:cNvPr id="15" name="TextBox 14"/>
           <p:cNvSpPr txBox="1"/>
           <p:nvPr/>
         </p:nvSpPr>
@@ -12444,29 +12989,29 @@
           <a:p>
             <a:pPr algn="ctr"/>
             <a:r>
-              <a:rPr sz="3200" b="1" i="0">
+              <a:rPr sz="3040" b="1" i="0">
                 <a:solidFill>
                   <a:srgbClr val="9E1B32"/>
                 </a:solidFill>
-                <a:latin typeface="Century Schoolbook"/>
+                <a:latin typeface="Lexend"/>
               </a:rPr>
               <a:t>Answer:   1.4 × 10</a:t>
             </a:r>
             <a:r>
-              <a:rPr sz="3200" b="1" i="0" baseline="30000">
+              <a:rPr sz="3040" b="1" i="0" baseline="30000">
                 <a:solidFill>
                   <a:srgbClr val="9E1B32"/>
                 </a:solidFill>
-                <a:latin typeface="Century Schoolbook"/>
+                <a:latin typeface="Lexend"/>
               </a:rPr>
               <a:t>2</a:t>
             </a:r>
             <a:r>
-              <a:rPr sz="3200" b="1" i="0">
+              <a:rPr sz="3040" b="1" i="0">
                 <a:solidFill>
                   <a:srgbClr val="9E1B32"/>
                 </a:solidFill>
-                <a:latin typeface="Century Schoolbook"/>
+                <a:latin typeface="Lexend"/>
               </a:rPr>
               <a:t> km/h</a:t>
             </a:r>
@@ -12515,11 +13060,11 @@
           <a:p>
             <a:pPr algn="l"/>
             <a:r>
-              <a:rPr sz="3400" b="1" i="0">
-                <a:solidFill>
-                  <a:srgbClr val="1A1A1A"/>
-                </a:solidFill>
-                <a:latin typeface="Century Schoolbook"/>
+              <a:rPr sz="3229" b="1" i="0">
+                <a:solidFill>
+                  <a:srgbClr val="1A1A1A"/>
+                </a:solidFill>
+                <a:latin typeface="Lexend"/>
               </a:rPr>
               <a:t>Whiteboards   ·   Question 8 of 9</a:t>
             </a:r>
@@ -12655,11 +13200,11 @@
           <a:p>
             <a:pPr algn="l"/>
             <a:r>
-              <a:rPr sz="1100" b="0" i="1">
+              <a:rPr sz="1040" b="0" i="0">
                 <a:solidFill>
                   <a:srgbClr val="6B6B6B"/>
                 </a:solidFill>
-                <a:latin typeface="Century Schoolbook"/>
+                <a:latin typeface="Lexend"/>
               </a:rPr>
               <a:t>Grade 7 Accelerated · Unit 4 · Lesson 4 — Real-World Problems and Significant Digits</a:t>
             </a:r>
@@ -12690,11 +13235,11 @@
           <a:p>
             <a:pPr algn="r"/>
             <a:r>
-              <a:rPr sz="1100" b="0" i="0">
+              <a:rPr sz="1040" b="0" i="0">
                 <a:solidFill>
                   <a:srgbClr val="6B6B6B"/>
                 </a:solidFill>
-                <a:latin typeface="Century Schoolbook"/>
+                <a:latin typeface="Lexend"/>
               </a:rPr>
               <a:t>29</a:t>
             </a:r>
@@ -12725,11 +13270,11 @@
           <a:p>
             <a:pPr algn="ctr"/>
             <a:r>
-              <a:rPr sz="2600" b="0" i="0">
-                <a:solidFill>
-                  <a:srgbClr val="1A1A1A"/>
-                </a:solidFill>
-                <a:latin typeface="Century Schoolbook"/>
+              <a:rPr sz="2470" b="0" i="0">
+                <a:solidFill>
+                  <a:srgbClr val="1A1A1A"/>
+                </a:solidFill>
+                <a:latin typeface="Lexend"/>
               </a:rPr>
               <a:t>A measured length times a measured width gives an area</a:t>
             </a:r>
@@ -12744,8 +13289,8 @@
         </p:nvSpPr>
         <p:spPr>
           <a:xfrm>
-            <a:off x="1797016" y="2746579"/>
-            <a:ext cx="696416" cy="457200"/>
+            <a:off x="1856207" y="2746579"/>
+            <a:ext cx="725065" cy="457200"/>
           </a:xfrm>
           <a:prstGeom prst="rect">
             <a:avLst/>
@@ -12760,11 +13305,11 @@
           <a:p>
             <a:pPr algn="l"/>
             <a:r>
-              <a:rPr sz="2600" b="0" i="0">
-                <a:solidFill>
-                  <a:srgbClr val="1A1A1A"/>
-                </a:solidFill>
-                <a:latin typeface="Century Schoolbook"/>
+              <a:rPr sz="2470" b="0" i="0">
+                <a:solidFill>
+                  <a:srgbClr val="1A1A1A"/>
+                </a:solidFill>
+                <a:latin typeface="Lexend"/>
               </a:rPr>
               <a:t>of  </a:t>
             </a:r>
@@ -12773,7 +13318,7 @@
       </p:sp>
       <p:pic>
         <p:nvPicPr>
-          <p:cNvPr id="10" name="Picture 9" descr="56b3c95944d22948.png"/>
+          <p:cNvPr id="10" name="Picture 9" descr="66c8c788a53acfda.png"/>
           <p:cNvPicPr>
             <a:picLocks noChangeAspect="1"/>
           </p:cNvPicPr>
@@ -12787,8 +13332,8 @@
         </p:blipFill>
         <p:spPr>
           <a:xfrm>
-            <a:off x="2356273" y="2799919"/>
-            <a:ext cx="1408176" cy="350520"/>
+            <a:off x="2444112" y="2806015"/>
+            <a:ext cx="1392936" cy="338328"/>
           </a:xfrm>
           <a:prstGeom prst="rect">
             <a:avLst/>
@@ -12803,8 +13348,8 @@
         </p:nvSpPr>
         <p:spPr>
           <a:xfrm>
-            <a:off x="3764449" y="2746579"/>
-            <a:ext cx="4662027" cy="457200"/>
+            <a:off x="3837048" y="2746579"/>
+            <a:ext cx="4561885" cy="457200"/>
           </a:xfrm>
           <a:prstGeom prst="rect">
             <a:avLst/>
@@ -12819,29 +13364,29 @@
           <a:p>
             <a:pPr algn="l"/>
             <a:r>
-              <a:rPr sz="2600" b="0" i="0">
-                <a:solidFill>
-                  <a:srgbClr val="1A1A1A"/>
-                </a:solidFill>
-                <a:latin typeface="Century Schoolbook"/>
+              <a:rPr sz="2470" b="0" i="0">
+                <a:solidFill>
+                  <a:srgbClr val="1A1A1A"/>
+                </a:solidFill>
+                <a:latin typeface="Lexend"/>
               </a:rPr>
               <a:t>  m</a:t>
             </a:r>
             <a:r>
-              <a:rPr sz="2600" b="0" i="0" baseline="30000">
-                <a:solidFill>
-                  <a:srgbClr val="1A1A1A"/>
-                </a:solidFill>
-                <a:latin typeface="Century Schoolbook"/>
+              <a:rPr sz="2470" b="0" i="0" baseline="30000">
+                <a:solidFill>
+                  <a:srgbClr val="1A1A1A"/>
+                </a:solidFill>
+                <a:latin typeface="Lexend"/>
               </a:rPr>
               <a:t>2</a:t>
             </a:r>
             <a:r>
-              <a:rPr sz="2600" b="0" i="0">
-                <a:solidFill>
-                  <a:srgbClr val="1A1A1A"/>
-                </a:solidFill>
-                <a:latin typeface="Century Schoolbook"/>
+              <a:rPr sz="2470" b="0" i="0">
+                <a:solidFill>
+                  <a:srgbClr val="1A1A1A"/>
+                </a:solidFill>
+                <a:latin typeface="Lexend"/>
               </a:rPr>
               <a:t>. The length measured  </a:t>
             </a:r>
@@ -12850,7 +13395,7 @@
       </p:sp>
       <p:pic>
         <p:nvPicPr>
-          <p:cNvPr id="12" name="Picture 11" descr="05f1b129363955b5.png"/>
+          <p:cNvPr id="12" name="Picture 11" descr="e3528be3edfa6647.png"/>
           <p:cNvPicPr>
             <a:picLocks noChangeAspect="1"/>
           </p:cNvPicPr>
@@ -12864,8 +13409,8 @@
         </p:blipFill>
         <p:spPr>
           <a:xfrm>
-            <a:off x="8289316" y="2799919"/>
-            <a:ext cx="1399032" cy="350520"/>
+            <a:off x="8261773" y="2804491"/>
+            <a:ext cx="1402080" cy="341376"/>
           </a:xfrm>
           <a:prstGeom prst="rect">
             <a:avLst/>
@@ -12880,8 +13425,8 @@
         </p:nvSpPr>
         <p:spPr>
           <a:xfrm>
-            <a:off x="9688348" y="2746579"/>
-            <a:ext cx="813314" cy="457200"/>
+            <a:off x="9663853" y="2746579"/>
+            <a:ext cx="778618" cy="457200"/>
           </a:xfrm>
           <a:prstGeom prst="rect">
             <a:avLst/>
@@ -12896,11 +13441,11 @@
           <a:p>
             <a:pPr algn="l"/>
             <a:r>
-              <a:rPr sz="2600" b="0" i="0">
-                <a:solidFill>
-                  <a:srgbClr val="1A1A1A"/>
-                </a:solidFill>
-                <a:latin typeface="Century Schoolbook"/>
+              <a:rPr sz="2470" b="0" i="0">
+                <a:solidFill>
+                  <a:srgbClr val="1A1A1A"/>
+                </a:solidFill>
+                <a:latin typeface="Lexend"/>
               </a:rPr>
               <a:t>  m.</a:t>
             </a:r>
@@ -12931,11 +13476,11 @@
           <a:p>
             <a:pPr algn="ctr"/>
             <a:r>
-              <a:rPr sz="2600" b="0" i="0">
-                <a:solidFill>
-                  <a:srgbClr val="1A1A1A"/>
-                </a:solidFill>
-                <a:latin typeface="Century Schoolbook"/>
+              <a:rPr sz="2470" b="0" i="0">
+                <a:solidFill>
+                  <a:srgbClr val="1A1A1A"/>
+                </a:solidFill>
+                <a:latin typeface="Lexend"/>
               </a:rPr>
               <a:t>What did the width measure, to two significant digits?</a:t>
             </a:r>
@@ -12966,11 +13511,11 @@
           <a:p>
             <a:pPr algn="ctr"/>
             <a:r>
-              <a:rPr sz="2600" b="1" i="0">
-                <a:solidFill>
-                  <a:srgbClr val="1A1A1A"/>
-                </a:solidFill>
-                <a:latin typeface="Century Schoolbook"/>
+              <a:rPr sz="2470" b="1" i="0">
+                <a:solidFill>
+                  <a:srgbClr val="1A1A1A"/>
+                </a:solidFill>
+                <a:latin typeface="Lexend"/>
               </a:rPr>
               <a:t>Answer it.</a:t>
             </a:r>
@@ -13019,11 +13564,11 @@
           <a:p>
             <a:pPr algn="l"/>
             <a:r>
-              <a:rPr sz="3600" b="1" i="0">
-                <a:solidFill>
-                  <a:srgbClr val="1A1A1A"/>
-                </a:solidFill>
-                <a:latin typeface="Century Schoolbook"/>
+              <a:rPr sz="3420" b="1" i="0">
+                <a:solidFill>
+                  <a:srgbClr val="1A1A1A"/>
+                </a:solidFill>
+                <a:latin typeface="Lexend"/>
               </a:rPr>
               <a:t>Warm-Up</a:t>
             </a:r>
@@ -13159,11 +13704,11 @@
           <a:p>
             <a:pPr algn="l"/>
             <a:r>
-              <a:rPr sz="1100" b="0" i="1">
+              <a:rPr sz="1040" b="0" i="0">
                 <a:solidFill>
                   <a:srgbClr val="6B6B6B"/>
                 </a:solidFill>
-                <a:latin typeface="Century Schoolbook"/>
+                <a:latin typeface="Lexend"/>
               </a:rPr>
               <a:t>Grade 7 Accelerated · Unit 4 · Lesson 4 — Real-World Problems and Significant Digits</a:t>
             </a:r>
@@ -13194,11 +13739,11 @@
           <a:p>
             <a:pPr algn="r"/>
             <a:r>
-              <a:rPr sz="1100" b="0" i="0">
+              <a:rPr sz="1040" b="0" i="0">
                 <a:solidFill>
                   <a:srgbClr val="6B6B6B"/>
                 </a:solidFill>
-                <a:latin typeface="Century Schoolbook"/>
+                <a:latin typeface="Lexend"/>
               </a:rPr>
               <a:t>3</a:t>
             </a:r>
@@ -13214,7 +13759,7 @@
         <p:spPr>
           <a:xfrm>
             <a:off x="1874519" y="1440180"/>
-            <a:ext cx="720605" cy="457200"/>
+            <a:ext cx="671561" cy="457200"/>
           </a:xfrm>
           <a:prstGeom prst="rect">
             <a:avLst/>
@@ -13229,11 +13774,11 @@
           <a:p>
             <a:pPr algn="l"/>
             <a:r>
-              <a:rPr sz="2300" b="0" i="0">
-                <a:solidFill>
-                  <a:srgbClr val="1A1A1A"/>
-                </a:solidFill>
-                <a:latin typeface="Century Schoolbook"/>
+              <a:rPr sz="2180" b="0" i="0">
+                <a:solidFill>
+                  <a:srgbClr val="1A1A1A"/>
+                </a:solidFill>
+                <a:latin typeface="Lexend"/>
               </a:rPr>
               <a:t>1.   </a:t>
             </a:r>
@@ -13242,7 +13787,7 @@
       </p:sp>
       <p:pic>
         <p:nvPicPr>
-          <p:cNvPr id="9" name="Picture 8" descr="aa1e7ea664b07d25.png"/>
+          <p:cNvPr id="9" name="Picture 8" descr="9ef93e9422ec8078.png"/>
           <p:cNvPicPr>
             <a:picLocks noChangeAspect="1"/>
           </p:cNvPicPr>
@@ -13256,8 +13801,8 @@
         </p:blipFill>
         <p:spPr>
           <a:xfrm>
-            <a:off x="2457965" y="1501140"/>
-            <a:ext cx="2441448" cy="335280"/>
+            <a:off x="2408921" y="1501140"/>
+            <a:ext cx="2417064" cy="335280"/>
           </a:xfrm>
           <a:prstGeom prst="rect">
             <a:avLst/>
@@ -13272,8 +13817,8 @@
         </p:nvSpPr>
         <p:spPr>
           <a:xfrm>
-            <a:off x="5448053" y="1440180"/>
-            <a:ext cx="1451708" cy="457200"/>
+            <a:off x="5374625" y="1440180"/>
+            <a:ext cx="1440344" cy="457200"/>
           </a:xfrm>
           <a:prstGeom prst="rect">
             <a:avLst/>
@@ -13288,20 +13833,20 @@
           <a:p>
             <a:pPr algn="l"/>
             <a:r>
-              <a:rPr sz="2300" b="1" i="0">
+              <a:rPr sz="2180" b="1" i="0">
                 <a:solidFill>
                   <a:srgbClr val="9E1B32"/>
                 </a:solidFill>
-                <a:latin typeface="Century Schoolbook"/>
+                <a:latin typeface="Lexend"/>
               </a:rPr>
               <a:t>1.2 × 10</a:t>
             </a:r>
             <a:r>
-              <a:rPr sz="2300" b="1" i="0" baseline="30000">
+              <a:rPr sz="2180" b="1" i="0" baseline="30000">
                 <a:solidFill>
                   <a:srgbClr val="9E1B32"/>
                 </a:solidFill>
-                <a:latin typeface="Century Schoolbook"/>
+                <a:latin typeface="Lexend"/>
               </a:rPr>
               <a:t>4</a:t>
             </a:r>
@@ -13317,7 +13862,7 @@
         <p:spPr>
           <a:xfrm>
             <a:off x="1874519" y="2052828"/>
-            <a:ext cx="726811" cy="457200"/>
+            <a:ext cx="685699" cy="457200"/>
           </a:xfrm>
           <a:prstGeom prst="rect">
             <a:avLst/>
@@ -13332,11 +13877,11 @@
           <a:p>
             <a:pPr algn="l"/>
             <a:r>
-              <a:rPr sz="2300" b="0" i="0">
-                <a:solidFill>
-                  <a:srgbClr val="1A1A1A"/>
-                </a:solidFill>
-                <a:latin typeface="Century Schoolbook"/>
+              <a:rPr sz="2180" b="0" i="0">
+                <a:solidFill>
+                  <a:srgbClr val="1A1A1A"/>
+                </a:solidFill>
+                <a:latin typeface="Lexend"/>
               </a:rPr>
               <a:t>2.   </a:t>
             </a:r>
@@ -13345,7 +13890,7 @@
       </p:sp>
       <p:pic>
         <p:nvPicPr>
-          <p:cNvPr id="12" name="Picture 11" descr="8ddd66cd0c0fdcaa.png"/>
+          <p:cNvPr id="12" name="Picture 11" descr="872c396e107e432d.png"/>
           <p:cNvPicPr>
             <a:picLocks noChangeAspect="1"/>
           </p:cNvPicPr>
@@ -13359,8 +13904,8 @@
         </p:blipFill>
         <p:spPr>
           <a:xfrm>
-            <a:off x="2464171" y="2113788"/>
-            <a:ext cx="3099816" cy="335280"/>
+            <a:off x="2423059" y="2115312"/>
+            <a:ext cx="3057144" cy="332232"/>
           </a:xfrm>
           <a:prstGeom prst="rect">
             <a:avLst/>
@@ -13375,8 +13920,8 @@
         </p:nvSpPr>
         <p:spPr>
           <a:xfrm>
-            <a:off x="6112627" y="2052828"/>
-            <a:ext cx="1637178" cy="457200"/>
+            <a:off x="6028843" y="2052828"/>
+            <a:ext cx="1612395" cy="457200"/>
           </a:xfrm>
           <a:prstGeom prst="rect">
             <a:avLst/>
@@ -13391,20 +13936,20 @@
           <a:p>
             <a:pPr algn="l"/>
             <a:r>
-              <a:rPr sz="2300" b="1" i="0">
+              <a:rPr sz="2180" b="1" i="0">
                 <a:solidFill>
                   <a:srgbClr val="9E1B32"/>
                 </a:solidFill>
-                <a:latin typeface="Century Schoolbook"/>
+                <a:latin typeface="Lexend"/>
               </a:rPr>
               <a:t>5.89 × 10</a:t>
             </a:r>
             <a:r>
-              <a:rPr sz="2300" b="1" i="0" baseline="30000">
+              <a:rPr sz="2180" b="1" i="0" baseline="30000">
                 <a:solidFill>
                   <a:srgbClr val="9E1B32"/>
                 </a:solidFill>
-                <a:latin typeface="Century Schoolbook"/>
+                <a:latin typeface="Lexend"/>
               </a:rPr>
               <a:t>7</a:t>
             </a:r>
@@ -13420,7 +13965,7 @@
         <p:spPr>
           <a:xfrm>
             <a:off x="1874519" y="2665476"/>
-            <a:ext cx="5997709" cy="457200"/>
+            <a:ext cx="5859958" cy="457200"/>
           </a:xfrm>
           <a:prstGeom prst="rect">
             <a:avLst/>
@@ -13435,11 +13980,11 @@
           <a:p>
             <a:pPr algn="l"/>
             <a:r>
-              <a:rPr sz="2300" b="0" i="0">
-                <a:solidFill>
-                  <a:srgbClr val="1A1A1A"/>
-                </a:solidFill>
-                <a:latin typeface="Century Schoolbook"/>
+              <a:rPr sz="2180" b="0" i="0">
+                <a:solidFill>
+                  <a:srgbClr val="1A1A1A"/>
+                </a:solidFill>
+                <a:latin typeface="Lexend"/>
               </a:rPr>
               <a:t>3.   Write  0.00902  in scientific notation.</a:t>
             </a:r>
@@ -13454,8 +13999,8 @@
         </p:nvSpPr>
         <p:spPr>
           <a:xfrm>
-            <a:off x="8283709" y="2665476"/>
-            <a:ext cx="1743665" cy="457200"/>
+            <a:off x="8145958" y="2665476"/>
+            <a:ext cx="1800082" cy="457200"/>
           </a:xfrm>
           <a:prstGeom prst="rect">
             <a:avLst/>
@@ -13470,20 +14015,20 @@
           <a:p>
             <a:pPr algn="l"/>
             <a:r>
-              <a:rPr sz="2300" b="1" i="0">
+              <a:rPr sz="2180" b="1" i="0">
                 <a:solidFill>
                   <a:srgbClr val="9E1B32"/>
                 </a:solidFill>
-                <a:latin typeface="Century Schoolbook"/>
+                <a:latin typeface="Lexend"/>
               </a:rPr>
               <a:t>9.02 × 10</a:t>
             </a:r>
             <a:r>
-              <a:rPr sz="2300" b="1" i="0" baseline="30000">
+              <a:rPr sz="2180" b="1" i="0" baseline="30000">
                 <a:solidFill>
                   <a:srgbClr val="9E1B32"/>
                 </a:solidFill>
-                <a:latin typeface="Century Schoolbook"/>
+                <a:latin typeface="Lexend"/>
               </a:rPr>
               <a:t>-3</a:t>
             </a:r>
@@ -13499,7 +14044,7 @@
         <p:spPr>
           <a:xfrm>
             <a:off x="1874519" y="3278124"/>
-            <a:ext cx="6461623" cy="457200"/>
+            <a:ext cx="6301924" cy="457200"/>
           </a:xfrm>
           <a:prstGeom prst="rect">
             <a:avLst/>
@@ -13514,11 +14059,11 @@
           <a:p>
             <a:pPr algn="l"/>
             <a:r>
-              <a:rPr sz="2300" b="0" i="0">
-                <a:solidFill>
-                  <a:srgbClr val="1A1A1A"/>
-                </a:solidFill>
-                <a:latin typeface="Century Schoolbook"/>
+              <a:rPr sz="2180" b="0" i="0">
+                <a:solidFill>
+                  <a:srgbClr val="1A1A1A"/>
+                </a:solidFill>
+                <a:latin typeface="Lexend"/>
               </a:rPr>
               <a:t>4.   Round  4.738  to the nearest hundredth.</a:t>
             </a:r>
@@ -13533,8 +14078,8 @@
         </p:nvSpPr>
         <p:spPr>
           <a:xfrm>
-            <a:off x="8747623" y="3278124"/>
-            <a:ext cx="829616" cy="457200"/>
+            <a:off x="8587924" y="3278124"/>
+            <a:ext cx="830673" cy="457200"/>
           </a:xfrm>
           <a:prstGeom prst="rect">
             <a:avLst/>
@@ -13549,11 +14094,11 @@
           <a:p>
             <a:pPr algn="l"/>
             <a:r>
-              <a:rPr sz="2300" b="1" i="0">
+              <a:rPr sz="2180" b="1" i="0">
                 <a:solidFill>
                   <a:srgbClr val="9E1B32"/>
                 </a:solidFill>
-                <a:latin typeface="Century Schoolbook"/>
+                <a:latin typeface="Lexend"/>
               </a:rPr>
               <a:t>4.74</a:t>
             </a:r>
@@ -13602,11 +14147,11 @@
           <a:p>
             <a:pPr algn="l"/>
             <a:r>
-              <a:rPr sz="3400" b="1" i="0">
-                <a:solidFill>
-                  <a:srgbClr val="1A1A1A"/>
-                </a:solidFill>
-                <a:latin typeface="Century Schoolbook"/>
+              <a:rPr sz="3229" b="1" i="0">
+                <a:solidFill>
+                  <a:srgbClr val="1A1A1A"/>
+                </a:solidFill>
+                <a:latin typeface="Lexend"/>
               </a:rPr>
               <a:t>Whiteboards   ·   Question 8 of 9</a:t>
             </a:r>
@@ -13742,11 +14287,11 @@
           <a:p>
             <a:pPr algn="l"/>
             <a:r>
-              <a:rPr sz="1100" b="0" i="1">
+              <a:rPr sz="1040" b="0" i="0">
                 <a:solidFill>
                   <a:srgbClr val="6B6B6B"/>
                 </a:solidFill>
-                <a:latin typeface="Century Schoolbook"/>
+                <a:latin typeface="Lexend"/>
               </a:rPr>
               <a:t>Grade 7 Accelerated · Unit 4 · Lesson 4 — Real-World Problems and Significant Digits</a:t>
             </a:r>
@@ -13777,11 +14322,11 @@
           <a:p>
             <a:pPr algn="r"/>
             <a:r>
-              <a:rPr sz="1100" b="0" i="0">
+              <a:rPr sz="1040" b="0" i="0">
                 <a:solidFill>
                   <a:srgbClr val="6B6B6B"/>
                 </a:solidFill>
-                <a:latin typeface="Century Schoolbook"/>
+                <a:latin typeface="Lexend"/>
               </a:rPr>
               <a:t>30</a:t>
             </a:r>
@@ -13812,11 +14357,11 @@
           <a:p>
             <a:pPr algn="ctr"/>
             <a:r>
-              <a:rPr sz="2600" b="0" i="0">
-                <a:solidFill>
-                  <a:srgbClr val="1A1A1A"/>
-                </a:solidFill>
-                <a:latin typeface="Century Schoolbook"/>
+              <a:rPr sz="2470" b="0" i="0">
+                <a:solidFill>
+                  <a:srgbClr val="1A1A1A"/>
+                </a:solidFill>
+                <a:latin typeface="Lexend"/>
               </a:rPr>
               <a:t>A measured length times a measured width gives an area</a:t>
             </a:r>
@@ -13831,8 +14376,8 @@
         </p:nvSpPr>
         <p:spPr>
           <a:xfrm>
-            <a:off x="1795492" y="2655139"/>
-            <a:ext cx="696416" cy="457200"/>
+            <a:off x="1854683" y="2655139"/>
+            <a:ext cx="725065" cy="457200"/>
           </a:xfrm>
           <a:prstGeom prst="rect">
             <a:avLst/>
@@ -13847,11 +14392,11 @@
           <a:p>
             <a:pPr algn="l"/>
             <a:r>
-              <a:rPr sz="2600" b="0" i="0">
-                <a:solidFill>
-                  <a:srgbClr val="1A1A1A"/>
-                </a:solidFill>
-                <a:latin typeface="Century Schoolbook"/>
+              <a:rPr sz="2470" b="0" i="0">
+                <a:solidFill>
+                  <a:srgbClr val="1A1A1A"/>
+                </a:solidFill>
+                <a:latin typeface="Lexend"/>
               </a:rPr>
               <a:t>of  </a:t>
             </a:r>
@@ -13860,7 +14405,7 @@
       </p:sp>
       <p:pic>
         <p:nvPicPr>
-          <p:cNvPr id="10" name="Picture 9" descr="7257295b37188a90.png"/>
+          <p:cNvPr id="10" name="Picture 9" descr="96dda91be14bb112.png"/>
           <p:cNvPicPr>
             <a:picLocks noChangeAspect="1"/>
           </p:cNvPicPr>
@@ -13874,8 +14419,8 @@
         </p:blipFill>
         <p:spPr>
           <a:xfrm>
-            <a:off x="2354749" y="2708479"/>
-            <a:ext cx="1411224" cy="350520"/>
+            <a:off x="2442588" y="2714575"/>
+            <a:ext cx="1395984" cy="338328"/>
           </a:xfrm>
           <a:prstGeom prst="rect">
             <a:avLst/>
@@ -13890,8 +14435,8 @@
         </p:nvSpPr>
         <p:spPr>
           <a:xfrm>
-            <a:off x="3765973" y="2655139"/>
-            <a:ext cx="4662027" cy="457200"/>
+            <a:off x="3838572" y="2655139"/>
+            <a:ext cx="4561885" cy="457200"/>
           </a:xfrm>
           <a:prstGeom prst="rect">
             <a:avLst/>
@@ -13906,29 +14451,29 @@
           <a:p>
             <a:pPr algn="l"/>
             <a:r>
-              <a:rPr sz="2600" b="0" i="0">
-                <a:solidFill>
-                  <a:srgbClr val="1A1A1A"/>
-                </a:solidFill>
-                <a:latin typeface="Century Schoolbook"/>
+              <a:rPr sz="2470" b="0" i="0">
+                <a:solidFill>
+                  <a:srgbClr val="1A1A1A"/>
+                </a:solidFill>
+                <a:latin typeface="Lexend"/>
               </a:rPr>
               <a:t>  m</a:t>
             </a:r>
             <a:r>
-              <a:rPr sz="2600" b="0" i="0" baseline="30000">
-                <a:solidFill>
-                  <a:srgbClr val="1A1A1A"/>
-                </a:solidFill>
-                <a:latin typeface="Century Schoolbook"/>
+              <a:rPr sz="2470" b="0" i="0" baseline="30000">
+                <a:solidFill>
+                  <a:srgbClr val="1A1A1A"/>
+                </a:solidFill>
+                <a:latin typeface="Lexend"/>
               </a:rPr>
               <a:t>2</a:t>
             </a:r>
             <a:r>
-              <a:rPr sz="2600" b="0" i="0">
-                <a:solidFill>
-                  <a:srgbClr val="1A1A1A"/>
-                </a:solidFill>
-                <a:latin typeface="Century Schoolbook"/>
+              <a:rPr sz="2470" b="0" i="0">
+                <a:solidFill>
+                  <a:srgbClr val="1A1A1A"/>
+                </a:solidFill>
+                <a:latin typeface="Lexend"/>
               </a:rPr>
               <a:t>. The length measured  </a:t>
             </a:r>
@@ -13937,7 +14482,7 @@
       </p:sp>
       <p:pic>
         <p:nvPicPr>
-          <p:cNvPr id="12" name="Picture 11" descr="94cb33e082284147.png"/>
+          <p:cNvPr id="12" name="Picture 11" descr="b0f75faad513fd62.png"/>
           <p:cNvPicPr>
             <a:picLocks noChangeAspect="1"/>
           </p:cNvPicPr>
@@ -13951,8 +14496,8 @@
         </p:blipFill>
         <p:spPr>
           <a:xfrm>
-            <a:off x="8290840" y="2708479"/>
-            <a:ext cx="1399032" cy="350520"/>
+            <a:off x="8263297" y="2713051"/>
+            <a:ext cx="1402080" cy="341376"/>
           </a:xfrm>
           <a:prstGeom prst="rect">
             <a:avLst/>
@@ -13967,8 +14512,8 @@
         </p:nvSpPr>
         <p:spPr>
           <a:xfrm>
-            <a:off x="9689872" y="2655139"/>
-            <a:ext cx="813314" cy="457200"/>
+            <a:off x="9665377" y="2655139"/>
+            <a:ext cx="778618" cy="457200"/>
           </a:xfrm>
           <a:prstGeom prst="rect">
             <a:avLst/>
@@ -13983,11 +14528,11 @@
           <a:p>
             <a:pPr algn="l"/>
             <a:r>
-              <a:rPr sz="2600" b="0" i="0">
-                <a:solidFill>
-                  <a:srgbClr val="1A1A1A"/>
-                </a:solidFill>
-                <a:latin typeface="Century Schoolbook"/>
+              <a:rPr sz="2470" b="0" i="0">
+                <a:solidFill>
+                  <a:srgbClr val="1A1A1A"/>
+                </a:solidFill>
+                <a:latin typeface="Lexend"/>
               </a:rPr>
               <a:t>  m.</a:t>
             </a:r>
@@ -14018,26 +14563,109 @@
           <a:p>
             <a:pPr algn="ctr"/>
             <a:r>
-              <a:rPr sz="2600" b="0" i="0">
-                <a:solidFill>
-                  <a:srgbClr val="1A1A1A"/>
-                </a:solidFill>
-                <a:latin typeface="Century Schoolbook"/>
+              <a:rPr sz="2470" b="0" i="0">
+                <a:solidFill>
+                  <a:srgbClr val="1A1A1A"/>
+                </a:solidFill>
+                <a:latin typeface="Lexend"/>
               </a:rPr>
               <a:t>What did the width measure, to two significant digits?</a:t>
             </a:r>
           </a:p>
         </p:txBody>
       </p:sp>
-      <p:sp>
-        <p:nvSpPr>
-          <p:cNvPr id="15" name="TextBox 14"/>
-          <p:cNvSpPr txBox="1"/>
-          <p:nvPr/>
-        </p:nvSpPr>
-        <p:spPr>
-          <a:xfrm>
-            <a:off x="777240" y="4663440"/>
+      <p:pic>
+        <p:nvPicPr>
+          <p:cNvPr id="15" name="Picture 14" descr="90203440ac2af944.png"/>
+          <p:cNvPicPr>
+            <a:picLocks noChangeAspect="1"/>
+          </p:cNvPicPr>
+          <p:nvPr/>
+        </p:nvPicPr>
+        <p:blipFill>
+          <a:blip r:embed="rId4"/>
+          <a:stretch>
+            <a:fillRect/>
+          </a:stretch>
+        </p:blipFill>
+        <p:spPr>
+          <a:xfrm>
+            <a:off x="3346025" y="4059074"/>
+            <a:ext cx="2377440" cy="316992"/>
+          </a:xfrm>
+          <a:prstGeom prst="rect">
+            <a:avLst/>
+          </a:prstGeom>
+        </p:spPr>
+      </p:pic>
+      <p:sp>
+        <p:nvSpPr>
+          <p:cNvPr id="16" name="TextBox 15"/>
+          <p:cNvSpPr txBox="1"/>
+          <p:nvPr/>
+        </p:nvSpPr>
+        <p:spPr>
+          <a:xfrm>
+            <a:off x="3291161" y="4528466"/>
+            <a:ext cx="4420957" cy="457200"/>
+          </a:xfrm>
+          <a:prstGeom prst="rect">
+            <a:avLst/>
+          </a:prstGeom>
+          <a:noFill/>
+        </p:spPr>
+        <p:txBody>
+          <a:bodyPr wrap="none" lIns="45720" rIns="45720" tIns="18288" bIns="18288" anchor="ctr">
+            <a:noAutofit/>
+          </a:bodyPr>
+          <a:lstStyle/>
+          <a:p>
+            <a:pPr algn="l"/>
+            <a:r>
+              <a:rPr sz="2750" b="0" i="0">
+                <a:solidFill>
+                  <a:srgbClr val="1A1A1A"/>
+                </a:solidFill>
+                <a:latin typeface="Lexend"/>
+              </a:rPr>
+              <a:t>Two significant digits:   </a:t>
+            </a:r>
+          </a:p>
+        </p:txBody>
+      </p:sp>
+      <p:pic>
+        <p:nvPicPr>
+          <p:cNvPr id="17" name="Picture 16" descr="83b7c76269977cf5.png"/>
+          <p:cNvPicPr>
+            <a:picLocks noChangeAspect="1"/>
+          </p:cNvPicPr>
+          <p:nvPr/>
+        </p:nvPicPr>
+        <p:blipFill>
+          <a:blip r:embed="rId5"/>
+          <a:stretch>
+            <a:fillRect/>
+          </a:stretch>
+        </p:blipFill>
+        <p:spPr>
+          <a:xfrm>
+            <a:off x="7574958" y="4604666"/>
+            <a:ext cx="1301496" cy="304800"/>
+          </a:xfrm>
+          <a:prstGeom prst="rect">
+            <a:avLst/>
+          </a:prstGeom>
+        </p:spPr>
+      </p:pic>
+      <p:sp>
+        <p:nvSpPr>
+          <p:cNvPr id="18" name="TextBox 17"/>
+          <p:cNvSpPr txBox="1"/>
+          <p:nvPr/>
+        </p:nvSpPr>
+        <p:spPr>
+          <a:xfrm>
+            <a:off x="777240" y="5099966"/>
             <a:ext cx="10607040" cy="548640"/>
           </a:xfrm>
           <a:prstGeom prst="rect">
@@ -14053,29 +14681,29 @@
           <a:p>
             <a:pPr algn="ctr"/>
             <a:r>
-              <a:rPr sz="3200" b="1" i="0">
+              <a:rPr sz="3040" b="1" i="0">
                 <a:solidFill>
                   <a:srgbClr val="9E1B32"/>
                 </a:solidFill>
-                <a:latin typeface="Century Schoolbook"/>
+                <a:latin typeface="Lexend"/>
               </a:rPr>
               <a:t>Answer:   4.0 × 10</a:t>
             </a:r>
             <a:r>
-              <a:rPr sz="3200" b="1" i="0" baseline="30000">
+              <a:rPr sz="3040" b="1" i="0" baseline="30000">
                 <a:solidFill>
                   <a:srgbClr val="9E1B32"/>
                 </a:solidFill>
-                <a:latin typeface="Century Schoolbook"/>
+                <a:latin typeface="Lexend"/>
               </a:rPr>
               <a:t>1</a:t>
             </a:r>
             <a:r>
-              <a:rPr sz="3200" b="1" i="0">
+              <a:rPr sz="3040" b="1" i="0">
                 <a:solidFill>
                   <a:srgbClr val="9E1B32"/>
                 </a:solidFill>
-                <a:latin typeface="Century Schoolbook"/>
+                <a:latin typeface="Lexend"/>
               </a:rPr>
               <a:t> m</a:t>
             </a:r>
@@ -14124,11 +14752,11 @@
           <a:p>
             <a:pPr algn="l"/>
             <a:r>
-              <a:rPr sz="3400" b="1" i="0">
-                <a:solidFill>
-                  <a:srgbClr val="1A1A1A"/>
-                </a:solidFill>
-                <a:latin typeface="Century Schoolbook"/>
+              <a:rPr sz="3229" b="1" i="0">
+                <a:solidFill>
+                  <a:srgbClr val="1A1A1A"/>
+                </a:solidFill>
+                <a:latin typeface="Lexend"/>
               </a:rPr>
               <a:t>Whiteboards   ·   Question 9 of 9</a:t>
             </a:r>
@@ -14264,11 +14892,11 @@
           <a:p>
             <a:pPr algn="l"/>
             <a:r>
-              <a:rPr sz="1100" b="0" i="1">
+              <a:rPr sz="1040" b="0" i="0">
                 <a:solidFill>
                   <a:srgbClr val="6B6B6B"/>
                 </a:solidFill>
-                <a:latin typeface="Century Schoolbook"/>
+                <a:latin typeface="Lexend"/>
               </a:rPr>
               <a:t>Grade 7 Accelerated · Unit 4 · Lesson 4 — Real-World Problems and Significant Digits</a:t>
             </a:r>
@@ -14299,11 +14927,11 @@
           <a:p>
             <a:pPr algn="r"/>
             <a:r>
-              <a:rPr sz="1100" b="0" i="0">
+              <a:rPr sz="1040" b="0" i="0">
                 <a:solidFill>
                   <a:srgbClr val="6B6B6B"/>
                 </a:solidFill>
-                <a:latin typeface="Century Schoolbook"/>
+                <a:latin typeface="Lexend"/>
               </a:rPr>
               <a:t>31</a:t>
             </a:r>
@@ -14334,11 +14962,11 @@
           <a:p>
             <a:pPr algn="ctr"/>
             <a:r>
-              <a:rPr sz="2600" b="0" i="0">
-                <a:solidFill>
-                  <a:srgbClr val="1A1A1A"/>
-                </a:solidFill>
-                <a:latin typeface="Century Schoolbook"/>
+              <a:rPr sz="2470" b="0" i="0">
+                <a:solidFill>
+                  <a:srgbClr val="1A1A1A"/>
+                </a:solidFill>
+                <a:latin typeface="Lexend"/>
               </a:rPr>
               <a:t>Ellis says: 1,234 has 4 significant digits and 5.6 has 2,</a:t>
             </a:r>
@@ -14353,8 +14981,8 @@
         </p:nvSpPr>
         <p:spPr>
           <a:xfrm>
-            <a:off x="1285728" y="2746579"/>
-            <a:ext cx="2146894" cy="457200"/>
+            <a:off x="1385004" y="2746579"/>
+            <a:ext cx="2133542" cy="457200"/>
           </a:xfrm>
           <a:prstGeom prst="rect">
             <a:avLst/>
@@ -14369,11 +14997,11 @@
           <a:p>
             <a:pPr algn="l"/>
             <a:r>
-              <a:rPr sz="2600" b="0" i="0">
-                <a:solidFill>
-                  <a:srgbClr val="1A1A1A"/>
-                </a:solidFill>
-                <a:latin typeface="Century Schoolbook"/>
+              <a:rPr sz="2470" b="0" i="0">
+                <a:solidFill>
+                  <a:srgbClr val="1A1A1A"/>
+                </a:solidFill>
+                <a:latin typeface="Lexend"/>
               </a:rPr>
               <a:t>so the sum  </a:t>
             </a:r>
@@ -14382,7 +15010,7 @@
       </p:sp>
       <p:pic>
         <p:nvPicPr>
-          <p:cNvPr id="10" name="Picture 9" descr="705d48a90c77f252.png"/>
+          <p:cNvPr id="10" name="Picture 9" descr="6cd48108d25e51b0.png"/>
           <p:cNvPicPr>
             <a:picLocks noChangeAspect="1"/>
           </p:cNvPicPr>
@@ -14396,8 +15024,8 @@
         </p:blipFill>
         <p:spPr>
           <a:xfrm>
-            <a:off x="3295462" y="2806015"/>
-            <a:ext cx="1764792" cy="338328"/>
+            <a:off x="3381386" y="2801443"/>
+            <a:ext cx="1798320" cy="347472"/>
           </a:xfrm>
           <a:prstGeom prst="rect">
             <a:avLst/>
@@ -14412,8 +15040,8 @@
         </p:nvSpPr>
         <p:spPr>
           <a:xfrm>
-            <a:off x="5060254" y="2746579"/>
-            <a:ext cx="4401516" cy="457200"/>
+            <a:off x="5179706" y="2746579"/>
+            <a:ext cx="4234719" cy="457200"/>
           </a:xfrm>
           <a:prstGeom prst="rect">
             <a:avLst/>
@@ -14428,11 +15056,11 @@
           <a:p>
             <a:pPr algn="l"/>
             <a:r>
-              <a:rPr sz="2600" b="0" i="0">
-                <a:solidFill>
-                  <a:srgbClr val="1A1A1A"/>
-                </a:solidFill>
-                <a:latin typeface="Century Schoolbook"/>
+              <a:rPr sz="2470" b="0" i="0">
+                <a:solidFill>
+                  <a:srgbClr val="1A1A1A"/>
+                </a:solidFill>
+                <a:latin typeface="Lexend"/>
               </a:rPr>
               <a:t>  must be written with 2:  </a:t>
             </a:r>
@@ -14441,7 +15069,7 @@
       </p:sp>
       <p:pic>
         <p:nvPicPr>
-          <p:cNvPr id="12" name="Picture 11" descr="1a57ee4fc4052822.png"/>
+          <p:cNvPr id="12" name="Picture 11" descr="ebc5deb6b2afefa1.png"/>
           <p:cNvPicPr>
             <a:picLocks noChangeAspect="1"/>
           </p:cNvPicPr>
@@ -14455,8 +15083,8 @@
         </p:blipFill>
         <p:spPr>
           <a:xfrm>
-            <a:off x="9324611" y="2799919"/>
-            <a:ext cx="1380744" cy="350520"/>
+            <a:off x="9277265" y="2806015"/>
+            <a:ext cx="1350264" cy="338328"/>
           </a:xfrm>
           <a:prstGeom prst="rect">
             <a:avLst/>
@@ -14471,8 +15099,8 @@
         </p:nvSpPr>
         <p:spPr>
           <a:xfrm>
-            <a:off x="10705355" y="2746579"/>
-            <a:ext cx="307595" cy="457200"/>
+            <a:off x="10627529" y="2746579"/>
+            <a:ext cx="286146" cy="457200"/>
           </a:xfrm>
           <a:prstGeom prst="rect">
             <a:avLst/>
@@ -14487,11 +15115,11 @@
           <a:p>
             <a:pPr algn="l"/>
             <a:r>
-              <a:rPr sz="2600" b="0" i="0">
-                <a:solidFill>
-                  <a:srgbClr val="1A1A1A"/>
-                </a:solidFill>
-                <a:latin typeface="Century Schoolbook"/>
+              <a:rPr sz="2470" b="0" i="0">
+                <a:solidFill>
+                  <a:srgbClr val="1A1A1A"/>
+                </a:solidFill>
+                <a:latin typeface="Lexend"/>
               </a:rPr>
               <a:t>.</a:t>
             </a:r>
@@ -14522,11 +15150,11 @@
           <a:p>
             <a:pPr algn="ctr"/>
             <a:r>
-              <a:rPr sz="2600" b="0" i="0">
-                <a:solidFill>
-                  <a:srgbClr val="1A1A1A"/>
-                </a:solidFill>
-                <a:latin typeface="Century Schoolbook"/>
+              <a:rPr sz="2470" b="0" i="0">
+                <a:solidFill>
+                  <a:srgbClr val="1A1A1A"/>
+                </a:solidFill>
+                <a:latin typeface="Lexend"/>
               </a:rPr>
               <a:t>Explain why he is wrong, and give the correct sum.</a:t>
             </a:r>
@@ -14557,11 +15185,11 @@
           <a:p>
             <a:pPr algn="ctr"/>
             <a:r>
-              <a:rPr sz="2600" b="1" i="0">
-                <a:solidFill>
-                  <a:srgbClr val="1A1A1A"/>
-                </a:solidFill>
-                <a:latin typeface="Century Schoolbook"/>
+              <a:rPr sz="2470" b="1" i="0">
+                <a:solidFill>
+                  <a:srgbClr val="1A1A1A"/>
+                </a:solidFill>
+                <a:latin typeface="Lexend"/>
               </a:rPr>
               <a:t>Write your answer in sentences.</a:t>
             </a:r>
@@ -14610,11 +15238,11 @@
           <a:p>
             <a:pPr algn="l"/>
             <a:r>
-              <a:rPr sz="3400" b="1" i="0">
-                <a:solidFill>
-                  <a:srgbClr val="1A1A1A"/>
-                </a:solidFill>
-                <a:latin typeface="Century Schoolbook"/>
+              <a:rPr sz="3229" b="1" i="0">
+                <a:solidFill>
+                  <a:srgbClr val="1A1A1A"/>
+                </a:solidFill>
+                <a:latin typeface="Lexend"/>
               </a:rPr>
               <a:t>Whiteboards   ·   Question 9 of 9</a:t>
             </a:r>
@@ -14750,11 +15378,11 @@
           <a:p>
             <a:pPr algn="l"/>
             <a:r>
-              <a:rPr sz="1100" b="0" i="1">
+              <a:rPr sz="1040" b="0" i="0">
                 <a:solidFill>
                   <a:srgbClr val="6B6B6B"/>
                 </a:solidFill>
-                <a:latin typeface="Century Schoolbook"/>
+                <a:latin typeface="Lexend"/>
               </a:rPr>
               <a:t>Grade 7 Accelerated · Unit 4 · Lesson 4 — Real-World Problems and Significant Digits</a:t>
             </a:r>
@@ -14785,11 +15413,11 @@
           <a:p>
             <a:pPr algn="r"/>
             <a:r>
-              <a:rPr sz="1100" b="0" i="0">
+              <a:rPr sz="1040" b="0" i="0">
                 <a:solidFill>
                   <a:srgbClr val="6B6B6B"/>
                 </a:solidFill>
-                <a:latin typeface="Century Schoolbook"/>
+                <a:latin typeface="Lexend"/>
               </a:rPr>
               <a:t>32</a:t>
             </a:r>
@@ -14820,11 +15448,11 @@
           <a:p>
             <a:pPr algn="ctr"/>
             <a:r>
-              <a:rPr sz="2600" b="0" i="0">
-                <a:solidFill>
-                  <a:srgbClr val="1A1A1A"/>
-                </a:solidFill>
-                <a:latin typeface="Century Schoolbook"/>
+              <a:rPr sz="2470" b="0" i="0">
+                <a:solidFill>
+                  <a:srgbClr val="1A1A1A"/>
+                </a:solidFill>
+                <a:latin typeface="Lexend"/>
               </a:rPr>
               <a:t>Ellis says: 1,234 has 4 significant digits and 5.6 has 2,</a:t>
             </a:r>
@@ -14839,8 +15467,8 @@
         </p:nvSpPr>
         <p:spPr>
           <a:xfrm>
-            <a:off x="1285728" y="2655139"/>
-            <a:ext cx="2146894" cy="457200"/>
+            <a:off x="1385004" y="2655139"/>
+            <a:ext cx="2133542" cy="457200"/>
           </a:xfrm>
           <a:prstGeom prst="rect">
             <a:avLst/>
@@ -14855,11 +15483,11 @@
           <a:p>
             <a:pPr algn="l"/>
             <a:r>
-              <a:rPr sz="2600" b="0" i="0">
-                <a:solidFill>
-                  <a:srgbClr val="1A1A1A"/>
-                </a:solidFill>
-                <a:latin typeface="Century Schoolbook"/>
+              <a:rPr sz="2470" b="0" i="0">
+                <a:solidFill>
+                  <a:srgbClr val="1A1A1A"/>
+                </a:solidFill>
+                <a:latin typeface="Lexend"/>
               </a:rPr>
               <a:t>so the sum  </a:t>
             </a:r>
@@ -14868,7 +15496,7 @@
       </p:sp>
       <p:pic>
         <p:nvPicPr>
-          <p:cNvPr id="10" name="Picture 9" descr="a825a716d0b1ce30.png"/>
+          <p:cNvPr id="10" name="Picture 9" descr="a72db1300e8221a9.png"/>
           <p:cNvPicPr>
             <a:picLocks noChangeAspect="1"/>
           </p:cNvPicPr>
@@ -14882,8 +15510,8 @@
         </p:blipFill>
         <p:spPr>
           <a:xfrm>
-            <a:off x="3295462" y="2714575"/>
-            <a:ext cx="1764792" cy="338328"/>
+            <a:off x="3381386" y="2708479"/>
+            <a:ext cx="1795272" cy="350520"/>
           </a:xfrm>
           <a:prstGeom prst="rect">
             <a:avLst/>
@@ -14898,8 +15526,8 @@
         </p:nvSpPr>
         <p:spPr>
           <a:xfrm>
-            <a:off x="5060254" y="2655139"/>
-            <a:ext cx="4401516" cy="457200"/>
+            <a:off x="5176658" y="2655139"/>
+            <a:ext cx="4234719" cy="457200"/>
           </a:xfrm>
           <a:prstGeom prst="rect">
             <a:avLst/>
@@ -14914,11 +15542,11 @@
           <a:p>
             <a:pPr algn="l"/>
             <a:r>
-              <a:rPr sz="2600" b="0" i="0">
-                <a:solidFill>
-                  <a:srgbClr val="1A1A1A"/>
-                </a:solidFill>
-                <a:latin typeface="Century Schoolbook"/>
+              <a:rPr sz="2470" b="0" i="0">
+                <a:solidFill>
+                  <a:srgbClr val="1A1A1A"/>
+                </a:solidFill>
+                <a:latin typeface="Lexend"/>
               </a:rPr>
               <a:t>  must be written with 2:  </a:t>
             </a:r>
@@ -14927,7 +15555,7 @@
       </p:sp>
       <p:pic>
         <p:nvPicPr>
-          <p:cNvPr id="12" name="Picture 11" descr="1d3c8ee25f946d95.png"/>
+          <p:cNvPr id="12" name="Picture 11" descr="127604dc103a6844.png"/>
           <p:cNvPicPr>
             <a:picLocks noChangeAspect="1"/>
           </p:cNvPicPr>
@@ -14941,8 +15569,8 @@
         </p:blipFill>
         <p:spPr>
           <a:xfrm>
-            <a:off x="9324611" y="2708479"/>
-            <a:ext cx="1380744" cy="350520"/>
+            <a:off x="9274217" y="2714575"/>
+            <a:ext cx="1353312" cy="338328"/>
           </a:xfrm>
           <a:prstGeom prst="rect">
             <a:avLst/>
@@ -14957,8 +15585,8 @@
         </p:nvSpPr>
         <p:spPr>
           <a:xfrm>
-            <a:off x="10705355" y="2655139"/>
-            <a:ext cx="307595" cy="457200"/>
+            <a:off x="10627529" y="2655139"/>
+            <a:ext cx="286146" cy="457200"/>
           </a:xfrm>
           <a:prstGeom prst="rect">
             <a:avLst/>
@@ -14973,11 +15601,11 @@
           <a:p>
             <a:pPr algn="l"/>
             <a:r>
-              <a:rPr sz="2600" b="0" i="0">
-                <a:solidFill>
-                  <a:srgbClr val="1A1A1A"/>
-                </a:solidFill>
-                <a:latin typeface="Century Schoolbook"/>
+              <a:rPr sz="2470" b="0" i="0">
+                <a:solidFill>
+                  <a:srgbClr val="1A1A1A"/>
+                </a:solidFill>
+                <a:latin typeface="Lexend"/>
               </a:rPr>
               <a:t>.</a:t>
             </a:r>
@@ -15008,11 +15636,11 @@
           <a:p>
             <a:pPr algn="ctr"/>
             <a:r>
-              <a:rPr sz="2600" b="0" i="0">
-                <a:solidFill>
-                  <a:srgbClr val="1A1A1A"/>
-                </a:solidFill>
-                <a:latin typeface="Century Schoolbook"/>
+              <a:rPr sz="2470" b="0" i="0">
+                <a:solidFill>
+                  <a:srgbClr val="1A1A1A"/>
+                </a:solidFill>
+                <a:latin typeface="Lexend"/>
               </a:rPr>
               <a:t>Explain why he is wrong, and give the correct sum.</a:t>
             </a:r>
@@ -15027,7 +15655,101 @@
         </p:nvSpPr>
         <p:spPr>
           <a:xfrm>
-            <a:off x="777240" y="4663440"/>
+            <a:off x="1999219" y="3988970"/>
+            <a:ext cx="7720044" cy="457200"/>
+          </a:xfrm>
+          <a:prstGeom prst="rect">
+            <a:avLst/>
+          </a:prstGeom>
+          <a:noFill/>
+        </p:spPr>
+        <p:txBody>
+          <a:bodyPr wrap="none" lIns="45720" rIns="45720" tIns="18288" bIns="18288" anchor="ctr">
+            <a:noAutofit/>
+          </a:bodyPr>
+          <a:lstStyle/>
+          <a:p>
+            <a:pPr algn="l"/>
+            <a:r>
+              <a:rPr sz="2330" b="0" i="0">
+                <a:solidFill>
+                  <a:srgbClr val="1A1A1A"/>
+                </a:solidFill>
+                <a:latin typeface="Lexend"/>
+              </a:rPr>
+              <a:t>Adding uses decimal places, not a count of digits.</a:t>
+            </a:r>
+          </a:p>
+        </p:txBody>
+      </p:sp>
+      <p:pic>
+        <p:nvPicPr>
+          <p:cNvPr id="16" name="Picture 15" descr="d1e6d085c4e19a35.png"/>
+          <p:cNvPicPr>
+            <a:picLocks noChangeAspect="1"/>
+          </p:cNvPicPr>
+          <p:nvPr/>
+        </p:nvPicPr>
+        <p:blipFill>
+          <a:blip r:embed="rId4"/>
+          <a:stretch>
+            <a:fillRect/>
+          </a:stretch>
+        </p:blipFill>
+        <p:spPr>
+          <a:xfrm>
+            <a:off x="2054083" y="4586378"/>
+            <a:ext cx="2596896" cy="268224"/>
+          </a:xfrm>
+          <a:prstGeom prst="rect">
+            <a:avLst/>
+          </a:prstGeom>
+        </p:spPr>
+      </p:pic>
+      <p:sp>
+        <p:nvSpPr>
+          <p:cNvPr id="17" name="TextBox 16"/>
+          <p:cNvSpPr txBox="1"/>
+          <p:nvPr/>
+        </p:nvSpPr>
+        <p:spPr>
+          <a:xfrm>
+            <a:off x="1999219" y="4994810"/>
+            <a:ext cx="8300240" cy="457200"/>
+          </a:xfrm>
+          <a:prstGeom prst="rect">
+            <a:avLst/>
+          </a:prstGeom>
+          <a:noFill/>
+        </p:spPr>
+        <p:txBody>
+          <a:bodyPr wrap="none" lIns="45720" rIns="45720" tIns="18288" bIns="18288" anchor="ctr">
+            <a:noAutofit/>
+          </a:bodyPr>
+          <a:lstStyle/>
+          <a:p>
+            <a:pPr algn="l"/>
+            <a:r>
+              <a:rPr sz="2330" b="0" i="0">
+                <a:solidFill>
+                  <a:srgbClr val="1A1A1A"/>
+                </a:solidFill>
+                <a:latin typeface="Lexend"/>
+              </a:rPr>
+              <a:t>1,234 stops at the ones place, so round to ones:  1,240</a:t>
+            </a:r>
+          </a:p>
+        </p:txBody>
+      </p:sp>
+      <p:sp>
+        <p:nvSpPr>
+          <p:cNvPr id="18" name="TextBox 17"/>
+          <p:cNvSpPr txBox="1"/>
+          <p:nvPr/>
+        </p:nvSpPr>
+        <p:spPr>
+          <a:xfrm>
+            <a:off x="777240" y="5566310"/>
             <a:ext cx="10607040" cy="548640"/>
           </a:xfrm>
           <a:prstGeom prst="rect">
@@ -15043,20 +15765,20 @@
           <a:p>
             <a:pPr algn="ctr"/>
             <a:r>
-              <a:rPr sz="3200" b="1" i="0">
+              <a:rPr sz="3040" b="1" i="0">
                 <a:solidFill>
                   <a:srgbClr val="9E1B32"/>
                 </a:solidFill>
-                <a:latin typeface="Century Schoolbook"/>
+                <a:latin typeface="Lexend"/>
               </a:rPr>
               <a:t>Answer:   1,240 = 1.240 × 10</a:t>
             </a:r>
             <a:r>
-              <a:rPr sz="3200" b="1" i="0" baseline="30000">
+              <a:rPr sz="3040" b="1" i="0" baseline="30000">
                 <a:solidFill>
                   <a:srgbClr val="9E1B32"/>
                 </a:solidFill>
-                <a:latin typeface="Century Schoolbook"/>
+                <a:latin typeface="Lexend"/>
               </a:rPr>
               <a:t>3</a:t>
             </a:r>
@@ -15105,11 +15827,11 @@
           <a:p>
             <a:pPr algn="l"/>
             <a:r>
-              <a:rPr sz="3600" b="1" i="0">
-                <a:solidFill>
-                  <a:srgbClr val="1A1A1A"/>
-                </a:solidFill>
-                <a:latin typeface="Century Schoolbook"/>
+              <a:rPr sz="3420" b="1" i="0">
+                <a:solidFill>
+                  <a:srgbClr val="1A1A1A"/>
+                </a:solidFill>
+                <a:latin typeface="Lexend"/>
               </a:rPr>
               <a:t>Independent Set</a:t>
             </a:r>
@@ -15245,11 +15967,11 @@
           <a:p>
             <a:pPr algn="l"/>
             <a:r>
-              <a:rPr sz="1100" b="0" i="1">
+              <a:rPr sz="1040" b="0" i="0">
                 <a:solidFill>
                   <a:srgbClr val="6B6B6B"/>
                 </a:solidFill>
-                <a:latin typeface="Century Schoolbook"/>
+                <a:latin typeface="Lexend"/>
               </a:rPr>
               <a:t>Grade 7 Accelerated · Unit 4 · Lesson 4 — Real-World Problems and Significant Digits</a:t>
             </a:r>
@@ -15280,11 +16002,11 @@
           <a:p>
             <a:pPr algn="r"/>
             <a:r>
-              <a:rPr sz="1100" b="0" i="0">
+              <a:rPr sz="1040" b="0" i="0">
                 <a:solidFill>
                   <a:srgbClr val="6B6B6B"/>
                 </a:solidFill>
-                <a:latin typeface="Century Schoolbook"/>
+                <a:latin typeface="Lexend"/>
               </a:rPr>
               <a:t>33</a:t>
             </a:r>
@@ -15315,11 +16037,11 @@
           <a:p>
             <a:pPr algn="l"/>
             <a:r>
-              <a:rPr sz="1900" b="1" i="0">
+              <a:rPr sz="1810" b="1" i="0">
                 <a:solidFill>
                   <a:srgbClr val="0B5394"/>
                 </a:solidFill>
-                <a:latin typeface="Century Schoolbook"/>
+                <a:latin typeface="Lexend"/>
               </a:rPr>
               <a:t>1.</a:t>
             </a:r>
@@ -15335,7 +16057,7 @@
         <p:spPr>
           <a:xfrm>
             <a:off x="1554480" y="1499019"/>
-            <a:ext cx="6057710" cy="377686"/>
+            <a:ext cx="6001785" cy="377686"/>
           </a:xfrm>
           <a:prstGeom prst="rect">
             <a:avLst/>
@@ -15350,11 +16072,11 @@
           <a:p>
             <a:pPr algn="l"/>
             <a:r>
-              <a:rPr sz="1900" b="0" i="0">
-                <a:solidFill>
-                  <a:srgbClr val="1A1A1A"/>
-                </a:solidFill>
-                <a:latin typeface="Century Schoolbook"/>
+              <a:rPr sz="1810" b="0" i="0">
+                <a:solidFill>
+                  <a:srgbClr val="1A1A1A"/>
+                </a:solidFill>
+                <a:latin typeface="Lexend"/>
               </a:rPr>
               <a:t>How many significant digits are in  6,030  grams?</a:t>
             </a:r>
@@ -15385,11 +16107,11 @@
           <a:p>
             <a:pPr algn="l"/>
             <a:r>
-              <a:rPr sz="1900" b="1" i="0">
+              <a:rPr sz="1810" b="1" i="0">
                 <a:solidFill>
                   <a:srgbClr val="0B5394"/>
                 </a:solidFill>
-                <a:latin typeface="Century Schoolbook"/>
+                <a:latin typeface="Lexend"/>
               </a:rPr>
               <a:t>2.</a:t>
             </a:r>
@@ -15405,7 +16127,7 @@
         <p:spPr>
           <a:xfrm>
             <a:off x="1554480" y="1966953"/>
-            <a:ext cx="6408826" cy="377686"/>
+            <a:ext cx="6343588" cy="377686"/>
           </a:xfrm>
           <a:prstGeom prst="rect">
             <a:avLst/>
@@ -15420,11 +16142,11 @@
           <a:p>
             <a:pPr algn="l"/>
             <a:r>
-              <a:rPr sz="1900" b="0" i="0">
-                <a:solidFill>
-                  <a:srgbClr val="1A1A1A"/>
-                </a:solidFill>
-                <a:latin typeface="Century Schoolbook"/>
+              <a:rPr sz="1810" b="0" i="0">
+                <a:solidFill>
+                  <a:srgbClr val="1A1A1A"/>
+                </a:solidFill>
+                <a:latin typeface="Lexend"/>
               </a:rPr>
               <a:t>How many significant digits are in  0.00710  meters?</a:t>
             </a:r>
@@ -15455,11 +16177,11 @@
           <a:p>
             <a:pPr algn="l"/>
             <a:r>
-              <a:rPr sz="1900" b="1" i="0">
+              <a:rPr sz="1810" b="1" i="0">
                 <a:solidFill>
                   <a:srgbClr val="0B5394"/>
                 </a:solidFill>
-                <a:latin typeface="Century Schoolbook"/>
+                <a:latin typeface="Lexend"/>
               </a:rPr>
               <a:t>3.</a:t>
             </a:r>
@@ -15475,7 +16197,7 @@
         <p:spPr>
           <a:xfrm>
             <a:off x="1554480" y="2434888"/>
-            <a:ext cx="2908969" cy="377686"/>
+            <a:ext cx="2901426" cy="377686"/>
           </a:xfrm>
           <a:prstGeom prst="rect">
             <a:avLst/>
@@ -15490,11 +16212,11 @@
           <a:p>
             <a:pPr algn="l"/>
             <a:r>
-              <a:rPr sz="1900" b="0" i="0">
-                <a:solidFill>
-                  <a:srgbClr val="1A1A1A"/>
-                </a:solidFill>
-                <a:latin typeface="Century Schoolbook"/>
+              <a:rPr sz="1810" b="0" i="0">
+                <a:solidFill>
+                  <a:srgbClr val="1A1A1A"/>
+                </a:solidFill>
+                <a:latin typeface="Lexend"/>
               </a:rPr>
               <a:t>A rectangle measures  </a:t>
             </a:r>
@@ -15503,7 +16225,7 @@
       </p:sp>
       <p:pic>
         <p:nvPicPr>
-          <p:cNvPr id="14" name="Picture 13" descr="455a5450e4ac9801.png"/>
+          <p:cNvPr id="14" name="Picture 13" descr="7d17691463990a5b.png"/>
           <p:cNvPicPr>
             <a:picLocks noChangeAspect="1"/>
           </p:cNvPicPr>
@@ -15517,8 +16239,8 @@
         </p:blipFill>
         <p:spPr>
           <a:xfrm>
-            <a:off x="4326289" y="2506648"/>
-            <a:ext cx="954289" cy="234165"/>
+            <a:off x="4318746" y="2509166"/>
+            <a:ext cx="954289" cy="229130"/>
           </a:xfrm>
           <a:prstGeom prst="rect">
             <a:avLst/>
@@ -15533,8 +16255,8 @@
         </p:nvSpPr>
         <p:spPr>
           <a:xfrm>
-            <a:off x="5280578" y="2434888"/>
-            <a:ext cx="1066305" cy="377686"/>
+            <a:off x="5273035" y="2434888"/>
+            <a:ext cx="1063721" cy="377686"/>
           </a:xfrm>
           <a:prstGeom prst="rect">
             <a:avLst/>
@@ -15549,11 +16271,11 @@
           <a:p>
             <a:pPr algn="l"/>
             <a:r>
-              <a:rPr sz="1900" b="0" i="0">
-                <a:solidFill>
-                  <a:srgbClr val="1A1A1A"/>
-                </a:solidFill>
-                <a:latin typeface="Century Schoolbook"/>
+              <a:rPr sz="1810" b="0" i="0">
+                <a:solidFill>
+                  <a:srgbClr val="1A1A1A"/>
+                </a:solidFill>
+                <a:latin typeface="Lexend"/>
               </a:rPr>
               <a:t>  m by  </a:t>
             </a:r>
@@ -15562,7 +16284,7 @@
       </p:sp>
       <p:pic>
         <p:nvPicPr>
-          <p:cNvPr id="16" name="Picture 15" descr="bb8fc48a8c32d166.png"/>
+          <p:cNvPr id="16" name="Picture 15" descr="35e387f60425e7c4.png"/>
           <p:cNvPicPr>
             <a:picLocks noChangeAspect="1"/>
           </p:cNvPicPr>
@@ -15576,8 +16298,8 @@
         </p:blipFill>
         <p:spPr>
           <a:xfrm>
-            <a:off x="6209724" y="2506648"/>
-            <a:ext cx="1087738" cy="234165"/>
+            <a:off x="6199596" y="2509166"/>
+            <a:ext cx="1072630" cy="229130"/>
           </a:xfrm>
           <a:prstGeom prst="rect">
             <a:avLst/>
@@ -15592,8 +16314,8 @@
         </p:nvSpPr>
         <p:spPr>
           <a:xfrm>
-            <a:off x="7297463" y="2434888"/>
-            <a:ext cx="4024107" cy="377686"/>
+            <a:off x="7272227" y="2434888"/>
+            <a:ext cx="3961306" cy="377686"/>
           </a:xfrm>
           <a:prstGeom prst="rect">
             <a:avLst/>
@@ -15608,11 +16330,11 @@
           <a:p>
             <a:pPr algn="l"/>
             <a:r>
-              <a:rPr sz="1900" b="0" i="0">
-                <a:solidFill>
-                  <a:srgbClr val="1A1A1A"/>
-                </a:solidFill>
-                <a:latin typeface="Century Schoolbook"/>
+              <a:rPr sz="1810" b="0" i="0">
+                <a:solidFill>
+                  <a:srgbClr val="1A1A1A"/>
+                </a:solidFill>
+                <a:latin typeface="Lexend"/>
               </a:rPr>
               <a:t>  m. Find its area, to the correct </a:t>
             </a:r>
@@ -15628,7 +16350,7 @@
         <p:spPr>
           <a:xfrm>
             <a:off x="1554480" y="2802238"/>
-            <a:ext cx="3535636" cy="377686"/>
+            <a:ext cx="3518640" cy="377686"/>
           </a:xfrm>
           <a:prstGeom prst="rect">
             <a:avLst/>
@@ -15643,11 +16365,11 @@
           <a:p>
             <a:pPr algn="l"/>
             <a:r>
-              <a:rPr sz="1900" b="0" i="0">
-                <a:solidFill>
-                  <a:srgbClr val="1A1A1A"/>
-                </a:solidFill>
-                <a:latin typeface="Century Schoolbook"/>
+              <a:rPr sz="1810" b="0" i="0">
+                <a:solidFill>
+                  <a:srgbClr val="1A1A1A"/>
+                </a:solidFill>
+                <a:latin typeface="Lexend"/>
               </a:rPr>
               <a:t>number of significant digits.</a:t>
             </a:r>
@@ -15678,11 +16400,11 @@
           <a:p>
             <a:pPr algn="l"/>
             <a:r>
-              <a:rPr sz="1900" b="1" i="0">
+              <a:rPr sz="1810" b="1" i="0">
                 <a:solidFill>
                   <a:srgbClr val="0B5394"/>
                 </a:solidFill>
-                <a:latin typeface="Century Schoolbook"/>
+                <a:latin typeface="Lexend"/>
               </a:rPr>
               <a:t>4.</a:t>
             </a:r>
@@ -15691,7 +16413,7 @@
       </p:sp>
       <p:pic>
         <p:nvPicPr>
-          <p:cNvPr id="20" name="Picture 19" descr="1b1c445e0e5cd7a5.png"/>
+          <p:cNvPr id="20" name="Picture 19" descr="2f8ec9a9220ceb39.png"/>
           <p:cNvPicPr>
             <a:picLocks noChangeAspect="1"/>
           </p:cNvPicPr>
@@ -15705,8 +16427,8 @@
         </p:blipFill>
         <p:spPr>
           <a:xfrm>
-            <a:off x="1627632" y="3320530"/>
-            <a:ext cx="2696684" cy="276970"/>
+            <a:off x="1627632" y="3323048"/>
+            <a:ext cx="2696684" cy="271934"/>
           </a:xfrm>
           <a:prstGeom prst="rect">
             <a:avLst/>
@@ -15722,7 +16444,7 @@
         <p:spPr>
           <a:xfrm>
             <a:off x="4324316" y="3270172"/>
-            <a:ext cx="6903239" cy="377686"/>
+            <a:ext cx="6831265" cy="377686"/>
           </a:xfrm>
           <a:prstGeom prst="rect">
             <a:avLst/>
@@ -15737,11 +16459,11 @@
           <a:p>
             <a:pPr algn="l"/>
             <a:r>
-              <a:rPr sz="1900" b="0" i="0">
-                <a:solidFill>
-                  <a:srgbClr val="1A1A1A"/>
-                </a:solidFill>
-                <a:latin typeface="Century Schoolbook"/>
+              <a:rPr sz="1810" b="0" i="0">
+                <a:solidFill>
+                  <a:srgbClr val="1A1A1A"/>
+                </a:solidFill>
+                <a:latin typeface="Lexend"/>
               </a:rPr>
               <a:t>  meters, both measured. Write the sum with the correct </a:t>
             </a:r>
@@ -15757,7 +16479,7 @@
         <p:spPr>
           <a:xfrm>
             <a:off x="1554480" y="3637522"/>
-            <a:ext cx="1347009" cy="377686"/>
+            <a:ext cx="1329440" cy="377686"/>
           </a:xfrm>
           <a:prstGeom prst="rect">
             <a:avLst/>
@@ -15772,11 +16494,11 @@
           <a:p>
             <a:pPr algn="l"/>
             <a:r>
-              <a:rPr sz="1900" b="0" i="0">
-                <a:solidFill>
-                  <a:srgbClr val="1A1A1A"/>
-                </a:solidFill>
-                <a:latin typeface="Century Schoolbook"/>
+              <a:rPr sz="1810" b="0" i="0">
+                <a:solidFill>
+                  <a:srgbClr val="1A1A1A"/>
+                </a:solidFill>
+                <a:latin typeface="Lexend"/>
               </a:rPr>
               <a:t>precision.</a:t>
             </a:r>
@@ -15807,11 +16529,11 @@
           <a:p>
             <a:pPr algn="l"/>
             <a:r>
-              <a:rPr sz="1900" b="1" i="0">
+              <a:rPr sz="1810" b="1" i="0">
                 <a:solidFill>
                   <a:srgbClr val="0B5394"/>
                 </a:solidFill>
-                <a:latin typeface="Century Schoolbook"/>
+                <a:latin typeface="Lexend"/>
               </a:rPr>
               <a:t>5.</a:t>
             </a:r>
@@ -15827,7 +16549,7 @@
         <p:spPr>
           <a:xfrm>
             <a:off x="1554480" y="4105457"/>
-            <a:ext cx="1851624" cy="377686"/>
+            <a:ext cx="1826459" cy="377686"/>
           </a:xfrm>
           <a:prstGeom prst="rect">
             <a:avLst/>
@@ -15842,11 +16564,11 @@
           <a:p>
             <a:pPr algn="l"/>
             <a:r>
-              <a:rPr sz="1900" b="0" i="0">
-                <a:solidFill>
-                  <a:srgbClr val="1A1A1A"/>
-                </a:solidFill>
-                <a:latin typeface="Century Schoolbook"/>
+              <a:rPr sz="1810" b="0" i="0">
+                <a:solidFill>
+                  <a:srgbClr val="1A1A1A"/>
+                </a:solidFill>
+                <a:latin typeface="Lexend"/>
               </a:rPr>
               <a:t>A car travels  </a:t>
             </a:r>
@@ -15855,7 +16577,7 @@
       </p:sp>
       <p:pic>
         <p:nvPicPr>
-          <p:cNvPr id="25" name="Picture 24" descr="e70ffa874200d03c.png"/>
+          <p:cNvPr id="25" name="Picture 24" descr="d28efaf6c4b6b0d1.png"/>
           <p:cNvPicPr>
             <a:picLocks noChangeAspect="1"/>
           </p:cNvPicPr>
@@ -15869,8 +16591,8 @@
         </p:blipFill>
         <p:spPr>
           <a:xfrm>
-            <a:off x="3268944" y="4177217"/>
-            <a:ext cx="1067595" cy="234165"/>
+            <a:off x="3243779" y="4179735"/>
+            <a:ext cx="1080184" cy="229130"/>
           </a:xfrm>
           <a:prstGeom prst="rect">
             <a:avLst/>
@@ -15885,8 +16607,8 @@
         </p:nvSpPr>
         <p:spPr>
           <a:xfrm>
-            <a:off x="4336539" y="4105457"/>
-            <a:ext cx="6919699" cy="377686"/>
+            <a:off x="4323963" y="4105457"/>
+            <a:ext cx="6869881" cy="377686"/>
           </a:xfrm>
           <a:prstGeom prst="rect">
             <a:avLst/>
@@ -15901,11 +16623,11 @@
           <a:p>
             <a:pPr algn="l"/>
             <a:r>
-              <a:rPr sz="1900" b="0" i="0">
-                <a:solidFill>
-                  <a:srgbClr val="1A1A1A"/>
-                </a:solidFill>
-                <a:latin typeface="Century Schoolbook"/>
+              <a:rPr sz="1810" b="0" i="0">
+                <a:solidFill>
+                  <a:srgbClr val="1A1A1A"/>
+                </a:solidFill>
+                <a:latin typeface="Lexend"/>
               </a:rPr>
               <a:t>  km in  4.0  hours. Find its average speed, to the correct </a:t>
             </a:r>
@@ -15921,7 +16643,7 @@
         <p:spPr>
           <a:xfrm>
             <a:off x="1554480" y="4472807"/>
-            <a:ext cx="3535636" cy="377686"/>
+            <a:ext cx="3518640" cy="377686"/>
           </a:xfrm>
           <a:prstGeom prst="rect">
             <a:avLst/>
@@ -15936,11 +16658,11 @@
           <a:p>
             <a:pPr algn="l"/>
             <a:r>
-              <a:rPr sz="1900" b="0" i="0">
-                <a:solidFill>
-                  <a:srgbClr val="1A1A1A"/>
-                </a:solidFill>
-                <a:latin typeface="Century Schoolbook"/>
+              <a:rPr sz="1810" b="0" i="0">
+                <a:solidFill>
+                  <a:srgbClr val="1A1A1A"/>
+                </a:solidFill>
+                <a:latin typeface="Lexend"/>
               </a:rPr>
               <a:t>number of significant digits.</a:t>
             </a:r>
@@ -15971,11 +16693,11 @@
           <a:p>
             <a:pPr algn="l"/>
             <a:r>
-              <a:rPr sz="1900" b="1" i="0">
+              <a:rPr sz="1810" b="1" i="0">
                 <a:solidFill>
                   <a:srgbClr val="0B5394"/>
                 </a:solidFill>
-                <a:latin typeface="Century Schoolbook"/>
+                <a:latin typeface="Lexend"/>
               </a:rPr>
               <a:t>6.</a:t>
             </a:r>
@@ -15984,7 +16706,7 @@
       </p:sp>
       <p:pic>
         <p:nvPicPr>
-          <p:cNvPr id="29" name="Picture 28" descr="98201dc88cb6851c.png"/>
+          <p:cNvPr id="29" name="Picture 28" descr="f68f597f3be75e82.png"/>
           <p:cNvPicPr>
             <a:picLocks noChangeAspect="1"/>
           </p:cNvPicPr>
@@ -15999,7 +16721,7 @@
         <p:spPr>
           <a:xfrm>
             <a:off x="1627632" y="4991100"/>
-            <a:ext cx="2958547" cy="276970"/>
+            <a:ext cx="2913225" cy="276970"/>
           </a:xfrm>
           <a:prstGeom prst="rect">
             <a:avLst/>
@@ -16014,8 +16736,8 @@
         </p:nvSpPr>
         <p:spPr>
           <a:xfrm>
-            <a:off x="4586179" y="4940741"/>
-            <a:ext cx="6603237" cy="377686"/>
+            <a:off x="4540857" y="4940741"/>
+            <a:ext cx="6571740" cy="377686"/>
           </a:xfrm>
           <a:prstGeom prst="rect">
             <a:avLst/>
@@ -16030,11 +16752,11 @@
           <a:p>
             <a:pPr algn="l"/>
             <a:r>
-              <a:rPr sz="1900" b="0" i="0">
-                <a:solidFill>
-                  <a:srgbClr val="1A1A1A"/>
-                </a:solidFill>
-                <a:latin typeface="Century Schoolbook"/>
+              <a:rPr sz="1810" b="0" i="0">
+                <a:solidFill>
+                  <a:srgbClr val="1A1A1A"/>
+                </a:solidFill>
+                <a:latin typeface="Lexend"/>
               </a:rPr>
               <a:t>  grams, both measured. Write the difference with the </a:t>
             </a:r>
@@ -16050,7 +16772,7 @@
         <p:spPr>
           <a:xfrm>
             <a:off x="1554480" y="5308092"/>
-            <a:ext cx="2232819" cy="377686"/>
+            <a:ext cx="2233056" cy="377686"/>
           </a:xfrm>
           <a:prstGeom prst="rect">
             <a:avLst/>
@@ -16065,11 +16787,11 @@
           <a:p>
             <a:pPr algn="l"/>
             <a:r>
-              <a:rPr sz="1900" b="0" i="0">
-                <a:solidFill>
-                  <a:srgbClr val="1A1A1A"/>
-                </a:solidFill>
-                <a:latin typeface="Century Schoolbook"/>
+              <a:rPr sz="1810" b="0" i="0">
+                <a:solidFill>
+                  <a:srgbClr val="1A1A1A"/>
+                </a:solidFill>
+                <a:latin typeface="Lexend"/>
               </a:rPr>
               <a:t>correct precision.</a:t>
             </a:r>
@@ -16118,11 +16840,11 @@
           <a:p>
             <a:pPr algn="l"/>
             <a:r>
-              <a:rPr sz="3600" b="1" i="0">
-                <a:solidFill>
-                  <a:srgbClr val="1A1A1A"/>
-                </a:solidFill>
-                <a:latin typeface="Century Schoolbook"/>
+              <a:rPr sz="3420" b="1" i="0">
+                <a:solidFill>
+                  <a:srgbClr val="1A1A1A"/>
+                </a:solidFill>
+                <a:latin typeface="Lexend"/>
               </a:rPr>
               <a:t>IXL</a:t>
             </a:r>
@@ -16258,11 +16980,11 @@
           <a:p>
             <a:pPr algn="l"/>
             <a:r>
-              <a:rPr sz="1100" b="0" i="1">
+              <a:rPr sz="1040" b="0" i="0">
                 <a:solidFill>
                   <a:srgbClr val="6B6B6B"/>
                 </a:solidFill>
-                <a:latin typeface="Century Schoolbook"/>
+                <a:latin typeface="Lexend"/>
               </a:rPr>
               <a:t>Grade 7 Accelerated · Unit 4 · Lesson 4 — Real-World Problems and Significant Digits</a:t>
             </a:r>
@@ -16293,11 +17015,11 @@
           <a:p>
             <a:pPr algn="r"/>
             <a:r>
-              <a:rPr sz="1100" b="0" i="0">
+              <a:rPr sz="1040" b="0" i="0">
                 <a:solidFill>
                   <a:srgbClr val="6B6B6B"/>
                 </a:solidFill>
-                <a:latin typeface="Century Schoolbook"/>
+                <a:latin typeface="Lexend"/>
               </a:rPr>
               <a:t>34</a:t>
             </a:r>
@@ -16328,11 +17050,11 @@
           <a:p>
             <a:pPr algn="l"/>
             <a:r>
-              <a:rPr sz="2100" b="1" i="0">
+              <a:rPr sz="1989" b="1" i="0">
                 <a:solidFill>
                   <a:srgbClr val="0B5394"/>
                 </a:solidFill>
-                <a:latin typeface="Century Schoolbook"/>
+                <a:latin typeface="Lexend"/>
               </a:rPr>
               <a:t>1.</a:t>
             </a:r>
@@ -16363,11 +17085,11 @@
           <a:p>
             <a:pPr algn="l"/>
             <a:r>
-              <a:rPr sz="2100" b="0" i="0">
-                <a:solidFill>
-                  <a:srgbClr val="1A1A1A"/>
-                </a:solidFill>
-                <a:latin typeface="Century Schoolbook"/>
+              <a:rPr sz="1989" b="0" i="0">
+                <a:solidFill>
+                  <a:srgbClr val="1A1A1A"/>
+                </a:solidFill>
+                <a:latin typeface="Lexend"/>
               </a:rPr>
               <a:t>Open IXL and start today's skills.</a:t>
             </a:r>
@@ -16398,11 +17120,11 @@
           <a:p>
             <a:pPr algn="l"/>
             <a:r>
-              <a:rPr sz="2100" b="1" i="0">
+              <a:rPr sz="1989" b="1" i="0">
                 <a:solidFill>
                   <a:srgbClr val="0B5394"/>
                 </a:solidFill>
-                <a:latin typeface="Century Schoolbook"/>
+                <a:latin typeface="Lexend"/>
               </a:rPr>
               <a:t>2.</a:t>
             </a:r>
@@ -16433,11 +17155,11 @@
           <a:p>
             <a:pPr algn="l"/>
             <a:r>
-              <a:rPr sz="2100" b="0" i="0">
-                <a:solidFill>
-                  <a:srgbClr val="1A1A1A"/>
-                </a:solidFill>
-                <a:latin typeface="Century Schoolbook"/>
+              <a:rPr sz="1989" b="0" i="0">
+                <a:solidFill>
+                  <a:srgbClr val="1A1A1A"/>
+                </a:solidFill>
+                <a:latin typeface="Lexend"/>
               </a:rPr>
               <a:t>Work on paper where the question needs work. The answer box does not show it.</a:t>
             </a:r>
@@ -16468,11 +17190,11 @@
           <a:p>
             <a:pPr algn="l"/>
             <a:r>
-              <a:rPr sz="2100" b="1" i="0">
+              <a:rPr sz="1989" b="1" i="0">
                 <a:solidFill>
                   <a:srgbClr val="0B5394"/>
                 </a:solidFill>
-                <a:latin typeface="Century Schoolbook"/>
+                <a:latin typeface="Lexend"/>
               </a:rPr>
               <a:t>3.</a:t>
             </a:r>
@@ -16503,11 +17225,11 @@
           <a:p>
             <a:pPr algn="l"/>
             <a:r>
-              <a:rPr sz="2100" b="0" i="0">
-                <a:solidFill>
-                  <a:srgbClr val="1A1A1A"/>
-                </a:solidFill>
-                <a:latin typeface="Century Schoolbook"/>
+              <a:rPr sz="1989" b="0" i="0">
+                <a:solidFill>
+                  <a:srgbClr val="1A1A1A"/>
+                </a:solidFill>
+                <a:latin typeface="Lexend"/>
               </a:rPr>
               <a:t>Every skill listed is required, to a SmartScore of 67. Due at the start of the next class.</a:t>
             </a:r>
@@ -16538,11 +17260,11 @@
           <a:p>
             <a:pPr algn="l"/>
             <a:r>
-              <a:rPr sz="2100" b="1" i="0">
-                <a:solidFill>
-                  <a:srgbClr val="1A1A1A"/>
-                </a:solidFill>
-                <a:latin typeface="Century Schoolbook"/>
+              <a:rPr sz="1989" b="1" i="0">
+                <a:solidFill>
+                  <a:srgbClr val="1A1A1A"/>
+                </a:solidFill>
+                <a:latin typeface="Lexend"/>
               </a:rPr>
               <a:t>Today's skills — all required</a:t>
             </a:r>
@@ -16573,11 +17295,11 @@
           <a:p>
             <a:pPr algn="l"/>
             <a:r>
-              <a:rPr sz="1900" b="0" i="0">
-                <a:solidFill>
-                  <a:srgbClr val="1A1A1A"/>
-                </a:solidFill>
-                <a:latin typeface="Century Schoolbook"/>
+              <a:rPr sz="1810" b="0" i="0">
+                <a:solidFill>
+                  <a:srgbClr val="1A1A1A"/>
+                </a:solidFill>
+                <a:latin typeface="Lexend"/>
               </a:rPr>
               <a:t>Add, subtract, multiply, and divide numbers written in scientific notation: word problems — D5S</a:t>
             </a:r>
@@ -16626,11 +17348,11 @@
           <a:p>
             <a:pPr algn="l"/>
             <a:r>
-              <a:rPr sz="3600" b="1" i="0">
-                <a:solidFill>
-                  <a:srgbClr val="1A1A1A"/>
-                </a:solidFill>
-                <a:latin typeface="Century Schoolbook"/>
+              <a:rPr sz="3420" b="1" i="0">
+                <a:solidFill>
+                  <a:srgbClr val="1A1A1A"/>
+                </a:solidFill>
+                <a:latin typeface="Lexend"/>
               </a:rPr>
               <a:t>Notes</a:t>
             </a:r>
@@ -16766,11 +17488,11 @@
           <a:p>
             <a:pPr algn="l"/>
             <a:r>
-              <a:rPr sz="1100" b="0" i="1">
+              <a:rPr sz="1040" b="0" i="0">
                 <a:solidFill>
                   <a:srgbClr val="6B6B6B"/>
                 </a:solidFill>
-                <a:latin typeface="Century Schoolbook"/>
+                <a:latin typeface="Lexend"/>
               </a:rPr>
               <a:t>Grade 7 Accelerated · Unit 4 · Lesson 4 — Real-World Problems and Significant Digits</a:t>
             </a:r>
@@ -16801,11 +17523,11 @@
           <a:p>
             <a:pPr algn="r"/>
             <a:r>
-              <a:rPr sz="1100" b="0" i="0">
+              <a:rPr sz="1040" b="0" i="0">
                 <a:solidFill>
                   <a:srgbClr val="6B6B6B"/>
                 </a:solidFill>
-                <a:latin typeface="Century Schoolbook"/>
+                <a:latin typeface="Lexend"/>
               </a:rPr>
               <a:t>4</a:t>
             </a:r>
@@ -16836,11 +17558,11 @@
           <a:p>
             <a:pPr algn="l"/>
             <a:r>
-              <a:rPr sz="2500" b="1" i="0">
-                <a:solidFill>
-                  <a:srgbClr val="1A1A1A"/>
-                </a:solidFill>
-                <a:latin typeface="Century Schoolbook"/>
+              <a:rPr sz="2380" b="1" i="0">
+                <a:solidFill>
+                  <a:srgbClr val="1A1A1A"/>
+                </a:solidFill>
+                <a:latin typeface="Lexend"/>
               </a:rPr>
               <a:t>I.  Which digits are significant</a:t>
             </a:r>
@@ -16913,11 +17635,11 @@
                     <a:p>
                       <a:pPr algn="ctr"/>
                       <a:r>
-                        <a:rPr sz="1500" b="1">
+                        <a:rPr sz="1420" b="1">
                           <a:solidFill>
                             <a:srgbClr val="1A1A1A"/>
                           </a:solidFill>
-                          <a:latin typeface="Century Schoolbook"/>
+                          <a:latin typeface="Lexend"/>
                         </a:rPr>
                         <a:t>Measurement</a:t>
                       </a:r>
@@ -16960,11 +17682,11 @@
                     <a:p>
                       <a:pPr algn="ctr"/>
                       <a:r>
-                        <a:rPr sz="1500" b="1">
+                        <a:rPr sz="1420" b="1">
                           <a:solidFill>
                             <a:srgbClr val="1A1A1A"/>
                           </a:solidFill>
-                          <a:latin typeface="Century Schoolbook"/>
+                          <a:latin typeface="Lexend"/>
                         </a:rPr>
                         <a:t>Digits</a:t>
                       </a:r>
@@ -17007,11 +17729,11 @@
                     <a:p>
                       <a:pPr algn="ctr"/>
                       <a:r>
-                        <a:rPr sz="1500" b="1">
+                        <a:rPr sz="1420" b="1">
                           <a:solidFill>
                             <a:srgbClr val="1A1A1A"/>
                           </a:solidFill>
-                          <a:latin typeface="Century Schoolbook"/>
+                          <a:latin typeface="Lexend"/>
                         </a:rPr>
                         <a:t>Why</a:t>
                       </a:r>
@@ -17056,11 +17778,11 @@
                     <a:p>
                       <a:pPr algn="ctr"/>
                       <a:r>
-                        <a:rPr sz="1500" b="0">
+                        <a:rPr sz="1420" b="0">
                           <a:solidFill>
                             <a:srgbClr val="1A1A1A"/>
                           </a:solidFill>
-                          <a:latin typeface="Century Schoolbook"/>
+                          <a:latin typeface="Lexend"/>
                         </a:rPr>
                         <a:t>4,207</a:t>
                       </a:r>
@@ -17103,11 +17825,11 @@
                     <a:p>
                       <a:pPr algn="ctr"/>
                       <a:r>
-                        <a:rPr sz="1500" b="0">
+                        <a:rPr sz="1420" b="0">
                           <a:solidFill>
                             <a:srgbClr val="1A1A1A"/>
                           </a:solidFill>
-                          <a:latin typeface="Century Schoolbook"/>
+                          <a:latin typeface="Lexend"/>
                         </a:rPr>
                         <a:t>4</a:t>
                       </a:r>
@@ -17150,11 +17872,11 @@
                     <a:p>
                       <a:pPr algn="ctr"/>
                       <a:r>
-                        <a:rPr sz="1500" b="0">
+                        <a:rPr sz="1420" b="0">
                           <a:solidFill>
                             <a:srgbClr val="1A1A1A"/>
                           </a:solidFill>
-                          <a:latin typeface="Century Schoolbook"/>
+                          <a:latin typeface="Lexend"/>
                         </a:rPr>
                         <a:t>the middle zero counts</a:t>
                       </a:r>
@@ -17199,11 +17921,11 @@
                     <a:p>
                       <a:pPr algn="ctr"/>
                       <a:r>
-                        <a:rPr sz="1500" b="0">
+                        <a:rPr sz="1420" b="0">
                           <a:solidFill>
                             <a:srgbClr val="1A1A1A"/>
                           </a:solidFill>
-                          <a:latin typeface="Century Schoolbook"/>
+                          <a:latin typeface="Lexend"/>
                         </a:rPr>
                         <a:t>0.0058</a:t>
                       </a:r>
@@ -17246,11 +17968,11 @@
                     <a:p>
                       <a:pPr algn="ctr"/>
                       <a:r>
-                        <a:rPr sz="1500" b="0">
+                        <a:rPr sz="1420" b="0">
                           <a:solidFill>
                             <a:srgbClr val="1A1A1A"/>
                           </a:solidFill>
-                          <a:latin typeface="Century Schoolbook"/>
+                          <a:latin typeface="Lexend"/>
                         </a:rPr>
                         <a:t>2</a:t>
                       </a:r>
@@ -17293,11 +18015,11 @@
                     <a:p>
                       <a:pPr algn="ctr"/>
                       <a:r>
-                        <a:rPr sz="1500" b="0">
+                        <a:rPr sz="1420" b="0">
                           <a:solidFill>
                             <a:srgbClr val="1A1A1A"/>
                           </a:solidFill>
-                          <a:latin typeface="Century Schoolbook"/>
+                          <a:latin typeface="Lexend"/>
                         </a:rPr>
                         <a:t>leading zeros never count</a:t>
                       </a:r>
@@ -17342,11 +18064,11 @@
                     <a:p>
                       <a:pPr algn="ctr"/>
                       <a:r>
-                        <a:rPr sz="1500" b="0">
+                        <a:rPr sz="1420" b="0">
                           <a:solidFill>
                             <a:srgbClr val="1A1A1A"/>
                           </a:solidFill>
-                          <a:latin typeface="Century Schoolbook"/>
+                          <a:latin typeface="Lexend"/>
                         </a:rPr>
                         <a:t>3.200</a:t>
                       </a:r>
@@ -17389,11 +18111,11 @@
                     <a:p>
                       <a:pPr algn="ctr"/>
                       <a:r>
-                        <a:rPr sz="1500" b="0">
+                        <a:rPr sz="1420" b="0">
                           <a:solidFill>
                             <a:srgbClr val="1A1A1A"/>
                           </a:solidFill>
-                          <a:latin typeface="Century Schoolbook"/>
+                          <a:latin typeface="Lexend"/>
                         </a:rPr>
                         <a:t>4</a:t>
                       </a:r>
@@ -17436,11 +18158,11 @@
                     <a:p>
                       <a:pPr algn="ctr"/>
                       <a:r>
-                        <a:rPr sz="1500" b="0">
+                        <a:rPr sz="1420" b="0">
                           <a:solidFill>
                             <a:srgbClr val="1A1A1A"/>
                           </a:solidFill>
-                          <a:latin typeface="Century Schoolbook"/>
+                          <a:latin typeface="Lexend"/>
                         </a:rPr>
                         <a:t>trailing zeros count after a decimal point</a:t>
                       </a:r>
@@ -17485,11 +18207,11 @@
                     <a:p>
                       <a:pPr algn="ctr"/>
                       <a:r>
-                        <a:rPr sz="1500" b="0">
+                        <a:rPr sz="1420" b="0">
                           <a:solidFill>
                             <a:srgbClr val="1A1A1A"/>
                           </a:solidFill>
-                          <a:latin typeface="Century Schoolbook"/>
+                          <a:latin typeface="Lexend"/>
                         </a:rPr>
                         <a:t>52,000</a:t>
                       </a:r>
@@ -17532,11 +18254,11 @@
                     <a:p>
                       <a:pPr algn="ctr"/>
                       <a:r>
-                        <a:rPr sz="1500" b="0">
+                        <a:rPr sz="1420" b="0">
                           <a:solidFill>
                             <a:srgbClr val="1A1A1A"/>
                           </a:solidFill>
-                          <a:latin typeface="Century Schoolbook"/>
+                          <a:latin typeface="Lexend"/>
                         </a:rPr>
                         <a:t>2</a:t>
                       </a:r>
@@ -17579,11 +18301,11 @@
                     <a:p>
                       <a:pPr algn="ctr"/>
                       <a:r>
-                        <a:rPr sz="1500" b="0">
+                        <a:rPr sz="1420" b="0">
                           <a:solidFill>
                             <a:srgbClr val="1A1A1A"/>
                           </a:solidFill>
-                          <a:latin typeface="Century Schoolbook"/>
+                          <a:latin typeface="Lexend"/>
                         </a:rPr>
                         <a:t>no decimal point, so they do not</a:t>
                       </a:r>
@@ -17666,11 +18388,11 @@
           <a:p>
             <a:pPr algn="l"/>
             <a:r>
-              <a:rPr sz="3600" b="1" i="0">
-                <a:solidFill>
-                  <a:srgbClr val="1A1A1A"/>
-                </a:solidFill>
-                <a:latin typeface="Century Schoolbook"/>
+              <a:rPr sz="3420" b="1" i="0">
+                <a:solidFill>
+                  <a:srgbClr val="1A1A1A"/>
+                </a:solidFill>
+                <a:latin typeface="Lexend"/>
               </a:rPr>
               <a:t>Notes</a:t>
             </a:r>
@@ -17806,11 +18528,11 @@
           <a:p>
             <a:pPr algn="l"/>
             <a:r>
-              <a:rPr sz="1100" b="0" i="1">
+              <a:rPr sz="1040" b="0" i="0">
                 <a:solidFill>
                   <a:srgbClr val="6B6B6B"/>
                 </a:solidFill>
-                <a:latin typeface="Century Schoolbook"/>
+                <a:latin typeface="Lexend"/>
               </a:rPr>
               <a:t>Grade 7 Accelerated · Unit 4 · Lesson 4 — Real-World Problems and Significant Digits</a:t>
             </a:r>
@@ -17841,11 +18563,11 @@
           <a:p>
             <a:pPr algn="r"/>
             <a:r>
-              <a:rPr sz="1100" b="0" i="0">
+              <a:rPr sz="1040" b="0" i="0">
                 <a:solidFill>
                   <a:srgbClr val="6B6B6B"/>
                 </a:solidFill>
-                <a:latin typeface="Century Schoolbook"/>
+                <a:latin typeface="Lexend"/>
               </a:rPr>
               <a:t>5</a:t>
             </a:r>
@@ -17876,11 +18598,11 @@
           <a:p>
             <a:pPr algn="l"/>
             <a:r>
-              <a:rPr sz="2500" b="1" i="0">
-                <a:solidFill>
-                  <a:srgbClr val="1A1A1A"/>
-                </a:solidFill>
-                <a:latin typeface="Century Schoolbook"/>
+              <a:rPr sz="2380" b="1" i="0">
+                <a:solidFill>
+                  <a:srgbClr val="1A1A1A"/>
+                </a:solidFill>
+                <a:latin typeface="Lexend"/>
               </a:rPr>
               <a:t>II.  Multiplying or dividing: count the digits</a:t>
             </a:r>
@@ -17924,7 +18646,7 @@
       </p:cxnSp>
       <p:pic>
         <p:nvPicPr>
-          <p:cNvPr id="10" name="Picture 9" descr="3a738e44a54142cf.png"/>
+          <p:cNvPr id="10" name="Picture 9" descr="c7e6ff835d857cca.png"/>
           <p:cNvPicPr>
             <a:picLocks noChangeAspect="1"/>
           </p:cNvPicPr>
@@ -17938,8 +18660,8 @@
         </p:blipFill>
         <p:spPr>
           <a:xfrm>
-            <a:off x="3043428" y="1993392"/>
-            <a:ext cx="6074664" cy="411480"/>
+            <a:off x="3061716" y="1993392"/>
+            <a:ext cx="6038088" cy="411480"/>
           </a:xfrm>
           <a:prstGeom prst="rect">
             <a:avLst/>
@@ -17954,8 +18676,8 @@
         </p:nvSpPr>
         <p:spPr>
           <a:xfrm>
-            <a:off x="1305746" y="2656332"/>
-            <a:ext cx="8306442" cy="457200"/>
+            <a:off x="1343817" y="2656332"/>
+            <a:ext cx="8233348" cy="457200"/>
           </a:xfrm>
           <a:prstGeom prst="rect">
             <a:avLst/>
@@ -17970,11 +18692,11 @@
           <a:p>
             <a:pPr algn="l"/>
             <a:r>
-              <a:rPr sz="2600" b="0" i="0">
-                <a:solidFill>
-                  <a:srgbClr val="1A1A1A"/>
-                </a:solidFill>
-                <a:latin typeface="Century Schoolbook"/>
+              <a:rPr sz="2470" b="0" i="0">
+                <a:solidFill>
+                  <a:srgbClr val="1A1A1A"/>
+                </a:solidFill>
+                <a:latin typeface="Lexend"/>
               </a:rPr>
               <a:t>2 significant digits and 3, so the answer keeps 2:   </a:t>
             </a:r>
@@ -17983,7 +18705,7 @@
       </p:sp>
       <p:pic>
         <p:nvPicPr>
-          <p:cNvPr id="12" name="Picture 11" descr="46d10cc3baed6a39.png"/>
+          <p:cNvPr id="12" name="Picture 11" descr="723af09f9a41839a.png"/>
           <p:cNvPicPr>
             <a:picLocks noChangeAspect="1"/>
           </p:cNvPicPr>
@@ -17997,8 +18719,8 @@
         </p:blipFill>
         <p:spPr>
           <a:xfrm>
-            <a:off x="9475029" y="2708148"/>
-            <a:ext cx="1380744" cy="353568"/>
+            <a:off x="9440006" y="2717292"/>
+            <a:ext cx="1377696" cy="335280"/>
           </a:xfrm>
           <a:prstGeom prst="rect">
             <a:avLst/>
@@ -18029,11 +18751,11 @@
           <a:p>
             <a:pPr algn="l"/>
             <a:r>
-              <a:rPr sz="2300" b="1" i="0">
-                <a:solidFill>
-                  <a:srgbClr val="1A1A1A"/>
-                </a:solidFill>
-                <a:latin typeface="Century Schoolbook"/>
+              <a:rPr sz="2180" b="1" i="0">
+                <a:solidFill>
+                  <a:srgbClr val="1A1A1A"/>
+                </a:solidFill>
+                <a:latin typeface="Lexend"/>
               </a:rPr>
               <a:t>Multiply or divide: the answer takes the smaller of the two significant-digit counts.</a:t>
             </a:r>
@@ -18082,11 +18804,11 @@
           <a:p>
             <a:pPr algn="l"/>
             <a:r>
-              <a:rPr sz="3600" b="1" i="0">
-                <a:solidFill>
-                  <a:srgbClr val="1A1A1A"/>
-                </a:solidFill>
-                <a:latin typeface="Century Schoolbook"/>
+              <a:rPr sz="3420" b="1" i="0">
+                <a:solidFill>
+                  <a:srgbClr val="1A1A1A"/>
+                </a:solidFill>
+                <a:latin typeface="Lexend"/>
               </a:rPr>
               <a:t>Notes</a:t>
             </a:r>
@@ -18222,11 +18944,11 @@
           <a:p>
             <a:pPr algn="l"/>
             <a:r>
-              <a:rPr sz="1100" b="0" i="1">
+              <a:rPr sz="1040" b="0" i="0">
                 <a:solidFill>
                   <a:srgbClr val="6B6B6B"/>
                 </a:solidFill>
-                <a:latin typeface="Century Schoolbook"/>
+                <a:latin typeface="Lexend"/>
               </a:rPr>
               <a:t>Grade 7 Accelerated · Unit 4 · Lesson 4 — Real-World Problems and Significant Digits</a:t>
             </a:r>
@@ -18257,11 +18979,11 @@
           <a:p>
             <a:pPr algn="r"/>
             <a:r>
-              <a:rPr sz="1100" b="0" i="0">
+              <a:rPr sz="1040" b="0" i="0">
                 <a:solidFill>
                   <a:srgbClr val="6B6B6B"/>
                 </a:solidFill>
-                <a:latin typeface="Century Schoolbook"/>
+                <a:latin typeface="Lexend"/>
               </a:rPr>
               <a:t>6</a:t>
             </a:r>
@@ -18292,11 +19014,11 @@
           <a:p>
             <a:pPr algn="l"/>
             <a:r>
-              <a:rPr sz="2500" b="1" i="0">
-                <a:solidFill>
-                  <a:srgbClr val="1A1A1A"/>
-                </a:solidFill>
-                <a:latin typeface="Century Schoolbook"/>
+              <a:rPr sz="2380" b="1" i="0">
+                <a:solidFill>
+                  <a:srgbClr val="1A1A1A"/>
+                </a:solidFill>
+                <a:latin typeface="Lexend"/>
               </a:rPr>
               <a:t>III.  Adding or subtracting: a different rule</a:t>
             </a:r>
@@ -18340,7 +19062,7 @@
       </p:cxnSp>
       <p:pic>
         <p:nvPicPr>
-          <p:cNvPr id="10" name="Picture 9" descr="b19428082cb99cfa.png"/>
+          <p:cNvPr id="10" name="Picture 9" descr="ac84020e548be5d7.png"/>
           <p:cNvPicPr>
             <a:picLocks noChangeAspect="1"/>
           </p:cNvPicPr>
@@ -18354,8 +19076,8 @@
         </p:blipFill>
         <p:spPr>
           <a:xfrm>
-            <a:off x="4390643" y="2029968"/>
-            <a:ext cx="3380232" cy="338328"/>
+            <a:off x="4389120" y="2023872"/>
+            <a:ext cx="3383280" cy="350520"/>
           </a:xfrm>
           <a:prstGeom prst="rect">
             <a:avLst/>
@@ -18370,8 +19092,8 @@
         </p:nvSpPr>
         <p:spPr>
           <a:xfrm>
-            <a:off x="1794714" y="2656332"/>
-            <a:ext cx="8709251" cy="457200"/>
+            <a:off x="1820000" y="2656332"/>
+            <a:ext cx="8658679" cy="457200"/>
           </a:xfrm>
           <a:prstGeom prst="rect">
             <a:avLst/>
@@ -18386,11 +19108,11 @@
           <a:p>
             <a:pPr algn="l"/>
             <a:r>
-              <a:rPr sz="2600" b="0" i="0">
-                <a:solidFill>
-                  <a:srgbClr val="1A1A1A"/>
-                </a:solidFill>
-                <a:latin typeface="Century Schoolbook"/>
+              <a:rPr sz="2470" b="0" i="0">
+                <a:solidFill>
+                  <a:srgbClr val="1A1A1A"/>
+                </a:solidFill>
+                <a:latin typeface="Lexend"/>
               </a:rPr>
               <a:t>1,234 stops at the ones place;  5.6 stops at the tenths</a:t>
             </a:r>
@@ -18405,8 +19127,8 @@
         </p:nvSpPr>
         <p:spPr>
           <a:xfrm>
-            <a:off x="1561688" y="3342132"/>
-            <a:ext cx="6078534" cy="457200"/>
+            <a:off x="1508410" y="3342132"/>
+            <a:ext cx="6114987" cy="457200"/>
           </a:xfrm>
           <a:prstGeom prst="rect">
             <a:avLst/>
@@ -18421,11 +19143,11 @@
           <a:p>
             <a:pPr algn="l"/>
             <a:r>
-              <a:rPr sz="2600" b="0" i="0">
-                <a:solidFill>
-                  <a:srgbClr val="1A1A1A"/>
-                </a:solidFill>
-                <a:latin typeface="Century Schoolbook"/>
+              <a:rPr sz="2470" b="0" i="0">
+                <a:solidFill>
+                  <a:srgbClr val="1A1A1A"/>
+                </a:solidFill>
+                <a:latin typeface="Lexend"/>
               </a:rPr>
               <a:t>so the sum stops at the ones place:   </a:t>
             </a:r>
@@ -18434,7 +19156,7 @@
       </p:sp>
       <p:pic>
         <p:nvPicPr>
-          <p:cNvPr id="13" name="Picture 12" descr="4090bfd67d1032c8.png"/>
+          <p:cNvPr id="13" name="Picture 12" descr="40647922f9acd29f.png"/>
           <p:cNvPicPr>
             <a:picLocks noChangeAspect="1"/>
           </p:cNvPicPr>
@@ -18448,8 +19170,8 @@
         </p:blipFill>
         <p:spPr>
           <a:xfrm>
-            <a:off x="7503063" y="3371088"/>
-            <a:ext cx="3096768" cy="399288"/>
+            <a:off x="7486237" y="3368040"/>
+            <a:ext cx="3166872" cy="405384"/>
           </a:xfrm>
           <a:prstGeom prst="rect">
             <a:avLst/>
@@ -18480,11 +19202,11 @@
           <a:p>
             <a:pPr algn="l"/>
             <a:r>
-              <a:rPr sz="2300" b="1" i="0">
-                <a:solidFill>
-                  <a:srgbClr val="1A1A1A"/>
-                </a:solidFill>
-                <a:latin typeface="Century Schoolbook"/>
+              <a:rPr sz="2180" b="1" i="0">
+                <a:solidFill>
+                  <a:srgbClr val="1A1A1A"/>
+                </a:solidFill>
+                <a:latin typeface="Lexend"/>
               </a:rPr>
               <a:t>Add or subtract: the answer stops at the leftmost of the two last-digit places.</a:t>
             </a:r>
@@ -18533,11 +19255,11 @@
           <a:p>
             <a:pPr algn="l"/>
             <a:r>
-              <a:rPr sz="3600" b="1" i="0">
-                <a:solidFill>
-                  <a:srgbClr val="1A1A1A"/>
-                </a:solidFill>
-                <a:latin typeface="Century Schoolbook"/>
+              <a:rPr sz="3420" b="1" i="0">
+                <a:solidFill>
+                  <a:srgbClr val="1A1A1A"/>
+                </a:solidFill>
+                <a:latin typeface="Lexend"/>
               </a:rPr>
               <a:t>Example 1</a:t>
             </a:r>
@@ -18673,11 +19395,11 @@
           <a:p>
             <a:pPr algn="l"/>
             <a:r>
-              <a:rPr sz="1100" b="0" i="1">
+              <a:rPr sz="1040" b="0" i="0">
                 <a:solidFill>
                   <a:srgbClr val="6B6B6B"/>
                 </a:solidFill>
-                <a:latin typeface="Century Schoolbook"/>
+                <a:latin typeface="Lexend"/>
               </a:rPr>
               <a:t>Grade 7 Accelerated · Unit 4 · Lesson 4 — Real-World Problems and Significant Digits</a:t>
             </a:r>
@@ -18708,11 +19430,11 @@
           <a:p>
             <a:pPr algn="r"/>
             <a:r>
-              <a:rPr sz="1100" b="0" i="0">
+              <a:rPr sz="1040" b="0" i="0">
                 <a:solidFill>
                   <a:srgbClr val="6B6B6B"/>
                 </a:solidFill>
-                <a:latin typeface="Century Schoolbook"/>
+                <a:latin typeface="Lexend"/>
               </a:rPr>
               <a:t>7</a:t>
             </a:r>
@@ -18727,8 +19449,8 @@
         </p:nvSpPr>
         <p:spPr>
           <a:xfrm>
-            <a:off x="1609368" y="1714500"/>
-            <a:ext cx="4175239" cy="457200"/>
+            <a:off x="1668053" y="1714500"/>
+            <a:ext cx="4120518" cy="457200"/>
           </a:xfrm>
           <a:prstGeom prst="rect">
             <a:avLst/>
@@ -18743,11 +19465,11 @@
           <a:p>
             <a:pPr algn="l"/>
             <a:r>
-              <a:rPr sz="2600" b="0" i="0">
-                <a:solidFill>
-                  <a:srgbClr val="1A1A1A"/>
-                </a:solidFill>
-                <a:latin typeface="Century Schoolbook"/>
+              <a:rPr sz="2470" b="0" i="0">
+                <a:solidFill>
+                  <a:srgbClr val="1A1A1A"/>
+                </a:solidFill>
+                <a:latin typeface="Lexend"/>
               </a:rPr>
               <a:t>A solar array measures  </a:t>
             </a:r>
@@ -18756,7 +19478,7 @@
       </p:sp>
       <p:pic>
         <p:nvPicPr>
-          <p:cNvPr id="9" name="Picture 8" descr="7ad9bfb61548f81e.png"/>
+          <p:cNvPr id="9" name="Picture 8" descr="ff2cbfe6b6afaadc.png"/>
           <p:cNvPicPr>
             <a:picLocks noChangeAspect="1"/>
           </p:cNvPicPr>
@@ -18770,8 +19492,8 @@
         </p:blipFill>
         <p:spPr>
           <a:xfrm>
-            <a:off x="5647447" y="1769363"/>
-            <a:ext cx="1594104" cy="347472"/>
+            <a:off x="5651411" y="1772412"/>
+            <a:ext cx="1575816" cy="341376"/>
           </a:xfrm>
           <a:prstGeom prst="rect">
             <a:avLst/>
@@ -18786,8 +19508,8 @@
         </p:nvSpPr>
         <p:spPr>
           <a:xfrm>
-            <a:off x="7241551" y="1714500"/>
-            <a:ext cx="1381716" cy="457200"/>
+            <a:off x="7227227" y="1714500"/>
+            <a:ext cx="1378148" cy="457200"/>
           </a:xfrm>
           <a:prstGeom prst="rect">
             <a:avLst/>
@@ -18802,11 +19524,11 @@
           <a:p>
             <a:pPr algn="l"/>
             <a:r>
-              <a:rPr sz="2600" b="0" i="0">
-                <a:solidFill>
-                  <a:srgbClr val="1A1A1A"/>
-                </a:solidFill>
-                <a:latin typeface="Century Schoolbook"/>
+              <a:rPr sz="2470" b="0" i="0">
+                <a:solidFill>
+                  <a:srgbClr val="1A1A1A"/>
+                </a:solidFill>
+                <a:latin typeface="Lexend"/>
               </a:rPr>
               <a:t>  m by  </a:t>
             </a:r>
@@ -18815,7 +19537,7 @@
       </p:sp>
       <p:pic>
         <p:nvPicPr>
-          <p:cNvPr id="11" name="Picture 10" descr="82188a05fd74b54c.png"/>
+          <p:cNvPr id="11" name="Picture 10" descr="aa26922bd492b4c7.png"/>
           <p:cNvPicPr>
             <a:picLocks noChangeAspect="1"/>
           </p:cNvPicPr>
@@ -18829,8 +19551,8 @@
         </p:blipFill>
         <p:spPr>
           <a:xfrm>
-            <a:off x="8486108" y="1767839"/>
-            <a:ext cx="1389888" cy="350520"/>
+            <a:off x="8468215" y="1772412"/>
+            <a:ext cx="1383792" cy="341376"/>
           </a:xfrm>
           <a:prstGeom prst="rect">
             <a:avLst/>
@@ -18845,8 +19567,8 @@
         </p:nvSpPr>
         <p:spPr>
           <a:xfrm>
-            <a:off x="9875996" y="1714500"/>
-            <a:ext cx="813314" cy="457200"/>
+            <a:off x="9852007" y="1714500"/>
+            <a:ext cx="778618" cy="457200"/>
           </a:xfrm>
           <a:prstGeom prst="rect">
             <a:avLst/>
@@ -18861,11 +19583,11 @@
           <a:p>
             <a:pPr algn="l"/>
             <a:r>
-              <a:rPr sz="2600" b="0" i="0">
-                <a:solidFill>
-                  <a:srgbClr val="1A1A1A"/>
-                </a:solidFill>
-                <a:latin typeface="Century Schoolbook"/>
+              <a:rPr sz="2470" b="0" i="0">
+                <a:solidFill>
+                  <a:srgbClr val="1A1A1A"/>
+                </a:solidFill>
+                <a:latin typeface="Lexend"/>
               </a:rPr>
               <a:t>  m.</a:t>
             </a:r>
@@ -18896,11 +19618,11 @@
           <a:p>
             <a:pPr algn="ctr"/>
             <a:r>
-              <a:rPr sz="2400" b="0" i="0">
-                <a:solidFill>
-                  <a:srgbClr val="1A1A1A"/>
-                </a:solidFill>
-                <a:latin typeface="Century Schoolbook"/>
+              <a:rPr sz="2280" b="0" i="0">
+                <a:solidFill>
+                  <a:srgbClr val="1A1A1A"/>
+                </a:solidFill>
+                <a:latin typeface="Lexend"/>
               </a:rPr>
               <a:t>What is its area?</a:t>
             </a:r>
@@ -18931,11 +19653,11 @@
           <a:p>
             <a:pPr algn="ctr"/>
             <a:r>
-              <a:rPr sz="2400" b="1" i="0">
-                <a:solidFill>
-                  <a:srgbClr val="1A1A1A"/>
-                </a:solidFill>
-                <a:latin typeface="Century Schoolbook"/>
+              <a:rPr sz="2280" b="1" i="0">
+                <a:solidFill>
+                  <a:srgbClr val="1A1A1A"/>
+                </a:solidFill>
+                <a:latin typeface="Lexend"/>
               </a:rPr>
               <a:t>Give the answer to the correct number of significant digits.</a:t>
             </a:r>
@@ -18984,11 +19706,11 @@
           <a:p>
             <a:pPr algn="l"/>
             <a:r>
-              <a:rPr sz="3600" b="1" i="0">
-                <a:solidFill>
-                  <a:srgbClr val="1A1A1A"/>
-                </a:solidFill>
-                <a:latin typeface="Century Schoolbook"/>
+              <a:rPr sz="3420" b="1" i="0">
+                <a:solidFill>
+                  <a:srgbClr val="1A1A1A"/>
+                </a:solidFill>
+                <a:latin typeface="Lexend"/>
               </a:rPr>
               <a:t>Example 1</a:t>
             </a:r>
@@ -19124,11 +19846,11 @@
           <a:p>
             <a:pPr algn="l"/>
             <a:r>
-              <a:rPr sz="1100" b="0" i="1">
+              <a:rPr sz="1040" b="0" i="0">
                 <a:solidFill>
                   <a:srgbClr val="6B6B6B"/>
                 </a:solidFill>
-                <a:latin typeface="Century Schoolbook"/>
+                <a:latin typeface="Lexend"/>
               </a:rPr>
               <a:t>Grade 7 Accelerated · Unit 4 · Lesson 4 — Real-World Problems and Significant Digits</a:t>
             </a:r>
@@ -19159,11 +19881,11 @@
           <a:p>
             <a:pPr algn="r"/>
             <a:r>
-              <a:rPr sz="1100" b="0" i="0">
+              <a:rPr sz="1040" b="0" i="0">
                 <a:solidFill>
                   <a:srgbClr val="6B6B6B"/>
                 </a:solidFill>
-                <a:latin typeface="Century Schoolbook"/>
+                <a:latin typeface="Lexend"/>
               </a:rPr>
               <a:t>8</a:t>
             </a:r>
@@ -19172,7 +19894,7 @@
       </p:sp>
       <p:pic>
         <p:nvPicPr>
-          <p:cNvPr id="8" name="Picture 7" descr="8831760cab574e03.png"/>
+          <p:cNvPr id="8" name="Picture 7" descr="d7b7c5abadb0c1a6.png"/>
           <p:cNvPicPr>
             <a:picLocks noChangeAspect="1"/>
           </p:cNvPicPr>
@@ -19187,7 +19909,7 @@
         <p:spPr>
           <a:xfrm>
             <a:off x="1828800" y="1920240"/>
-            <a:ext cx="5151120" cy="408432"/>
+            <a:ext cx="5151120" cy="411480"/>
           </a:xfrm>
           <a:prstGeom prst="rect">
             <a:avLst/>
@@ -19196,7 +19918,7 @@
       </p:pic>
       <p:pic>
         <p:nvPicPr>
-          <p:cNvPr id="9" name="Picture 8" descr="30f7ea4290ce6530.png"/>
+          <p:cNvPr id="9" name="Picture 8" descr="7cbf666cf8e124c7.png"/>
           <p:cNvPicPr>
             <a:picLocks noChangeAspect="1"/>
           </p:cNvPicPr>
@@ -19210,8 +19932,8 @@
         </p:blipFill>
         <p:spPr>
           <a:xfrm>
-            <a:off x="1828800" y="2602992"/>
-            <a:ext cx="5010912" cy="365760"/>
+            <a:off x="1828800" y="2606040"/>
+            <a:ext cx="5455920" cy="387096"/>
           </a:xfrm>
           <a:prstGeom prst="rect">
             <a:avLst/>
@@ -19220,7 +19942,7 @@
       </p:pic>
       <p:pic>
         <p:nvPicPr>
-          <p:cNvPr id="10" name="Picture 9" descr="ae705d3f714a20af.png"/>
+          <p:cNvPr id="10" name="Picture 9" descr="a0e46ac6ee16d3ec.png"/>
           <p:cNvPicPr>
             <a:picLocks noChangeAspect="1"/>
           </p:cNvPicPr>
@@ -19234,8 +19956,8 @@
         </p:blipFill>
         <p:spPr>
           <a:xfrm>
-            <a:off x="1828800" y="3243072"/>
-            <a:ext cx="4517136" cy="402336"/>
+            <a:off x="1828800" y="3267456"/>
+            <a:ext cx="4602480" cy="405384"/>
           </a:xfrm>
           <a:prstGeom prst="rect">
             <a:avLst/>
@@ -19266,29 +19988,29 @@
           <a:p>
             <a:pPr algn="ctr"/>
             <a:r>
-              <a:rPr sz="3200" b="1" i="0">
+              <a:rPr sz="3040" b="1" i="0">
                 <a:solidFill>
                   <a:srgbClr val="9E1B32"/>
                 </a:solidFill>
-                <a:latin typeface="Century Schoolbook"/>
+                <a:latin typeface="Lexend"/>
               </a:rPr>
               <a:t>Answer:   1.1 × 10</a:t>
             </a:r>
             <a:r>
-              <a:rPr sz="3200" b="1" i="0" baseline="30000">
+              <a:rPr sz="3040" b="1" i="0" baseline="30000">
                 <a:solidFill>
                   <a:srgbClr val="9E1B32"/>
                 </a:solidFill>
-                <a:latin typeface="Century Schoolbook"/>
+                <a:latin typeface="Lexend"/>
               </a:rPr>
               <a:t>4</a:t>
             </a:r>
             <a:r>
-              <a:rPr sz="3200" b="1" i="0">
+              <a:rPr sz="3040" b="1" i="0">
                 <a:solidFill>
                   <a:srgbClr val="9E1B32"/>
                 </a:solidFill>
-                <a:latin typeface="Century Schoolbook"/>
+                <a:latin typeface="Lexend"/>
               </a:rPr>
               <a:t> square meters</a:t>
             </a:r>
@@ -19337,11 +20059,11 @@
           <a:p>
             <a:pPr algn="l"/>
             <a:r>
-              <a:rPr sz="3600" b="1" i="0">
-                <a:solidFill>
-                  <a:srgbClr val="1A1A1A"/>
-                </a:solidFill>
-                <a:latin typeface="Century Schoolbook"/>
+              <a:rPr sz="3420" b="1" i="0">
+                <a:solidFill>
+                  <a:srgbClr val="1A1A1A"/>
+                </a:solidFill>
+                <a:latin typeface="Lexend"/>
               </a:rPr>
               <a:t>Your Turn</a:t>
             </a:r>
@@ -19477,11 +20199,11 @@
           <a:p>
             <a:pPr algn="l"/>
             <a:r>
-              <a:rPr sz="1100" b="0" i="1">
+              <a:rPr sz="1040" b="0" i="0">
                 <a:solidFill>
                   <a:srgbClr val="6B6B6B"/>
                 </a:solidFill>
-                <a:latin typeface="Century Schoolbook"/>
+                <a:latin typeface="Lexend"/>
               </a:rPr>
               <a:t>Grade 7 Accelerated · Unit 4 · Lesson 4 — Real-World Problems and Significant Digits</a:t>
             </a:r>
@@ -19512,11 +20234,11 @@
           <a:p>
             <a:pPr algn="r"/>
             <a:r>
-              <a:rPr sz="1100" b="0" i="0">
+              <a:rPr sz="1040" b="0" i="0">
                 <a:solidFill>
                   <a:srgbClr val="6B6B6B"/>
                 </a:solidFill>
-                <a:latin typeface="Century Schoolbook"/>
+                <a:latin typeface="Lexend"/>
               </a:rPr>
               <a:t>9</a:t>
             </a:r>
@@ -19531,8 +20253,8 @@
         </p:nvSpPr>
         <p:spPr>
           <a:xfrm>
-            <a:off x="1728695" y="2186940"/>
-            <a:ext cx="3101434" cy="457200"/>
+            <a:off x="1770625" y="1583436"/>
+            <a:ext cx="3077173" cy="457200"/>
           </a:xfrm>
           <a:prstGeom prst="rect">
             <a:avLst/>
@@ -19547,11 +20269,11 @@
           <a:p>
             <a:pPr algn="l"/>
             <a:r>
-              <a:rPr sz="2600" b="0" i="0">
-                <a:solidFill>
-                  <a:srgbClr val="1A1A1A"/>
-                </a:solidFill>
-                <a:latin typeface="Century Schoolbook"/>
+              <a:rPr sz="2470" b="0" i="0">
+                <a:solidFill>
+                  <a:srgbClr val="1A1A1A"/>
+                </a:solidFill>
+                <a:latin typeface="Lexend"/>
               </a:rPr>
               <a:t>A field measures  </a:t>
             </a:r>
@@ -19560,7 +20282,7 @@
       </p:sp>
       <p:pic>
         <p:nvPicPr>
-          <p:cNvPr id="9" name="Picture 8" descr="d18dbc9ddd0d98f4.png"/>
+          <p:cNvPr id="9" name="Picture 8" descr="1645c9c47acde3ce.png"/>
           <p:cNvPicPr>
             <a:picLocks noChangeAspect="1"/>
           </p:cNvPicPr>
@@ -19574,8 +20296,8 @@
         </p:blipFill>
         <p:spPr>
           <a:xfrm>
-            <a:off x="4692969" y="2194560"/>
-            <a:ext cx="1786128" cy="441960"/>
+            <a:off x="4710639" y="1600200"/>
+            <a:ext cx="1792224" cy="423672"/>
           </a:xfrm>
           <a:prstGeom prst="rect">
             <a:avLst/>
@@ -19590,8 +20312,8 @@
         </p:nvSpPr>
         <p:spPr>
           <a:xfrm>
-            <a:off x="6479097" y="2186940"/>
-            <a:ext cx="1381716" cy="457200"/>
+            <a:off x="6502863" y="1583436"/>
+            <a:ext cx="1378148" cy="457200"/>
           </a:xfrm>
           <a:prstGeom prst="rect">
             <a:avLst/>
@@ -19606,11 +20328,11 @@
           <a:p>
             <a:pPr algn="l"/>
             <a:r>
-              <a:rPr sz="2600" b="0" i="0">
-                <a:solidFill>
-                  <a:srgbClr val="1A1A1A"/>
-                </a:solidFill>
-                <a:latin typeface="Century Schoolbook"/>
+              <a:rPr sz="2470" b="0" i="0">
+                <a:solidFill>
+                  <a:srgbClr val="1A1A1A"/>
+                </a:solidFill>
+                <a:latin typeface="Lexend"/>
               </a:rPr>
               <a:t>  m by  </a:t>
             </a:r>
@@ -19619,7 +20341,7 @@
       </p:sp>
       <p:pic>
         <p:nvPicPr>
-          <p:cNvPr id="11" name="Picture 10" descr="e2afadd128af9cbc.png"/>
+          <p:cNvPr id="11" name="Picture 10" descr="debdcb1f492603f6.png"/>
           <p:cNvPicPr>
             <a:picLocks noChangeAspect="1"/>
           </p:cNvPicPr>
@@ -19633,8 +20355,8 @@
         </p:blipFill>
         <p:spPr>
           <a:xfrm>
-            <a:off x="7723653" y="2194560"/>
-            <a:ext cx="2033015" cy="441960"/>
+            <a:off x="7743851" y="1600200"/>
+            <a:ext cx="2005584" cy="423672"/>
           </a:xfrm>
           <a:prstGeom prst="rect">
             <a:avLst/>
@@ -19649,8 +20371,8 @@
         </p:nvSpPr>
         <p:spPr>
           <a:xfrm>
-            <a:off x="9756669" y="2186940"/>
-            <a:ext cx="813314" cy="457200"/>
+            <a:off x="9749435" y="1583436"/>
+            <a:ext cx="778618" cy="457200"/>
           </a:xfrm>
           <a:prstGeom prst="rect">
             <a:avLst/>
@@ -19665,11 +20387,11 @@
           <a:p>
             <a:pPr algn="l"/>
             <a:r>
-              <a:rPr sz="2600" b="0" i="0">
-                <a:solidFill>
-                  <a:srgbClr val="1A1A1A"/>
-                </a:solidFill>
-                <a:latin typeface="Century Schoolbook"/>
+              <a:rPr sz="2470" b="0" i="0">
+                <a:solidFill>
+                  <a:srgbClr val="1A1A1A"/>
+                </a:solidFill>
+                <a:latin typeface="Lexend"/>
               </a:rPr>
               <a:t>  m.</a:t>
             </a:r>
@@ -19684,7 +20406,7 @@
         </p:nvSpPr>
         <p:spPr>
           <a:xfrm>
-            <a:off x="777240" y="2956560"/>
+            <a:off x="777240" y="2343912"/>
             <a:ext cx="10607040" cy="429370"/>
           </a:xfrm>
           <a:prstGeom prst="rect">
@@ -19700,11 +20422,11 @@
           <a:p>
             <a:pPr algn="ctr"/>
             <a:r>
-              <a:rPr sz="2400" b="0" i="0">
-                <a:solidFill>
-                  <a:srgbClr val="1A1A1A"/>
-                </a:solidFill>
-                <a:latin typeface="Century Schoolbook"/>
+              <a:rPr sz="2280" b="0" i="0">
+                <a:solidFill>
+                  <a:srgbClr val="1A1A1A"/>
+                </a:solidFill>
+                <a:latin typeface="Lexend"/>
               </a:rPr>
               <a:t>What is its area?</a:t>
             </a:r>

--- a/a7/packages/A7 Unit 4 - Solving Problems with Rational Numbers/Lessons/4.04/A7 4.04 Real-World Problems and Significant Digits - Slides.pptx
+++ b/a7/packages/A7 Unit 4 - Solving Problems with Rational Numbers/Lessons/4.04/A7 4.04 Real-World Problems and Significant Digits - Slides.pptx
@@ -4741,7 +4741,7 @@
       </p:pic>
       <p:pic>
         <p:nvPicPr>
-          <p:cNvPr id="9" name="Picture 8" descr="4fefc32bca2ec8cd.png"/>
+          <p:cNvPr id="9" name="Picture 8" descr="bb89500147edd46c.png"/>
           <p:cNvPicPr>
             <a:picLocks noChangeAspect="1"/>
           </p:cNvPicPr>
@@ -4756,7 +4756,7 @@
         <p:spPr>
           <a:xfrm>
             <a:off x="1828800" y="2474976"/>
-            <a:ext cx="4276344" cy="417576"/>
+            <a:ext cx="3895344" cy="417576"/>
           </a:xfrm>
           <a:prstGeom prst="rect">
             <a:avLst/>
@@ -4765,7 +4765,7 @@
       </p:pic>
       <p:pic>
         <p:nvPicPr>
-          <p:cNvPr id="10" name="Picture 9" descr="6b86362e5b517e0b.png"/>
+          <p:cNvPr id="10" name="Picture 9" descr="675b2dce7029d49a.png"/>
           <p:cNvPicPr>
             <a:picLocks noChangeAspect="1"/>
           </p:cNvPicPr>
@@ -4780,7 +4780,7 @@
         <p:spPr>
           <a:xfrm>
             <a:off x="1828800" y="3166871"/>
-            <a:ext cx="6184392" cy="338328"/>
+            <a:ext cx="6041136" cy="338328"/>
           </a:xfrm>
           <a:prstGeom prst="rect">
             <a:avLst/>
@@ -19918,7 +19918,7 @@
       </p:pic>
       <p:pic>
         <p:nvPicPr>
-          <p:cNvPr id="9" name="Picture 8" descr="7cbf666cf8e124c7.png"/>
+          <p:cNvPr id="9" name="Picture 8" descr="a08d6ab77e172398.png"/>
           <p:cNvPicPr>
             <a:picLocks noChangeAspect="1"/>
           </p:cNvPicPr>
@@ -19933,7 +19933,7 @@
         <p:spPr>
           <a:xfrm>
             <a:off x="1828800" y="2606040"/>
-            <a:ext cx="5455920" cy="387096"/>
+            <a:ext cx="6248400" cy="387096"/>
           </a:xfrm>
           <a:prstGeom prst="rect">
             <a:avLst/>
@@ -19942,7 +19942,7 @@
       </p:pic>
       <p:pic>
         <p:nvPicPr>
-          <p:cNvPr id="10" name="Picture 9" descr="a0e46ac6ee16d3ec.png"/>
+          <p:cNvPr id="10" name="Picture 9" descr="a93125fbd09b82b7.png"/>
           <p:cNvPicPr>
             <a:picLocks noChangeAspect="1"/>
           </p:cNvPicPr>
@@ -19957,7 +19957,7 @@
         <p:spPr>
           <a:xfrm>
             <a:off x="1828800" y="3267456"/>
-            <a:ext cx="4602480" cy="405384"/>
+            <a:ext cx="4462272" cy="405384"/>
           </a:xfrm>
           <a:prstGeom prst="rect">
             <a:avLst/>

--- a/a7/packages/A7 Unit 4 - Solving Problems with Rational Numbers/Lessons/4.04/A7 4.04 Real-World Problems and Significant Digits - Slides.pptx
+++ b/a7/packages/A7 Unit 4 - Solving Problems with Rational Numbers/Lessons/4.04/A7 4.04 Real-World Problems and Significant Digits - Slides.pptx
@@ -14968,7 +14968,7 @@
                 </a:solidFill>
                 <a:latin typeface="Lexend"/>
               </a:rPr>
-              <a:t>Ellis says: 1,234 has 4 significant digits and 5.6 has 2,</a:t>
+              <a:t>Ellis says: 9,145 has 4 significant digits and 4.8 has 2,</a:t>
             </a:r>
           </a:p>
         </p:txBody>
@@ -14981,7 +14981,7 @@
         </p:nvSpPr>
         <p:spPr>
           <a:xfrm>
-            <a:off x="1385004" y="2746579"/>
+            <a:off x="1340808" y="2746579"/>
             <a:ext cx="2133542" cy="457200"/>
           </a:xfrm>
           <a:prstGeom prst="rect">
@@ -15010,7 +15010,7 @@
       </p:sp>
       <p:pic>
         <p:nvPicPr>
-          <p:cNvPr id="10" name="Picture 9" descr="6cd48108d25e51b0.png"/>
+          <p:cNvPr id="10" name="Picture 9" descr="9630dac2daa1ad10.png"/>
           <p:cNvPicPr>
             <a:picLocks noChangeAspect="1"/>
           </p:cNvPicPr>
@@ -15024,8 +15024,8 @@
         </p:blipFill>
         <p:spPr>
           <a:xfrm>
-            <a:off x="3381386" y="2801443"/>
-            <a:ext cx="1798320" cy="347472"/>
+            <a:off x="3337190" y="2801443"/>
+            <a:ext cx="1859280" cy="347472"/>
           </a:xfrm>
           <a:prstGeom prst="rect">
             <a:avLst/>
@@ -15040,7 +15040,7 @@
         </p:nvSpPr>
         <p:spPr>
           <a:xfrm>
-            <a:off x="5179706" y="2746579"/>
+            <a:off x="5196470" y="2746579"/>
             <a:ext cx="4234719" cy="457200"/>
           </a:xfrm>
           <a:prstGeom prst="rect">
@@ -15069,7 +15069,7 @@
       </p:sp>
       <p:pic>
         <p:nvPicPr>
-          <p:cNvPr id="12" name="Picture 11" descr="ebc5deb6b2afefa1.png"/>
+          <p:cNvPr id="12" name="Picture 11" descr="ca0b1ffd8d5f7502.png"/>
           <p:cNvPicPr>
             <a:picLocks noChangeAspect="1"/>
           </p:cNvPicPr>
@@ -15083,8 +15083,8 @@
         </p:blipFill>
         <p:spPr>
           <a:xfrm>
-            <a:off x="9277265" y="2806015"/>
-            <a:ext cx="1350264" cy="338328"/>
+            <a:off x="9294029" y="2806015"/>
+            <a:ext cx="1377696" cy="338328"/>
           </a:xfrm>
           <a:prstGeom prst="rect">
             <a:avLst/>
@@ -15099,7 +15099,7 @@
         </p:nvSpPr>
         <p:spPr>
           <a:xfrm>
-            <a:off x="10627529" y="2746579"/>
+            <a:off x="10671725" y="2746579"/>
             <a:ext cx="286146" cy="457200"/>
           </a:xfrm>
           <a:prstGeom prst="rect">
@@ -15454,7 +15454,7 @@
                 </a:solidFill>
                 <a:latin typeface="Lexend"/>
               </a:rPr>
-              <a:t>Ellis says: 1,234 has 4 significant digits and 5.6 has 2,</a:t>
+              <a:t>Ellis says: 9,145 has 4 significant digits and 4.8 has 2,</a:t>
             </a:r>
           </a:p>
         </p:txBody>
@@ -15467,7 +15467,7 @@
         </p:nvSpPr>
         <p:spPr>
           <a:xfrm>
-            <a:off x="1385004" y="2655139"/>
+            <a:off x="1340808" y="2655139"/>
             <a:ext cx="2133542" cy="457200"/>
           </a:xfrm>
           <a:prstGeom prst="rect">
@@ -15496,7 +15496,7 @@
       </p:sp>
       <p:pic>
         <p:nvPicPr>
-          <p:cNvPr id="10" name="Picture 9" descr="a72db1300e8221a9.png"/>
+          <p:cNvPr id="10" name="Picture 9" descr="76e99574fb25931b.png"/>
           <p:cNvPicPr>
             <a:picLocks noChangeAspect="1"/>
           </p:cNvPicPr>
@@ -15510,8 +15510,8 @@
         </p:blipFill>
         <p:spPr>
           <a:xfrm>
-            <a:off x="3381386" y="2708479"/>
-            <a:ext cx="1795272" cy="350520"/>
+            <a:off x="3337190" y="2708479"/>
+            <a:ext cx="1859280" cy="350520"/>
           </a:xfrm>
           <a:prstGeom prst="rect">
             <a:avLst/>
@@ -15526,7 +15526,7 @@
         </p:nvSpPr>
         <p:spPr>
           <a:xfrm>
-            <a:off x="5176658" y="2655139"/>
+            <a:off x="5196470" y="2655139"/>
             <a:ext cx="4234719" cy="457200"/>
           </a:xfrm>
           <a:prstGeom prst="rect">
@@ -15555,7 +15555,7 @@
       </p:sp>
       <p:pic>
         <p:nvPicPr>
-          <p:cNvPr id="12" name="Picture 11" descr="127604dc103a6844.png"/>
+          <p:cNvPr id="12" name="Picture 11" descr="4947c6a9376ae7a3.png"/>
           <p:cNvPicPr>
             <a:picLocks noChangeAspect="1"/>
           </p:cNvPicPr>
@@ -15569,8 +15569,8 @@
         </p:blipFill>
         <p:spPr>
           <a:xfrm>
-            <a:off x="9274217" y="2714575"/>
-            <a:ext cx="1353312" cy="338328"/>
+            <a:off x="9294029" y="2714575"/>
+            <a:ext cx="1377696" cy="338328"/>
           </a:xfrm>
           <a:prstGeom prst="rect">
             <a:avLst/>
@@ -15585,7 +15585,7 @@
         </p:nvSpPr>
         <p:spPr>
           <a:xfrm>
-            <a:off x="10627529" y="2655139"/>
+            <a:off x="10671725" y="2655139"/>
             <a:ext cx="286146" cy="457200"/>
           </a:xfrm>
           <a:prstGeom prst="rect">
@@ -15655,7 +15655,7 @@
         </p:nvSpPr>
         <p:spPr>
           <a:xfrm>
-            <a:off x="1999219" y="3988970"/>
+            <a:off x="1997221" y="3988970"/>
             <a:ext cx="7720044" cy="457200"/>
           </a:xfrm>
           <a:prstGeom prst="rect">
@@ -15684,7 +15684,7 @@
       </p:sp>
       <p:pic>
         <p:nvPicPr>
-          <p:cNvPr id="16" name="Picture 15" descr="d1e6d085c4e19a35.png"/>
+          <p:cNvPr id="16" name="Picture 15" descr="990cd9202cebfca1.png"/>
           <p:cNvPicPr>
             <a:picLocks noChangeAspect="1"/>
           </p:cNvPicPr>
@@ -15698,8 +15698,8 @@
         </p:blipFill>
         <p:spPr>
           <a:xfrm>
-            <a:off x="2054083" y="4586378"/>
-            <a:ext cx="2596896" cy="268224"/>
+            <a:off x="2052085" y="4586378"/>
+            <a:ext cx="2673096" cy="268224"/>
           </a:xfrm>
           <a:prstGeom prst="rect">
             <a:avLst/>
@@ -15714,8 +15714,8 @@
         </p:nvSpPr>
         <p:spPr>
           <a:xfrm>
-            <a:off x="1999219" y="4994810"/>
-            <a:ext cx="8300240" cy="457200"/>
+            <a:off x="1997221" y="4994810"/>
+            <a:ext cx="8304236" cy="457200"/>
           </a:xfrm>
           <a:prstGeom prst="rect">
             <a:avLst/>
@@ -15736,7 +15736,7 @@
                 </a:solidFill>
                 <a:latin typeface="Lexend"/>
               </a:rPr>
-              <a:t>1,234 stops at the ones place, so round to ones:  1,240</a:t>
+              <a:t>9,145 stops at the ones place, so round to ones:  9,150</a:t>
             </a:r>
           </a:p>
         </p:txBody>
@@ -15771,7 +15771,7 @@
                 </a:solidFill>
                 <a:latin typeface="Lexend"/>
               </a:rPr>
-              <a:t>Answer:   1,240 = 1.240 × 10</a:t>
+              <a:t>Answer:   9,150 = 9.150 × 10</a:t>
             </a:r>
             <a:r>
               <a:rPr sz="3040" b="1" i="0" baseline="30000">

--- a/a7/packages/A7 Unit 4 - Solving Problems with Rational Numbers/Lessons/4.04/A7 4.04 Real-World Problems and Significant Digits - Slides.pptx
+++ b/a7/packages/A7 Unit 4 - Solving Problems with Rational Numbers/Lessons/4.04/A7 4.04 Real-World Problems and Significant Digits - Slides.pptx
@@ -3673,8 +3673,8 @@
         </p:nvSpPr>
         <p:spPr>
           <a:xfrm>
-            <a:off x="1770625" y="1583436"/>
-            <a:ext cx="3077173" cy="457200"/>
+            <a:off x="2613353" y="1577340"/>
+            <a:ext cx="2856615" cy="457200"/>
           </a:xfrm>
           <a:prstGeom prst="rect">
             <a:avLst/>
@@ -3689,7 +3689,7 @@
           <a:p>
             <a:pPr algn="l"/>
             <a:r>
-              <a:rPr sz="2470" b="0" i="0">
+              <a:rPr sz="2280" b="0" i="0">
                 <a:solidFill>
                   <a:srgbClr val="1A1A1A"/>
                 </a:solidFill>
@@ -3702,7 +3702,7 @@
       </p:sp>
       <p:pic>
         <p:nvPicPr>
-          <p:cNvPr id="9" name="Picture 8" descr="1645c9c47acde3ce.png"/>
+          <p:cNvPr id="9" name="Picture 8" descr="44c2bf593fa02489.png"/>
           <p:cNvPicPr>
             <a:picLocks noChangeAspect="1"/>
           </p:cNvPicPr>
@@ -3716,8 +3716,8 @@
         </p:blipFill>
         <p:spPr>
           <a:xfrm>
-            <a:off x="4710639" y="1600200"/>
-            <a:ext cx="1792224" cy="423672"/>
+            <a:off x="5332809" y="1647825"/>
+            <a:ext cx="1163955" cy="277368"/>
           </a:xfrm>
           <a:prstGeom prst="rect">
             <a:avLst/>
@@ -3732,8 +3732,8 @@
         </p:nvSpPr>
         <p:spPr>
           <a:xfrm>
-            <a:off x="6502863" y="1583436"/>
-            <a:ext cx="1378148" cy="457200"/>
+            <a:off x="6496764" y="1577340"/>
+            <a:ext cx="1288226" cy="457200"/>
           </a:xfrm>
           <a:prstGeom prst="rect">
             <a:avLst/>
@@ -3748,7 +3748,7 @@
           <a:p>
             <a:pPr algn="l"/>
             <a:r>
-              <a:rPr sz="2470" b="0" i="0">
+              <a:rPr sz="2280" b="0" i="0">
                 <a:solidFill>
                   <a:srgbClr val="1A1A1A"/>
                 </a:solidFill>
@@ -3761,7 +3761,7 @@
       </p:sp>
       <p:pic>
         <p:nvPicPr>
-          <p:cNvPr id="11" name="Picture 10" descr="debdcb1f492603f6.png"/>
+          <p:cNvPr id="11" name="Picture 10" descr="14b23867f6fdf483.png"/>
           <p:cNvPicPr>
             <a:picLocks noChangeAspect="1"/>
           </p:cNvPicPr>
@@ -3775,8 +3775,8 @@
         </p:blipFill>
         <p:spPr>
           <a:xfrm>
-            <a:off x="7743851" y="1600200"/>
-            <a:ext cx="2005584" cy="423672"/>
+            <a:off x="7647830" y="1647825"/>
+            <a:ext cx="1302639" cy="277368"/>
           </a:xfrm>
           <a:prstGeom prst="rect">
             <a:avLst/>
@@ -3791,8 +3791,8 @@
         </p:nvSpPr>
         <p:spPr>
           <a:xfrm>
-            <a:off x="9749435" y="1583436"/>
-            <a:ext cx="778618" cy="457200"/>
+            <a:off x="8950469" y="1577340"/>
+            <a:ext cx="734856" cy="457200"/>
           </a:xfrm>
           <a:prstGeom prst="rect">
             <a:avLst/>
@@ -3807,7 +3807,7 @@
           <a:p>
             <a:pPr algn="l"/>
             <a:r>
-              <a:rPr sz="2470" b="0" i="0">
+              <a:rPr sz="2280" b="0" i="0">
                 <a:solidFill>
                   <a:srgbClr val="1A1A1A"/>
                 </a:solidFill>
@@ -3826,7 +3826,7 @@
         </p:nvSpPr>
         <p:spPr>
           <a:xfrm>
-            <a:off x="777240" y="2343912"/>
+            <a:off x="777240" y="2286000"/>
             <a:ext cx="10607040" cy="429370"/>
           </a:xfrm>
           <a:prstGeom prst="rect">
@@ -4089,8 +4089,8 @@
         </p:nvSpPr>
         <p:spPr>
           <a:xfrm>
-            <a:off x="1769101" y="1583436"/>
-            <a:ext cx="3077173" cy="457200"/>
+            <a:off x="2612115" y="1577340"/>
+            <a:ext cx="2856615" cy="457200"/>
           </a:xfrm>
           <a:prstGeom prst="rect">
             <a:avLst/>
@@ -4105,7 +4105,7 @@
           <a:p>
             <a:pPr algn="l"/>
             <a:r>
-              <a:rPr sz="2470" b="0" i="0">
+              <a:rPr sz="2280" b="0" i="0">
                 <a:solidFill>
                   <a:srgbClr val="1A1A1A"/>
                 </a:solidFill>
@@ -4118,7 +4118,7 @@
       </p:sp>
       <p:pic>
         <p:nvPicPr>
-          <p:cNvPr id="9" name="Picture 8" descr="19219eb587cce93d.png"/>
+          <p:cNvPr id="9" name="Picture 8" descr="87a1fbfe2ae1b81c.png"/>
           <p:cNvPicPr>
             <a:picLocks noChangeAspect="1"/>
           </p:cNvPicPr>
@@ -4132,8 +4132,8 @@
         </p:blipFill>
         <p:spPr>
           <a:xfrm>
-            <a:off x="4709115" y="1600200"/>
-            <a:ext cx="1792224" cy="423672"/>
+            <a:off x="5331570" y="1647825"/>
+            <a:ext cx="1163955" cy="277368"/>
           </a:xfrm>
           <a:prstGeom prst="rect">
             <a:avLst/>
@@ -4148,8 +4148,8 @@
         </p:nvSpPr>
         <p:spPr>
           <a:xfrm>
-            <a:off x="6501339" y="1583436"/>
-            <a:ext cx="1378148" cy="457200"/>
+            <a:off x="6495525" y="1577340"/>
+            <a:ext cx="1288226" cy="457200"/>
           </a:xfrm>
           <a:prstGeom prst="rect">
             <a:avLst/>
@@ -4164,7 +4164,7 @@
           <a:p>
             <a:pPr algn="l"/>
             <a:r>
-              <a:rPr sz="2470" b="0" i="0">
+              <a:rPr sz="2280" b="0" i="0">
                 <a:solidFill>
                   <a:srgbClr val="1A1A1A"/>
                 </a:solidFill>
@@ -4177,7 +4177,7 @@
       </p:sp>
       <p:pic>
         <p:nvPicPr>
-          <p:cNvPr id="11" name="Picture 10" descr="acda4b72b75ce9a7.png"/>
+          <p:cNvPr id="11" name="Picture 10" descr="f5dd2a15c5c66d50.png"/>
           <p:cNvPicPr>
             <a:picLocks noChangeAspect="1"/>
           </p:cNvPicPr>
@@ -4191,8 +4191,8 @@
         </p:blipFill>
         <p:spPr>
           <a:xfrm>
-            <a:off x="7742327" y="1600200"/>
-            <a:ext cx="2008632" cy="423672"/>
+            <a:off x="7646592" y="1647825"/>
+            <a:ext cx="1305115" cy="277368"/>
           </a:xfrm>
           <a:prstGeom prst="rect">
             <a:avLst/>
@@ -4207,8 +4207,8 @@
         </p:nvSpPr>
         <p:spPr>
           <a:xfrm>
-            <a:off x="9750959" y="1583436"/>
-            <a:ext cx="778618" cy="457200"/>
+            <a:off x="8951707" y="1577340"/>
+            <a:ext cx="734856" cy="457200"/>
           </a:xfrm>
           <a:prstGeom prst="rect">
             <a:avLst/>
@@ -4223,7 +4223,7 @@
           <a:p>
             <a:pPr algn="l"/>
             <a:r>
-              <a:rPr sz="2470" b="0" i="0">
+              <a:rPr sz="2280" b="0" i="0">
                 <a:solidFill>
                   <a:srgbClr val="1A1A1A"/>
                 </a:solidFill>
@@ -4242,7 +4242,7 @@
         </p:nvSpPr>
         <p:spPr>
           <a:xfrm>
-            <a:off x="777240" y="2343912"/>
+            <a:off x="777240" y="2286000"/>
             <a:ext cx="10607040" cy="429370"/>
           </a:xfrm>
           <a:prstGeom prst="rect">
@@ -4271,7 +4271,7 @@
       </p:sp>
       <p:pic>
         <p:nvPicPr>
-          <p:cNvPr id="14" name="Picture 13" descr="94a8240adc6e96da.png"/>
+          <p:cNvPr id="14" name="Picture 13" descr="df377020efabcee0.png"/>
           <p:cNvPicPr>
             <a:picLocks noChangeAspect="1"/>
           </p:cNvPicPr>
@@ -4285,8 +4285,8 @@
         </p:blipFill>
         <p:spPr>
           <a:xfrm>
-            <a:off x="2765957" y="3055222"/>
-            <a:ext cx="2185416" cy="213360"/>
+            <a:off x="2768481" y="3010645"/>
+            <a:ext cx="2186606" cy="214693"/>
           </a:xfrm>
           <a:prstGeom prst="rect">
             <a:avLst/>
@@ -4301,7 +4301,7 @@
         </p:nvSpPr>
         <p:spPr>
           <a:xfrm>
-            <a:off x="4951373" y="2933302"/>
+            <a:off x="4955087" y="2875390"/>
             <a:ext cx="1320048" cy="457200"/>
           </a:xfrm>
           <a:prstGeom prst="rect">
@@ -4330,7 +4330,7 @@
       </p:sp>
       <p:pic>
         <p:nvPicPr>
-          <p:cNvPr id="16" name="Picture 15" descr="6dc7d095c18b4262.png"/>
+          <p:cNvPr id="16" name="Picture 15" descr="1f20c58a7a5bfe36.png"/>
           <p:cNvPicPr>
             <a:picLocks noChangeAspect="1"/>
           </p:cNvPicPr>
@@ -4344,8 +4344,8 @@
         </p:blipFill>
         <p:spPr>
           <a:xfrm>
-            <a:off x="6134261" y="3030838"/>
-            <a:ext cx="1859280" cy="262128"/>
+            <a:off x="6137976" y="2963972"/>
+            <a:ext cx="1855231" cy="261366"/>
           </a:xfrm>
           <a:prstGeom prst="rect">
             <a:avLst/>
@@ -4368,7 +4368,7 @@
         </p:blipFill>
         <p:spPr>
           <a:xfrm>
-            <a:off x="2765957" y="3509374"/>
+            <a:off x="2768481" y="3467559"/>
             <a:ext cx="2758440" cy="310896"/>
           </a:xfrm>
           <a:prstGeom prst="rect">
@@ -4384,7 +4384,7 @@
         </p:nvSpPr>
         <p:spPr>
           <a:xfrm>
-            <a:off x="2711093" y="3939142"/>
+            <a:off x="2713617" y="3881230"/>
             <a:ext cx="5849317" cy="457200"/>
           </a:xfrm>
           <a:prstGeom prst="rect">
@@ -4413,7 +4413,7 @@
       </p:sp>
       <p:pic>
         <p:nvPicPr>
-          <p:cNvPr id="19" name="Picture 18" descr="7eec2dad996b77df.png"/>
+          <p:cNvPr id="19" name="Picture 18" descr="0fcaf31c99643225.png"/>
           <p:cNvPicPr>
             <a:picLocks noChangeAspect="1"/>
           </p:cNvPicPr>
@@ -4427,8 +4427,8 @@
         </p:blipFill>
         <p:spPr>
           <a:xfrm>
-            <a:off x="8423250" y="4039726"/>
-            <a:ext cx="1030224" cy="256032"/>
+            <a:off x="8425774" y="3974480"/>
+            <a:ext cx="1022127" cy="256698"/>
           </a:xfrm>
           <a:prstGeom prst="rect">
             <a:avLst/>
@@ -4724,8 +4724,8 @@
         </p:nvSpPr>
         <p:spPr>
           <a:xfrm>
-            <a:off x="1989331" y="1714500"/>
-            <a:ext cx="3203813" cy="457200"/>
+            <a:off x="2397036" y="1714500"/>
+            <a:ext cx="2973613" cy="457200"/>
           </a:xfrm>
           <a:prstGeom prst="rect">
             <a:avLst/>
@@ -4740,7 +4740,7 @@
           <a:p>
             <a:pPr algn="l"/>
             <a:r>
-              <a:rPr sz="2470" b="0" i="0">
+              <a:rPr sz="2280" b="0" i="0">
                 <a:solidFill>
                   <a:srgbClr val="1A1A1A"/>
                 </a:solidFill>
@@ -4767,8 +4767,8 @@
         </p:blipFill>
         <p:spPr>
           <a:xfrm>
-            <a:off x="5055985" y="1773936"/>
-            <a:ext cx="1783080" cy="338328"/>
+            <a:off x="5233490" y="1787461"/>
+            <a:ext cx="1448752" cy="274891"/>
           </a:xfrm>
           <a:prstGeom prst="rect">
             <a:avLst/>
@@ -4783,8 +4783,8 @@
         </p:nvSpPr>
         <p:spPr>
           <a:xfrm>
-            <a:off x="6839065" y="1714500"/>
-            <a:ext cx="3470282" cy="457200"/>
+            <a:off x="6682242" y="1714500"/>
+            <a:ext cx="3219400" cy="457200"/>
           </a:xfrm>
           <a:prstGeom prst="rect">
             <a:avLst/>
@@ -4799,7 +4799,7 @@
           <a:p>
             <a:pPr algn="l"/>
             <a:r>
-              <a:rPr sz="2470" b="0" i="0">
+              <a:rPr sz="2280" b="0" i="0">
                 <a:solidFill>
                   <a:srgbClr val="1A1A1A"/>
                 </a:solidFill>
@@ -4826,8 +4826,8 @@
         </p:blipFill>
         <p:spPr>
           <a:xfrm>
-            <a:off x="3160625" y="2506980"/>
-            <a:ext cx="1999487" cy="335280"/>
+            <a:off x="3493001" y="2475738"/>
+            <a:ext cx="1624584" cy="272415"/>
           </a:xfrm>
           <a:prstGeom prst="rect">
             <a:avLst/>
@@ -4842,8 +4842,8 @@
         </p:nvSpPr>
         <p:spPr>
           <a:xfrm>
-            <a:off x="5160113" y="2446020"/>
-            <a:ext cx="3977941" cy="457200"/>
+            <a:off x="5117585" y="2400300"/>
+            <a:ext cx="3688093" cy="457200"/>
           </a:xfrm>
           <a:prstGeom prst="rect">
             <a:avLst/>
@@ -4858,7 +4858,7 @@
           <a:p>
             <a:pPr algn="l"/>
             <a:r>
-              <a:rPr sz="2470" b="0" i="0">
+              <a:rPr sz="2280" b="0" i="0">
                 <a:solidFill>
                   <a:srgbClr val="1A1A1A"/>
                 </a:solidFill>
@@ -4877,7 +4877,7 @@
         </p:nvSpPr>
         <p:spPr>
           <a:xfrm>
-            <a:off x="777240" y="3383280"/>
+            <a:off x="777240" y="3291840"/>
             <a:ext cx="10607040" cy="429370"/>
           </a:xfrm>
           <a:prstGeom prst="rect">
@@ -5493,8 +5493,8 @@
         </p:nvSpPr>
         <p:spPr>
           <a:xfrm>
-            <a:off x="3509636" y="1581912"/>
-            <a:ext cx="1819665" cy="457200"/>
+            <a:off x="3978573" y="1577340"/>
+            <a:ext cx="1695822" cy="457200"/>
           </a:xfrm>
           <a:prstGeom prst="rect">
             <a:avLst/>
@@ -5509,7 +5509,7 @@
           <a:p>
             <a:pPr algn="l"/>
             <a:r>
-              <a:rPr sz="2470" b="0" i="0">
+              <a:rPr sz="2280" b="0" i="0">
                 <a:solidFill>
                   <a:srgbClr val="1A1A1A"/>
                 </a:solidFill>
@@ -5522,7 +5522,7 @@
       </p:sp>
       <p:pic>
         <p:nvPicPr>
-          <p:cNvPr id="9" name="Picture 8" descr="7085e71197c76ea8.png"/>
+          <p:cNvPr id="9" name="Picture 8" descr="08a04405287c7870.png"/>
           <p:cNvPicPr>
             <a:picLocks noChangeAspect="1"/>
           </p:cNvPicPr>
@@ -5536,8 +5536,8 @@
         </p:blipFill>
         <p:spPr>
           <a:xfrm>
-            <a:off x="5192141" y="1600200"/>
-            <a:ext cx="2026920" cy="420624"/>
+            <a:off x="5537235" y="1650301"/>
+            <a:ext cx="1317498" cy="274891"/>
           </a:xfrm>
           <a:prstGeom prst="rect">
             <a:avLst/>
@@ -5552,8 +5552,8 @@
         </p:nvSpPr>
         <p:spPr>
           <a:xfrm>
-            <a:off x="7219061" y="1581912"/>
-            <a:ext cx="1569981" cy="457200"/>
+            <a:off x="6854733" y="1577340"/>
+            <a:ext cx="1465372" cy="457200"/>
           </a:xfrm>
           <a:prstGeom prst="rect">
             <a:avLst/>
@@ -5568,7 +5568,7 @@
           <a:p>
             <a:pPr algn="l"/>
             <a:r>
-              <a:rPr sz="2470" b="0" i="0">
+              <a:rPr sz="2280" b="0" i="0">
                 <a:solidFill>
                   <a:srgbClr val="1A1A1A"/>
                 </a:solidFill>
@@ -5587,8 +5587,8 @@
         </p:nvSpPr>
         <p:spPr>
           <a:xfrm>
-            <a:off x="2593031" y="2324100"/>
-            <a:ext cx="1876815" cy="457200"/>
+            <a:off x="3134202" y="2263140"/>
+            <a:ext cx="1748626" cy="457200"/>
           </a:xfrm>
           <a:prstGeom prst="rect">
             <a:avLst/>
@@ -5603,7 +5603,7 @@
           <a:p>
             <a:pPr algn="l"/>
             <a:r>
-              <a:rPr sz="2470" b="0" i="0">
+              <a:rPr sz="2280" b="0" i="0">
                 <a:solidFill>
                   <a:srgbClr val="1A1A1A"/>
                 </a:solidFill>
@@ -5616,7 +5616,7 @@
       </p:sp>
       <p:pic>
         <p:nvPicPr>
-          <p:cNvPr id="12" name="Picture 11" descr="8ca2d2fd49f849d4.png"/>
+          <p:cNvPr id="12" name="Picture 11" descr="5e32de29ecd0922a.png"/>
           <p:cNvPicPr>
             <a:picLocks noChangeAspect="1"/>
           </p:cNvPicPr>
@@ -5630,8 +5630,8 @@
         </p:blipFill>
         <p:spPr>
           <a:xfrm>
-            <a:off x="4332686" y="2340864"/>
-            <a:ext cx="2036064" cy="423672"/>
+            <a:off x="4745669" y="2333625"/>
+            <a:ext cx="1322451" cy="277368"/>
           </a:xfrm>
           <a:prstGeom prst="rect">
             <a:avLst/>
@@ -5646,8 +5646,8 @@
         </p:nvSpPr>
         <p:spPr>
           <a:xfrm>
-            <a:off x="6368750" y="2324100"/>
-            <a:ext cx="3336898" cy="457200"/>
+            <a:off x="6068120" y="2263140"/>
+            <a:ext cx="3096357" cy="457200"/>
           </a:xfrm>
           <a:prstGeom prst="rect">
             <a:avLst/>
@@ -5662,7 +5662,7 @@
           <a:p>
             <a:pPr algn="l"/>
             <a:r>
-              <a:rPr sz="2470" b="0" i="0">
+              <a:rPr sz="2280" b="0" i="0">
                 <a:solidFill>
                   <a:srgbClr val="1A1A1A"/>
                 </a:solidFill>
@@ -5681,7 +5681,7 @@
         </p:nvSpPr>
         <p:spPr>
           <a:xfrm>
-            <a:off x="777240" y="3084576"/>
+            <a:off x="777240" y="2971800"/>
             <a:ext cx="10607040" cy="429370"/>
           </a:xfrm>
           <a:prstGeom prst="rect">
@@ -5944,8 +5944,8 @@
         </p:nvSpPr>
         <p:spPr>
           <a:xfrm>
-            <a:off x="3508112" y="1581912"/>
-            <a:ext cx="1819665" cy="457200"/>
+            <a:off x="3977335" y="1577340"/>
+            <a:ext cx="1695822" cy="457200"/>
           </a:xfrm>
           <a:prstGeom prst="rect">
             <a:avLst/>
@@ -5960,7 +5960,7 @@
           <a:p>
             <a:pPr algn="l"/>
             <a:r>
-              <a:rPr sz="2470" b="0" i="0">
+              <a:rPr sz="2280" b="0" i="0">
                 <a:solidFill>
                   <a:srgbClr val="1A1A1A"/>
                 </a:solidFill>
@@ -5973,7 +5973,7 @@
       </p:sp>
       <p:pic>
         <p:nvPicPr>
-          <p:cNvPr id="9" name="Picture 8" descr="792d949c5a21a618.png"/>
+          <p:cNvPr id="9" name="Picture 8" descr="c2efbce8eea1c4c4.png"/>
           <p:cNvPicPr>
             <a:picLocks noChangeAspect="1"/>
           </p:cNvPicPr>
@@ -5987,8 +5987,8 @@
         </p:blipFill>
         <p:spPr>
           <a:xfrm>
-            <a:off x="5190617" y="1600200"/>
-            <a:ext cx="2029968" cy="420624"/>
+            <a:off x="5535997" y="1650301"/>
+            <a:ext cx="1319974" cy="274891"/>
           </a:xfrm>
           <a:prstGeom prst="rect">
             <a:avLst/>
@@ -6003,8 +6003,8 @@
         </p:nvSpPr>
         <p:spPr>
           <a:xfrm>
-            <a:off x="7220585" y="1581912"/>
-            <a:ext cx="1569981" cy="457200"/>
+            <a:off x="6855972" y="1577340"/>
+            <a:ext cx="1465372" cy="457200"/>
           </a:xfrm>
           <a:prstGeom prst="rect">
             <a:avLst/>
@@ -6019,7 +6019,7 @@
           <a:p>
             <a:pPr algn="l"/>
             <a:r>
-              <a:rPr sz="2470" b="0" i="0">
+              <a:rPr sz="2280" b="0" i="0">
                 <a:solidFill>
                   <a:srgbClr val="1A1A1A"/>
                 </a:solidFill>
@@ -6038,8 +6038,8 @@
         </p:nvSpPr>
         <p:spPr>
           <a:xfrm>
-            <a:off x="2591507" y="2324100"/>
-            <a:ext cx="1876815" cy="457200"/>
+            <a:off x="3132964" y="2263140"/>
+            <a:ext cx="1748626" cy="457200"/>
           </a:xfrm>
           <a:prstGeom prst="rect">
             <a:avLst/>
@@ -6054,7 +6054,7 @@
           <a:p>
             <a:pPr algn="l"/>
             <a:r>
-              <a:rPr sz="2470" b="0" i="0">
+              <a:rPr sz="2280" b="0" i="0">
                 <a:solidFill>
                   <a:srgbClr val="1A1A1A"/>
                 </a:solidFill>
@@ -6067,7 +6067,7 @@
       </p:sp>
       <p:pic>
         <p:nvPicPr>
-          <p:cNvPr id="12" name="Picture 11" descr="b395e7df8785e028.png"/>
+          <p:cNvPr id="12" name="Picture 11" descr="56a45577f708deb6.png"/>
           <p:cNvPicPr>
             <a:picLocks noChangeAspect="1"/>
           </p:cNvPicPr>
@@ -6081,8 +6081,8 @@
         </p:blipFill>
         <p:spPr>
           <a:xfrm>
-            <a:off x="4331162" y="2340864"/>
-            <a:ext cx="2039112" cy="423672"/>
+            <a:off x="4744431" y="2333625"/>
+            <a:ext cx="1324927" cy="277368"/>
           </a:xfrm>
           <a:prstGeom prst="rect">
             <a:avLst/>
@@ -6097,8 +6097,8 @@
         </p:nvSpPr>
         <p:spPr>
           <a:xfrm>
-            <a:off x="6370274" y="2324100"/>
-            <a:ext cx="3336898" cy="457200"/>
+            <a:off x="6069358" y="2263140"/>
+            <a:ext cx="3096357" cy="457200"/>
           </a:xfrm>
           <a:prstGeom prst="rect">
             <a:avLst/>
@@ -6113,7 +6113,7 @@
           <a:p>
             <a:pPr algn="l"/>
             <a:r>
-              <a:rPr sz="2470" b="0" i="0">
+              <a:rPr sz="2280" b="0" i="0">
                 <a:solidFill>
                   <a:srgbClr val="1A1A1A"/>
                 </a:solidFill>
@@ -6132,7 +6132,7 @@
         </p:nvSpPr>
         <p:spPr>
           <a:xfrm>
-            <a:off x="777240" y="3084576"/>
+            <a:off x="777240" y="2971800"/>
             <a:ext cx="10607040" cy="429370"/>
           </a:xfrm>
           <a:prstGeom prst="rect">
@@ -6175,7 +6175,7 @@
         </p:blipFill>
         <p:spPr>
           <a:xfrm>
-            <a:off x="2110235" y="3768454"/>
+            <a:off x="2110235" y="3693111"/>
             <a:ext cx="2529840" cy="268224"/>
           </a:xfrm>
           <a:prstGeom prst="rect">
@@ -6191,7 +6191,7 @@
         </p:nvSpPr>
         <p:spPr>
           <a:xfrm>
-            <a:off x="2055371" y="4176886"/>
+            <a:off x="2055371" y="4064110"/>
             <a:ext cx="8187937" cy="457200"/>
           </a:xfrm>
           <a:prstGeom prst="rect">
@@ -6234,7 +6234,7 @@
         </p:blipFill>
         <p:spPr>
           <a:xfrm>
-            <a:off x="2110235" y="4752958"/>
+            <a:off x="2110235" y="4656279"/>
             <a:ext cx="2270760" cy="310896"/>
           </a:xfrm>
           <a:prstGeom prst="rect">
@@ -6250,7 +6250,7 @@
         </p:nvSpPr>
         <p:spPr>
           <a:xfrm>
-            <a:off x="777240" y="5251306"/>
+            <a:off x="777240" y="5138530"/>
             <a:ext cx="10607040" cy="548640"/>
           </a:xfrm>
           <a:prstGeom prst="rect">
@@ -7226,7 +7226,7 @@
       </p:sp>
       <p:pic>
         <p:nvPicPr>
-          <p:cNvPr id="9" name="Picture 8" descr="cb6705e7e3c13403.png"/>
+          <p:cNvPr id="9" name="Picture 8" descr="a7946796b3d2e700.png"/>
           <p:cNvPicPr>
             <a:picLocks noChangeAspect="1"/>
           </p:cNvPicPr>
@@ -7240,8 +7240,8 @@
         </p:blipFill>
         <p:spPr>
           <a:xfrm>
-            <a:off x="5464334" y="1941575"/>
-            <a:ext cx="1130808" cy="277368"/>
+            <a:off x="5464334" y="1922145"/>
+            <a:ext cx="1124331" cy="277368"/>
           </a:xfrm>
           <a:prstGeom prst="rect">
             <a:avLst/>
@@ -7256,7 +7256,7 @@
         </p:nvSpPr>
         <p:spPr>
           <a:xfrm>
-            <a:off x="6595142" y="1851660"/>
+            <a:off x="6588665" y="1851660"/>
             <a:ext cx="1288226" cy="457200"/>
           </a:xfrm>
           <a:prstGeom prst="rect">
@@ -7285,7 +7285,7 @@
       </p:sp>
       <p:pic>
         <p:nvPicPr>
-          <p:cNvPr id="11" name="Picture 10" descr="fe2d8d13976231c4.png"/>
+          <p:cNvPr id="11" name="Picture 10" descr="a6a6c57be53ee6d2.png"/>
           <p:cNvPicPr>
             <a:picLocks noChangeAspect="1"/>
           </p:cNvPicPr>
@@ -7299,8 +7299,8 @@
         </p:blipFill>
         <p:spPr>
           <a:xfrm>
-            <a:off x="7746208" y="1941575"/>
-            <a:ext cx="1127760" cy="277368"/>
+            <a:off x="7739731" y="1922145"/>
+            <a:ext cx="1129284" cy="277368"/>
           </a:xfrm>
           <a:prstGeom prst="rect">
             <a:avLst/>
@@ -7315,7 +7315,7 @@
         </p:nvSpPr>
         <p:spPr>
           <a:xfrm>
-            <a:off x="8873968" y="1851660"/>
+            <a:off x="8869015" y="1851660"/>
             <a:ext cx="734856" cy="457200"/>
           </a:xfrm>
           <a:prstGeom prst="rect">
@@ -7712,7 +7712,7 @@
       </p:sp>
       <p:pic>
         <p:nvPicPr>
-          <p:cNvPr id="9" name="Picture 8" descr="14e1bd54084a469a.png"/>
+          <p:cNvPr id="9" name="Picture 8" descr="21b219ba43567f35.png"/>
           <p:cNvPicPr>
             <a:picLocks noChangeAspect="1"/>
           </p:cNvPicPr>
@@ -7726,8 +7726,8 @@
         </p:blipFill>
         <p:spPr>
           <a:xfrm>
-            <a:off x="5464334" y="1941575"/>
-            <a:ext cx="1130808" cy="277368"/>
+            <a:off x="5464334" y="1922145"/>
+            <a:ext cx="1126807" cy="277368"/>
           </a:xfrm>
           <a:prstGeom prst="rect">
             <a:avLst/>
@@ -7742,7 +7742,7 @@
         </p:nvSpPr>
         <p:spPr>
           <a:xfrm>
-            <a:off x="6595142" y="1851660"/>
+            <a:off x="6591141" y="1851660"/>
             <a:ext cx="1288226" cy="457200"/>
           </a:xfrm>
           <a:prstGeom prst="rect">
@@ -7771,7 +7771,7 @@
       </p:sp>
       <p:pic>
         <p:nvPicPr>
-          <p:cNvPr id="11" name="Picture 10" descr="5ace9ec43120721e.png"/>
+          <p:cNvPr id="11" name="Picture 10" descr="046ade4f82d7b81f.png"/>
           <p:cNvPicPr>
             <a:picLocks noChangeAspect="1"/>
           </p:cNvPicPr>
@@ -7785,8 +7785,8 @@
         </p:blipFill>
         <p:spPr>
           <a:xfrm>
-            <a:off x="7746208" y="1941575"/>
-            <a:ext cx="1127760" cy="277368"/>
+            <a:off x="7742208" y="1922145"/>
+            <a:ext cx="1129284" cy="277368"/>
           </a:xfrm>
           <a:prstGeom prst="rect">
             <a:avLst/>
@@ -7801,7 +7801,7 @@
         </p:nvSpPr>
         <p:spPr>
           <a:xfrm>
-            <a:off x="8873968" y="1851660"/>
+            <a:off x="8871492" y="1851660"/>
             <a:ext cx="734856" cy="457200"/>
           </a:xfrm>
           <a:prstGeom prst="rect">
@@ -7900,7 +7900,7 @@
       </p:sp>
       <p:pic>
         <p:nvPicPr>
-          <p:cNvPr id="15" name="Picture 14" descr="0dcb6b3604aaf1a1.png"/>
+          <p:cNvPr id="15" name="Picture 14" descr="44e63c88951851e0.png"/>
           <p:cNvPicPr>
             <a:picLocks noChangeAspect="1"/>
           </p:cNvPicPr>
@@ -7914,8 +7914,8 @@
         </p:blipFill>
         <p:spPr>
           <a:xfrm>
-            <a:off x="3571929" y="4212667"/>
-            <a:ext cx="1825752" cy="213360"/>
+            <a:off x="3573001" y="4226002"/>
+            <a:ext cx="1822561" cy="214693"/>
           </a:xfrm>
           <a:prstGeom prst="rect">
             <a:avLst/>
@@ -7930,7 +7930,7 @@
         </p:nvSpPr>
         <p:spPr>
           <a:xfrm>
-            <a:off x="5397681" y="4090747"/>
+            <a:off x="5395562" y="4090747"/>
             <a:ext cx="1320048" cy="457200"/>
           </a:xfrm>
           <a:prstGeom prst="rect">
@@ -7959,7 +7959,7 @@
       </p:sp>
       <p:pic>
         <p:nvPicPr>
-          <p:cNvPr id="17" name="Picture 16" descr="a732557401dc8add.png"/>
+          <p:cNvPr id="17" name="Picture 16" descr="de20136ea86b668f.png"/>
           <p:cNvPicPr>
             <a:picLocks noChangeAspect="1"/>
           </p:cNvPicPr>
@@ -7973,8 +7973,8 @@
         </p:blipFill>
         <p:spPr>
           <a:xfrm>
-            <a:off x="6580570" y="4188283"/>
-            <a:ext cx="1831848" cy="262128"/>
+            <a:off x="6578451" y="4179329"/>
+            <a:ext cx="1827228" cy="261366"/>
           </a:xfrm>
           <a:prstGeom prst="rect">
             <a:avLst/>
@@ -7997,7 +7997,7 @@
         </p:blipFill>
         <p:spPr>
           <a:xfrm>
-            <a:off x="3571929" y="4666819"/>
+            <a:off x="3573001" y="4682916"/>
             <a:ext cx="2362200" cy="310896"/>
           </a:xfrm>
           <a:prstGeom prst="rect">
@@ -8013,7 +8013,7 @@
         </p:nvSpPr>
         <p:spPr>
           <a:xfrm>
-            <a:off x="3517065" y="5096587"/>
+            <a:off x="3518137" y="5096587"/>
             <a:ext cx="4209940" cy="457200"/>
           </a:xfrm>
           <a:prstGeom prst="rect">
@@ -8042,7 +8042,7 @@
       </p:sp>
       <p:pic>
         <p:nvPicPr>
-          <p:cNvPr id="20" name="Picture 19" descr="018e3913f4d433d2.png"/>
+          <p:cNvPr id="20" name="Picture 19" descr="dbc7cf508525fbf8.png"/>
           <p:cNvPicPr>
             <a:picLocks noChangeAspect="1"/>
           </p:cNvPicPr>
@@ -8056,8 +8056,8 @@
         </p:blipFill>
         <p:spPr>
           <a:xfrm>
-            <a:off x="7589846" y="5197171"/>
-            <a:ext cx="1057656" cy="256032"/>
+            <a:off x="7590917" y="5187503"/>
+            <a:ext cx="1054798" cy="259032"/>
           </a:xfrm>
           <a:prstGeom prst="rect">
             <a:avLst/>
@@ -8396,7 +8396,7 @@
         </p:blipFill>
         <p:spPr>
           <a:xfrm>
-            <a:off x="2408921" y="1501140"/>
+            <a:off x="2408921" y="1503997"/>
             <a:ext cx="2417064" cy="335280"/>
           </a:xfrm>
           <a:prstGeom prst="rect">
@@ -8455,7 +8455,7 @@
         </p:blipFill>
         <p:spPr>
           <a:xfrm>
-            <a:off x="2423059" y="2115312"/>
+            <a:off x="2423059" y="2119693"/>
             <a:ext cx="3057144" cy="332232"/>
           </a:xfrm>
           <a:prstGeom prst="rect">
@@ -8804,8 +8804,8 @@
         </p:nvSpPr>
         <p:spPr>
           <a:xfrm>
-            <a:off x="1580585" y="2692908"/>
-            <a:ext cx="6958554" cy="457200"/>
+            <a:off x="2033417" y="2692908"/>
+            <a:ext cx="6439355" cy="457200"/>
           </a:xfrm>
           <a:prstGeom prst="rect">
             <a:avLst/>
@@ -8820,7 +8820,7 @@
           <a:p>
             <a:pPr algn="l"/>
             <a:r>
-              <a:rPr sz="2470" b="0" i="0">
+              <a:rPr sz="2280" b="0" i="0">
                 <a:solidFill>
                   <a:srgbClr val="1A1A1A"/>
                 </a:solidFill>
@@ -8847,8 +8847,8 @@
         </p:blipFill>
         <p:spPr>
           <a:xfrm>
-            <a:off x="8401980" y="2753867"/>
-            <a:ext cx="2029968" cy="335280"/>
+            <a:off x="8335612" y="2768346"/>
+            <a:ext cx="1649349" cy="272415"/>
           </a:xfrm>
           <a:prstGeom prst="rect">
             <a:avLst/>
@@ -8863,8 +8863,8 @@
         </p:nvSpPr>
         <p:spPr>
           <a:xfrm>
-            <a:off x="10431948" y="2692908"/>
-            <a:ext cx="286146" cy="457200"/>
+            <a:off x="9984961" y="2692908"/>
+            <a:ext cx="280301" cy="457200"/>
           </a:xfrm>
           <a:prstGeom prst="rect">
             <a:avLst/>
@@ -8879,7 +8879,7 @@
           <a:p>
             <a:pPr algn="l"/>
             <a:r>
-              <a:rPr sz="2470" b="0" i="0">
+              <a:rPr sz="2280" b="0" i="0">
                 <a:solidFill>
                   <a:srgbClr val="1A1A1A"/>
                 </a:solidFill>
@@ -9231,8 +9231,8 @@
         </p:nvSpPr>
         <p:spPr>
           <a:xfrm>
-            <a:off x="1580585" y="2601468"/>
-            <a:ext cx="6958554" cy="457200"/>
+            <a:off x="2033417" y="2601468"/>
+            <a:ext cx="6439355" cy="457200"/>
           </a:xfrm>
           <a:prstGeom prst="rect">
             <a:avLst/>
@@ -9247,7 +9247,7 @@
           <a:p>
             <a:pPr algn="l"/>
             <a:r>
-              <a:rPr sz="2470" b="0" i="0">
+              <a:rPr sz="2280" b="0" i="0">
                 <a:solidFill>
                   <a:srgbClr val="1A1A1A"/>
                 </a:solidFill>
@@ -9274,8 +9274,8 @@
         </p:blipFill>
         <p:spPr>
           <a:xfrm>
-            <a:off x="8401980" y="2662428"/>
-            <a:ext cx="2029968" cy="335280"/>
+            <a:off x="8335612" y="2676906"/>
+            <a:ext cx="1649349" cy="272415"/>
           </a:xfrm>
           <a:prstGeom prst="rect">
             <a:avLst/>
@@ -9290,8 +9290,8 @@
         </p:nvSpPr>
         <p:spPr>
           <a:xfrm>
-            <a:off x="10431948" y="2601468"/>
-            <a:ext cx="286146" cy="457200"/>
+            <a:off x="9984961" y="2601468"/>
+            <a:ext cx="280301" cy="457200"/>
           </a:xfrm>
           <a:prstGeom prst="rect">
             <a:avLst/>
@@ -9306,7 +9306,7 @@
           <a:p>
             <a:pPr algn="l"/>
             <a:r>
-              <a:rPr sz="2470" b="0" i="0">
+              <a:rPr sz="2280" b="0" i="0">
                 <a:solidFill>
                   <a:srgbClr val="1A1A1A"/>
                 </a:solidFill>
@@ -9389,7 +9389,66 @@
       </p:sp>
       <p:pic>
         <p:nvPicPr>
-          <p:cNvPr id="14" name="Picture 13" descr="40ace4bdf802fbb0.png"/>
+          <p:cNvPr id="14" name="Picture 13" descr="b41e0e74d053423f.png"/>
+          <p:cNvPicPr>
+            <a:picLocks noChangeAspect="1"/>
+          </p:cNvPicPr>
+          <p:nvPr/>
+        </p:nvPicPr>
+        <p:blipFill>
+          <a:blip r:embed="rId2"/>
+          <a:stretch>
+            <a:fillRect/>
+          </a:stretch>
+        </p:blipFill>
+        <p:spPr>
+          <a:xfrm>
+            <a:off x="1881233" y="4531469"/>
+            <a:ext cx="1554194" cy="256698"/>
+          </a:xfrm>
+          <a:prstGeom prst="rect">
+            <a:avLst/>
+          </a:prstGeom>
+        </p:spPr>
+      </p:pic>
+      <p:sp>
+        <p:nvSpPr>
+          <p:cNvPr id="15" name="TextBox 14"/>
+          <p:cNvSpPr txBox="1"/>
+          <p:nvPr/>
+        </p:nvSpPr>
+        <p:spPr>
+          <a:xfrm>
+            <a:off x="3435428" y="4438219"/>
+            <a:ext cx="2100221" cy="457200"/>
+          </a:xfrm>
+          <a:prstGeom prst="rect">
+            <a:avLst/>
+          </a:prstGeom>
+          <a:noFill/>
+        </p:spPr>
+        <p:txBody>
+          <a:bodyPr wrap="none" lIns="45720" rIns="45720" tIns="18288" bIns="18288" anchor="ctr">
+            <a:noAutofit/>
+          </a:bodyPr>
+          <a:lstStyle/>
+          <a:p>
+            <a:pPr algn="l"/>
+            <a:r>
+              <a:rPr sz="2330" b="0" i="0">
+                <a:solidFill>
+                  <a:srgbClr val="1A1A1A"/>
+                </a:solidFill>
+                <a:latin typeface="Lexend"/>
+              </a:rPr>
+              <a:t>   becomes   </a:t>
+            </a:r>
+          </a:p>
+        </p:txBody>
+      </p:sp>
+      <p:pic>
+        <p:nvPicPr>
+          <p:cNvPr id="16" name="Picture 15" descr="04bd18778892b97e.png"/>
           <p:cNvPicPr>
             <a:picLocks noChangeAspect="1"/>
           </p:cNvPicPr>
@@ -9403,67 +9462,8 @@
         </p:blipFill>
         <p:spPr>
           <a:xfrm>
-            <a:off x="1881233" y="4538803"/>
-            <a:ext cx="1557528" cy="256032"/>
-          </a:xfrm>
-          <a:prstGeom prst="rect">
-            <a:avLst/>
-          </a:prstGeom>
-        </p:spPr>
-      </p:pic>
-      <p:sp>
-        <p:nvSpPr>
-          <p:cNvPr id="15" name="TextBox 14"/>
-          <p:cNvSpPr txBox="1"/>
-          <p:nvPr/>
-        </p:nvSpPr>
-        <p:spPr>
-          <a:xfrm>
-            <a:off x="3438761" y="4438219"/>
-            <a:ext cx="2100221" cy="457200"/>
-          </a:xfrm>
-          <a:prstGeom prst="rect">
-            <a:avLst/>
-          </a:prstGeom>
-          <a:noFill/>
-        </p:spPr>
-        <p:txBody>
-          <a:bodyPr wrap="none" lIns="45720" rIns="45720" tIns="18288" bIns="18288" anchor="ctr">
-            <a:noAutofit/>
-          </a:bodyPr>
-          <a:lstStyle/>
-          <a:p>
-            <a:pPr algn="l"/>
-            <a:r>
-              <a:rPr sz="2330" b="0" i="0">
-                <a:solidFill>
-                  <a:srgbClr val="1A1A1A"/>
-                </a:solidFill>
-                <a:latin typeface="Lexend"/>
-              </a:rPr>
-              <a:t>   becomes   </a:t>
-            </a:r>
-          </a:p>
-        </p:txBody>
-      </p:sp>
-      <p:pic>
-        <p:nvPicPr>
-          <p:cNvPr id="16" name="Picture 15" descr="ecdbdf53729bbd0a.png"/>
-          <p:cNvPicPr>
-            <a:picLocks noChangeAspect="1"/>
-          </p:cNvPicPr>
-          <p:nvPr/>
-        </p:nvPicPr>
-        <p:blipFill>
-          <a:blip r:embed="rId4"/>
-          <a:stretch>
-            <a:fillRect/>
-          </a:stretch>
-        </p:blipFill>
-        <p:spPr>
-          <a:xfrm>
-            <a:off x="5401823" y="4538803"/>
-            <a:ext cx="1231392" cy="256032"/>
+            <a:off x="5398489" y="4531469"/>
+            <a:ext cx="1227486" cy="256698"/>
           </a:xfrm>
           <a:prstGeom prst="rect">
             <a:avLst/>
@@ -9758,8 +9758,8 @@
         </p:blipFill>
         <p:spPr>
           <a:xfrm>
-            <a:off x="2007740" y="2194560"/>
-            <a:ext cx="3983736" cy="411480"/>
+            <a:off x="2538529" y="2239708"/>
+            <a:ext cx="3236785" cy="334327"/>
           </a:xfrm>
           <a:prstGeom prst="rect">
             <a:avLst/>
@@ -9774,8 +9774,8 @@
         </p:nvSpPr>
         <p:spPr>
           <a:xfrm>
-            <a:off x="5991476" y="2171700"/>
-            <a:ext cx="4299462" cy="457200"/>
+            <a:off x="5775314" y="2171700"/>
+            <a:ext cx="3984835" cy="457200"/>
           </a:xfrm>
           <a:prstGeom prst="rect">
             <a:avLst/>
@@ -9790,7 +9790,7 @@
           <a:p>
             <a:pPr algn="l"/>
             <a:r>
-              <a:rPr sz="2470" b="0" i="0">
+              <a:rPr sz="2280" b="0" i="0">
                 <a:solidFill>
                   <a:srgbClr val="1A1A1A"/>
                 </a:solidFill>
@@ -10115,8 +10115,8 @@
         </p:blipFill>
         <p:spPr>
           <a:xfrm>
-            <a:off x="2006216" y="2103120"/>
-            <a:ext cx="3986784" cy="411480"/>
+            <a:off x="2537291" y="2148268"/>
+            <a:ext cx="3239262" cy="334327"/>
           </a:xfrm>
           <a:prstGeom prst="rect">
             <a:avLst/>
@@ -10131,8 +10131,8 @@
         </p:nvSpPr>
         <p:spPr>
           <a:xfrm>
-            <a:off x="5993000" y="2080260"/>
-            <a:ext cx="4299462" cy="457200"/>
+            <a:off x="5776553" y="2080260"/>
+            <a:ext cx="3984835" cy="457200"/>
           </a:xfrm>
           <a:prstGeom prst="rect">
             <a:avLst/>
@@ -10147,7 +10147,7 @@
           <a:p>
             <a:pPr algn="l"/>
             <a:r>
-              <a:rPr sz="2470" b="0" i="0">
+              <a:rPr sz="2280" b="0" i="0">
                 <a:solidFill>
                   <a:srgbClr val="1A1A1A"/>
                 </a:solidFill>
@@ -10209,7 +10209,7 @@
         </p:blipFill>
         <p:spPr>
           <a:xfrm>
-            <a:off x="1318422" y="3508579"/>
+            <a:off x="1318422" y="3546012"/>
             <a:ext cx="2499360" cy="268224"/>
           </a:xfrm>
           <a:prstGeom prst="rect">
@@ -10268,7 +10268,7 @@
         </p:blipFill>
         <p:spPr>
           <a:xfrm>
-            <a:off x="1318422" y="4493083"/>
+            <a:off x="1318422" y="4509180"/>
             <a:ext cx="2130552" cy="310896"/>
           </a:xfrm>
           <a:prstGeom prst="rect">
@@ -11407,8 +11407,8 @@
         </p:nvSpPr>
         <p:spPr>
           <a:xfrm>
-            <a:off x="1553716" y="2171700"/>
-            <a:ext cx="3892815" cy="457200"/>
+            <a:off x="2062817" y="2171700"/>
+            <a:ext cx="3609461" cy="457200"/>
           </a:xfrm>
           <a:prstGeom prst="rect">
             <a:avLst/>
@@ -11423,7 +11423,7 @@
           <a:p>
             <a:pPr algn="l"/>
             <a:r>
-              <a:rPr sz="2470" b="0" i="0">
+              <a:rPr sz="2280" b="0" i="0">
                 <a:solidFill>
                   <a:srgbClr val="1A1A1A"/>
                 </a:solidFill>
@@ -11450,8 +11450,8 @@
         </p:blipFill>
         <p:spPr>
           <a:xfrm>
-            <a:off x="5309372" y="2229612"/>
-            <a:ext cx="1420368" cy="341376"/>
+            <a:off x="5535118" y="2242185"/>
+            <a:ext cx="1154049" cy="277368"/>
           </a:xfrm>
           <a:prstGeom prst="rect">
             <a:avLst/>
@@ -11466,8 +11466,8 @@
         </p:nvSpPr>
         <p:spPr>
           <a:xfrm>
-            <a:off x="6729740" y="2171700"/>
-            <a:ext cx="1556043" cy="457200"/>
+            <a:off x="6689167" y="2171700"/>
+            <a:ext cx="1452433" cy="457200"/>
           </a:xfrm>
           <a:prstGeom prst="rect">
             <a:avLst/>
@@ -11482,7 +11482,7 @@
           <a:p>
             <a:pPr algn="l"/>
             <a:r>
-              <a:rPr sz="2470" b="0" i="0">
+              <a:rPr sz="2280" b="0" i="0">
                 <a:solidFill>
                   <a:srgbClr val="1A1A1A"/>
                 </a:solidFill>
@@ -11509,8 +11509,8 @@
         </p:blipFill>
         <p:spPr>
           <a:xfrm>
-            <a:off x="8148624" y="2229612"/>
-            <a:ext cx="1639824" cy="341376"/>
+            <a:off x="8004441" y="2242185"/>
+            <a:ext cx="1332357" cy="277368"/>
           </a:xfrm>
           <a:prstGeom prst="rect">
             <a:avLst/>
@@ -11525,8 +11525,8 @@
         </p:nvSpPr>
         <p:spPr>
           <a:xfrm>
-            <a:off x="9788448" y="2171700"/>
-            <a:ext cx="956514" cy="457200"/>
+            <a:off x="9336798" y="2171700"/>
+            <a:ext cx="899064" cy="457200"/>
           </a:xfrm>
           <a:prstGeom prst="rect">
             <a:avLst/>
@@ -11541,7 +11541,7 @@
           <a:p>
             <a:pPr algn="l"/>
             <a:r>
-              <a:rPr sz="2470" b="0" i="0">
+              <a:rPr sz="2280" b="0" i="0">
                 <a:solidFill>
                   <a:srgbClr val="1A1A1A"/>
                 </a:solidFill>
@@ -12142,8 +12142,8 @@
         </p:nvSpPr>
         <p:spPr>
           <a:xfrm>
-            <a:off x="1552192" y="2080260"/>
-            <a:ext cx="3892815" cy="457200"/>
+            <a:off x="2061578" y="2080260"/>
+            <a:ext cx="3609461" cy="457200"/>
           </a:xfrm>
           <a:prstGeom prst="rect">
             <a:avLst/>
@@ -12158,7 +12158,7 @@
           <a:p>
             <a:pPr algn="l"/>
             <a:r>
-              <a:rPr sz="2470" b="0" i="0">
+              <a:rPr sz="2280" b="0" i="0">
                 <a:solidFill>
                   <a:srgbClr val="1A1A1A"/>
                 </a:solidFill>
@@ -12185,8 +12185,8 @@
         </p:blipFill>
         <p:spPr>
           <a:xfrm>
-            <a:off x="5307848" y="2138171"/>
-            <a:ext cx="1423416" cy="341376"/>
+            <a:off x="5533880" y="2150745"/>
+            <a:ext cx="1156525" cy="277368"/>
           </a:xfrm>
           <a:prstGeom prst="rect">
             <a:avLst/>
@@ -12201,8 +12201,8 @@
         </p:nvSpPr>
         <p:spPr>
           <a:xfrm>
-            <a:off x="6731264" y="2080260"/>
-            <a:ext cx="1556043" cy="457200"/>
+            <a:off x="6690406" y="2080260"/>
+            <a:ext cx="1452433" cy="457200"/>
           </a:xfrm>
           <a:prstGeom prst="rect">
             <a:avLst/>
@@ -12217,7 +12217,7 @@
           <a:p>
             <a:pPr algn="l"/>
             <a:r>
-              <a:rPr sz="2470" b="0" i="0">
+              <a:rPr sz="2280" b="0" i="0">
                 <a:solidFill>
                   <a:srgbClr val="1A1A1A"/>
                 </a:solidFill>
@@ -12244,8 +12244,8 @@
         </p:blipFill>
         <p:spPr>
           <a:xfrm>
-            <a:off x="8150148" y="2138171"/>
-            <a:ext cx="1639824" cy="341376"/>
+            <a:off x="8005679" y="2150745"/>
+            <a:ext cx="1332357" cy="277368"/>
           </a:xfrm>
           <a:prstGeom prst="rect">
             <a:avLst/>
@@ -12260,8 +12260,8 @@
         </p:nvSpPr>
         <p:spPr>
           <a:xfrm>
-            <a:off x="9789972" y="2080260"/>
-            <a:ext cx="956514" cy="457200"/>
+            <a:off x="9338036" y="2080260"/>
+            <a:ext cx="899064" cy="457200"/>
           </a:xfrm>
           <a:prstGeom prst="rect">
             <a:avLst/>
@@ -12276,7 +12276,7 @@
           <a:p>
             <a:pPr algn="l"/>
             <a:r>
-              <a:rPr sz="2470" b="0" i="0">
+              <a:rPr sz="2280" b="0" i="0">
                 <a:solidFill>
                   <a:srgbClr val="1A1A1A"/>
                 </a:solidFill>
@@ -12324,7 +12324,7 @@
       </p:sp>
       <p:pic>
         <p:nvPicPr>
-          <p:cNvPr id="14" name="Picture 13" descr="7be216ecf24c5d81.png"/>
+          <p:cNvPr id="14" name="Picture 13" descr="bbac96af5f9ecf76.png"/>
           <p:cNvPicPr>
             <a:picLocks noChangeAspect="1"/>
           </p:cNvPicPr>
@@ -12338,8 +12338,8 @@
         </p:blipFill>
         <p:spPr>
           <a:xfrm>
-            <a:off x="2746669" y="3536011"/>
-            <a:ext cx="2029968" cy="213360"/>
+            <a:off x="2748360" y="3549346"/>
+            <a:ext cx="2030253" cy="214693"/>
           </a:xfrm>
           <a:prstGeom prst="rect">
             <a:avLst/>
@@ -12354,7 +12354,7 @@
         </p:nvSpPr>
         <p:spPr>
           <a:xfrm>
-            <a:off x="4776637" y="3414091"/>
+            <a:off x="4778613" y="3414091"/>
             <a:ext cx="1320048" cy="457200"/>
           </a:xfrm>
           <a:prstGeom prst="rect">
@@ -12383,7 +12383,7 @@
       </p:sp>
       <p:pic>
         <p:nvPicPr>
-          <p:cNvPr id="16" name="Picture 15" descr="6dc7d095c18b4262.png"/>
+          <p:cNvPr id="16" name="Picture 15" descr="1f20c58a7a5bfe36.png"/>
           <p:cNvPicPr>
             <a:picLocks noChangeAspect="1"/>
           </p:cNvPicPr>
@@ -12397,8 +12397,8 @@
         </p:blipFill>
         <p:spPr>
           <a:xfrm>
-            <a:off x="5959526" y="3511627"/>
-            <a:ext cx="1859280" cy="262128"/>
+            <a:off x="5961502" y="3502673"/>
+            <a:ext cx="1855231" cy="261366"/>
           </a:xfrm>
           <a:prstGeom prst="rect">
             <a:avLst/>
@@ -12421,7 +12421,7 @@
         </p:blipFill>
         <p:spPr>
           <a:xfrm>
-            <a:off x="2746669" y="3990163"/>
+            <a:off x="2748360" y="4006260"/>
             <a:ext cx="2602992" cy="310896"/>
           </a:xfrm>
           <a:prstGeom prst="rect">
@@ -12437,7 +12437,7 @@
         </p:nvSpPr>
         <p:spPr>
           <a:xfrm>
-            <a:off x="2691805" y="4419931"/>
+            <a:off x="2693496" y="4419931"/>
             <a:ext cx="5845221" cy="457200"/>
           </a:xfrm>
           <a:prstGeom prst="rect">
@@ -12466,7 +12466,7 @@
       </p:sp>
       <p:pic>
         <p:nvPicPr>
-          <p:cNvPr id="19" name="Picture 18" descr="9b8a502d8aaa20ea.png"/>
+          <p:cNvPr id="19" name="Picture 18" descr="1d4326cbde9a9c95.png"/>
           <p:cNvPicPr>
             <a:picLocks noChangeAspect="1"/>
           </p:cNvPicPr>
@@ -12480,8 +12480,8 @@
         </p:blipFill>
         <p:spPr>
           <a:xfrm>
-            <a:off x="8399866" y="4520515"/>
-            <a:ext cx="1069848" cy="256032"/>
+            <a:off x="8401557" y="4513181"/>
+            <a:ext cx="1068800" cy="256698"/>
           </a:xfrm>
           <a:prstGeom prst="rect">
             <a:avLst/>
@@ -12786,8 +12786,8 @@
         </p:nvSpPr>
         <p:spPr>
           <a:xfrm>
-            <a:off x="2639605" y="2171700"/>
-            <a:ext cx="2421842" cy="457200"/>
+            <a:off x="2990619" y="2171700"/>
+            <a:ext cx="2251640" cy="457200"/>
           </a:xfrm>
           <a:prstGeom prst="rect">
             <a:avLst/>
@@ -12802,7 +12802,7 @@
           <a:p>
             <a:pPr algn="l"/>
             <a:r>
-              <a:rPr sz="2470" b="0" i="0">
+              <a:rPr sz="2280" b="0" i="0">
                 <a:solidFill>
                   <a:srgbClr val="1A1A1A"/>
                 </a:solidFill>
@@ -12829,8 +12829,8 @@
         </p:blipFill>
         <p:spPr>
           <a:xfrm>
-            <a:off x="4924287" y="2229612"/>
-            <a:ext cx="1661160" cy="341376"/>
+            <a:off x="5105099" y="2242185"/>
+            <a:ext cx="1349692" cy="277368"/>
           </a:xfrm>
           <a:prstGeom prst="rect">
             <a:avLst/>
@@ -12845,8 +12845,8 @@
         </p:nvSpPr>
         <p:spPr>
           <a:xfrm>
-            <a:off x="6585447" y="2171700"/>
-            <a:ext cx="3073626" cy="457200"/>
+            <a:off x="6454792" y="2171700"/>
+            <a:ext cx="2853268" cy="457200"/>
           </a:xfrm>
           <a:prstGeom prst="rect">
             <a:avLst/>
@@ -12861,7 +12861,7 @@
           <a:p>
             <a:pPr algn="l"/>
             <a:r>
-              <a:rPr sz="2470" b="0" i="0">
+              <a:rPr sz="2280" b="0" i="0">
                 <a:solidFill>
                   <a:srgbClr val="1A1A1A"/>
                 </a:solidFill>
@@ -13178,8 +13178,8 @@
         </p:nvSpPr>
         <p:spPr>
           <a:xfrm>
-            <a:off x="2639605" y="2080260"/>
-            <a:ext cx="2421842" cy="457200"/>
+            <a:off x="2990619" y="2080260"/>
+            <a:ext cx="2251640" cy="457200"/>
           </a:xfrm>
           <a:prstGeom prst="rect">
             <a:avLst/>
@@ -13194,7 +13194,7 @@
           <a:p>
             <a:pPr algn="l"/>
             <a:r>
-              <a:rPr sz="2470" b="0" i="0">
+              <a:rPr sz="2280" b="0" i="0">
                 <a:solidFill>
                   <a:srgbClr val="1A1A1A"/>
                 </a:solidFill>
@@ -13221,8 +13221,8 @@
         </p:blipFill>
         <p:spPr>
           <a:xfrm>
-            <a:off x="4924287" y="2138171"/>
-            <a:ext cx="1661160" cy="341376"/>
+            <a:off x="5105099" y="2150745"/>
+            <a:ext cx="1349692" cy="277368"/>
           </a:xfrm>
           <a:prstGeom prst="rect">
             <a:avLst/>
@@ -13237,8 +13237,8 @@
         </p:nvSpPr>
         <p:spPr>
           <a:xfrm>
-            <a:off x="6585447" y="2080260"/>
-            <a:ext cx="3073626" cy="457200"/>
+            <a:off x="6454792" y="2080260"/>
+            <a:ext cx="2853268" cy="457200"/>
           </a:xfrm>
           <a:prstGeom prst="rect">
             <a:avLst/>
@@ -13253,7 +13253,7 @@
           <a:p>
             <a:pPr algn="l"/>
             <a:r>
-              <a:rPr sz="2470" b="0" i="0">
+              <a:rPr sz="2280" b="0" i="0">
                 <a:solidFill>
                   <a:srgbClr val="1A1A1A"/>
                 </a:solidFill>
@@ -13315,7 +13315,7 @@
         </p:blipFill>
         <p:spPr>
           <a:xfrm>
-            <a:off x="2635366" y="3482340"/>
+            <a:off x="2635986" y="3498437"/>
             <a:ext cx="1981199" cy="213360"/>
           </a:xfrm>
           <a:prstGeom prst="rect">
@@ -13331,7 +13331,7 @@
         </p:nvSpPr>
         <p:spPr>
           <a:xfrm>
-            <a:off x="2580502" y="3863339"/>
+            <a:off x="2581122" y="3863339"/>
             <a:ext cx="6076970" cy="457200"/>
           </a:xfrm>
           <a:prstGeom prst="rect">
@@ -13360,7 +13360,7 @@
       </p:sp>
       <p:pic>
         <p:nvPicPr>
-          <p:cNvPr id="14" name="Picture 13" descr="a617e99eac0e9963.png"/>
+          <p:cNvPr id="14" name="Picture 13" descr="21b219ba43567f35.png"/>
           <p:cNvPicPr>
             <a:picLocks noChangeAspect="1"/>
           </p:cNvPicPr>
@@ -13374,8 +13374,8 @@
         </p:blipFill>
         <p:spPr>
           <a:xfrm>
-            <a:off x="8520313" y="3960876"/>
-            <a:ext cx="1063752" cy="262128"/>
+            <a:off x="8520932" y="3951922"/>
+            <a:ext cx="1061799" cy="261366"/>
           </a:xfrm>
           <a:prstGeom prst="rect">
             <a:avLst/>
@@ -13714,7 +13714,7 @@
         </p:blipFill>
         <p:spPr>
           <a:xfrm>
-            <a:off x="2408921" y="1501140"/>
+            <a:off x="2408921" y="1503997"/>
             <a:ext cx="2417064" cy="335280"/>
           </a:xfrm>
           <a:prstGeom prst="rect">
@@ -13817,7 +13817,7 @@
         </p:blipFill>
         <p:spPr>
           <a:xfrm>
-            <a:off x="2423059" y="2115312"/>
+            <a:off x="2423059" y="2119693"/>
             <a:ext cx="3057144" cy="332232"/>
           </a:xfrm>
           <a:prstGeom prst="rect">
@@ -14289,8 +14289,8 @@
         </p:nvSpPr>
         <p:spPr>
           <a:xfrm>
-            <a:off x="1856207" y="2746579"/>
-            <a:ext cx="725065" cy="457200"/>
+            <a:off x="2327358" y="2746579"/>
+            <a:ext cx="685449" cy="457200"/>
           </a:xfrm>
           <a:prstGeom prst="rect">
             <a:avLst/>
@@ -14305,7 +14305,7 @@
           <a:p>
             <a:pPr algn="l"/>
             <a:r>
-              <a:rPr sz="2470" b="0" i="0">
+              <a:rPr sz="2280" b="0" i="0">
                 <a:solidFill>
                   <a:srgbClr val="1A1A1A"/>
                 </a:solidFill>
@@ -14332,8 +14332,8 @@
         </p:blipFill>
         <p:spPr>
           <a:xfrm>
-            <a:off x="2444112" y="2806015"/>
-            <a:ext cx="1392936" cy="338328"/>
+            <a:off x="2875648" y="2819540"/>
+            <a:ext cx="1131760" cy="274891"/>
           </a:xfrm>
           <a:prstGeom prst="rect">
             <a:avLst/>
@@ -14348,8 +14348,8 @@
         </p:nvSpPr>
         <p:spPr>
           <a:xfrm>
-            <a:off x="3837048" y="2746579"/>
-            <a:ext cx="4561885" cy="457200"/>
+            <a:off x="4007408" y="2746579"/>
+            <a:ext cx="4227025" cy="457200"/>
           </a:xfrm>
           <a:prstGeom prst="rect">
             <a:avLst/>
@@ -14364,7 +14364,7 @@
           <a:p>
             <a:pPr algn="l"/>
             <a:r>
-              <a:rPr sz="2470" b="0" i="0">
+              <a:rPr sz="2280" b="0" i="0">
                 <a:solidFill>
                   <a:srgbClr val="1A1A1A"/>
                 </a:solidFill>
@@ -14373,7 +14373,7 @@
               <a:t>  m</a:t>
             </a:r>
             <a:r>
-              <a:rPr sz="2470" b="0" i="0" baseline="30000">
+              <a:rPr sz="2280" b="0" i="0" baseline="30000">
                 <a:solidFill>
                   <a:srgbClr val="1A1A1A"/>
                 </a:solidFill>
@@ -14382,7 +14382,7 @@
               <a:t>2</a:t>
             </a:r>
             <a:r>
-              <a:rPr sz="2470" b="0" i="0">
+              <a:rPr sz="2280" b="0" i="0">
                 <a:solidFill>
                   <a:srgbClr val="1A1A1A"/>
                 </a:solidFill>
@@ -14409,8 +14409,8 @@
         </p:blipFill>
         <p:spPr>
           <a:xfrm>
-            <a:off x="8261773" y="2804491"/>
-            <a:ext cx="1402080" cy="341376"/>
+            <a:off x="8097274" y="2817064"/>
+            <a:ext cx="1139190" cy="277368"/>
           </a:xfrm>
           <a:prstGeom prst="rect">
             <a:avLst/>
@@ -14425,8 +14425,8 @@
         </p:nvSpPr>
         <p:spPr>
           <a:xfrm>
-            <a:off x="9663853" y="2746579"/>
-            <a:ext cx="778618" cy="457200"/>
+            <a:off x="9236464" y="2746579"/>
+            <a:ext cx="734856" cy="457200"/>
           </a:xfrm>
           <a:prstGeom prst="rect">
             <a:avLst/>
@@ -14441,7 +14441,7 @@
           <a:p>
             <a:pPr algn="l"/>
             <a:r>
-              <a:rPr sz="2470" b="0" i="0">
+              <a:rPr sz="2280" b="0" i="0">
                 <a:solidFill>
                   <a:srgbClr val="1A1A1A"/>
                 </a:solidFill>
@@ -14793,8 +14793,8 @@
         </p:nvSpPr>
         <p:spPr>
           <a:xfrm>
-            <a:off x="1854683" y="2655139"/>
-            <a:ext cx="725065" cy="457200"/>
+            <a:off x="2326120" y="2655139"/>
+            <a:ext cx="685449" cy="457200"/>
           </a:xfrm>
           <a:prstGeom prst="rect">
             <a:avLst/>
@@ -14809,7 +14809,7 @@
           <a:p>
             <a:pPr algn="l"/>
             <a:r>
-              <a:rPr sz="2470" b="0" i="0">
+              <a:rPr sz="2280" b="0" i="0">
                 <a:solidFill>
                   <a:srgbClr val="1A1A1A"/>
                 </a:solidFill>
@@ -14836,8 +14836,8 @@
         </p:blipFill>
         <p:spPr>
           <a:xfrm>
-            <a:off x="2442588" y="2714575"/>
-            <a:ext cx="1395984" cy="338328"/>
+            <a:off x="2874410" y="2728100"/>
+            <a:ext cx="1134237" cy="274891"/>
           </a:xfrm>
           <a:prstGeom prst="rect">
             <a:avLst/>
@@ -14852,8 +14852,8 @@
         </p:nvSpPr>
         <p:spPr>
           <a:xfrm>
-            <a:off x="3838572" y="2655139"/>
-            <a:ext cx="4561885" cy="457200"/>
+            <a:off x="4008647" y="2655139"/>
+            <a:ext cx="4227025" cy="457200"/>
           </a:xfrm>
           <a:prstGeom prst="rect">
             <a:avLst/>
@@ -14868,7 +14868,7 @@
           <a:p>
             <a:pPr algn="l"/>
             <a:r>
-              <a:rPr sz="2470" b="0" i="0">
+              <a:rPr sz="2280" b="0" i="0">
                 <a:solidFill>
                   <a:srgbClr val="1A1A1A"/>
                 </a:solidFill>
@@ -14877,7 +14877,7 @@
               <a:t>  m</a:t>
             </a:r>
             <a:r>
-              <a:rPr sz="2470" b="0" i="0" baseline="30000">
+              <a:rPr sz="2280" b="0" i="0" baseline="30000">
                 <a:solidFill>
                   <a:srgbClr val="1A1A1A"/>
                 </a:solidFill>
@@ -14886,7 +14886,7 @@
               <a:t>2</a:t>
             </a:r>
             <a:r>
-              <a:rPr sz="2470" b="0" i="0">
+              <a:rPr sz="2280" b="0" i="0">
                 <a:solidFill>
                   <a:srgbClr val="1A1A1A"/>
                 </a:solidFill>
@@ -14913,8 +14913,8 @@
         </p:blipFill>
         <p:spPr>
           <a:xfrm>
-            <a:off x="8263297" y="2713051"/>
-            <a:ext cx="1402080" cy="341376"/>
+            <a:off x="8098512" y="2725624"/>
+            <a:ext cx="1139190" cy="277368"/>
           </a:xfrm>
           <a:prstGeom prst="rect">
             <a:avLst/>
@@ -14929,8 +14929,8 @@
         </p:nvSpPr>
         <p:spPr>
           <a:xfrm>
-            <a:off x="9665377" y="2655139"/>
-            <a:ext cx="778618" cy="457200"/>
+            <a:off x="9237702" y="2655139"/>
+            <a:ext cx="734856" cy="457200"/>
           </a:xfrm>
           <a:prstGeom prst="rect">
             <a:avLst/>
@@ -14945,7 +14945,7 @@
           <a:p>
             <a:pPr algn="l"/>
             <a:r>
-              <a:rPr sz="2470" b="0" i="0">
+              <a:rPr sz="2280" b="0" i="0">
                 <a:solidFill>
                   <a:srgbClr val="1A1A1A"/>
                 </a:solidFill>
@@ -15007,7 +15007,7 @@
         </p:blipFill>
         <p:spPr>
           <a:xfrm>
-            <a:off x="3346025" y="4059074"/>
+            <a:off x="3345977" y="4102699"/>
             <a:ext cx="2377440" cy="316992"/>
           </a:xfrm>
           <a:prstGeom prst="rect">
@@ -15023,7 +15023,7 @@
         </p:nvSpPr>
         <p:spPr>
           <a:xfrm>
-            <a:off x="3291161" y="4528466"/>
+            <a:off x="3291113" y="4528466"/>
             <a:ext cx="4420957" cy="457200"/>
           </a:xfrm>
           <a:prstGeom prst="rect">
@@ -15052,7 +15052,7 @@
       </p:sp>
       <p:pic>
         <p:nvPicPr>
-          <p:cNvPr id="17" name="Picture 16" descr="83b7c76269977cf5.png"/>
+          <p:cNvPr id="17" name="Picture 16" descr="8973d474b1ce85e1.png"/>
           <p:cNvPicPr>
             <a:picLocks noChangeAspect="1"/>
           </p:cNvPicPr>
@@ -15066,8 +15066,8 @@
         </p:blipFill>
         <p:spPr>
           <a:xfrm>
-            <a:off x="7574958" y="4604666"/>
-            <a:ext cx="1301496" cy="304800"/>
+            <a:off x="7574911" y="4591331"/>
+            <a:ext cx="1295495" cy="309372"/>
           </a:xfrm>
           <a:prstGeom prst="rect">
             <a:avLst/>
@@ -15398,8 +15398,8 @@
         </p:nvSpPr>
         <p:spPr>
           <a:xfrm>
-            <a:off x="1340808" y="2746579"/>
-            <a:ext cx="2133542" cy="457200"/>
+            <a:off x="1876073" y="2746579"/>
+            <a:ext cx="1985571" cy="457200"/>
           </a:xfrm>
           <a:prstGeom prst="rect">
             <a:avLst/>
@@ -15414,7 +15414,7 @@
           <a:p>
             <a:pPr algn="l"/>
             <a:r>
-              <a:rPr sz="2470" b="0" i="0">
+              <a:rPr sz="2280" b="0" i="0">
                 <a:solidFill>
                   <a:srgbClr val="1A1A1A"/>
                 </a:solidFill>
@@ -15441,8 +15441,8 @@
         </p:blipFill>
         <p:spPr>
           <a:xfrm>
-            <a:off x="3337190" y="2801443"/>
-            <a:ext cx="1859280" cy="347472"/>
+            <a:off x="3724484" y="2864117"/>
+            <a:ext cx="1510664" cy="282321"/>
           </a:xfrm>
           <a:prstGeom prst="rect">
             <a:avLst/>
@@ -15457,8 +15457,8 @@
         </p:nvSpPr>
         <p:spPr>
           <a:xfrm>
-            <a:off x="5196470" y="2746579"/>
-            <a:ext cx="4234719" cy="457200"/>
+            <a:off x="5235149" y="2746579"/>
+            <a:ext cx="3924937" cy="457200"/>
           </a:xfrm>
           <a:prstGeom prst="rect">
             <a:avLst/>
@@ -15473,7 +15473,7 @@
           <a:p>
             <a:pPr algn="l"/>
             <a:r>
-              <a:rPr sz="2470" b="0" i="0">
+              <a:rPr sz="2280" b="0" i="0">
                 <a:solidFill>
                   <a:srgbClr val="1A1A1A"/>
                 </a:solidFill>
@@ -15500,8 +15500,8 @@
         </p:blipFill>
         <p:spPr>
           <a:xfrm>
-            <a:off x="9294029" y="2806015"/>
-            <a:ext cx="1377696" cy="338328"/>
+            <a:off x="9022927" y="2819540"/>
+            <a:ext cx="1119378" cy="274891"/>
           </a:xfrm>
           <a:prstGeom prst="rect">
             <a:avLst/>
@@ -15516,8 +15516,8 @@
         </p:nvSpPr>
         <p:spPr>
           <a:xfrm>
-            <a:off x="10671725" y="2746579"/>
-            <a:ext cx="286146" cy="457200"/>
+            <a:off x="10142305" y="2746579"/>
+            <a:ext cx="280301" cy="457200"/>
           </a:xfrm>
           <a:prstGeom prst="rect">
             <a:avLst/>
@@ -15532,7 +15532,7 @@
           <a:p>
             <a:pPr algn="l"/>
             <a:r>
-              <a:rPr sz="2470" b="0" i="0">
+              <a:rPr sz="2280" b="0" i="0">
                 <a:solidFill>
                   <a:srgbClr val="1A1A1A"/>
                 </a:solidFill>
@@ -15884,8 +15884,8 @@
         </p:nvSpPr>
         <p:spPr>
           <a:xfrm>
-            <a:off x="1340808" y="2655139"/>
-            <a:ext cx="2133542" cy="457200"/>
+            <a:off x="1876073" y="2655139"/>
+            <a:ext cx="1985571" cy="457200"/>
           </a:xfrm>
           <a:prstGeom prst="rect">
             <a:avLst/>
@@ -15900,7 +15900,7 @@
           <a:p>
             <a:pPr algn="l"/>
             <a:r>
-              <a:rPr sz="2470" b="0" i="0">
+              <a:rPr sz="2280" b="0" i="0">
                 <a:solidFill>
                   <a:srgbClr val="1A1A1A"/>
                 </a:solidFill>
@@ -15927,8 +15927,8 @@
         </p:blipFill>
         <p:spPr>
           <a:xfrm>
-            <a:off x="3337190" y="2708479"/>
-            <a:ext cx="1859280" cy="350520"/>
+            <a:off x="3724484" y="2770201"/>
+            <a:ext cx="1510664" cy="284797"/>
           </a:xfrm>
           <a:prstGeom prst="rect">
             <a:avLst/>
@@ -15943,8 +15943,8 @@
         </p:nvSpPr>
         <p:spPr>
           <a:xfrm>
-            <a:off x="5196470" y="2655139"/>
-            <a:ext cx="4234719" cy="457200"/>
+            <a:off x="5235149" y="2655139"/>
+            <a:ext cx="3924937" cy="457200"/>
           </a:xfrm>
           <a:prstGeom prst="rect">
             <a:avLst/>
@@ -15959,7 +15959,7 @@
           <a:p>
             <a:pPr algn="l"/>
             <a:r>
-              <a:rPr sz="2470" b="0" i="0">
+              <a:rPr sz="2280" b="0" i="0">
                 <a:solidFill>
                   <a:srgbClr val="1A1A1A"/>
                 </a:solidFill>
@@ -15986,8 +15986,8 @@
         </p:blipFill>
         <p:spPr>
           <a:xfrm>
-            <a:off x="9294029" y="2714575"/>
-            <a:ext cx="1377696" cy="338328"/>
+            <a:off x="9022927" y="2728100"/>
+            <a:ext cx="1119378" cy="274891"/>
           </a:xfrm>
           <a:prstGeom prst="rect">
             <a:avLst/>
@@ -16002,8 +16002,8 @@
         </p:nvSpPr>
         <p:spPr>
           <a:xfrm>
-            <a:off x="10671725" y="2655139"/>
-            <a:ext cx="286146" cy="457200"/>
+            <a:off x="10142305" y="2655139"/>
+            <a:ext cx="280301" cy="457200"/>
           </a:xfrm>
           <a:prstGeom prst="rect">
             <a:avLst/>
@@ -16018,7 +16018,7 @@
           <a:p>
             <a:pPr algn="l"/>
             <a:r>
-              <a:rPr sz="2470" b="0" i="0">
+              <a:rPr sz="2280" b="0" i="0">
                 <a:solidFill>
                   <a:srgbClr val="1A1A1A"/>
                 </a:solidFill>
@@ -16115,7 +16115,7 @@
         </p:blipFill>
         <p:spPr>
           <a:xfrm>
-            <a:off x="2052085" y="4586378"/>
+            <a:off x="2052085" y="4623811"/>
             <a:ext cx="2673096" cy="268224"/>
           </a:xfrm>
           <a:prstGeom prst="rect">
@@ -17648,7 +17648,7 @@
                 </a:solidFill>
                 <a:latin typeface="Lexend"/>
               </a:rPr>
-              <a:t>Every skill listed is required, to a SmartScore of 67. Due at the start of the next class.</a:t>
+              <a:t>Every skill listed is required, to a SmartScore of 67. Due by the Unit 4 test.</a:t>
             </a:r>
           </a:p>
         </p:txBody>
@@ -17697,7 +17697,7 @@
         <p:spPr>
           <a:xfrm>
             <a:off x="1325880" y="4507992"/>
-            <a:ext cx="9692640" cy="329184"/>
+            <a:ext cx="9692640" cy="658368"/>
           </a:xfrm>
           <a:prstGeom prst="rect">
             <a:avLst/>
@@ -19515,7 +19515,7 @@
         </p:blipFill>
         <p:spPr>
           <a:xfrm>
-            <a:off x="3061716" y="1993392"/>
+            <a:off x="3061716" y="2194560"/>
             <a:ext cx="6038088" cy="411480"/>
           </a:xfrm>
           <a:prstGeom prst="rect">
@@ -19531,7 +19531,7 @@
         </p:nvSpPr>
         <p:spPr>
           <a:xfrm>
-            <a:off x="1343817" y="2656332"/>
+            <a:off x="1426336" y="2967228"/>
             <a:ext cx="8233348" cy="457200"/>
           </a:xfrm>
           <a:prstGeom prst="rect">
@@ -19574,8 +19574,8 @@
         </p:blipFill>
         <p:spPr>
           <a:xfrm>
-            <a:off x="9440006" y="2717292"/>
-            <a:ext cx="1377696" cy="335280"/>
+            <a:off x="9522524" y="3029902"/>
+            <a:ext cx="1212659" cy="295116"/>
           </a:xfrm>
           <a:prstGeom prst="rect">
             <a:avLst/>
@@ -19590,7 +19590,7 @@
         </p:nvSpPr>
         <p:spPr>
           <a:xfrm>
-            <a:off x="987552" y="3429000"/>
+            <a:off x="987552" y="3941064"/>
             <a:ext cx="10131551" cy="950976"/>
           </a:xfrm>
           <a:prstGeom prst="rect">
@@ -19931,7 +19931,7 @@
         </p:blipFill>
         <p:spPr>
           <a:xfrm>
-            <a:off x="4389120" y="2023872"/>
+            <a:off x="4389120" y="2243709"/>
             <a:ext cx="3383280" cy="350520"/>
           </a:xfrm>
           <a:prstGeom prst="rect">
@@ -19947,7 +19947,7 @@
         </p:nvSpPr>
         <p:spPr>
           <a:xfrm>
-            <a:off x="1820000" y="2656332"/>
+            <a:off x="1820000" y="2967228"/>
             <a:ext cx="8658679" cy="457200"/>
           </a:xfrm>
           <a:prstGeom prst="rect">
@@ -19982,7 +19982,7 @@
         </p:nvSpPr>
         <p:spPr>
           <a:xfrm>
-            <a:off x="1508410" y="3342132"/>
+            <a:off x="1698092" y="3762756"/>
             <a:ext cx="6114987" cy="457200"/>
           </a:xfrm>
           <a:prstGeom prst="rect">
@@ -20025,8 +20025,8 @@
         </p:blipFill>
         <p:spPr>
           <a:xfrm>
-            <a:off x="7486237" y="3368040"/>
-            <a:ext cx="3166872" cy="405384"/>
+            <a:off x="7675919" y="3820064"/>
+            <a:ext cx="2787507" cy="356822"/>
           </a:xfrm>
           <a:prstGeom prst="rect">
             <a:avLst/>
@@ -20041,7 +20041,7 @@
         </p:nvSpPr>
         <p:spPr>
           <a:xfrm>
-            <a:off x="987552" y="4114800"/>
+            <a:off x="987552" y="4736592"/>
             <a:ext cx="10131551" cy="475488"/>
           </a:xfrm>
           <a:prstGeom prst="rect">
@@ -20304,8 +20304,8 @@
         </p:nvSpPr>
         <p:spPr>
           <a:xfrm>
-            <a:off x="1668053" y="1714500"/>
-            <a:ext cx="4120518" cy="457200"/>
+            <a:off x="2162728" y="1714500"/>
+            <a:ext cx="3819779" cy="457200"/>
           </a:xfrm>
           <a:prstGeom prst="rect">
             <a:avLst/>
@@ -20320,7 +20320,7 @@
           <a:p>
             <a:pPr algn="l"/>
             <a:r>
-              <a:rPr sz="2470" b="0" i="0">
+              <a:rPr sz="2280" b="0" i="0">
                 <a:solidFill>
                   <a:srgbClr val="1A1A1A"/>
                 </a:solidFill>
@@ -20347,8 +20347,8 @@
         </p:blipFill>
         <p:spPr>
           <a:xfrm>
-            <a:off x="5651411" y="1772412"/>
-            <a:ext cx="1575816" cy="341376"/>
+            <a:off x="5845347" y="1784985"/>
+            <a:ext cx="1280350" cy="277368"/>
           </a:xfrm>
           <a:prstGeom prst="rect">
             <a:avLst/>
@@ -20363,8 +20363,8 @@
         </p:nvSpPr>
         <p:spPr>
           <a:xfrm>
-            <a:off x="7227227" y="1714500"/>
-            <a:ext cx="1378148" cy="457200"/>
+            <a:off x="7125697" y="1714500"/>
+            <a:ext cx="1288226" cy="457200"/>
           </a:xfrm>
           <a:prstGeom prst="rect">
             <a:avLst/>
@@ -20379,7 +20379,7 @@
           <a:p>
             <a:pPr algn="l"/>
             <a:r>
-              <a:rPr sz="2470" b="0" i="0">
+              <a:rPr sz="2280" b="0" i="0">
                 <a:solidFill>
                   <a:srgbClr val="1A1A1A"/>
                 </a:solidFill>
@@ -20406,8 +20406,8 @@
         </p:blipFill>
         <p:spPr>
           <a:xfrm>
-            <a:off x="8468215" y="1772412"/>
-            <a:ext cx="1383792" cy="341376"/>
+            <a:off x="8276764" y="1784985"/>
+            <a:ext cx="1124331" cy="277368"/>
           </a:xfrm>
           <a:prstGeom prst="rect">
             <a:avLst/>
@@ -20422,8 +20422,8 @@
         </p:nvSpPr>
         <p:spPr>
           <a:xfrm>
-            <a:off x="9852007" y="1714500"/>
-            <a:ext cx="778618" cy="457200"/>
+            <a:off x="9401095" y="1714500"/>
+            <a:ext cx="734856" cy="457200"/>
           </a:xfrm>
           <a:prstGeom prst="rect">
             <a:avLst/>
@@ -20438,7 +20438,7 @@
           <a:p>
             <a:pPr algn="l"/>
             <a:r>
-              <a:rPr sz="2470" b="0" i="0">
+              <a:rPr sz="2280" b="0" i="0">
                 <a:solidFill>
                   <a:srgbClr val="1A1A1A"/>
                 </a:solidFill>
@@ -20457,7 +20457,7 @@
         </p:nvSpPr>
         <p:spPr>
           <a:xfrm>
-            <a:off x="777240" y="2468880"/>
+            <a:off x="777240" y="2423160"/>
             <a:ext cx="10607040" cy="429370"/>
           </a:xfrm>
           <a:prstGeom prst="rect">
@@ -20492,7 +20492,7 @@
         </p:nvSpPr>
         <p:spPr>
           <a:xfrm>
-            <a:off x="777240" y="3190858"/>
+            <a:off x="777240" y="3145138"/>
             <a:ext cx="10607040" cy="429370"/>
           </a:xfrm>
           <a:prstGeom prst="rect">
